--- a/Unit 1 - Introduction to AI and Gen AI.pptx
+++ b/Unit 1 - Introduction to AI and Gen AI.pptx
@@ -4304,7 +4304,7 @@
         </p:nvSpPr>
         <p:spPr>
           <a:xfrm>
-            <a:off x="932688" y="5159197"/>
+            <a:off x="932688" y="4992624"/>
             <a:ext cx="966784" cy="329184"/>
           </a:xfrm>
           <a:prstGeom prst="roundRect">
@@ -4371,7 +4371,7 @@
         </p:nvSpPr>
         <p:spPr>
           <a:xfrm>
-            <a:off x="2027488" y="5159197"/>
+            <a:off x="2027488" y="4992624"/>
             <a:ext cx="1298522" cy="329184"/>
           </a:xfrm>
           <a:prstGeom prst="roundRect">
@@ -4438,7 +4438,7 @@
         </p:nvSpPr>
         <p:spPr>
           <a:xfrm>
-            <a:off x="3454026" y="5159197"/>
+            <a:off x="3454026" y="4992624"/>
             <a:ext cx="1672081" cy="329184"/>
           </a:xfrm>
           <a:prstGeom prst="roundRect">
@@ -4505,7 +4505,7 @@
         </p:nvSpPr>
         <p:spPr>
           <a:xfrm>
-            <a:off x="5254123" y="5159197"/>
+            <a:off x="5254123" y="4992624"/>
             <a:ext cx="1301250" cy="329184"/>
           </a:xfrm>
           <a:prstGeom prst="roundRect">
@@ -4572,7 +4572,7 @@
         </p:nvSpPr>
         <p:spPr>
           <a:xfrm>
-            <a:off x="932688" y="5742432"/>
+            <a:off x="932688" y="5614416"/>
             <a:ext cx="3840480" cy="12700"/>
           </a:xfrm>
           <a:prstGeom prst="rect">
@@ -4616,8 +4616,8 @@
         </p:nvSpPr>
         <p:spPr>
           <a:xfrm>
-            <a:off x="932688" y="5925312"/>
-            <a:ext cx="5486400" cy="640080"/>
+            <a:off x="932688" y="5797296"/>
+            <a:ext cx="4937760" cy="640080"/>
           </a:xfrm>
           <a:prstGeom prst="rect">
             <a:avLst/>
@@ -4632,7 +4632,7 @@
           <a:p>
             <a:pPr algn="l">
               <a:lnSpc>
-                <a:spcPct val="130000"/>
+                <a:spcPct val="122000"/>
               </a:lnSpc>
               <a:spcBef>
                 <a:spcPts val="0"/>
@@ -4642,33 +4642,102 @@
               </a:spcAft>
             </a:pPr>
             <a:r>
-              <a:rPr sz="1050" b="1" i="0">
-                <a:solidFill>
-                  <a:srgbClr val="FFFFFF"/>
-                </a:solidFill>
-                <a:latin typeface="Segoe UI"/>
-                <a:ea typeface="Segoe UI"/>
-                <a:cs typeface="Segoe UI"/>
-              </a:rPr>
-              <a:t>PGPM · Systems Specialisation</a:t>
+              <a:rPr sz="850" b="1" i="0" spc="160">
+                <a:solidFill>
+                  <a:srgbClr val="00B3A4"/>
+                </a:solidFill>
+                <a:latin typeface="Segoe UI"/>
+                <a:ea typeface="Segoe UI"/>
+                <a:cs typeface="Segoe UI"/>
+              </a:rPr>
+              <a:t>PRESENTED BY</a:t>
             </a:r>
           </a:p>
           <a:p>
             <a:pPr algn="l">
               <a:lnSpc>
-                <a:spcPct val="130000"/>
+                <a:spcPct val="122000"/>
               </a:lnSpc>
               <a:spcBef>
-                <a:spcPts val="0"/>
+                <a:spcPts val="400"/>
               </a:spcBef>
               <a:spcAft>
                 <a:spcPts val="0"/>
               </a:spcAft>
             </a:pPr>
             <a:r>
+              <a:rPr sz="1300" b="1" i="0">
+                <a:solidFill>
+                  <a:srgbClr val="FFFFFF"/>
+                </a:solidFill>
+                <a:latin typeface="Segoe UI"/>
+                <a:ea typeface="Segoe UI"/>
+                <a:cs typeface="Segoe UI"/>
+              </a:rPr>
+              <a:t>Lingesh K</a:t>
+            </a:r>
+            <a:r>
               <a:rPr sz="1050" b="0" i="0">
                 <a:solidFill>
-                  <a:srgbClr val="8B9DBE"/>
+                  <a:srgbClr val="7E91B4"/>
+                </a:solidFill>
+                <a:latin typeface="Segoe UI"/>
+                <a:ea typeface="Segoe UI"/>
+                <a:cs typeface="Segoe UI"/>
+              </a:rPr>
+              <a:t>      Register No. </a:t>
+            </a:r>
+            <a:r>
+              <a:rPr sz="1050" b="1" i="0">
+                <a:solidFill>
+                  <a:srgbClr val="C5D2E8"/>
+                </a:solidFill>
+                <a:latin typeface="Segoe UI"/>
+                <a:ea typeface="Segoe UI"/>
+                <a:cs typeface="Segoe UI"/>
+              </a:rPr>
+              <a:t>OSI2509030</a:t>
+            </a:r>
+          </a:p>
+        </p:txBody>
+      </p:sp>
+      <p:sp>
+        <p:nvSpPr>
+          <p:cNvPr id="18" name="TextBox 17"/>
+          <p:cNvSpPr txBox="1"/>
+          <p:nvPr/>
+        </p:nvSpPr>
+        <p:spPr>
+          <a:xfrm>
+            <a:off x="7180783" y="5870448"/>
+            <a:ext cx="4206240" cy="640080"/>
+          </a:xfrm>
+          <a:prstGeom prst="rect">
+            <a:avLst/>
+          </a:prstGeom>
+          <a:noFill/>
+        </p:spPr>
+        <p:txBody>
+          <a:bodyPr wrap="square" lIns="0" rIns="0" tIns="0" bIns="0" anchor="t">
+            <a:spAutoFit/>
+          </a:bodyPr>
+          <a:lstStyle/>
+          <a:p>
+            <a:pPr algn="r">
+              <a:lnSpc>
+                <a:spcPct val="134000"/>
+              </a:lnSpc>
+              <a:spcBef>
+                <a:spcPts val="0"/>
+              </a:spcBef>
+              <a:spcAft>
+                <a:spcPts val="0"/>
+              </a:spcAft>
+            </a:pPr>
+            <a:r>
+              <a:rPr sz="1000" b="1" i="0">
+                <a:solidFill>
+                  <a:srgbClr val="C5D2E8"/>
                 </a:solidFill>
                 <a:latin typeface="Segoe UI"/>
                 <a:ea typeface="Segoe UI"/>
@@ -5079,7 +5148,7 @@
         <p:spPr>
           <a:xfrm>
             <a:off x="987552" y="5943600"/>
-            <a:ext cx="5486400" cy="274320"/>
+            <a:ext cx="6400800" cy="274320"/>
           </a:xfrm>
           <a:prstGeom prst="rect">
             <a:avLst/>
@@ -5188,7 +5257,7 @@
         <p:spPr>
           <a:xfrm>
             <a:off x="713232" y="6272784"/>
-            <a:ext cx="8073923" cy="219456"/>
+            <a:ext cx="5597920" cy="219456"/>
           </a:xfrm>
           <a:prstGeom prst="rect">
             <a:avLst/>
@@ -5256,8 +5325,8 @@
         </p:nvSpPr>
         <p:spPr>
           <a:xfrm>
-            <a:off x="10381183" y="6272784"/>
-            <a:ext cx="1097280" cy="219456"/>
+            <a:off x="8826703" y="6272784"/>
+            <a:ext cx="2651760" cy="219456"/>
           </a:xfrm>
           <a:prstGeom prst="rect">
             <a:avLst/>
@@ -5282,9 +5351,31 @@
               </a:spcAft>
             </a:pPr>
             <a:r>
+              <a:rPr sz="900" b="0" i="0">
+                <a:solidFill>
+                  <a:srgbClr val="636E85"/>
+                </a:solidFill>
+                <a:latin typeface="Segoe UI"/>
+                <a:ea typeface="Segoe UI"/>
+                <a:cs typeface="Segoe UI"/>
+              </a:rPr>
+              <a:t>Lingesh K  ·  OSI2509030</a:t>
+            </a:r>
+            <a:r>
+              <a:rPr sz="900" b="0" i="0">
+                <a:solidFill>
+                  <a:srgbClr val="141C2E"/>
+                </a:solidFill>
+                <a:latin typeface="Segoe UI"/>
+                <a:ea typeface="Segoe UI"/>
+                <a:cs typeface="Segoe UI"/>
+              </a:rPr>
+              <a:t>     </a:t>
+            </a:r>
+            <a:r>
               <a:rPr sz="900" b="1" i="0">
                 <a:solidFill>
-                  <a:srgbClr val="636E85"/>
+                  <a:srgbClr val="0E1E3C"/>
                 </a:solidFill>
                 <a:latin typeface="Segoe UI"/>
                 <a:ea typeface="Segoe UI"/>
@@ -6636,7 +6727,7 @@
         <p:spPr>
           <a:xfrm>
             <a:off x="713232" y="6272784"/>
-            <a:ext cx="8073923" cy="219456"/>
+            <a:ext cx="5597920" cy="219456"/>
           </a:xfrm>
           <a:prstGeom prst="rect">
             <a:avLst/>
@@ -6704,8 +6795,8 @@
         </p:nvSpPr>
         <p:spPr>
           <a:xfrm>
-            <a:off x="10381183" y="6272784"/>
-            <a:ext cx="1097280" cy="219456"/>
+            <a:off x="8826703" y="6272784"/>
+            <a:ext cx="2651760" cy="219456"/>
           </a:xfrm>
           <a:prstGeom prst="rect">
             <a:avLst/>
@@ -6730,9 +6821,31 @@
               </a:spcAft>
             </a:pPr>
             <a:r>
+              <a:rPr sz="900" b="0" i="0">
+                <a:solidFill>
+                  <a:srgbClr val="636E85"/>
+                </a:solidFill>
+                <a:latin typeface="Segoe UI"/>
+                <a:ea typeface="Segoe UI"/>
+                <a:cs typeface="Segoe UI"/>
+              </a:rPr>
+              <a:t>Lingesh K  ·  OSI2509030</a:t>
+            </a:r>
+            <a:r>
+              <a:rPr sz="900" b="0" i="0">
+                <a:solidFill>
+                  <a:srgbClr val="141C2E"/>
+                </a:solidFill>
+                <a:latin typeface="Segoe UI"/>
+                <a:ea typeface="Segoe UI"/>
+                <a:cs typeface="Segoe UI"/>
+              </a:rPr>
+              <a:t>     </a:t>
+            </a:r>
+            <a:r>
               <a:rPr sz="900" b="1" i="0">
                 <a:solidFill>
-                  <a:srgbClr val="636E85"/>
+                  <a:srgbClr val="0E1E3C"/>
                 </a:solidFill>
                 <a:latin typeface="Segoe UI"/>
                 <a:ea typeface="Segoe UI"/>
@@ -8096,7 +8209,7 @@
         <p:spPr>
           <a:xfrm>
             <a:off x="987552" y="5943600"/>
-            <a:ext cx="5486400" cy="274320"/>
+            <a:ext cx="6400800" cy="274320"/>
           </a:xfrm>
           <a:prstGeom prst="rect">
             <a:avLst/>
@@ -8205,7 +8318,7 @@
         <p:spPr>
           <a:xfrm>
             <a:off x="713232" y="6272784"/>
-            <a:ext cx="8073923" cy="219456"/>
+            <a:ext cx="5597920" cy="219456"/>
           </a:xfrm>
           <a:prstGeom prst="rect">
             <a:avLst/>
@@ -8273,8 +8386,8 @@
         </p:nvSpPr>
         <p:spPr>
           <a:xfrm>
-            <a:off x="10381183" y="6272784"/>
-            <a:ext cx="1097280" cy="219456"/>
+            <a:off x="8826703" y="6272784"/>
+            <a:ext cx="2651760" cy="219456"/>
           </a:xfrm>
           <a:prstGeom prst="rect">
             <a:avLst/>
@@ -8299,9 +8412,31 @@
               </a:spcAft>
             </a:pPr>
             <a:r>
+              <a:rPr sz="900" b="0" i="0">
+                <a:solidFill>
+                  <a:srgbClr val="636E85"/>
+                </a:solidFill>
+                <a:latin typeface="Segoe UI"/>
+                <a:ea typeface="Segoe UI"/>
+                <a:cs typeface="Segoe UI"/>
+              </a:rPr>
+              <a:t>Lingesh K  ·  OSI2509030</a:t>
+            </a:r>
+            <a:r>
+              <a:rPr sz="900" b="0" i="0">
+                <a:solidFill>
+                  <a:srgbClr val="141C2E"/>
+                </a:solidFill>
+                <a:latin typeface="Segoe UI"/>
+                <a:ea typeface="Segoe UI"/>
+                <a:cs typeface="Segoe UI"/>
+              </a:rPr>
+              <a:t>     </a:t>
+            </a:r>
+            <a:r>
               <a:rPr sz="900" b="1" i="0">
                 <a:solidFill>
-                  <a:srgbClr val="636E85"/>
+                  <a:srgbClr val="0E1E3C"/>
                 </a:solidFill>
                 <a:latin typeface="Segoe UI"/>
                 <a:ea typeface="Segoe UI"/>
@@ -10088,7 +10223,7 @@
         <p:spPr>
           <a:xfrm>
             <a:off x="713232" y="6272784"/>
-            <a:ext cx="8073923" cy="219456"/>
+            <a:ext cx="5597920" cy="219456"/>
           </a:xfrm>
           <a:prstGeom prst="rect">
             <a:avLst/>
@@ -10156,8 +10291,8 @@
         </p:nvSpPr>
         <p:spPr>
           <a:xfrm>
-            <a:off x="10381183" y="6272784"/>
-            <a:ext cx="1097280" cy="219456"/>
+            <a:off x="8826703" y="6272784"/>
+            <a:ext cx="2651760" cy="219456"/>
           </a:xfrm>
           <a:prstGeom prst="rect">
             <a:avLst/>
@@ -10182,9 +10317,31 @@
               </a:spcAft>
             </a:pPr>
             <a:r>
+              <a:rPr sz="900" b="0" i="0">
+                <a:solidFill>
+                  <a:srgbClr val="636E85"/>
+                </a:solidFill>
+                <a:latin typeface="Segoe UI"/>
+                <a:ea typeface="Segoe UI"/>
+                <a:cs typeface="Segoe UI"/>
+              </a:rPr>
+              <a:t>Lingesh K  ·  OSI2509030</a:t>
+            </a:r>
+            <a:r>
+              <a:rPr sz="900" b="0" i="0">
+                <a:solidFill>
+                  <a:srgbClr val="141C2E"/>
+                </a:solidFill>
+                <a:latin typeface="Segoe UI"/>
+                <a:ea typeface="Segoe UI"/>
+                <a:cs typeface="Segoe UI"/>
+              </a:rPr>
+              <a:t>     </a:t>
+            </a:r>
+            <a:r>
               <a:rPr sz="900" b="1" i="0">
                 <a:solidFill>
-                  <a:srgbClr val="636E85"/>
+                  <a:srgbClr val="0E1E3C"/>
                 </a:solidFill>
                 <a:latin typeface="Segoe UI"/>
                 <a:ea typeface="Segoe UI"/>
@@ -11727,7 +11884,7 @@
         <p:spPr>
           <a:xfrm>
             <a:off x="987552" y="5943600"/>
-            <a:ext cx="5486400" cy="274320"/>
+            <a:ext cx="6400800" cy="274320"/>
           </a:xfrm>
           <a:prstGeom prst="rect">
             <a:avLst/>
@@ -11836,7 +11993,7 @@
         <p:spPr>
           <a:xfrm>
             <a:off x="713232" y="6272784"/>
-            <a:ext cx="8073923" cy="219456"/>
+            <a:ext cx="5597920" cy="219456"/>
           </a:xfrm>
           <a:prstGeom prst="rect">
             <a:avLst/>
@@ -11904,8 +12061,8 @@
         </p:nvSpPr>
         <p:spPr>
           <a:xfrm>
-            <a:off x="10381183" y="6272784"/>
-            <a:ext cx="1097280" cy="219456"/>
+            <a:off x="8826703" y="6272784"/>
+            <a:ext cx="2651760" cy="219456"/>
           </a:xfrm>
           <a:prstGeom prst="rect">
             <a:avLst/>
@@ -11930,9 +12087,31 @@
               </a:spcAft>
             </a:pPr>
             <a:r>
+              <a:rPr sz="900" b="0" i="0">
+                <a:solidFill>
+                  <a:srgbClr val="636E85"/>
+                </a:solidFill>
+                <a:latin typeface="Segoe UI"/>
+                <a:ea typeface="Segoe UI"/>
+                <a:cs typeface="Segoe UI"/>
+              </a:rPr>
+              <a:t>Lingesh K  ·  OSI2509030</a:t>
+            </a:r>
+            <a:r>
+              <a:rPr sz="900" b="0" i="0">
+                <a:solidFill>
+                  <a:srgbClr val="141C2E"/>
+                </a:solidFill>
+                <a:latin typeface="Segoe UI"/>
+                <a:ea typeface="Segoe UI"/>
+                <a:cs typeface="Segoe UI"/>
+              </a:rPr>
+              <a:t>     </a:t>
+            </a:r>
+            <a:r>
               <a:rPr sz="900" b="1" i="0">
                 <a:solidFill>
-                  <a:srgbClr val="636E85"/>
+                  <a:srgbClr val="0E1E3C"/>
                 </a:solidFill>
                 <a:latin typeface="Segoe UI"/>
                 <a:ea typeface="Segoe UI"/>
@@ -13304,7 +13483,7 @@
         <p:spPr>
           <a:xfrm>
             <a:off x="713232" y="6272784"/>
-            <a:ext cx="8073923" cy="219456"/>
+            <a:ext cx="5597920" cy="219456"/>
           </a:xfrm>
           <a:prstGeom prst="rect">
             <a:avLst/>
@@ -13372,8 +13551,8 @@
         </p:nvSpPr>
         <p:spPr>
           <a:xfrm>
-            <a:off x="10381183" y="6272784"/>
-            <a:ext cx="1097280" cy="219456"/>
+            <a:off x="8826703" y="6272784"/>
+            <a:ext cx="2651760" cy="219456"/>
           </a:xfrm>
           <a:prstGeom prst="rect">
             <a:avLst/>
@@ -13398,9 +13577,31 @@
               </a:spcAft>
             </a:pPr>
             <a:r>
+              <a:rPr sz="900" b="0" i="0">
+                <a:solidFill>
+                  <a:srgbClr val="636E85"/>
+                </a:solidFill>
+                <a:latin typeface="Segoe UI"/>
+                <a:ea typeface="Segoe UI"/>
+                <a:cs typeface="Segoe UI"/>
+              </a:rPr>
+              <a:t>Lingesh K  ·  OSI2509030</a:t>
+            </a:r>
+            <a:r>
+              <a:rPr sz="900" b="0" i="0">
+                <a:solidFill>
+                  <a:srgbClr val="141C2E"/>
+                </a:solidFill>
+                <a:latin typeface="Segoe UI"/>
+                <a:ea typeface="Segoe UI"/>
+                <a:cs typeface="Segoe UI"/>
+              </a:rPr>
+              <a:t>     </a:t>
+            </a:r>
+            <a:r>
               <a:rPr sz="900" b="1" i="0">
                 <a:solidFill>
-                  <a:srgbClr val="636E85"/>
+                  <a:srgbClr val="0E1E3C"/>
                 </a:solidFill>
                 <a:latin typeface="Segoe UI"/>
                 <a:ea typeface="Segoe UI"/>
@@ -15363,7 +15564,7 @@
         <p:spPr>
           <a:xfrm>
             <a:off x="713232" y="6272784"/>
-            <a:ext cx="8073923" cy="219456"/>
+            <a:ext cx="5597920" cy="219456"/>
           </a:xfrm>
           <a:prstGeom prst="rect">
             <a:avLst/>
@@ -15431,8 +15632,8 @@
         </p:nvSpPr>
         <p:spPr>
           <a:xfrm>
-            <a:off x="10381183" y="6272784"/>
-            <a:ext cx="1097280" cy="219456"/>
+            <a:off x="8826703" y="6272784"/>
+            <a:ext cx="2651760" cy="219456"/>
           </a:xfrm>
           <a:prstGeom prst="rect">
             <a:avLst/>
@@ -15457,9 +15658,31 @@
               </a:spcAft>
             </a:pPr>
             <a:r>
+              <a:rPr sz="900" b="0" i="0">
+                <a:solidFill>
+                  <a:srgbClr val="636E85"/>
+                </a:solidFill>
+                <a:latin typeface="Segoe UI"/>
+                <a:ea typeface="Segoe UI"/>
+                <a:cs typeface="Segoe UI"/>
+              </a:rPr>
+              <a:t>Lingesh K  ·  OSI2509030</a:t>
+            </a:r>
+            <a:r>
+              <a:rPr sz="900" b="0" i="0">
+                <a:solidFill>
+                  <a:srgbClr val="141C2E"/>
+                </a:solidFill>
+                <a:latin typeface="Segoe UI"/>
+                <a:ea typeface="Segoe UI"/>
+                <a:cs typeface="Segoe UI"/>
+              </a:rPr>
+              <a:t>     </a:t>
+            </a:r>
+            <a:r>
               <a:rPr sz="900" b="1" i="0">
                 <a:solidFill>
-                  <a:srgbClr val="636E85"/>
+                  <a:srgbClr val="0E1E3C"/>
                 </a:solidFill>
                 <a:latin typeface="Segoe UI"/>
                 <a:ea typeface="Segoe UI"/>
@@ -16428,7 +16651,7 @@
         <p:spPr>
           <a:xfrm>
             <a:off x="713232" y="6272784"/>
-            <a:ext cx="8073923" cy="219456"/>
+            <a:ext cx="5597920" cy="219456"/>
           </a:xfrm>
           <a:prstGeom prst="rect">
             <a:avLst/>
@@ -16496,8 +16719,8 @@
         </p:nvSpPr>
         <p:spPr>
           <a:xfrm>
-            <a:off x="10381183" y="6272784"/>
-            <a:ext cx="1097280" cy="219456"/>
+            <a:off x="8826703" y="6272784"/>
+            <a:ext cx="2651760" cy="219456"/>
           </a:xfrm>
           <a:prstGeom prst="rect">
             <a:avLst/>
@@ -16522,9 +16745,31 @@
               </a:spcAft>
             </a:pPr>
             <a:r>
+              <a:rPr sz="900" b="0" i="0">
+                <a:solidFill>
+                  <a:srgbClr val="636E85"/>
+                </a:solidFill>
+                <a:latin typeface="Segoe UI"/>
+                <a:ea typeface="Segoe UI"/>
+                <a:cs typeface="Segoe UI"/>
+              </a:rPr>
+              <a:t>Lingesh K  ·  OSI2509030</a:t>
+            </a:r>
+            <a:r>
+              <a:rPr sz="900" b="0" i="0">
+                <a:solidFill>
+                  <a:srgbClr val="141C2E"/>
+                </a:solidFill>
+                <a:latin typeface="Segoe UI"/>
+                <a:ea typeface="Segoe UI"/>
+                <a:cs typeface="Segoe UI"/>
+              </a:rPr>
+              <a:t>     </a:t>
+            </a:r>
+            <a:r>
               <a:rPr sz="900" b="1" i="0">
                 <a:solidFill>
-                  <a:srgbClr val="636E85"/>
+                  <a:srgbClr val="0E1E3C"/>
                 </a:solidFill>
                 <a:latin typeface="Segoe UI"/>
                 <a:ea typeface="Segoe UI"/>
@@ -18087,7 +18332,7 @@
         <p:spPr>
           <a:xfrm>
             <a:off x="713232" y="6272784"/>
-            <a:ext cx="8073923" cy="219456"/>
+            <a:ext cx="5597920" cy="219456"/>
           </a:xfrm>
           <a:prstGeom prst="rect">
             <a:avLst/>
@@ -18155,8 +18400,8 @@
         </p:nvSpPr>
         <p:spPr>
           <a:xfrm>
-            <a:off x="10381183" y="6272784"/>
-            <a:ext cx="1097280" cy="219456"/>
+            <a:off x="8826703" y="6272784"/>
+            <a:ext cx="2651760" cy="219456"/>
           </a:xfrm>
           <a:prstGeom prst="rect">
             <a:avLst/>
@@ -18181,9 +18426,31 @@
               </a:spcAft>
             </a:pPr>
             <a:r>
+              <a:rPr sz="900" b="0" i="0">
+                <a:solidFill>
+                  <a:srgbClr val="636E85"/>
+                </a:solidFill>
+                <a:latin typeface="Segoe UI"/>
+                <a:ea typeface="Segoe UI"/>
+                <a:cs typeface="Segoe UI"/>
+              </a:rPr>
+              <a:t>Lingesh K  ·  OSI2509030</a:t>
+            </a:r>
+            <a:r>
+              <a:rPr sz="900" b="0" i="0">
+                <a:solidFill>
+                  <a:srgbClr val="141C2E"/>
+                </a:solidFill>
+                <a:latin typeface="Segoe UI"/>
+                <a:ea typeface="Segoe UI"/>
+                <a:cs typeface="Segoe UI"/>
+              </a:rPr>
+              <a:t>     </a:t>
+            </a:r>
+            <a:r>
               <a:rPr sz="900" b="1" i="0">
                 <a:solidFill>
-                  <a:srgbClr val="636E85"/>
+                  <a:srgbClr val="0E1E3C"/>
                 </a:solidFill>
                 <a:latin typeface="Segoe UI"/>
                 <a:ea typeface="Segoe UI"/>
@@ -19837,7 +20104,7 @@
         <p:spPr>
           <a:xfrm>
             <a:off x="713232" y="6272784"/>
-            <a:ext cx="8073923" cy="219456"/>
+            <a:ext cx="5597920" cy="219456"/>
           </a:xfrm>
           <a:prstGeom prst="rect">
             <a:avLst/>
@@ -19905,8 +20172,8 @@
         </p:nvSpPr>
         <p:spPr>
           <a:xfrm>
-            <a:off x="10381183" y="6272784"/>
-            <a:ext cx="1097280" cy="219456"/>
+            <a:off x="8826703" y="6272784"/>
+            <a:ext cx="2651760" cy="219456"/>
           </a:xfrm>
           <a:prstGeom prst="rect">
             <a:avLst/>
@@ -19931,9 +20198,31 @@
               </a:spcAft>
             </a:pPr>
             <a:r>
+              <a:rPr sz="900" b="0" i="0">
+                <a:solidFill>
+                  <a:srgbClr val="636E85"/>
+                </a:solidFill>
+                <a:latin typeface="Segoe UI"/>
+                <a:ea typeface="Segoe UI"/>
+                <a:cs typeface="Segoe UI"/>
+              </a:rPr>
+              <a:t>Lingesh K  ·  OSI2509030</a:t>
+            </a:r>
+            <a:r>
+              <a:rPr sz="900" b="0" i="0">
+                <a:solidFill>
+                  <a:srgbClr val="141C2E"/>
+                </a:solidFill>
+                <a:latin typeface="Segoe UI"/>
+                <a:ea typeface="Segoe UI"/>
+                <a:cs typeface="Segoe UI"/>
+              </a:rPr>
+              <a:t>     </a:t>
+            </a:r>
+            <a:r>
               <a:rPr sz="900" b="1" i="0">
                 <a:solidFill>
-                  <a:srgbClr val="636E85"/>
+                  <a:srgbClr val="0E1E3C"/>
                 </a:solidFill>
                 <a:latin typeface="Segoe UI"/>
                 <a:ea typeface="Segoe UI"/>
@@ -22088,8 +22377,8 @@
         </p:nvSpPr>
         <p:spPr>
           <a:xfrm>
-            <a:off x="987552" y="4882896"/>
-            <a:ext cx="7315200" cy="1572768"/>
+            <a:off x="987552" y="4718304"/>
+            <a:ext cx="7315200" cy="1207008"/>
           </a:xfrm>
           <a:prstGeom prst="rect">
             <a:avLst/>
@@ -22128,10 +22417,10 @@
           <a:p>
             <a:pPr algn="l">
               <a:lnSpc>
-                <a:spcPct val="132000"/>
+                <a:spcPct val="128000"/>
               </a:lnSpc>
               <a:spcBef>
-                <a:spcPts val="500"/>
+                <a:spcPts val="400"/>
               </a:spcBef>
               <a:spcAft>
                 <a:spcPts val="0"/>
@@ -22152,10 +22441,10 @@
           <a:p>
             <a:pPr algn="l">
               <a:lnSpc>
-                <a:spcPct val="132000"/>
+                <a:spcPct val="128000"/>
               </a:lnSpc>
               <a:spcBef>
-                <a:spcPts val="500"/>
+                <a:spcPts val="400"/>
               </a:spcBef>
               <a:spcAft>
                 <a:spcPts val="0"/>
@@ -22176,10 +22465,10 @@
           <a:p>
             <a:pPr algn="l">
               <a:lnSpc>
-                <a:spcPct val="132000"/>
+                <a:spcPct val="128000"/>
               </a:lnSpc>
               <a:spcBef>
-                <a:spcPts val="500"/>
+                <a:spcPts val="400"/>
               </a:spcBef>
               <a:spcAft>
                 <a:spcPts val="0"/>
@@ -22195,6 +22484,141 @@
                 <a:cs typeface="Segoe UI"/>
               </a:rPr>
               <a:t>— What should your team never paste into a public AI tool?</a:t>
+            </a:r>
+          </a:p>
+        </p:txBody>
+      </p:sp>
+      <p:sp>
+        <p:nvSpPr>
+          <p:cNvPr id="11" name="Rectangle 10"/>
+          <p:cNvSpPr/>
+          <p:nvPr/>
+        </p:nvSpPr>
+        <p:spPr>
+          <a:xfrm>
+            <a:off x="987552" y="6035040"/>
+            <a:ext cx="3291840" cy="12700"/>
+          </a:xfrm>
+          <a:prstGeom prst="rect">
+            <a:avLst/>
+          </a:prstGeom>
+          <a:solidFill>
+            <a:srgbClr val="2A3E66"/>
+          </a:solidFill>
+          <a:ln>
+            <a:noFill/>
+          </a:ln>
+          <a:effectLst/>
+        </p:spPr>
+        <p:style>
+          <a:lnRef idx="1">
+            <a:schemeClr val="accent1"/>
+          </a:lnRef>
+          <a:fillRef idx="3">
+            <a:schemeClr val="accent1"/>
+          </a:fillRef>
+          <a:effectRef idx="2">
+            <a:schemeClr val="accent1"/>
+          </a:effectRef>
+          <a:fontRef idx="minor">
+            <a:schemeClr val="lt1"/>
+          </a:fontRef>
+        </p:style>
+        <p:txBody>
+          <a:bodyPr rtlCol="0" anchor="ctr"/>
+          <a:lstStyle/>
+          <a:p>
+            <a:pPr algn="ctr"/>
+          </a:p>
+        </p:txBody>
+      </p:sp>
+      <p:sp>
+        <p:nvSpPr>
+          <p:cNvPr id="12" name="TextBox 11"/>
+          <p:cNvSpPr txBox="1"/>
+          <p:nvPr/>
+        </p:nvSpPr>
+        <p:spPr>
+          <a:xfrm>
+            <a:off x="987552" y="6163056"/>
+            <a:ext cx="5852160" cy="292608"/>
+          </a:xfrm>
+          <a:prstGeom prst="rect">
+            <a:avLst/>
+          </a:prstGeom>
+          <a:noFill/>
+        </p:spPr>
+        <p:txBody>
+          <a:bodyPr wrap="square" lIns="0" rIns="0" tIns="0" bIns="0" anchor="t">
+            <a:spAutoFit/>
+          </a:bodyPr>
+          <a:lstStyle/>
+          <a:p>
+            <a:pPr algn="l">
+              <a:lnSpc>
+                <a:spcPct val="122000"/>
+              </a:lnSpc>
+              <a:spcBef>
+                <a:spcPts val="0"/>
+              </a:spcBef>
+              <a:spcAft>
+                <a:spcPts val="0"/>
+              </a:spcAft>
+            </a:pPr>
+            <a:r>
+              <a:rPr sz="1150" b="1" i="0">
+                <a:solidFill>
+                  <a:srgbClr val="FFFFFF"/>
+                </a:solidFill>
+                <a:latin typeface="Segoe UI"/>
+                <a:ea typeface="Segoe UI"/>
+                <a:cs typeface="Segoe UI"/>
+              </a:rPr>
+              <a:t>Lingesh K</a:t>
+            </a:r>
+            <a:r>
+              <a:rPr sz="1000" b="0" i="0">
+                <a:solidFill>
+                  <a:srgbClr val="7E91B4"/>
+                </a:solidFill>
+                <a:latin typeface="Segoe UI"/>
+                <a:ea typeface="Segoe UI"/>
+                <a:cs typeface="Segoe UI"/>
+              </a:rPr>
+              <a:t>   ·   Register No. </a:t>
+            </a:r>
+            <a:r>
+              <a:rPr sz="1000" b="1" i="0">
+                <a:solidFill>
+                  <a:srgbClr val="C5D2E8"/>
+                </a:solidFill>
+                <a:latin typeface="Segoe UI"/>
+                <a:ea typeface="Segoe UI"/>
+                <a:cs typeface="Segoe UI"/>
+              </a:rPr>
+              <a:t>OSI2509030</a:t>
+            </a:r>
+            <a:r>
+              <a:rPr sz="1000" b="0" i="0">
+                <a:solidFill>
+                  <a:srgbClr val="4A5E86"/>
+                </a:solidFill>
+                <a:latin typeface="Segoe UI"/>
+                <a:ea typeface="Segoe UI"/>
+                <a:cs typeface="Segoe UI"/>
+              </a:rPr>
+              <a:t>   ·   </a:t>
+            </a:r>
+            <a:r>
+              <a:rPr sz="1000" b="0" i="0">
+                <a:solidFill>
+                  <a:srgbClr val="7E91B4"/>
+                </a:solidFill>
+                <a:latin typeface="Segoe UI"/>
+                <a:ea typeface="Segoe UI"/>
+                <a:cs typeface="Segoe UI"/>
+              </a:rPr>
+              <a:t>PGPM · Systems Specialisation</a:t>
             </a:r>
           </a:p>
         </p:txBody>
@@ -22599,7 +23023,7 @@
         <p:spPr>
           <a:xfrm>
             <a:off x="987552" y="5943600"/>
-            <a:ext cx="5486400" cy="274320"/>
+            <a:ext cx="6400800" cy="274320"/>
           </a:xfrm>
           <a:prstGeom prst="rect">
             <a:avLst/>
@@ -22708,7 +23132,7 @@
         <p:spPr>
           <a:xfrm>
             <a:off x="713232" y="6272784"/>
-            <a:ext cx="8073923" cy="219456"/>
+            <a:ext cx="5597920" cy="219456"/>
           </a:xfrm>
           <a:prstGeom prst="rect">
             <a:avLst/>
@@ -22776,8 +23200,8 @@
         </p:nvSpPr>
         <p:spPr>
           <a:xfrm>
-            <a:off x="10381183" y="6272784"/>
-            <a:ext cx="1097280" cy="219456"/>
+            <a:off x="8826703" y="6272784"/>
+            <a:ext cx="2651760" cy="219456"/>
           </a:xfrm>
           <a:prstGeom prst="rect">
             <a:avLst/>
@@ -22802,9 +23226,31 @@
               </a:spcAft>
             </a:pPr>
             <a:r>
+              <a:rPr sz="900" b="0" i="0">
+                <a:solidFill>
+                  <a:srgbClr val="636E85"/>
+                </a:solidFill>
+                <a:latin typeface="Segoe UI"/>
+                <a:ea typeface="Segoe UI"/>
+                <a:cs typeface="Segoe UI"/>
+              </a:rPr>
+              <a:t>Lingesh K  ·  OSI2509030</a:t>
+            </a:r>
+            <a:r>
+              <a:rPr sz="900" b="0" i="0">
+                <a:solidFill>
+                  <a:srgbClr val="141C2E"/>
+                </a:solidFill>
+                <a:latin typeface="Segoe UI"/>
+                <a:ea typeface="Segoe UI"/>
+                <a:cs typeface="Segoe UI"/>
+              </a:rPr>
+              <a:t>     </a:t>
+            </a:r>
+            <a:r>
               <a:rPr sz="900" b="1" i="0">
                 <a:solidFill>
-                  <a:srgbClr val="636E85"/>
+                  <a:srgbClr val="0E1E3C"/>
                 </a:solidFill>
                 <a:latin typeface="Segoe UI"/>
                 <a:ea typeface="Segoe UI"/>
@@ -24156,7 +24602,7 @@
         <p:spPr>
           <a:xfrm>
             <a:off x="713232" y="6272784"/>
-            <a:ext cx="8073923" cy="219456"/>
+            <a:ext cx="5597920" cy="219456"/>
           </a:xfrm>
           <a:prstGeom prst="rect">
             <a:avLst/>
@@ -24224,8 +24670,8 @@
         </p:nvSpPr>
         <p:spPr>
           <a:xfrm>
-            <a:off x="10381183" y="6272784"/>
-            <a:ext cx="1097280" cy="219456"/>
+            <a:off x="8826703" y="6272784"/>
+            <a:ext cx="2651760" cy="219456"/>
           </a:xfrm>
           <a:prstGeom prst="rect">
             <a:avLst/>
@@ -24250,9 +24696,31 @@
               </a:spcAft>
             </a:pPr>
             <a:r>
+              <a:rPr sz="900" b="0" i="0">
+                <a:solidFill>
+                  <a:srgbClr val="636E85"/>
+                </a:solidFill>
+                <a:latin typeface="Segoe UI"/>
+                <a:ea typeface="Segoe UI"/>
+                <a:cs typeface="Segoe UI"/>
+              </a:rPr>
+              <a:t>Lingesh K  ·  OSI2509030</a:t>
+            </a:r>
+            <a:r>
+              <a:rPr sz="900" b="0" i="0">
+                <a:solidFill>
+                  <a:srgbClr val="141C2E"/>
+                </a:solidFill>
+                <a:latin typeface="Segoe UI"/>
+                <a:ea typeface="Segoe UI"/>
+                <a:cs typeface="Segoe UI"/>
+              </a:rPr>
+              <a:t>     </a:t>
+            </a:r>
+            <a:r>
               <a:rPr sz="900" b="1" i="0">
                 <a:solidFill>
-                  <a:srgbClr val="636E85"/>
+                  <a:srgbClr val="0E1E3C"/>
                 </a:solidFill>
                 <a:latin typeface="Segoe UI"/>
                 <a:ea typeface="Segoe UI"/>
@@ -26000,7 +26468,7 @@
         <p:spPr>
           <a:xfrm>
             <a:off x="987552" y="5943600"/>
-            <a:ext cx="5486400" cy="274320"/>
+            <a:ext cx="6400800" cy="274320"/>
           </a:xfrm>
           <a:prstGeom prst="rect">
             <a:avLst/>
@@ -26109,7 +26577,7 @@
         <p:spPr>
           <a:xfrm>
             <a:off x="713232" y="6272784"/>
-            <a:ext cx="8073923" cy="219456"/>
+            <a:ext cx="5597920" cy="219456"/>
           </a:xfrm>
           <a:prstGeom prst="rect">
             <a:avLst/>
@@ -26177,8 +26645,8 @@
         </p:nvSpPr>
         <p:spPr>
           <a:xfrm>
-            <a:off x="10381183" y="6272784"/>
-            <a:ext cx="1097280" cy="219456"/>
+            <a:off x="8826703" y="6272784"/>
+            <a:ext cx="2651760" cy="219456"/>
           </a:xfrm>
           <a:prstGeom prst="rect">
             <a:avLst/>
@@ -26203,9 +26671,31 @@
               </a:spcAft>
             </a:pPr>
             <a:r>
+              <a:rPr sz="900" b="0" i="0">
+                <a:solidFill>
+                  <a:srgbClr val="636E85"/>
+                </a:solidFill>
+                <a:latin typeface="Segoe UI"/>
+                <a:ea typeface="Segoe UI"/>
+                <a:cs typeface="Segoe UI"/>
+              </a:rPr>
+              <a:t>Lingesh K  ·  OSI2509030</a:t>
+            </a:r>
+            <a:r>
+              <a:rPr sz="900" b="0" i="0">
+                <a:solidFill>
+                  <a:srgbClr val="141C2E"/>
+                </a:solidFill>
+                <a:latin typeface="Segoe UI"/>
+                <a:ea typeface="Segoe UI"/>
+                <a:cs typeface="Segoe UI"/>
+              </a:rPr>
+              <a:t>     </a:t>
+            </a:r>
+            <a:r>
               <a:rPr sz="900" b="1" i="0">
                 <a:solidFill>
-                  <a:srgbClr val="636E85"/>
+                  <a:srgbClr val="0E1E3C"/>
                 </a:solidFill>
                 <a:latin typeface="Segoe UI"/>
                 <a:ea typeface="Segoe UI"/>
@@ -27369,7 +27859,7 @@
         <p:spPr>
           <a:xfrm>
             <a:off x="713232" y="6272784"/>
-            <a:ext cx="8073923" cy="219456"/>
+            <a:ext cx="5597920" cy="219456"/>
           </a:xfrm>
           <a:prstGeom prst="rect">
             <a:avLst/>
@@ -27437,8 +27927,8 @@
         </p:nvSpPr>
         <p:spPr>
           <a:xfrm>
-            <a:off x="10381183" y="6272784"/>
-            <a:ext cx="1097280" cy="219456"/>
+            <a:off x="8826703" y="6272784"/>
+            <a:ext cx="2651760" cy="219456"/>
           </a:xfrm>
           <a:prstGeom prst="rect">
             <a:avLst/>
@@ -27463,9 +27953,31 @@
               </a:spcAft>
             </a:pPr>
             <a:r>
+              <a:rPr sz="900" b="0" i="0">
+                <a:solidFill>
+                  <a:srgbClr val="636E85"/>
+                </a:solidFill>
+                <a:latin typeface="Segoe UI"/>
+                <a:ea typeface="Segoe UI"/>
+                <a:cs typeface="Segoe UI"/>
+              </a:rPr>
+              <a:t>Lingesh K  ·  OSI2509030</a:t>
+            </a:r>
+            <a:r>
+              <a:rPr sz="900" b="0" i="0">
+                <a:solidFill>
+                  <a:srgbClr val="141C2E"/>
+                </a:solidFill>
+                <a:latin typeface="Segoe UI"/>
+                <a:ea typeface="Segoe UI"/>
+                <a:cs typeface="Segoe UI"/>
+              </a:rPr>
+              <a:t>     </a:t>
+            </a:r>
+            <a:r>
               <a:rPr sz="900" b="1" i="0">
                 <a:solidFill>
-                  <a:srgbClr val="636E85"/>
+                  <a:srgbClr val="0E1E3C"/>
                 </a:solidFill>
                 <a:latin typeface="Segoe UI"/>
                 <a:ea typeface="Segoe UI"/>
@@ -28500,7 +29012,7 @@
         <p:spPr>
           <a:xfrm>
             <a:off x="713232" y="6272784"/>
-            <a:ext cx="8073923" cy="219456"/>
+            <a:ext cx="5597920" cy="219456"/>
           </a:xfrm>
           <a:prstGeom prst="rect">
             <a:avLst/>
@@ -28568,8 +29080,8 @@
         </p:nvSpPr>
         <p:spPr>
           <a:xfrm>
-            <a:off x="10381183" y="6272784"/>
-            <a:ext cx="1097280" cy="219456"/>
+            <a:off x="8826703" y="6272784"/>
+            <a:ext cx="2651760" cy="219456"/>
           </a:xfrm>
           <a:prstGeom prst="rect">
             <a:avLst/>
@@ -28594,9 +29106,31 @@
               </a:spcAft>
             </a:pPr>
             <a:r>
+              <a:rPr sz="900" b="0" i="0">
+                <a:solidFill>
+                  <a:srgbClr val="636E85"/>
+                </a:solidFill>
+                <a:latin typeface="Segoe UI"/>
+                <a:ea typeface="Segoe UI"/>
+                <a:cs typeface="Segoe UI"/>
+              </a:rPr>
+              <a:t>Lingesh K  ·  OSI2509030</a:t>
+            </a:r>
+            <a:r>
+              <a:rPr sz="900" b="0" i="0">
+                <a:solidFill>
+                  <a:srgbClr val="141C2E"/>
+                </a:solidFill>
+                <a:latin typeface="Segoe UI"/>
+                <a:ea typeface="Segoe UI"/>
+                <a:cs typeface="Segoe UI"/>
+              </a:rPr>
+              <a:t>     </a:t>
+            </a:r>
+            <a:r>
               <a:rPr sz="900" b="1" i="0">
                 <a:solidFill>
-                  <a:srgbClr val="636E85"/>
+                  <a:srgbClr val="0E1E3C"/>
                 </a:solidFill>
                 <a:latin typeface="Segoe UI"/>
                 <a:ea typeface="Segoe UI"/>

--- a/Unit 1 - Introduction to AI and Gen AI.pptx
+++ b/Unit 1 - Introduction to AI and Gen AI.pptx
@@ -4046,7 +4046,77 @@
       </p:sp>
       <p:sp>
         <p:nvSpPr>
-          <p:cNvPr id="7" name="TextBox 6"/>
+          <p:cNvPr id="7" name="logo-plate"/>
+          <p:cNvSpPr/>
+          <p:nvPr/>
+        </p:nvSpPr>
+        <p:spPr>
+          <a:xfrm>
+            <a:off x="9126735" y="539496"/>
+            <a:ext cx="2379159" cy="1152144"/>
+          </a:xfrm>
+          <a:prstGeom prst="roundRect">
+            <a:avLst>
+              <a:gd name="adj" fmla="val 14000"/>
+            </a:avLst>
+          </a:prstGeom>
+          <a:solidFill>
+            <a:srgbClr val="FFFFFF"/>
+          </a:solidFill>
+          <a:ln>
+            <a:noFill/>
+          </a:ln>
+          <a:effectLst/>
+        </p:spPr>
+        <p:style>
+          <a:lnRef idx="1">
+            <a:schemeClr val="accent1"/>
+          </a:lnRef>
+          <a:fillRef idx="3">
+            <a:schemeClr val="accent1"/>
+          </a:fillRef>
+          <a:effectRef idx="2">
+            <a:schemeClr val="accent1"/>
+          </a:effectRef>
+          <a:fontRef idx="minor">
+            <a:schemeClr val="lt1"/>
+          </a:fontRef>
+        </p:style>
+        <p:txBody>
+          <a:bodyPr rtlCol="0" anchor="ctr" wrap="square"/>
+          <a:lstStyle/>
+          <a:p>
+            <a:pPr algn="ctr"/>
+          </a:p>
+        </p:txBody>
+      </p:sp>
+      <p:pic>
+        <p:nvPicPr>
+          <p:cNvPr id="8" name="college-logo" descr="logo-full.png"/>
+          <p:cNvPicPr>
+            <a:picLocks noChangeAspect="1"/>
+          </p:cNvPicPr>
+          <p:nvPr/>
+        </p:nvPicPr>
+        <p:blipFill>
+          <a:blip r:embed="rId2"/>
+          <a:stretch>
+            <a:fillRect/>
+          </a:stretch>
+        </p:blipFill>
+        <p:spPr>
+          <a:xfrm>
+            <a:off x="9245607" y="658368"/>
+            <a:ext cx="2141415" cy="914400"/>
+          </a:xfrm>
+          <a:prstGeom prst="rect">
+            <a:avLst/>
+          </a:prstGeom>
+        </p:spPr>
+      </p:pic>
+      <p:sp>
+        <p:nvSpPr>
+          <p:cNvPr id="9" name="TextBox 8"/>
           <p:cNvSpPr txBox="1"/>
           <p:nvPr/>
         </p:nvSpPr>
@@ -4093,7 +4163,7 @@
       </p:sp>
       <p:sp>
         <p:nvSpPr>
-          <p:cNvPr id="8" name="Rounded Rectangle 7"/>
+          <p:cNvPr id="10" name="Rounded Rectangle 9"/>
           <p:cNvSpPr/>
           <p:nvPr/>
         </p:nvSpPr>
@@ -4160,7 +4230,7 @@
       </p:sp>
       <p:sp>
         <p:nvSpPr>
-          <p:cNvPr id="9" name="TextBox 8"/>
+          <p:cNvPr id="11" name="TextBox 10"/>
           <p:cNvSpPr txBox="1"/>
           <p:nvPr/>
         </p:nvSpPr>
@@ -4207,7 +4277,7 @@
       </p:sp>
       <p:sp>
         <p:nvSpPr>
-          <p:cNvPr id="10" name="Rectangle 9"/>
+          <p:cNvPr id="12" name="Rectangle 11"/>
           <p:cNvSpPr/>
           <p:nvPr/>
         </p:nvSpPr>
@@ -4251,7 +4321,7 @@
       </p:sp>
       <p:sp>
         <p:nvSpPr>
-          <p:cNvPr id="11" name="TextBox 10"/>
+          <p:cNvPr id="13" name="TextBox 12"/>
           <p:cNvSpPr txBox="1"/>
           <p:nvPr/>
         </p:nvSpPr>
@@ -4298,7 +4368,7 @@
       </p:sp>
       <p:sp>
         <p:nvSpPr>
-          <p:cNvPr id="12" name="Rounded Rectangle 11"/>
+          <p:cNvPr id="14" name="Rounded Rectangle 13"/>
           <p:cNvSpPr/>
           <p:nvPr/>
         </p:nvSpPr>
@@ -4365,7 +4435,7 @@
       </p:sp>
       <p:sp>
         <p:nvSpPr>
-          <p:cNvPr id="13" name="Rounded Rectangle 12"/>
+          <p:cNvPr id="15" name="Rounded Rectangle 14"/>
           <p:cNvSpPr/>
           <p:nvPr/>
         </p:nvSpPr>
@@ -4432,7 +4502,7 @@
       </p:sp>
       <p:sp>
         <p:nvSpPr>
-          <p:cNvPr id="14" name="Rounded Rectangle 13"/>
+          <p:cNvPr id="16" name="Rounded Rectangle 15"/>
           <p:cNvSpPr/>
           <p:nvPr/>
         </p:nvSpPr>
@@ -4499,7 +4569,7 @@
       </p:sp>
       <p:sp>
         <p:nvSpPr>
-          <p:cNvPr id="15" name="Rounded Rectangle 14"/>
+          <p:cNvPr id="17" name="Rounded Rectangle 16"/>
           <p:cNvSpPr/>
           <p:nvPr/>
         </p:nvSpPr>
@@ -4566,7 +4636,7 @@
       </p:sp>
       <p:sp>
         <p:nvSpPr>
-          <p:cNvPr id="16" name="Rectangle 15"/>
+          <p:cNvPr id="18" name="Rectangle 17"/>
           <p:cNvSpPr/>
           <p:nvPr/>
         </p:nvSpPr>
@@ -4610,7 +4680,7 @@
       </p:sp>
       <p:sp>
         <p:nvSpPr>
-          <p:cNvPr id="17" name="TextBox 16"/>
+          <p:cNvPr id="19" name="TextBox 18"/>
           <p:cNvSpPr txBox="1"/>
           <p:nvPr/>
         </p:nvSpPr>
@@ -4703,7 +4773,7 @@
       </p:sp>
       <p:sp>
         <p:nvSpPr>
-          <p:cNvPr id="18" name="TextBox 17"/>
+          <p:cNvPr id="20" name="TextBox 19"/>
           <p:cNvSpPr txBox="1"/>
           <p:nvPr/>
         </p:nvSpPr>
@@ -5186,6 +5256,76 @@
           </a:p>
         </p:txBody>
       </p:sp>
+      <p:sp>
+        <p:nvSpPr>
+          <p:cNvPr id="11" name="logo-plate"/>
+          <p:cNvSpPr/>
+          <p:nvPr/>
+        </p:nvSpPr>
+        <p:spPr>
+          <a:xfrm>
+            <a:off x="9512190" y="539496"/>
+            <a:ext cx="1993704" cy="987552"/>
+          </a:xfrm>
+          <a:prstGeom prst="roundRect">
+            <a:avLst>
+              <a:gd name="adj" fmla="val 14000"/>
+            </a:avLst>
+          </a:prstGeom>
+          <a:solidFill>
+            <a:srgbClr val="FFFFFF"/>
+          </a:solidFill>
+          <a:ln>
+            <a:noFill/>
+          </a:ln>
+          <a:effectLst/>
+        </p:spPr>
+        <p:style>
+          <a:lnRef idx="1">
+            <a:schemeClr val="accent1"/>
+          </a:lnRef>
+          <a:fillRef idx="3">
+            <a:schemeClr val="accent1"/>
+          </a:fillRef>
+          <a:effectRef idx="2">
+            <a:schemeClr val="accent1"/>
+          </a:effectRef>
+          <a:fontRef idx="minor">
+            <a:schemeClr val="lt1"/>
+          </a:fontRef>
+        </p:style>
+        <p:txBody>
+          <a:bodyPr rtlCol="0" anchor="ctr" wrap="square"/>
+          <a:lstStyle/>
+          <a:p>
+            <a:pPr algn="ctr"/>
+          </a:p>
+        </p:txBody>
+      </p:sp>
+      <p:pic>
+        <p:nvPicPr>
+          <p:cNvPr id="12" name="college-logo" descr="logo-full.png"/>
+          <p:cNvPicPr>
+            <a:picLocks noChangeAspect="1"/>
+          </p:cNvPicPr>
+          <p:nvPr/>
+        </p:nvPicPr>
+        <p:blipFill>
+          <a:blip r:embed="rId2"/>
+          <a:stretch>
+            <a:fillRect/>
+          </a:stretch>
+        </p:blipFill>
+        <p:spPr>
+          <a:xfrm>
+            <a:off x="9631062" y="658368"/>
+            <a:ext cx="1755961" cy="749808"/>
+          </a:xfrm>
+          <a:prstGeom prst="rect">
+            <a:avLst/>
+          </a:prstGeom>
+        </p:spPr>
+      </p:pic>
     </p:spTree>
   </p:cSld>
   <p:clrMapOvr>
@@ -5248,9 +5388,33 @@
           </a:p>
         </p:txBody>
       </p:sp>
-      <p:sp>
-        <p:nvSpPr>
-          <p:cNvPr id="3" name="TextBox 2"/>
+      <p:pic>
+        <p:nvPicPr>
+          <p:cNvPr id="3" name="college-logo" descr="logo-mark.png"/>
+          <p:cNvPicPr>
+            <a:picLocks noChangeAspect="1"/>
+          </p:cNvPicPr>
+          <p:nvPr/>
+        </p:nvPicPr>
+        <p:blipFill>
+          <a:blip r:embed="rId2"/>
+          <a:stretch>
+            <a:fillRect/>
+          </a:stretch>
+        </p:blipFill>
+        <p:spPr>
+          <a:xfrm>
+            <a:off x="11203333" y="6199632"/>
+            <a:ext cx="275129" cy="310896"/>
+          </a:xfrm>
+          <a:prstGeom prst="rect">
+            <a:avLst/>
+          </a:prstGeom>
+        </p:spPr>
+      </p:pic>
+      <p:sp>
+        <p:nvSpPr>
+          <p:cNvPr id="4" name="TextBox 3"/>
           <p:cNvSpPr txBox="1"/>
           <p:nvPr/>
         </p:nvSpPr>
@@ -5319,13 +5483,13 @@
       </p:sp>
       <p:sp>
         <p:nvSpPr>
-          <p:cNvPr id="4" name="TextBox 3"/>
+          <p:cNvPr id="5" name="TextBox 4"/>
           <p:cNvSpPr txBox="1"/>
           <p:nvPr/>
         </p:nvSpPr>
         <p:spPr>
           <a:xfrm>
-            <a:off x="8826703" y="6272784"/>
+            <a:off x="8240677" y="6272784"/>
             <a:ext cx="2651760" cy="219456"/>
           </a:xfrm>
           <a:prstGeom prst="rect">
@@ -5388,7 +5552,7 @@
       </p:sp>
       <p:sp>
         <p:nvSpPr>
-          <p:cNvPr id="5" name="TextBox 4"/>
+          <p:cNvPr id="6" name="TextBox 5"/>
           <p:cNvSpPr txBox="1"/>
           <p:nvPr/>
         </p:nvSpPr>
@@ -5435,7 +5599,7 @@
       </p:sp>
       <p:sp>
         <p:nvSpPr>
-          <p:cNvPr id="6" name="TextBox 5"/>
+          <p:cNvPr id="7" name="TextBox 6"/>
           <p:cNvSpPr txBox="1"/>
           <p:nvPr/>
         </p:nvSpPr>
@@ -5482,7 +5646,7 @@
       </p:sp>
       <p:sp>
         <p:nvSpPr>
-          <p:cNvPr id="7" name="Rectangle 6"/>
+          <p:cNvPr id="8" name="Rectangle 7"/>
           <p:cNvSpPr/>
           <p:nvPr/>
         </p:nvSpPr>
@@ -5526,7 +5690,7 @@
       </p:sp>
       <p:sp>
         <p:nvSpPr>
-          <p:cNvPr id="8" name="TextBox 7"/>
+          <p:cNvPr id="9" name="TextBox 8"/>
           <p:cNvSpPr txBox="1"/>
           <p:nvPr/>
         </p:nvSpPr>
@@ -5573,7 +5737,7 @@
       </p:sp>
       <p:sp>
         <p:nvSpPr>
-          <p:cNvPr id="9" name="Rectangle 8"/>
+          <p:cNvPr id="10" name="Rectangle 9"/>
           <p:cNvSpPr/>
           <p:nvPr/>
         </p:nvSpPr>
@@ -5617,7 +5781,7 @@
       </p:sp>
       <p:sp>
         <p:nvSpPr>
-          <p:cNvPr id="10" name="Rounded Rectangle 9"/>
+          <p:cNvPr id="11" name="Rounded Rectangle 10"/>
           <p:cNvSpPr/>
           <p:nvPr/>
         </p:nvSpPr>
@@ -5663,7 +5827,7 @@
       </p:sp>
       <p:sp>
         <p:nvSpPr>
-          <p:cNvPr id="11" name="TextBox 10"/>
+          <p:cNvPr id="12" name="TextBox 11"/>
           <p:cNvSpPr txBox="1"/>
           <p:nvPr/>
         </p:nvSpPr>
@@ -5710,7 +5874,7 @@
       </p:sp>
       <p:sp>
         <p:nvSpPr>
-          <p:cNvPr id="12" name="Rounded Rectangle 11"/>
+          <p:cNvPr id="13" name="Rounded Rectangle 12"/>
           <p:cNvSpPr/>
           <p:nvPr/>
         </p:nvSpPr>
@@ -5756,7 +5920,7 @@
       </p:sp>
       <p:sp>
         <p:nvSpPr>
-          <p:cNvPr id="13" name="TextBox 12"/>
+          <p:cNvPr id="14" name="TextBox 13"/>
           <p:cNvSpPr txBox="1"/>
           <p:nvPr/>
         </p:nvSpPr>
@@ -5803,7 +5967,7 @@
       </p:sp>
       <p:sp>
         <p:nvSpPr>
-          <p:cNvPr id="14" name="Rounded Rectangle 13"/>
+          <p:cNvPr id="15" name="Rounded Rectangle 14"/>
           <p:cNvSpPr/>
           <p:nvPr/>
         </p:nvSpPr>
@@ -5849,7 +6013,7 @@
       </p:sp>
       <p:sp>
         <p:nvSpPr>
-          <p:cNvPr id="15" name="TextBox 14"/>
+          <p:cNvPr id="16" name="TextBox 15"/>
           <p:cNvSpPr txBox="1"/>
           <p:nvPr/>
         </p:nvSpPr>
@@ -5896,7 +6060,7 @@
       </p:sp>
       <p:sp>
         <p:nvSpPr>
-          <p:cNvPr id="16" name="Rounded Rectangle 15"/>
+          <p:cNvPr id="17" name="Rounded Rectangle 16"/>
           <p:cNvSpPr/>
           <p:nvPr/>
         </p:nvSpPr>
@@ -5942,7 +6106,7 @@
       </p:sp>
       <p:sp>
         <p:nvSpPr>
-          <p:cNvPr id="17" name="TextBox 16"/>
+          <p:cNvPr id="18" name="TextBox 17"/>
           <p:cNvSpPr txBox="1"/>
           <p:nvPr/>
         </p:nvSpPr>
@@ -5989,7 +6153,7 @@
       </p:sp>
       <p:sp>
         <p:nvSpPr>
-          <p:cNvPr id="18" name="Rounded Rectangle 17"/>
+          <p:cNvPr id="19" name="Rounded Rectangle 18"/>
           <p:cNvSpPr/>
           <p:nvPr/>
         </p:nvSpPr>
@@ -6035,7 +6199,7 @@
       </p:sp>
       <p:sp>
         <p:nvSpPr>
-          <p:cNvPr id="19" name="TextBox 18"/>
+          <p:cNvPr id="20" name="TextBox 19"/>
           <p:cNvSpPr txBox="1"/>
           <p:nvPr/>
         </p:nvSpPr>
@@ -6082,7 +6246,7 @@
       </p:sp>
       <p:sp>
         <p:nvSpPr>
-          <p:cNvPr id="20" name="Rounded Rectangle 19"/>
+          <p:cNvPr id="21" name="Rounded Rectangle 20"/>
           <p:cNvSpPr/>
           <p:nvPr/>
         </p:nvSpPr>
@@ -6136,7 +6300,7 @@
       </p:sp>
       <p:sp>
         <p:nvSpPr>
-          <p:cNvPr id="21" name="Rectangle 20"/>
+          <p:cNvPr id="22" name="Rectangle 21"/>
           <p:cNvSpPr/>
           <p:nvPr/>
         </p:nvSpPr>
@@ -6180,7 +6344,7 @@
       </p:sp>
       <p:sp>
         <p:nvSpPr>
-          <p:cNvPr id="22" name="TextBox 21"/>
+          <p:cNvPr id="23" name="TextBox 22"/>
           <p:cNvSpPr txBox="1"/>
           <p:nvPr/>
         </p:nvSpPr>
@@ -6227,7 +6391,7 @@
       </p:sp>
       <p:sp>
         <p:nvSpPr>
-          <p:cNvPr id="23" name="TextBox 22"/>
+          <p:cNvPr id="24" name="TextBox 23"/>
           <p:cNvSpPr txBox="1"/>
           <p:nvPr/>
         </p:nvSpPr>
@@ -6274,7 +6438,7 @@
       </p:sp>
       <p:sp>
         <p:nvSpPr>
-          <p:cNvPr id="24" name="Rounded Rectangle 23"/>
+          <p:cNvPr id="25" name="Rounded Rectangle 24"/>
           <p:cNvSpPr/>
           <p:nvPr/>
         </p:nvSpPr>
@@ -6328,7 +6492,7 @@
       </p:sp>
       <p:sp>
         <p:nvSpPr>
-          <p:cNvPr id="25" name="Rectangle 24"/>
+          <p:cNvPr id="26" name="Rectangle 25"/>
           <p:cNvSpPr/>
           <p:nvPr/>
         </p:nvSpPr>
@@ -6372,7 +6536,7 @@
       </p:sp>
       <p:sp>
         <p:nvSpPr>
-          <p:cNvPr id="26" name="TextBox 25"/>
+          <p:cNvPr id="27" name="TextBox 26"/>
           <p:cNvSpPr txBox="1"/>
           <p:nvPr/>
         </p:nvSpPr>
@@ -6419,7 +6583,7 @@
       </p:sp>
       <p:sp>
         <p:nvSpPr>
-          <p:cNvPr id="27" name="TextBox 26"/>
+          <p:cNvPr id="28" name="TextBox 27"/>
           <p:cNvSpPr txBox="1"/>
           <p:nvPr/>
         </p:nvSpPr>
@@ -6466,7 +6630,7 @@
       </p:sp>
       <p:sp>
         <p:nvSpPr>
-          <p:cNvPr id="28" name="Rounded Rectangle 27"/>
+          <p:cNvPr id="29" name="Rounded Rectangle 28"/>
           <p:cNvSpPr/>
           <p:nvPr/>
         </p:nvSpPr>
@@ -6520,7 +6684,7 @@
       </p:sp>
       <p:sp>
         <p:nvSpPr>
-          <p:cNvPr id="29" name="Rectangle 28"/>
+          <p:cNvPr id="30" name="Rectangle 29"/>
           <p:cNvSpPr/>
           <p:nvPr/>
         </p:nvSpPr>
@@ -6564,7 +6728,7 @@
       </p:sp>
       <p:sp>
         <p:nvSpPr>
-          <p:cNvPr id="30" name="TextBox 29"/>
+          <p:cNvPr id="31" name="TextBox 30"/>
           <p:cNvSpPr txBox="1"/>
           <p:nvPr/>
         </p:nvSpPr>
@@ -6611,7 +6775,7 @@
       </p:sp>
       <p:sp>
         <p:nvSpPr>
-          <p:cNvPr id="31" name="TextBox 30"/>
+          <p:cNvPr id="32" name="TextBox 31"/>
           <p:cNvSpPr txBox="1"/>
           <p:nvPr/>
         </p:nvSpPr>
@@ -6718,9 +6882,33 @@
           </a:p>
         </p:txBody>
       </p:sp>
-      <p:sp>
-        <p:nvSpPr>
-          <p:cNvPr id="3" name="TextBox 2"/>
+      <p:pic>
+        <p:nvPicPr>
+          <p:cNvPr id="3" name="college-logo" descr="logo-mark.png"/>
+          <p:cNvPicPr>
+            <a:picLocks noChangeAspect="1"/>
+          </p:cNvPicPr>
+          <p:nvPr/>
+        </p:nvPicPr>
+        <p:blipFill>
+          <a:blip r:embed="rId2"/>
+          <a:stretch>
+            <a:fillRect/>
+          </a:stretch>
+        </p:blipFill>
+        <p:spPr>
+          <a:xfrm>
+            <a:off x="11203333" y="6199632"/>
+            <a:ext cx="275129" cy="310896"/>
+          </a:xfrm>
+          <a:prstGeom prst="rect">
+            <a:avLst/>
+          </a:prstGeom>
+        </p:spPr>
+      </p:pic>
+      <p:sp>
+        <p:nvSpPr>
+          <p:cNvPr id="4" name="TextBox 3"/>
           <p:cNvSpPr txBox="1"/>
           <p:nvPr/>
         </p:nvSpPr>
@@ -6789,13 +6977,13 @@
       </p:sp>
       <p:sp>
         <p:nvSpPr>
-          <p:cNvPr id="4" name="TextBox 3"/>
+          <p:cNvPr id="5" name="TextBox 4"/>
           <p:cNvSpPr txBox="1"/>
           <p:nvPr/>
         </p:nvSpPr>
         <p:spPr>
           <a:xfrm>
-            <a:off x="8826703" y="6272784"/>
+            <a:off x="8240677" y="6272784"/>
             <a:ext cx="2651760" cy="219456"/>
           </a:xfrm>
           <a:prstGeom prst="rect">
@@ -6858,7 +7046,7 @@
       </p:sp>
       <p:sp>
         <p:nvSpPr>
-          <p:cNvPr id="5" name="TextBox 4"/>
+          <p:cNvPr id="6" name="TextBox 5"/>
           <p:cNvSpPr txBox="1"/>
           <p:nvPr/>
         </p:nvSpPr>
@@ -6905,7 +7093,7 @@
       </p:sp>
       <p:sp>
         <p:nvSpPr>
-          <p:cNvPr id="6" name="TextBox 5"/>
+          <p:cNvPr id="7" name="TextBox 6"/>
           <p:cNvSpPr txBox="1"/>
           <p:nvPr/>
         </p:nvSpPr>
@@ -6952,7 +7140,7 @@
       </p:sp>
       <p:sp>
         <p:nvSpPr>
-          <p:cNvPr id="7" name="Rectangle 6"/>
+          <p:cNvPr id="8" name="Rectangle 7"/>
           <p:cNvSpPr/>
           <p:nvPr/>
         </p:nvSpPr>
@@ -6996,7 +7184,7 @@
       </p:sp>
       <p:sp>
         <p:nvSpPr>
-          <p:cNvPr id="8" name="TextBox 7"/>
+          <p:cNvPr id="9" name="TextBox 8"/>
           <p:cNvSpPr txBox="1"/>
           <p:nvPr/>
         </p:nvSpPr>
@@ -7043,7 +7231,7 @@
       </p:sp>
       <p:sp>
         <p:nvSpPr>
-          <p:cNvPr id="9" name="Rounded Rectangle 8"/>
+          <p:cNvPr id="10" name="Rounded Rectangle 9"/>
           <p:cNvSpPr/>
           <p:nvPr/>
         </p:nvSpPr>
@@ -7097,7 +7285,7 @@
       </p:sp>
       <p:sp>
         <p:nvSpPr>
-          <p:cNvPr id="10" name="Rectangle 9"/>
+          <p:cNvPr id="11" name="Rectangle 10"/>
           <p:cNvSpPr/>
           <p:nvPr/>
         </p:nvSpPr>
@@ -7141,7 +7329,7 @@
       </p:sp>
       <p:sp>
         <p:nvSpPr>
-          <p:cNvPr id="11" name="TextBox 10"/>
+          <p:cNvPr id="12" name="TextBox 11"/>
           <p:cNvSpPr txBox="1"/>
           <p:nvPr/>
         </p:nvSpPr>
@@ -7188,7 +7376,7 @@
       </p:sp>
       <p:sp>
         <p:nvSpPr>
-          <p:cNvPr id="12" name="TextBox 11"/>
+          <p:cNvPr id="13" name="TextBox 12"/>
           <p:cNvSpPr txBox="1"/>
           <p:nvPr/>
         </p:nvSpPr>
@@ -7235,7 +7423,7 @@
       </p:sp>
       <p:sp>
         <p:nvSpPr>
-          <p:cNvPr id="13" name="Rounded Rectangle 12"/>
+          <p:cNvPr id="14" name="Rounded Rectangle 13"/>
           <p:cNvSpPr/>
           <p:nvPr/>
         </p:nvSpPr>
@@ -7289,7 +7477,7 @@
       </p:sp>
       <p:sp>
         <p:nvSpPr>
-          <p:cNvPr id="14" name="Rectangle 13"/>
+          <p:cNvPr id="15" name="Rectangle 14"/>
           <p:cNvSpPr/>
           <p:nvPr/>
         </p:nvSpPr>
@@ -7333,7 +7521,7 @@
       </p:sp>
       <p:sp>
         <p:nvSpPr>
-          <p:cNvPr id="15" name="TextBox 14"/>
+          <p:cNvPr id="16" name="TextBox 15"/>
           <p:cNvSpPr txBox="1"/>
           <p:nvPr/>
         </p:nvSpPr>
@@ -7380,7 +7568,7 @@
       </p:sp>
       <p:sp>
         <p:nvSpPr>
-          <p:cNvPr id="16" name="TextBox 15"/>
+          <p:cNvPr id="17" name="TextBox 16"/>
           <p:cNvSpPr txBox="1"/>
           <p:nvPr/>
         </p:nvSpPr>
@@ -7427,7 +7615,7 @@
       </p:sp>
       <p:sp>
         <p:nvSpPr>
-          <p:cNvPr id="17" name="Rounded Rectangle 16"/>
+          <p:cNvPr id="18" name="Rounded Rectangle 17"/>
           <p:cNvSpPr/>
           <p:nvPr/>
         </p:nvSpPr>
@@ -7481,7 +7669,7 @@
       </p:sp>
       <p:sp>
         <p:nvSpPr>
-          <p:cNvPr id="18" name="Rectangle 17"/>
+          <p:cNvPr id="19" name="Rectangle 18"/>
           <p:cNvSpPr/>
           <p:nvPr/>
         </p:nvSpPr>
@@ -7525,7 +7713,7 @@
       </p:sp>
       <p:sp>
         <p:nvSpPr>
-          <p:cNvPr id="19" name="TextBox 18"/>
+          <p:cNvPr id="20" name="TextBox 19"/>
           <p:cNvSpPr txBox="1"/>
           <p:nvPr/>
         </p:nvSpPr>
@@ -7572,7 +7760,7 @@
       </p:sp>
       <p:sp>
         <p:nvSpPr>
-          <p:cNvPr id="20" name="TextBox 19"/>
+          <p:cNvPr id="21" name="TextBox 20"/>
           <p:cNvSpPr txBox="1"/>
           <p:nvPr/>
         </p:nvSpPr>
@@ -7619,7 +7807,7 @@
       </p:sp>
       <p:sp>
         <p:nvSpPr>
-          <p:cNvPr id="21" name="Rounded Rectangle 20"/>
+          <p:cNvPr id="22" name="Rounded Rectangle 21"/>
           <p:cNvSpPr/>
           <p:nvPr/>
         </p:nvSpPr>
@@ -7673,7 +7861,7 @@
       </p:sp>
       <p:sp>
         <p:nvSpPr>
-          <p:cNvPr id="22" name="Rectangle 21"/>
+          <p:cNvPr id="23" name="Rectangle 22"/>
           <p:cNvSpPr/>
           <p:nvPr/>
         </p:nvSpPr>
@@ -7717,7 +7905,7 @@
       </p:sp>
       <p:sp>
         <p:nvSpPr>
-          <p:cNvPr id="23" name="TextBox 22"/>
+          <p:cNvPr id="24" name="TextBox 23"/>
           <p:cNvSpPr txBox="1"/>
           <p:nvPr/>
         </p:nvSpPr>
@@ -7764,7 +7952,7 @@
       </p:sp>
       <p:sp>
         <p:nvSpPr>
-          <p:cNvPr id="24" name="TextBox 23"/>
+          <p:cNvPr id="25" name="TextBox 24"/>
           <p:cNvSpPr txBox="1"/>
           <p:nvPr/>
         </p:nvSpPr>
@@ -8247,6 +8435,76 @@
           </a:p>
         </p:txBody>
       </p:sp>
+      <p:sp>
+        <p:nvSpPr>
+          <p:cNvPr id="11" name="logo-plate"/>
+          <p:cNvSpPr/>
+          <p:nvPr/>
+        </p:nvSpPr>
+        <p:spPr>
+          <a:xfrm>
+            <a:off x="9512190" y="539496"/>
+            <a:ext cx="1993704" cy="987552"/>
+          </a:xfrm>
+          <a:prstGeom prst="roundRect">
+            <a:avLst>
+              <a:gd name="adj" fmla="val 14000"/>
+            </a:avLst>
+          </a:prstGeom>
+          <a:solidFill>
+            <a:srgbClr val="FFFFFF"/>
+          </a:solidFill>
+          <a:ln>
+            <a:noFill/>
+          </a:ln>
+          <a:effectLst/>
+        </p:spPr>
+        <p:style>
+          <a:lnRef idx="1">
+            <a:schemeClr val="accent1"/>
+          </a:lnRef>
+          <a:fillRef idx="3">
+            <a:schemeClr val="accent1"/>
+          </a:fillRef>
+          <a:effectRef idx="2">
+            <a:schemeClr val="accent1"/>
+          </a:effectRef>
+          <a:fontRef idx="minor">
+            <a:schemeClr val="lt1"/>
+          </a:fontRef>
+        </p:style>
+        <p:txBody>
+          <a:bodyPr rtlCol="0" anchor="ctr" wrap="square"/>
+          <a:lstStyle/>
+          <a:p>
+            <a:pPr algn="ctr"/>
+          </a:p>
+        </p:txBody>
+      </p:sp>
+      <p:pic>
+        <p:nvPicPr>
+          <p:cNvPr id="12" name="college-logo" descr="logo-full.png"/>
+          <p:cNvPicPr>
+            <a:picLocks noChangeAspect="1"/>
+          </p:cNvPicPr>
+          <p:nvPr/>
+        </p:nvPicPr>
+        <p:blipFill>
+          <a:blip r:embed="rId2"/>
+          <a:stretch>
+            <a:fillRect/>
+          </a:stretch>
+        </p:blipFill>
+        <p:spPr>
+          <a:xfrm>
+            <a:off x="9631062" y="658368"/>
+            <a:ext cx="1755961" cy="749808"/>
+          </a:xfrm>
+          <a:prstGeom prst="rect">
+            <a:avLst/>
+          </a:prstGeom>
+        </p:spPr>
+      </p:pic>
     </p:spTree>
   </p:cSld>
   <p:clrMapOvr>
@@ -8309,9 +8567,33 @@
           </a:p>
         </p:txBody>
       </p:sp>
-      <p:sp>
-        <p:nvSpPr>
-          <p:cNvPr id="3" name="TextBox 2"/>
+      <p:pic>
+        <p:nvPicPr>
+          <p:cNvPr id="3" name="college-logo" descr="logo-mark.png"/>
+          <p:cNvPicPr>
+            <a:picLocks noChangeAspect="1"/>
+          </p:cNvPicPr>
+          <p:nvPr/>
+        </p:nvPicPr>
+        <p:blipFill>
+          <a:blip r:embed="rId2"/>
+          <a:stretch>
+            <a:fillRect/>
+          </a:stretch>
+        </p:blipFill>
+        <p:spPr>
+          <a:xfrm>
+            <a:off x="11203333" y="6199632"/>
+            <a:ext cx="275129" cy="310896"/>
+          </a:xfrm>
+          <a:prstGeom prst="rect">
+            <a:avLst/>
+          </a:prstGeom>
+        </p:spPr>
+      </p:pic>
+      <p:sp>
+        <p:nvSpPr>
+          <p:cNvPr id="4" name="TextBox 3"/>
           <p:cNvSpPr txBox="1"/>
           <p:nvPr/>
         </p:nvSpPr>
@@ -8380,13 +8662,13 @@
       </p:sp>
       <p:sp>
         <p:nvSpPr>
-          <p:cNvPr id="4" name="TextBox 3"/>
+          <p:cNvPr id="5" name="TextBox 4"/>
           <p:cNvSpPr txBox="1"/>
           <p:nvPr/>
         </p:nvSpPr>
         <p:spPr>
           <a:xfrm>
-            <a:off x="8826703" y="6272784"/>
+            <a:off x="8240677" y="6272784"/>
             <a:ext cx="2651760" cy="219456"/>
           </a:xfrm>
           <a:prstGeom prst="rect">
@@ -8449,7 +8731,7 @@
       </p:sp>
       <p:sp>
         <p:nvSpPr>
-          <p:cNvPr id="5" name="TextBox 4"/>
+          <p:cNvPr id="6" name="TextBox 5"/>
           <p:cNvSpPr txBox="1"/>
           <p:nvPr/>
         </p:nvSpPr>
@@ -8496,7 +8778,7 @@
       </p:sp>
       <p:sp>
         <p:nvSpPr>
-          <p:cNvPr id="6" name="TextBox 5"/>
+          <p:cNvPr id="7" name="TextBox 6"/>
           <p:cNvSpPr txBox="1"/>
           <p:nvPr/>
         </p:nvSpPr>
@@ -8543,7 +8825,7 @@
       </p:sp>
       <p:sp>
         <p:nvSpPr>
-          <p:cNvPr id="7" name="Rectangle 6"/>
+          <p:cNvPr id="8" name="Rectangle 7"/>
           <p:cNvSpPr/>
           <p:nvPr/>
         </p:nvSpPr>
@@ -8587,7 +8869,7 @@
       </p:sp>
       <p:sp>
         <p:nvSpPr>
-          <p:cNvPr id="8" name="TextBox 7"/>
+          <p:cNvPr id="9" name="TextBox 8"/>
           <p:cNvSpPr txBox="1"/>
           <p:nvPr/>
         </p:nvSpPr>
@@ -8634,7 +8916,7 @@
       </p:sp>
       <p:sp>
         <p:nvSpPr>
-          <p:cNvPr id="9" name="Rounded Rectangle 8"/>
+          <p:cNvPr id="10" name="Rounded Rectangle 9"/>
           <p:cNvSpPr/>
           <p:nvPr/>
         </p:nvSpPr>
@@ -8688,7 +8970,7 @@
       </p:sp>
       <p:sp>
         <p:nvSpPr>
-          <p:cNvPr id="10" name="Rectangle 9"/>
+          <p:cNvPr id="11" name="Rectangle 10"/>
           <p:cNvSpPr/>
           <p:nvPr/>
         </p:nvSpPr>
@@ -8732,7 +9014,7 @@
       </p:sp>
       <p:sp>
         <p:nvSpPr>
-          <p:cNvPr id="11" name="Rounded Rectangle 10"/>
+          <p:cNvPr id="12" name="Rounded Rectangle 11"/>
           <p:cNvSpPr/>
           <p:nvPr/>
         </p:nvSpPr>
@@ -8799,7 +9081,7 @@
       </p:sp>
       <p:sp>
         <p:nvSpPr>
-          <p:cNvPr id="12" name="TextBox 11"/>
+          <p:cNvPr id="13" name="TextBox 12"/>
           <p:cNvSpPr txBox="1"/>
           <p:nvPr/>
         </p:nvSpPr>
@@ -8846,7 +9128,7 @@
       </p:sp>
       <p:sp>
         <p:nvSpPr>
-          <p:cNvPr id="13" name="Rectangle 12"/>
+          <p:cNvPr id="14" name="Rectangle 13"/>
           <p:cNvSpPr/>
           <p:nvPr/>
         </p:nvSpPr>
@@ -8890,7 +9172,7 @@
       </p:sp>
       <p:sp>
         <p:nvSpPr>
-          <p:cNvPr id="14" name="Rounded Rectangle 13"/>
+          <p:cNvPr id="15" name="Rounded Rectangle 14"/>
           <p:cNvSpPr/>
           <p:nvPr/>
         </p:nvSpPr>
@@ -8936,7 +9218,7 @@
       </p:sp>
       <p:sp>
         <p:nvSpPr>
-          <p:cNvPr id="15" name="TextBox 14"/>
+          <p:cNvPr id="16" name="TextBox 15"/>
           <p:cNvSpPr txBox="1"/>
           <p:nvPr/>
         </p:nvSpPr>
@@ -8983,7 +9265,7 @@
       </p:sp>
       <p:sp>
         <p:nvSpPr>
-          <p:cNvPr id="16" name="Rounded Rectangle 15"/>
+          <p:cNvPr id="17" name="Rounded Rectangle 16"/>
           <p:cNvSpPr/>
           <p:nvPr/>
         </p:nvSpPr>
@@ -9029,7 +9311,7 @@
       </p:sp>
       <p:sp>
         <p:nvSpPr>
-          <p:cNvPr id="17" name="TextBox 16"/>
+          <p:cNvPr id="18" name="TextBox 17"/>
           <p:cNvSpPr txBox="1"/>
           <p:nvPr/>
         </p:nvSpPr>
@@ -9076,7 +9358,7 @@
       </p:sp>
       <p:sp>
         <p:nvSpPr>
-          <p:cNvPr id="18" name="Rounded Rectangle 17"/>
+          <p:cNvPr id="19" name="Rounded Rectangle 18"/>
           <p:cNvSpPr/>
           <p:nvPr/>
         </p:nvSpPr>
@@ -9122,7 +9404,7 @@
       </p:sp>
       <p:sp>
         <p:nvSpPr>
-          <p:cNvPr id="19" name="TextBox 18"/>
+          <p:cNvPr id="20" name="TextBox 19"/>
           <p:cNvSpPr txBox="1"/>
           <p:nvPr/>
         </p:nvSpPr>
@@ -9169,7 +9451,7 @@
       </p:sp>
       <p:sp>
         <p:nvSpPr>
-          <p:cNvPr id="20" name="Rounded Rectangle 19"/>
+          <p:cNvPr id="21" name="Rounded Rectangle 20"/>
           <p:cNvSpPr/>
           <p:nvPr/>
         </p:nvSpPr>
@@ -9215,7 +9497,7 @@
       </p:sp>
       <p:sp>
         <p:nvSpPr>
-          <p:cNvPr id="21" name="TextBox 20"/>
+          <p:cNvPr id="22" name="TextBox 21"/>
           <p:cNvSpPr txBox="1"/>
           <p:nvPr/>
         </p:nvSpPr>
@@ -9262,7 +9544,7 @@
       </p:sp>
       <p:sp>
         <p:nvSpPr>
-          <p:cNvPr id="22" name="Rounded Rectangle 21"/>
+          <p:cNvPr id="23" name="Rounded Rectangle 22"/>
           <p:cNvSpPr/>
           <p:nvPr/>
         </p:nvSpPr>
@@ -9308,7 +9590,7 @@
       </p:sp>
       <p:sp>
         <p:nvSpPr>
-          <p:cNvPr id="23" name="TextBox 22"/>
+          <p:cNvPr id="24" name="TextBox 23"/>
           <p:cNvSpPr txBox="1"/>
           <p:nvPr/>
         </p:nvSpPr>
@@ -9355,7 +9637,7 @@
       </p:sp>
       <p:sp>
         <p:nvSpPr>
-          <p:cNvPr id="24" name="Rounded Rectangle 23"/>
+          <p:cNvPr id="25" name="Rounded Rectangle 24"/>
           <p:cNvSpPr/>
           <p:nvPr/>
         </p:nvSpPr>
@@ -9409,7 +9691,7 @@
       </p:sp>
       <p:sp>
         <p:nvSpPr>
-          <p:cNvPr id="25" name="Rectangle 24"/>
+          <p:cNvPr id="26" name="Rectangle 25"/>
           <p:cNvSpPr/>
           <p:nvPr/>
         </p:nvSpPr>
@@ -9453,7 +9735,7 @@
       </p:sp>
       <p:sp>
         <p:nvSpPr>
-          <p:cNvPr id="26" name="Rounded Rectangle 25"/>
+          <p:cNvPr id="27" name="Rounded Rectangle 26"/>
           <p:cNvSpPr/>
           <p:nvPr/>
         </p:nvSpPr>
@@ -9520,7 +9802,7 @@
       </p:sp>
       <p:sp>
         <p:nvSpPr>
-          <p:cNvPr id="27" name="TextBox 26"/>
+          <p:cNvPr id="28" name="TextBox 27"/>
           <p:cNvSpPr txBox="1"/>
           <p:nvPr/>
         </p:nvSpPr>
@@ -9567,7 +9849,7 @@
       </p:sp>
       <p:sp>
         <p:nvSpPr>
-          <p:cNvPr id="28" name="Rectangle 27"/>
+          <p:cNvPr id="29" name="Rectangle 28"/>
           <p:cNvSpPr/>
           <p:nvPr/>
         </p:nvSpPr>
@@ -9611,7 +9893,7 @@
       </p:sp>
       <p:sp>
         <p:nvSpPr>
-          <p:cNvPr id="29" name="Rounded Rectangle 28"/>
+          <p:cNvPr id="30" name="Rounded Rectangle 29"/>
           <p:cNvSpPr/>
           <p:nvPr/>
         </p:nvSpPr>
@@ -9657,7 +9939,7 @@
       </p:sp>
       <p:sp>
         <p:nvSpPr>
-          <p:cNvPr id="30" name="TextBox 29"/>
+          <p:cNvPr id="31" name="TextBox 30"/>
           <p:cNvSpPr txBox="1"/>
           <p:nvPr/>
         </p:nvSpPr>
@@ -9704,7 +9986,7 @@
       </p:sp>
       <p:sp>
         <p:nvSpPr>
-          <p:cNvPr id="31" name="Rounded Rectangle 30"/>
+          <p:cNvPr id="32" name="Rounded Rectangle 31"/>
           <p:cNvSpPr/>
           <p:nvPr/>
         </p:nvSpPr>
@@ -9750,7 +10032,7 @@
       </p:sp>
       <p:sp>
         <p:nvSpPr>
-          <p:cNvPr id="32" name="TextBox 31"/>
+          <p:cNvPr id="33" name="TextBox 32"/>
           <p:cNvSpPr txBox="1"/>
           <p:nvPr/>
         </p:nvSpPr>
@@ -9797,7 +10079,7 @@
       </p:sp>
       <p:sp>
         <p:nvSpPr>
-          <p:cNvPr id="33" name="Rounded Rectangle 32"/>
+          <p:cNvPr id="34" name="Rounded Rectangle 33"/>
           <p:cNvSpPr/>
           <p:nvPr/>
         </p:nvSpPr>
@@ -9843,7 +10125,7 @@
       </p:sp>
       <p:sp>
         <p:nvSpPr>
-          <p:cNvPr id="34" name="TextBox 33"/>
+          <p:cNvPr id="35" name="TextBox 34"/>
           <p:cNvSpPr txBox="1"/>
           <p:nvPr/>
         </p:nvSpPr>
@@ -9890,7 +10172,7 @@
       </p:sp>
       <p:sp>
         <p:nvSpPr>
-          <p:cNvPr id="35" name="Rounded Rectangle 34"/>
+          <p:cNvPr id="36" name="Rounded Rectangle 35"/>
           <p:cNvSpPr/>
           <p:nvPr/>
         </p:nvSpPr>
@@ -9936,7 +10218,7 @@
       </p:sp>
       <p:sp>
         <p:nvSpPr>
-          <p:cNvPr id="36" name="TextBox 35"/>
+          <p:cNvPr id="37" name="TextBox 36"/>
           <p:cNvSpPr txBox="1"/>
           <p:nvPr/>
         </p:nvSpPr>
@@ -9983,7 +10265,7 @@
       </p:sp>
       <p:sp>
         <p:nvSpPr>
-          <p:cNvPr id="37" name="Rounded Rectangle 36"/>
+          <p:cNvPr id="38" name="Rounded Rectangle 37"/>
           <p:cNvSpPr/>
           <p:nvPr/>
         </p:nvSpPr>
@@ -10029,7 +10311,7 @@
       </p:sp>
       <p:sp>
         <p:nvSpPr>
-          <p:cNvPr id="38" name="TextBox 37"/>
+          <p:cNvPr id="39" name="TextBox 38"/>
           <p:cNvSpPr txBox="1"/>
           <p:nvPr/>
         </p:nvSpPr>
@@ -10076,7 +10358,7 @@
       </p:sp>
       <p:sp>
         <p:nvSpPr>
-          <p:cNvPr id="39" name="Rounded Rectangle 38"/>
+          <p:cNvPr id="40" name="Rounded Rectangle 39"/>
           <p:cNvSpPr/>
           <p:nvPr/>
         </p:nvSpPr>
@@ -10214,9 +10496,33 @@
           </a:p>
         </p:txBody>
       </p:sp>
-      <p:sp>
-        <p:nvSpPr>
-          <p:cNvPr id="3" name="TextBox 2"/>
+      <p:pic>
+        <p:nvPicPr>
+          <p:cNvPr id="3" name="college-logo" descr="logo-mark.png"/>
+          <p:cNvPicPr>
+            <a:picLocks noChangeAspect="1"/>
+          </p:cNvPicPr>
+          <p:nvPr/>
+        </p:nvPicPr>
+        <p:blipFill>
+          <a:blip r:embed="rId2"/>
+          <a:stretch>
+            <a:fillRect/>
+          </a:stretch>
+        </p:blipFill>
+        <p:spPr>
+          <a:xfrm>
+            <a:off x="11203333" y="6199632"/>
+            <a:ext cx="275129" cy="310896"/>
+          </a:xfrm>
+          <a:prstGeom prst="rect">
+            <a:avLst/>
+          </a:prstGeom>
+        </p:spPr>
+      </p:pic>
+      <p:sp>
+        <p:nvSpPr>
+          <p:cNvPr id="4" name="TextBox 3"/>
           <p:cNvSpPr txBox="1"/>
           <p:nvPr/>
         </p:nvSpPr>
@@ -10285,13 +10591,13 @@
       </p:sp>
       <p:sp>
         <p:nvSpPr>
-          <p:cNvPr id="4" name="TextBox 3"/>
+          <p:cNvPr id="5" name="TextBox 4"/>
           <p:cNvSpPr txBox="1"/>
           <p:nvPr/>
         </p:nvSpPr>
         <p:spPr>
           <a:xfrm>
-            <a:off x="8826703" y="6272784"/>
+            <a:off x="8240677" y="6272784"/>
             <a:ext cx="2651760" cy="219456"/>
           </a:xfrm>
           <a:prstGeom prst="rect">
@@ -10354,7 +10660,7 @@
       </p:sp>
       <p:sp>
         <p:nvSpPr>
-          <p:cNvPr id="5" name="TextBox 4"/>
+          <p:cNvPr id="6" name="TextBox 5"/>
           <p:cNvSpPr txBox="1"/>
           <p:nvPr/>
         </p:nvSpPr>
@@ -10401,7 +10707,7 @@
       </p:sp>
       <p:sp>
         <p:nvSpPr>
-          <p:cNvPr id="6" name="TextBox 5"/>
+          <p:cNvPr id="7" name="TextBox 6"/>
           <p:cNvSpPr txBox="1"/>
           <p:nvPr/>
         </p:nvSpPr>
@@ -10448,7 +10754,7 @@
       </p:sp>
       <p:sp>
         <p:nvSpPr>
-          <p:cNvPr id="7" name="Rectangle 6"/>
+          <p:cNvPr id="8" name="Rectangle 7"/>
           <p:cNvSpPr/>
           <p:nvPr/>
         </p:nvSpPr>
@@ -10492,7 +10798,7 @@
       </p:sp>
       <p:graphicFrame>
         <p:nvGraphicFramePr>
-          <p:cNvPr id="8" name="Table 7"/>
+          <p:cNvPr id="9" name="Table 8"/>
           <p:cNvGraphicFramePr>
             <a:graphicFrameLocks noGrp="1"/>
           </p:cNvGraphicFramePr>
@@ -11375,7 +11681,7 @@
       </p:graphicFrame>
       <p:sp>
         <p:nvSpPr>
-          <p:cNvPr id="9" name="Rounded Rectangle 8"/>
+          <p:cNvPr id="10" name="Rounded Rectangle 9"/>
           <p:cNvSpPr/>
           <p:nvPr/>
         </p:nvSpPr>
@@ -11442,7 +11748,7 @@
       </p:sp>
       <p:sp>
         <p:nvSpPr>
-          <p:cNvPr id="10" name="Rectangle 9"/>
+          <p:cNvPr id="11" name="Rectangle 10"/>
           <p:cNvSpPr/>
           <p:nvPr/>
         </p:nvSpPr>
@@ -11922,6 +12228,76 @@
           </a:p>
         </p:txBody>
       </p:sp>
+      <p:sp>
+        <p:nvSpPr>
+          <p:cNvPr id="11" name="logo-plate"/>
+          <p:cNvSpPr/>
+          <p:nvPr/>
+        </p:nvSpPr>
+        <p:spPr>
+          <a:xfrm>
+            <a:off x="9512190" y="539496"/>
+            <a:ext cx="1993704" cy="987552"/>
+          </a:xfrm>
+          <a:prstGeom prst="roundRect">
+            <a:avLst>
+              <a:gd name="adj" fmla="val 14000"/>
+            </a:avLst>
+          </a:prstGeom>
+          <a:solidFill>
+            <a:srgbClr val="FFFFFF"/>
+          </a:solidFill>
+          <a:ln>
+            <a:noFill/>
+          </a:ln>
+          <a:effectLst/>
+        </p:spPr>
+        <p:style>
+          <a:lnRef idx="1">
+            <a:schemeClr val="accent1"/>
+          </a:lnRef>
+          <a:fillRef idx="3">
+            <a:schemeClr val="accent1"/>
+          </a:fillRef>
+          <a:effectRef idx="2">
+            <a:schemeClr val="accent1"/>
+          </a:effectRef>
+          <a:fontRef idx="minor">
+            <a:schemeClr val="lt1"/>
+          </a:fontRef>
+        </p:style>
+        <p:txBody>
+          <a:bodyPr rtlCol="0" anchor="ctr" wrap="square"/>
+          <a:lstStyle/>
+          <a:p>
+            <a:pPr algn="ctr"/>
+          </a:p>
+        </p:txBody>
+      </p:sp>
+      <p:pic>
+        <p:nvPicPr>
+          <p:cNvPr id="12" name="college-logo" descr="logo-full.png"/>
+          <p:cNvPicPr>
+            <a:picLocks noChangeAspect="1"/>
+          </p:cNvPicPr>
+          <p:nvPr/>
+        </p:nvPicPr>
+        <p:blipFill>
+          <a:blip r:embed="rId2"/>
+          <a:stretch>
+            <a:fillRect/>
+          </a:stretch>
+        </p:blipFill>
+        <p:spPr>
+          <a:xfrm>
+            <a:off x="9631062" y="658368"/>
+            <a:ext cx="1755961" cy="749808"/>
+          </a:xfrm>
+          <a:prstGeom prst="rect">
+            <a:avLst/>
+          </a:prstGeom>
+        </p:spPr>
+      </p:pic>
     </p:spTree>
   </p:cSld>
   <p:clrMapOvr>
@@ -11984,9 +12360,33 @@
           </a:p>
         </p:txBody>
       </p:sp>
-      <p:sp>
-        <p:nvSpPr>
-          <p:cNvPr id="3" name="TextBox 2"/>
+      <p:pic>
+        <p:nvPicPr>
+          <p:cNvPr id="3" name="college-logo" descr="logo-mark.png"/>
+          <p:cNvPicPr>
+            <a:picLocks noChangeAspect="1"/>
+          </p:cNvPicPr>
+          <p:nvPr/>
+        </p:nvPicPr>
+        <p:blipFill>
+          <a:blip r:embed="rId2"/>
+          <a:stretch>
+            <a:fillRect/>
+          </a:stretch>
+        </p:blipFill>
+        <p:spPr>
+          <a:xfrm>
+            <a:off x="11203333" y="6199632"/>
+            <a:ext cx="275129" cy="310896"/>
+          </a:xfrm>
+          <a:prstGeom prst="rect">
+            <a:avLst/>
+          </a:prstGeom>
+        </p:spPr>
+      </p:pic>
+      <p:sp>
+        <p:nvSpPr>
+          <p:cNvPr id="4" name="TextBox 3"/>
           <p:cNvSpPr txBox="1"/>
           <p:nvPr/>
         </p:nvSpPr>
@@ -12055,13 +12455,13 @@
       </p:sp>
       <p:sp>
         <p:nvSpPr>
-          <p:cNvPr id="4" name="TextBox 3"/>
+          <p:cNvPr id="5" name="TextBox 4"/>
           <p:cNvSpPr txBox="1"/>
           <p:nvPr/>
         </p:nvSpPr>
         <p:spPr>
           <a:xfrm>
-            <a:off x="8826703" y="6272784"/>
+            <a:off x="8240677" y="6272784"/>
             <a:ext cx="2651760" cy="219456"/>
           </a:xfrm>
           <a:prstGeom prst="rect">
@@ -12124,7 +12524,7 @@
       </p:sp>
       <p:sp>
         <p:nvSpPr>
-          <p:cNvPr id="5" name="TextBox 4"/>
+          <p:cNvPr id="6" name="TextBox 5"/>
           <p:cNvSpPr txBox="1"/>
           <p:nvPr/>
         </p:nvSpPr>
@@ -12171,7 +12571,7 @@
       </p:sp>
       <p:sp>
         <p:nvSpPr>
-          <p:cNvPr id="6" name="TextBox 5"/>
+          <p:cNvPr id="7" name="TextBox 6"/>
           <p:cNvSpPr txBox="1"/>
           <p:nvPr/>
         </p:nvSpPr>
@@ -12218,7 +12618,7 @@
       </p:sp>
       <p:sp>
         <p:nvSpPr>
-          <p:cNvPr id="7" name="Rectangle 6"/>
+          <p:cNvPr id="8" name="Rectangle 7"/>
           <p:cNvSpPr/>
           <p:nvPr/>
         </p:nvSpPr>
@@ -12262,7 +12662,7 @@
       </p:sp>
       <p:sp>
         <p:nvSpPr>
-          <p:cNvPr id="8" name="Rounded Rectangle 7"/>
+          <p:cNvPr id="9" name="Rounded Rectangle 8"/>
           <p:cNvSpPr/>
           <p:nvPr/>
         </p:nvSpPr>
@@ -12316,7 +12716,7 @@
       </p:sp>
       <p:sp>
         <p:nvSpPr>
-          <p:cNvPr id="9" name="Rectangle 8"/>
+          <p:cNvPr id="10" name="Rectangle 9"/>
           <p:cNvSpPr/>
           <p:nvPr/>
         </p:nvSpPr>
@@ -12360,7 +12760,7 @@
       </p:sp>
       <p:sp>
         <p:nvSpPr>
-          <p:cNvPr id="10" name="TextBox 9"/>
+          <p:cNvPr id="11" name="TextBox 10"/>
           <p:cNvSpPr txBox="1"/>
           <p:nvPr/>
         </p:nvSpPr>
@@ -12407,7 +12807,7 @@
       </p:sp>
       <p:sp>
         <p:nvSpPr>
-          <p:cNvPr id="11" name="TextBox 10"/>
+          <p:cNvPr id="12" name="TextBox 11"/>
           <p:cNvSpPr txBox="1"/>
           <p:nvPr/>
         </p:nvSpPr>
@@ -12454,7 +12854,7 @@
       </p:sp>
       <p:sp>
         <p:nvSpPr>
-          <p:cNvPr id="12" name="Rounded Rectangle 11"/>
+          <p:cNvPr id="13" name="Rounded Rectangle 12"/>
           <p:cNvSpPr/>
           <p:nvPr/>
         </p:nvSpPr>
@@ -12508,7 +12908,7 @@
       </p:sp>
       <p:sp>
         <p:nvSpPr>
-          <p:cNvPr id="13" name="Rectangle 12"/>
+          <p:cNvPr id="14" name="Rectangle 13"/>
           <p:cNvSpPr/>
           <p:nvPr/>
         </p:nvSpPr>
@@ -12552,7 +12952,7 @@
       </p:sp>
       <p:sp>
         <p:nvSpPr>
-          <p:cNvPr id="14" name="TextBox 13"/>
+          <p:cNvPr id="15" name="TextBox 14"/>
           <p:cNvSpPr txBox="1"/>
           <p:nvPr/>
         </p:nvSpPr>
@@ -12599,7 +12999,7 @@
       </p:sp>
       <p:sp>
         <p:nvSpPr>
-          <p:cNvPr id="15" name="TextBox 14"/>
+          <p:cNvPr id="16" name="TextBox 15"/>
           <p:cNvSpPr txBox="1"/>
           <p:nvPr/>
         </p:nvSpPr>
@@ -12646,7 +13046,7 @@
       </p:sp>
       <p:sp>
         <p:nvSpPr>
-          <p:cNvPr id="16" name="Rounded Rectangle 15"/>
+          <p:cNvPr id="17" name="Rounded Rectangle 16"/>
           <p:cNvSpPr/>
           <p:nvPr/>
         </p:nvSpPr>
@@ -12700,7 +13100,7 @@
       </p:sp>
       <p:sp>
         <p:nvSpPr>
-          <p:cNvPr id="17" name="Rectangle 16"/>
+          <p:cNvPr id="18" name="Rectangle 17"/>
           <p:cNvSpPr/>
           <p:nvPr/>
         </p:nvSpPr>
@@ -12744,7 +13144,7 @@
       </p:sp>
       <p:sp>
         <p:nvSpPr>
-          <p:cNvPr id="18" name="TextBox 17"/>
+          <p:cNvPr id="19" name="TextBox 18"/>
           <p:cNvSpPr txBox="1"/>
           <p:nvPr/>
         </p:nvSpPr>
@@ -12791,7 +13191,7 @@
       </p:sp>
       <p:sp>
         <p:nvSpPr>
-          <p:cNvPr id="19" name="TextBox 18"/>
+          <p:cNvPr id="20" name="TextBox 19"/>
           <p:cNvSpPr txBox="1"/>
           <p:nvPr/>
         </p:nvSpPr>
@@ -12838,7 +13238,7 @@
       </p:sp>
       <p:sp>
         <p:nvSpPr>
-          <p:cNvPr id="20" name="Rounded Rectangle 19"/>
+          <p:cNvPr id="21" name="Rounded Rectangle 20"/>
           <p:cNvSpPr/>
           <p:nvPr/>
         </p:nvSpPr>
@@ -12892,7 +13292,7 @@
       </p:sp>
       <p:sp>
         <p:nvSpPr>
-          <p:cNvPr id="21" name="Rectangle 20"/>
+          <p:cNvPr id="22" name="Rectangle 21"/>
           <p:cNvSpPr/>
           <p:nvPr/>
         </p:nvSpPr>
@@ -12936,7 +13336,7 @@
       </p:sp>
       <p:sp>
         <p:nvSpPr>
-          <p:cNvPr id="22" name="TextBox 21"/>
+          <p:cNvPr id="23" name="TextBox 22"/>
           <p:cNvSpPr txBox="1"/>
           <p:nvPr/>
         </p:nvSpPr>
@@ -12983,7 +13383,7 @@
       </p:sp>
       <p:sp>
         <p:nvSpPr>
-          <p:cNvPr id="23" name="TextBox 22"/>
+          <p:cNvPr id="24" name="TextBox 23"/>
           <p:cNvSpPr txBox="1"/>
           <p:nvPr/>
         </p:nvSpPr>
@@ -13030,7 +13430,7 @@
       </p:sp>
       <p:sp>
         <p:nvSpPr>
-          <p:cNvPr id="24" name="Rounded Rectangle 23"/>
+          <p:cNvPr id="25" name="Rounded Rectangle 24"/>
           <p:cNvSpPr/>
           <p:nvPr/>
         </p:nvSpPr>
@@ -13084,7 +13484,7 @@
       </p:sp>
       <p:sp>
         <p:nvSpPr>
-          <p:cNvPr id="25" name="Rectangle 24"/>
+          <p:cNvPr id="26" name="Rectangle 25"/>
           <p:cNvSpPr/>
           <p:nvPr/>
         </p:nvSpPr>
@@ -13128,7 +13528,7 @@
       </p:sp>
       <p:sp>
         <p:nvSpPr>
-          <p:cNvPr id="26" name="TextBox 25"/>
+          <p:cNvPr id="27" name="TextBox 26"/>
           <p:cNvSpPr txBox="1"/>
           <p:nvPr/>
         </p:nvSpPr>
@@ -13175,7 +13575,7 @@
       </p:sp>
       <p:sp>
         <p:nvSpPr>
-          <p:cNvPr id="27" name="TextBox 26"/>
+          <p:cNvPr id="28" name="TextBox 27"/>
           <p:cNvSpPr txBox="1"/>
           <p:nvPr/>
         </p:nvSpPr>
@@ -13222,7 +13622,7 @@
       </p:sp>
       <p:sp>
         <p:nvSpPr>
-          <p:cNvPr id="28" name="Rounded Rectangle 27"/>
+          <p:cNvPr id="29" name="Rounded Rectangle 28"/>
           <p:cNvSpPr/>
           <p:nvPr/>
         </p:nvSpPr>
@@ -13276,7 +13676,7 @@
       </p:sp>
       <p:sp>
         <p:nvSpPr>
-          <p:cNvPr id="29" name="Rectangle 28"/>
+          <p:cNvPr id="30" name="Rectangle 29"/>
           <p:cNvSpPr/>
           <p:nvPr/>
         </p:nvSpPr>
@@ -13320,7 +13720,7 @@
       </p:sp>
       <p:sp>
         <p:nvSpPr>
-          <p:cNvPr id="30" name="TextBox 29"/>
+          <p:cNvPr id="31" name="TextBox 30"/>
           <p:cNvSpPr txBox="1"/>
           <p:nvPr/>
         </p:nvSpPr>
@@ -13367,7 +13767,7 @@
       </p:sp>
       <p:sp>
         <p:nvSpPr>
-          <p:cNvPr id="31" name="TextBox 30"/>
+          <p:cNvPr id="32" name="TextBox 31"/>
           <p:cNvSpPr txBox="1"/>
           <p:nvPr/>
         </p:nvSpPr>
@@ -13474,9 +13874,33 @@
           </a:p>
         </p:txBody>
       </p:sp>
-      <p:sp>
-        <p:nvSpPr>
-          <p:cNvPr id="3" name="TextBox 2"/>
+      <p:pic>
+        <p:nvPicPr>
+          <p:cNvPr id="3" name="college-logo" descr="logo-mark.png"/>
+          <p:cNvPicPr>
+            <a:picLocks noChangeAspect="1"/>
+          </p:cNvPicPr>
+          <p:nvPr/>
+        </p:nvPicPr>
+        <p:blipFill>
+          <a:blip r:embed="rId2"/>
+          <a:stretch>
+            <a:fillRect/>
+          </a:stretch>
+        </p:blipFill>
+        <p:spPr>
+          <a:xfrm>
+            <a:off x="11203333" y="6199632"/>
+            <a:ext cx="275129" cy="310896"/>
+          </a:xfrm>
+          <a:prstGeom prst="rect">
+            <a:avLst/>
+          </a:prstGeom>
+        </p:spPr>
+      </p:pic>
+      <p:sp>
+        <p:nvSpPr>
+          <p:cNvPr id="4" name="TextBox 3"/>
           <p:cNvSpPr txBox="1"/>
           <p:nvPr/>
         </p:nvSpPr>
@@ -13545,13 +13969,13 @@
       </p:sp>
       <p:sp>
         <p:nvSpPr>
-          <p:cNvPr id="4" name="TextBox 3"/>
+          <p:cNvPr id="5" name="TextBox 4"/>
           <p:cNvSpPr txBox="1"/>
           <p:nvPr/>
         </p:nvSpPr>
         <p:spPr>
           <a:xfrm>
-            <a:off x="8826703" y="6272784"/>
+            <a:off x="8240677" y="6272784"/>
             <a:ext cx="2651760" cy="219456"/>
           </a:xfrm>
           <a:prstGeom prst="rect">
@@ -13614,7 +14038,7 @@
       </p:sp>
       <p:sp>
         <p:nvSpPr>
-          <p:cNvPr id="5" name="TextBox 4"/>
+          <p:cNvPr id="6" name="TextBox 5"/>
           <p:cNvSpPr txBox="1"/>
           <p:nvPr/>
         </p:nvSpPr>
@@ -13661,7 +14085,7 @@
       </p:sp>
       <p:sp>
         <p:nvSpPr>
-          <p:cNvPr id="6" name="TextBox 5"/>
+          <p:cNvPr id="7" name="TextBox 6"/>
           <p:cNvSpPr txBox="1"/>
           <p:nvPr/>
         </p:nvSpPr>
@@ -13708,7 +14132,7 @@
       </p:sp>
       <p:sp>
         <p:nvSpPr>
-          <p:cNvPr id="7" name="Rectangle 6"/>
+          <p:cNvPr id="8" name="Rectangle 7"/>
           <p:cNvSpPr/>
           <p:nvPr/>
         </p:nvSpPr>
@@ -13752,7 +14176,7 @@
       </p:sp>
       <p:sp>
         <p:nvSpPr>
-          <p:cNvPr id="8" name="TextBox 7"/>
+          <p:cNvPr id="9" name="TextBox 8"/>
           <p:cNvSpPr txBox="1"/>
           <p:nvPr/>
         </p:nvSpPr>
@@ -13799,7 +14223,7 @@
       </p:sp>
       <p:sp>
         <p:nvSpPr>
-          <p:cNvPr id="9" name="Rounded Rectangle 8"/>
+          <p:cNvPr id="10" name="Rounded Rectangle 9"/>
           <p:cNvSpPr/>
           <p:nvPr/>
         </p:nvSpPr>
@@ -13853,7 +14277,7 @@
       </p:sp>
       <p:sp>
         <p:nvSpPr>
-          <p:cNvPr id="10" name="Rectangle 9"/>
+          <p:cNvPr id="11" name="Rectangle 10"/>
           <p:cNvSpPr/>
           <p:nvPr/>
         </p:nvSpPr>
@@ -13897,7 +14321,7 @@
       </p:sp>
       <p:sp>
         <p:nvSpPr>
-          <p:cNvPr id="11" name="TextBox 10"/>
+          <p:cNvPr id="12" name="TextBox 11"/>
           <p:cNvSpPr txBox="1"/>
           <p:nvPr/>
         </p:nvSpPr>
@@ -13944,7 +14368,7 @@
       </p:sp>
       <p:sp>
         <p:nvSpPr>
-          <p:cNvPr id="12" name="Rounded Rectangle 11"/>
+          <p:cNvPr id="13" name="Rounded Rectangle 12"/>
           <p:cNvSpPr/>
           <p:nvPr/>
         </p:nvSpPr>
@@ -13990,7 +14414,7 @@
       </p:sp>
       <p:sp>
         <p:nvSpPr>
-          <p:cNvPr id="13" name="TextBox 12"/>
+          <p:cNvPr id="14" name="TextBox 13"/>
           <p:cNvSpPr txBox="1"/>
           <p:nvPr/>
         </p:nvSpPr>
@@ -14037,7 +14461,7 @@
       </p:sp>
       <p:sp>
         <p:nvSpPr>
-          <p:cNvPr id="14" name="Rounded Rectangle 13"/>
+          <p:cNvPr id="15" name="Rounded Rectangle 14"/>
           <p:cNvSpPr/>
           <p:nvPr/>
         </p:nvSpPr>
@@ -14083,7 +14507,7 @@
       </p:sp>
       <p:sp>
         <p:nvSpPr>
-          <p:cNvPr id="15" name="TextBox 14"/>
+          <p:cNvPr id="16" name="TextBox 15"/>
           <p:cNvSpPr txBox="1"/>
           <p:nvPr/>
         </p:nvSpPr>
@@ -14130,7 +14554,7 @@
       </p:sp>
       <p:sp>
         <p:nvSpPr>
-          <p:cNvPr id="16" name="Rounded Rectangle 15"/>
+          <p:cNvPr id="17" name="Rounded Rectangle 16"/>
           <p:cNvSpPr/>
           <p:nvPr/>
         </p:nvSpPr>
@@ -14176,7 +14600,7 @@
       </p:sp>
       <p:sp>
         <p:nvSpPr>
-          <p:cNvPr id="17" name="TextBox 16"/>
+          <p:cNvPr id="18" name="TextBox 17"/>
           <p:cNvSpPr txBox="1"/>
           <p:nvPr/>
         </p:nvSpPr>
@@ -14223,7 +14647,7 @@
       </p:sp>
       <p:sp>
         <p:nvSpPr>
-          <p:cNvPr id="18" name="Rounded Rectangle 17"/>
+          <p:cNvPr id="19" name="Rounded Rectangle 18"/>
           <p:cNvSpPr/>
           <p:nvPr/>
         </p:nvSpPr>
@@ -14277,7 +14701,7 @@
       </p:sp>
       <p:sp>
         <p:nvSpPr>
-          <p:cNvPr id="19" name="Rectangle 18"/>
+          <p:cNvPr id="20" name="Rectangle 19"/>
           <p:cNvSpPr/>
           <p:nvPr/>
         </p:nvSpPr>
@@ -14321,7 +14745,7 @@
       </p:sp>
       <p:sp>
         <p:nvSpPr>
-          <p:cNvPr id="20" name="TextBox 19"/>
+          <p:cNvPr id="21" name="TextBox 20"/>
           <p:cNvSpPr txBox="1"/>
           <p:nvPr/>
         </p:nvSpPr>
@@ -14368,7 +14792,7 @@
       </p:sp>
       <p:sp>
         <p:nvSpPr>
-          <p:cNvPr id="21" name="Rounded Rectangle 20"/>
+          <p:cNvPr id="22" name="Rounded Rectangle 21"/>
           <p:cNvSpPr/>
           <p:nvPr/>
         </p:nvSpPr>
@@ -14414,7 +14838,7 @@
       </p:sp>
       <p:sp>
         <p:nvSpPr>
-          <p:cNvPr id="22" name="TextBox 21"/>
+          <p:cNvPr id="23" name="TextBox 22"/>
           <p:cNvSpPr txBox="1"/>
           <p:nvPr/>
         </p:nvSpPr>
@@ -14461,7 +14885,7 @@
       </p:sp>
       <p:sp>
         <p:nvSpPr>
-          <p:cNvPr id="23" name="Rounded Rectangle 22"/>
+          <p:cNvPr id="24" name="Rounded Rectangle 23"/>
           <p:cNvSpPr/>
           <p:nvPr/>
         </p:nvSpPr>
@@ -14507,7 +14931,7 @@
       </p:sp>
       <p:sp>
         <p:nvSpPr>
-          <p:cNvPr id="24" name="TextBox 23"/>
+          <p:cNvPr id="25" name="TextBox 24"/>
           <p:cNvSpPr txBox="1"/>
           <p:nvPr/>
         </p:nvSpPr>
@@ -14554,7 +14978,7 @@
       </p:sp>
       <p:sp>
         <p:nvSpPr>
-          <p:cNvPr id="25" name="Rounded Rectangle 24"/>
+          <p:cNvPr id="26" name="Rounded Rectangle 25"/>
           <p:cNvSpPr/>
           <p:nvPr/>
         </p:nvSpPr>
@@ -14600,7 +15024,7 @@
       </p:sp>
       <p:sp>
         <p:nvSpPr>
-          <p:cNvPr id="26" name="TextBox 25"/>
+          <p:cNvPr id="27" name="TextBox 26"/>
           <p:cNvSpPr txBox="1"/>
           <p:nvPr/>
         </p:nvSpPr>
@@ -14647,7 +15071,7 @@
       </p:sp>
       <p:sp>
         <p:nvSpPr>
-          <p:cNvPr id="27" name="Rounded Rectangle 26"/>
+          <p:cNvPr id="28" name="Rounded Rectangle 27"/>
           <p:cNvSpPr/>
           <p:nvPr/>
         </p:nvSpPr>
@@ -14701,7 +15125,7 @@
       </p:sp>
       <p:sp>
         <p:nvSpPr>
-          <p:cNvPr id="28" name="Rectangle 27"/>
+          <p:cNvPr id="29" name="Rectangle 28"/>
           <p:cNvSpPr/>
           <p:nvPr/>
         </p:nvSpPr>
@@ -14745,7 +15169,7 @@
       </p:sp>
       <p:sp>
         <p:nvSpPr>
-          <p:cNvPr id="29" name="TextBox 28"/>
+          <p:cNvPr id="30" name="TextBox 29"/>
           <p:cNvSpPr txBox="1"/>
           <p:nvPr/>
         </p:nvSpPr>
@@ -14792,7 +15216,7 @@
       </p:sp>
       <p:sp>
         <p:nvSpPr>
-          <p:cNvPr id="30" name="Rounded Rectangle 29"/>
+          <p:cNvPr id="31" name="Rounded Rectangle 30"/>
           <p:cNvSpPr/>
           <p:nvPr/>
         </p:nvSpPr>
@@ -14838,7 +15262,7 @@
       </p:sp>
       <p:sp>
         <p:nvSpPr>
-          <p:cNvPr id="31" name="TextBox 30"/>
+          <p:cNvPr id="32" name="TextBox 31"/>
           <p:cNvSpPr txBox="1"/>
           <p:nvPr/>
         </p:nvSpPr>
@@ -14885,7 +15309,7 @@
       </p:sp>
       <p:sp>
         <p:nvSpPr>
-          <p:cNvPr id="32" name="Rounded Rectangle 31"/>
+          <p:cNvPr id="33" name="Rounded Rectangle 32"/>
           <p:cNvSpPr/>
           <p:nvPr/>
         </p:nvSpPr>
@@ -14931,7 +15355,7 @@
       </p:sp>
       <p:sp>
         <p:nvSpPr>
-          <p:cNvPr id="33" name="TextBox 32"/>
+          <p:cNvPr id="34" name="TextBox 33"/>
           <p:cNvSpPr txBox="1"/>
           <p:nvPr/>
         </p:nvSpPr>
@@ -14978,7 +15402,7 @@
       </p:sp>
       <p:sp>
         <p:nvSpPr>
-          <p:cNvPr id="34" name="Rounded Rectangle 33"/>
+          <p:cNvPr id="35" name="Rounded Rectangle 34"/>
           <p:cNvSpPr/>
           <p:nvPr/>
         </p:nvSpPr>
@@ -15024,7 +15448,7 @@
       </p:sp>
       <p:sp>
         <p:nvSpPr>
-          <p:cNvPr id="35" name="TextBox 34"/>
+          <p:cNvPr id="36" name="TextBox 35"/>
           <p:cNvSpPr txBox="1"/>
           <p:nvPr/>
         </p:nvSpPr>
@@ -15071,7 +15495,7 @@
       </p:sp>
       <p:sp>
         <p:nvSpPr>
-          <p:cNvPr id="36" name="Rounded Rectangle 35"/>
+          <p:cNvPr id="37" name="Rounded Rectangle 36"/>
           <p:cNvSpPr/>
           <p:nvPr/>
         </p:nvSpPr>
@@ -15125,7 +15549,7 @@
       </p:sp>
       <p:sp>
         <p:nvSpPr>
-          <p:cNvPr id="37" name="Rectangle 36"/>
+          <p:cNvPr id="38" name="Rectangle 37"/>
           <p:cNvSpPr/>
           <p:nvPr/>
         </p:nvSpPr>
@@ -15169,7 +15593,7 @@
       </p:sp>
       <p:sp>
         <p:nvSpPr>
-          <p:cNvPr id="38" name="TextBox 37"/>
+          <p:cNvPr id="39" name="TextBox 38"/>
           <p:cNvSpPr txBox="1"/>
           <p:nvPr/>
         </p:nvSpPr>
@@ -15216,7 +15640,7 @@
       </p:sp>
       <p:sp>
         <p:nvSpPr>
-          <p:cNvPr id="39" name="Rounded Rectangle 38"/>
+          <p:cNvPr id="40" name="Rounded Rectangle 39"/>
           <p:cNvSpPr/>
           <p:nvPr/>
         </p:nvSpPr>
@@ -15262,7 +15686,7 @@
       </p:sp>
       <p:sp>
         <p:nvSpPr>
-          <p:cNvPr id="40" name="TextBox 39"/>
+          <p:cNvPr id="41" name="TextBox 40"/>
           <p:cNvSpPr txBox="1"/>
           <p:nvPr/>
         </p:nvSpPr>
@@ -15309,7 +15733,7 @@
       </p:sp>
       <p:sp>
         <p:nvSpPr>
-          <p:cNvPr id="41" name="Rounded Rectangle 40"/>
+          <p:cNvPr id="42" name="Rounded Rectangle 41"/>
           <p:cNvSpPr/>
           <p:nvPr/>
         </p:nvSpPr>
@@ -15355,7 +15779,7 @@
       </p:sp>
       <p:sp>
         <p:nvSpPr>
-          <p:cNvPr id="42" name="TextBox 41"/>
+          <p:cNvPr id="43" name="TextBox 42"/>
           <p:cNvSpPr txBox="1"/>
           <p:nvPr/>
         </p:nvSpPr>
@@ -15402,7 +15826,7 @@
       </p:sp>
       <p:sp>
         <p:nvSpPr>
-          <p:cNvPr id="43" name="Rounded Rectangle 42"/>
+          <p:cNvPr id="44" name="Rounded Rectangle 43"/>
           <p:cNvSpPr/>
           <p:nvPr/>
         </p:nvSpPr>
@@ -15448,7 +15872,7 @@
       </p:sp>
       <p:sp>
         <p:nvSpPr>
-          <p:cNvPr id="44" name="TextBox 43"/>
+          <p:cNvPr id="45" name="TextBox 44"/>
           <p:cNvSpPr txBox="1"/>
           <p:nvPr/>
         </p:nvSpPr>
@@ -15555,9 +15979,33 @@
           </a:p>
         </p:txBody>
       </p:sp>
-      <p:sp>
-        <p:nvSpPr>
-          <p:cNvPr id="3" name="TextBox 2"/>
+      <p:pic>
+        <p:nvPicPr>
+          <p:cNvPr id="3" name="college-logo" descr="logo-mark.png"/>
+          <p:cNvPicPr>
+            <a:picLocks noChangeAspect="1"/>
+          </p:cNvPicPr>
+          <p:nvPr/>
+        </p:nvPicPr>
+        <p:blipFill>
+          <a:blip r:embed="rId2"/>
+          <a:stretch>
+            <a:fillRect/>
+          </a:stretch>
+        </p:blipFill>
+        <p:spPr>
+          <a:xfrm>
+            <a:off x="11203333" y="6199632"/>
+            <a:ext cx="275129" cy="310896"/>
+          </a:xfrm>
+          <a:prstGeom prst="rect">
+            <a:avLst/>
+          </a:prstGeom>
+        </p:spPr>
+      </p:pic>
+      <p:sp>
+        <p:nvSpPr>
+          <p:cNvPr id="4" name="TextBox 3"/>
           <p:cNvSpPr txBox="1"/>
           <p:nvPr/>
         </p:nvSpPr>
@@ -15626,13 +16074,13 @@
       </p:sp>
       <p:sp>
         <p:nvSpPr>
-          <p:cNvPr id="4" name="TextBox 3"/>
+          <p:cNvPr id="5" name="TextBox 4"/>
           <p:cNvSpPr txBox="1"/>
           <p:nvPr/>
         </p:nvSpPr>
         <p:spPr>
           <a:xfrm>
-            <a:off x="8826703" y="6272784"/>
+            <a:off x="8240677" y="6272784"/>
             <a:ext cx="2651760" cy="219456"/>
           </a:xfrm>
           <a:prstGeom prst="rect">
@@ -15695,7 +16143,7 @@
       </p:sp>
       <p:sp>
         <p:nvSpPr>
-          <p:cNvPr id="5" name="TextBox 4"/>
+          <p:cNvPr id="6" name="TextBox 5"/>
           <p:cNvSpPr txBox="1"/>
           <p:nvPr/>
         </p:nvSpPr>
@@ -15742,7 +16190,7 @@
       </p:sp>
       <p:sp>
         <p:nvSpPr>
-          <p:cNvPr id="6" name="TextBox 5"/>
+          <p:cNvPr id="7" name="TextBox 6"/>
           <p:cNvSpPr txBox="1"/>
           <p:nvPr/>
         </p:nvSpPr>
@@ -15789,7 +16237,7 @@
       </p:sp>
       <p:sp>
         <p:nvSpPr>
-          <p:cNvPr id="7" name="Rectangle 6"/>
+          <p:cNvPr id="8" name="Rectangle 7"/>
           <p:cNvSpPr/>
           <p:nvPr/>
         </p:nvSpPr>
@@ -15833,7 +16281,7 @@
       </p:sp>
       <p:sp>
         <p:nvSpPr>
-          <p:cNvPr id="8" name="TextBox 7"/>
+          <p:cNvPr id="9" name="TextBox 8"/>
           <p:cNvSpPr txBox="1"/>
           <p:nvPr/>
         </p:nvSpPr>
@@ -15880,7 +16328,7 @@
       </p:sp>
       <p:sp>
         <p:nvSpPr>
-          <p:cNvPr id="9" name="Rounded Rectangle 8"/>
+          <p:cNvPr id="10" name="Rounded Rectangle 9"/>
           <p:cNvSpPr/>
           <p:nvPr/>
         </p:nvSpPr>
@@ -15926,7 +16374,7 @@
       </p:sp>
       <p:sp>
         <p:nvSpPr>
-          <p:cNvPr id="10" name="TextBox 9"/>
+          <p:cNvPr id="11" name="TextBox 10"/>
           <p:cNvSpPr txBox="1"/>
           <p:nvPr/>
         </p:nvSpPr>
@@ -15997,7 +16445,7 @@
       </p:sp>
       <p:sp>
         <p:nvSpPr>
-          <p:cNvPr id="11" name="Rounded Rectangle 10"/>
+          <p:cNvPr id="12" name="Rounded Rectangle 11"/>
           <p:cNvSpPr/>
           <p:nvPr/>
         </p:nvSpPr>
@@ -16043,7 +16491,7 @@
       </p:sp>
       <p:sp>
         <p:nvSpPr>
-          <p:cNvPr id="12" name="TextBox 11"/>
+          <p:cNvPr id="13" name="TextBox 12"/>
           <p:cNvSpPr txBox="1"/>
           <p:nvPr/>
         </p:nvSpPr>
@@ -16114,7 +16562,7 @@
       </p:sp>
       <p:sp>
         <p:nvSpPr>
-          <p:cNvPr id="13" name="Rounded Rectangle 12"/>
+          <p:cNvPr id="14" name="Rounded Rectangle 13"/>
           <p:cNvSpPr/>
           <p:nvPr/>
         </p:nvSpPr>
@@ -16160,7 +16608,7 @@
       </p:sp>
       <p:sp>
         <p:nvSpPr>
-          <p:cNvPr id="14" name="TextBox 13"/>
+          <p:cNvPr id="15" name="TextBox 14"/>
           <p:cNvSpPr txBox="1"/>
           <p:nvPr/>
         </p:nvSpPr>
@@ -16231,7 +16679,7 @@
       </p:sp>
       <p:sp>
         <p:nvSpPr>
-          <p:cNvPr id="15" name="Rounded Rectangle 14"/>
+          <p:cNvPr id="16" name="Rounded Rectangle 15"/>
           <p:cNvSpPr/>
           <p:nvPr/>
         </p:nvSpPr>
@@ -16277,7 +16725,7 @@
       </p:sp>
       <p:sp>
         <p:nvSpPr>
-          <p:cNvPr id="16" name="TextBox 15"/>
+          <p:cNvPr id="17" name="TextBox 16"/>
           <p:cNvSpPr txBox="1"/>
           <p:nvPr/>
         </p:nvSpPr>
@@ -16348,7 +16796,7 @@
       </p:sp>
       <p:sp>
         <p:nvSpPr>
-          <p:cNvPr id="17" name="Rounded Rectangle 16"/>
+          <p:cNvPr id="18" name="Rounded Rectangle 17"/>
           <p:cNvSpPr/>
           <p:nvPr/>
         </p:nvSpPr>
@@ -16394,7 +16842,7 @@
       </p:sp>
       <p:sp>
         <p:nvSpPr>
-          <p:cNvPr id="18" name="TextBox 17"/>
+          <p:cNvPr id="19" name="TextBox 18"/>
           <p:cNvSpPr txBox="1"/>
           <p:nvPr/>
         </p:nvSpPr>
@@ -16465,7 +16913,7 @@
       </p:sp>
       <p:sp>
         <p:nvSpPr>
-          <p:cNvPr id="19" name="Rounded Rectangle 18"/>
+          <p:cNvPr id="20" name="Rounded Rectangle 19"/>
           <p:cNvSpPr/>
           <p:nvPr/>
         </p:nvSpPr>
@@ -16511,7 +16959,7 @@
       </p:sp>
       <p:sp>
         <p:nvSpPr>
-          <p:cNvPr id="20" name="TextBox 19"/>
+          <p:cNvPr id="21" name="TextBox 20"/>
           <p:cNvSpPr txBox="1"/>
           <p:nvPr/>
         </p:nvSpPr>
@@ -16642,9 +17090,33 @@
           </a:p>
         </p:txBody>
       </p:sp>
-      <p:sp>
-        <p:nvSpPr>
-          <p:cNvPr id="3" name="TextBox 2"/>
+      <p:pic>
+        <p:nvPicPr>
+          <p:cNvPr id="3" name="college-logo" descr="logo-mark.png"/>
+          <p:cNvPicPr>
+            <a:picLocks noChangeAspect="1"/>
+          </p:cNvPicPr>
+          <p:nvPr/>
+        </p:nvPicPr>
+        <p:blipFill>
+          <a:blip r:embed="rId2"/>
+          <a:stretch>
+            <a:fillRect/>
+          </a:stretch>
+        </p:blipFill>
+        <p:spPr>
+          <a:xfrm>
+            <a:off x="11203333" y="6199632"/>
+            <a:ext cx="275129" cy="310896"/>
+          </a:xfrm>
+          <a:prstGeom prst="rect">
+            <a:avLst/>
+          </a:prstGeom>
+        </p:spPr>
+      </p:pic>
+      <p:sp>
+        <p:nvSpPr>
+          <p:cNvPr id="4" name="TextBox 3"/>
           <p:cNvSpPr txBox="1"/>
           <p:nvPr/>
         </p:nvSpPr>
@@ -16713,13 +17185,13 @@
       </p:sp>
       <p:sp>
         <p:nvSpPr>
-          <p:cNvPr id="4" name="TextBox 3"/>
+          <p:cNvPr id="5" name="TextBox 4"/>
           <p:cNvSpPr txBox="1"/>
           <p:nvPr/>
         </p:nvSpPr>
         <p:spPr>
           <a:xfrm>
-            <a:off x="8826703" y="6272784"/>
+            <a:off x="8240677" y="6272784"/>
             <a:ext cx="2651760" cy="219456"/>
           </a:xfrm>
           <a:prstGeom prst="rect">
@@ -16782,7 +17254,7 @@
       </p:sp>
       <p:sp>
         <p:nvSpPr>
-          <p:cNvPr id="5" name="TextBox 4"/>
+          <p:cNvPr id="6" name="TextBox 5"/>
           <p:cNvSpPr txBox="1"/>
           <p:nvPr/>
         </p:nvSpPr>
@@ -16829,7 +17301,7 @@
       </p:sp>
       <p:sp>
         <p:nvSpPr>
-          <p:cNvPr id="6" name="TextBox 5"/>
+          <p:cNvPr id="7" name="TextBox 6"/>
           <p:cNvSpPr txBox="1"/>
           <p:nvPr/>
         </p:nvSpPr>
@@ -16876,7 +17348,7 @@
       </p:sp>
       <p:sp>
         <p:nvSpPr>
-          <p:cNvPr id="7" name="Rectangle 6"/>
+          <p:cNvPr id="8" name="Rectangle 7"/>
           <p:cNvSpPr/>
           <p:nvPr/>
         </p:nvSpPr>
@@ -16920,7 +17392,7 @@
       </p:sp>
       <p:sp>
         <p:nvSpPr>
-          <p:cNvPr id="8" name="TextBox 7"/>
+          <p:cNvPr id="9" name="TextBox 8"/>
           <p:cNvSpPr txBox="1"/>
           <p:nvPr/>
         </p:nvSpPr>
@@ -16967,7 +17439,7 @@
       </p:sp>
       <p:sp>
         <p:nvSpPr>
-          <p:cNvPr id="9" name="Rectangle 8"/>
+          <p:cNvPr id="10" name="Rectangle 9"/>
           <p:cNvSpPr/>
           <p:nvPr/>
         </p:nvSpPr>
@@ -17011,7 +17483,7 @@
       </p:sp>
       <p:sp>
         <p:nvSpPr>
-          <p:cNvPr id="10" name="TextBox 9"/>
+          <p:cNvPr id="11" name="TextBox 10"/>
           <p:cNvSpPr txBox="1"/>
           <p:nvPr/>
         </p:nvSpPr>
@@ -17058,7 +17530,7 @@
       </p:sp>
       <p:sp>
         <p:nvSpPr>
-          <p:cNvPr id="11" name="TextBox 10"/>
+          <p:cNvPr id="12" name="TextBox 11"/>
           <p:cNvSpPr txBox="1"/>
           <p:nvPr/>
         </p:nvSpPr>
@@ -17129,7 +17601,7 @@
       </p:sp>
       <p:sp>
         <p:nvSpPr>
-          <p:cNvPr id="12" name="Rectangle 11"/>
+          <p:cNvPr id="13" name="Rectangle 12"/>
           <p:cNvSpPr/>
           <p:nvPr/>
         </p:nvSpPr>
@@ -17173,7 +17645,7 @@
       </p:sp>
       <p:sp>
         <p:nvSpPr>
-          <p:cNvPr id="13" name="TextBox 12"/>
+          <p:cNvPr id="14" name="TextBox 13"/>
           <p:cNvSpPr txBox="1"/>
           <p:nvPr/>
         </p:nvSpPr>
@@ -17220,7 +17692,7 @@
       </p:sp>
       <p:sp>
         <p:nvSpPr>
-          <p:cNvPr id="14" name="TextBox 13"/>
+          <p:cNvPr id="15" name="TextBox 14"/>
           <p:cNvSpPr txBox="1"/>
           <p:nvPr/>
         </p:nvSpPr>
@@ -17291,7 +17763,7 @@
       </p:sp>
       <p:sp>
         <p:nvSpPr>
-          <p:cNvPr id="15" name="Rectangle 14"/>
+          <p:cNvPr id="16" name="Rectangle 15"/>
           <p:cNvSpPr/>
           <p:nvPr/>
         </p:nvSpPr>
@@ -17335,7 +17807,7 @@
       </p:sp>
       <p:sp>
         <p:nvSpPr>
-          <p:cNvPr id="16" name="TextBox 15"/>
+          <p:cNvPr id="17" name="TextBox 16"/>
           <p:cNvSpPr txBox="1"/>
           <p:nvPr/>
         </p:nvSpPr>
@@ -17382,7 +17854,7 @@
       </p:sp>
       <p:sp>
         <p:nvSpPr>
-          <p:cNvPr id="17" name="TextBox 16"/>
+          <p:cNvPr id="18" name="TextBox 17"/>
           <p:cNvSpPr txBox="1"/>
           <p:nvPr/>
         </p:nvSpPr>
@@ -17453,7 +17925,7 @@
       </p:sp>
       <p:sp>
         <p:nvSpPr>
-          <p:cNvPr id="18" name="Rectangle 17"/>
+          <p:cNvPr id="19" name="Rectangle 18"/>
           <p:cNvSpPr/>
           <p:nvPr/>
         </p:nvSpPr>
@@ -17497,7 +17969,7 @@
       </p:sp>
       <p:sp>
         <p:nvSpPr>
-          <p:cNvPr id="19" name="TextBox 18"/>
+          <p:cNvPr id="20" name="TextBox 19"/>
           <p:cNvSpPr txBox="1"/>
           <p:nvPr/>
         </p:nvSpPr>
@@ -17544,7 +18016,7 @@
       </p:sp>
       <p:sp>
         <p:nvSpPr>
-          <p:cNvPr id="20" name="TextBox 19"/>
+          <p:cNvPr id="21" name="TextBox 20"/>
           <p:cNvSpPr txBox="1"/>
           <p:nvPr/>
         </p:nvSpPr>
@@ -17615,7 +18087,7 @@
       </p:sp>
       <p:sp>
         <p:nvSpPr>
-          <p:cNvPr id="21" name="Rectangle 20"/>
+          <p:cNvPr id="22" name="Rectangle 21"/>
           <p:cNvSpPr/>
           <p:nvPr/>
         </p:nvSpPr>
@@ -17659,7 +18131,7 @@
       </p:sp>
       <p:sp>
         <p:nvSpPr>
-          <p:cNvPr id="22" name="TextBox 21"/>
+          <p:cNvPr id="23" name="TextBox 22"/>
           <p:cNvSpPr txBox="1"/>
           <p:nvPr/>
         </p:nvSpPr>
@@ -17706,7 +18178,7 @@
       </p:sp>
       <p:sp>
         <p:nvSpPr>
-          <p:cNvPr id="23" name="TextBox 22"/>
+          <p:cNvPr id="24" name="TextBox 23"/>
           <p:cNvSpPr txBox="1"/>
           <p:nvPr/>
         </p:nvSpPr>
@@ -17777,7 +18249,7 @@
       </p:sp>
       <p:sp>
         <p:nvSpPr>
-          <p:cNvPr id="24" name="Rectangle 23"/>
+          <p:cNvPr id="25" name="Rectangle 24"/>
           <p:cNvSpPr/>
           <p:nvPr/>
         </p:nvSpPr>
@@ -17821,7 +18293,7 @@
       </p:sp>
       <p:sp>
         <p:nvSpPr>
-          <p:cNvPr id="25" name="TextBox 24"/>
+          <p:cNvPr id="26" name="TextBox 25"/>
           <p:cNvSpPr txBox="1"/>
           <p:nvPr/>
         </p:nvSpPr>
@@ -17868,7 +18340,7 @@
       </p:sp>
       <p:sp>
         <p:nvSpPr>
-          <p:cNvPr id="26" name="TextBox 25"/>
+          <p:cNvPr id="27" name="TextBox 26"/>
           <p:cNvSpPr txBox="1"/>
           <p:nvPr/>
         </p:nvSpPr>
@@ -17939,7 +18411,7 @@
       </p:sp>
       <p:sp>
         <p:nvSpPr>
-          <p:cNvPr id="27" name="Rectangle 26"/>
+          <p:cNvPr id="28" name="Rectangle 27"/>
           <p:cNvSpPr/>
           <p:nvPr/>
         </p:nvSpPr>
@@ -17983,7 +18455,7 @@
       </p:sp>
       <p:sp>
         <p:nvSpPr>
-          <p:cNvPr id="28" name="TextBox 27"/>
+          <p:cNvPr id="29" name="TextBox 28"/>
           <p:cNvSpPr txBox="1"/>
           <p:nvPr/>
         </p:nvSpPr>
@@ -18030,7 +18502,7 @@
       </p:sp>
       <p:sp>
         <p:nvSpPr>
-          <p:cNvPr id="29" name="TextBox 28"/>
+          <p:cNvPr id="30" name="TextBox 29"/>
           <p:cNvSpPr txBox="1"/>
           <p:nvPr/>
         </p:nvSpPr>
@@ -18101,7 +18573,7 @@
       </p:sp>
       <p:sp>
         <p:nvSpPr>
-          <p:cNvPr id="30" name="Rectangle 29"/>
+          <p:cNvPr id="31" name="Rectangle 30"/>
           <p:cNvSpPr/>
           <p:nvPr/>
         </p:nvSpPr>
@@ -18145,7 +18617,7 @@
       </p:sp>
       <p:sp>
         <p:nvSpPr>
-          <p:cNvPr id="31" name="TextBox 30"/>
+          <p:cNvPr id="32" name="TextBox 31"/>
           <p:cNvSpPr txBox="1"/>
           <p:nvPr/>
         </p:nvSpPr>
@@ -18192,7 +18664,7 @@
       </p:sp>
       <p:sp>
         <p:nvSpPr>
-          <p:cNvPr id="32" name="TextBox 31"/>
+          <p:cNvPr id="33" name="TextBox 32"/>
           <p:cNvSpPr txBox="1"/>
           <p:nvPr/>
         </p:nvSpPr>
@@ -18323,9 +18795,33 @@
           </a:p>
         </p:txBody>
       </p:sp>
-      <p:sp>
-        <p:nvSpPr>
-          <p:cNvPr id="3" name="TextBox 2"/>
+      <p:pic>
+        <p:nvPicPr>
+          <p:cNvPr id="3" name="college-logo" descr="logo-mark.png"/>
+          <p:cNvPicPr>
+            <a:picLocks noChangeAspect="1"/>
+          </p:cNvPicPr>
+          <p:nvPr/>
+        </p:nvPicPr>
+        <p:blipFill>
+          <a:blip r:embed="rId2"/>
+          <a:stretch>
+            <a:fillRect/>
+          </a:stretch>
+        </p:blipFill>
+        <p:spPr>
+          <a:xfrm>
+            <a:off x="11203333" y="6199632"/>
+            <a:ext cx="275129" cy="310896"/>
+          </a:xfrm>
+          <a:prstGeom prst="rect">
+            <a:avLst/>
+          </a:prstGeom>
+        </p:spPr>
+      </p:pic>
+      <p:sp>
+        <p:nvSpPr>
+          <p:cNvPr id="4" name="TextBox 3"/>
           <p:cNvSpPr txBox="1"/>
           <p:nvPr/>
         </p:nvSpPr>
@@ -18394,13 +18890,13 @@
       </p:sp>
       <p:sp>
         <p:nvSpPr>
-          <p:cNvPr id="4" name="TextBox 3"/>
+          <p:cNvPr id="5" name="TextBox 4"/>
           <p:cNvSpPr txBox="1"/>
           <p:nvPr/>
         </p:nvSpPr>
         <p:spPr>
           <a:xfrm>
-            <a:off x="8826703" y="6272784"/>
+            <a:off x="8240677" y="6272784"/>
             <a:ext cx="2651760" cy="219456"/>
           </a:xfrm>
           <a:prstGeom prst="rect">
@@ -18463,7 +18959,7 @@
       </p:sp>
       <p:sp>
         <p:nvSpPr>
-          <p:cNvPr id="5" name="TextBox 4"/>
+          <p:cNvPr id="6" name="TextBox 5"/>
           <p:cNvSpPr txBox="1"/>
           <p:nvPr/>
         </p:nvSpPr>
@@ -18510,7 +19006,7 @@
       </p:sp>
       <p:sp>
         <p:nvSpPr>
-          <p:cNvPr id="6" name="TextBox 5"/>
+          <p:cNvPr id="7" name="TextBox 6"/>
           <p:cNvSpPr txBox="1"/>
           <p:nvPr/>
         </p:nvSpPr>
@@ -18557,7 +19053,7 @@
       </p:sp>
       <p:sp>
         <p:nvSpPr>
-          <p:cNvPr id="7" name="Rectangle 6"/>
+          <p:cNvPr id="8" name="Rectangle 7"/>
           <p:cNvSpPr/>
           <p:nvPr/>
         </p:nvSpPr>
@@ -18601,7 +19097,7 @@
       </p:sp>
       <p:sp>
         <p:nvSpPr>
-          <p:cNvPr id="8" name="Rectangle 7"/>
+          <p:cNvPr id="9" name="Rectangle 8"/>
           <p:cNvSpPr/>
           <p:nvPr/>
         </p:nvSpPr>
@@ -18645,7 +19141,7 @@
       </p:sp>
       <p:sp>
         <p:nvSpPr>
-          <p:cNvPr id="9" name="Oval 8"/>
+          <p:cNvPr id="10" name="Oval 9"/>
           <p:cNvSpPr/>
           <p:nvPr/>
         </p:nvSpPr>
@@ -18689,7 +19185,7 @@
       </p:sp>
       <p:sp>
         <p:nvSpPr>
-          <p:cNvPr id="10" name="TextBox 9"/>
+          <p:cNvPr id="11" name="TextBox 10"/>
           <p:cNvSpPr txBox="1"/>
           <p:nvPr/>
         </p:nvSpPr>
@@ -18736,7 +19232,7 @@
       </p:sp>
       <p:sp>
         <p:nvSpPr>
-          <p:cNvPr id="11" name="Rounded Rectangle 10"/>
+          <p:cNvPr id="12" name="Rounded Rectangle 11"/>
           <p:cNvSpPr/>
           <p:nvPr/>
         </p:nvSpPr>
@@ -18784,7 +19280,7 @@
       </p:sp>
       <p:sp>
         <p:nvSpPr>
-          <p:cNvPr id="12" name="TextBox 11"/>
+          <p:cNvPr id="13" name="TextBox 12"/>
           <p:cNvSpPr txBox="1"/>
           <p:nvPr/>
         </p:nvSpPr>
@@ -18831,7 +19327,7 @@
       </p:sp>
       <p:sp>
         <p:nvSpPr>
-          <p:cNvPr id="13" name="TextBox 12"/>
+          <p:cNvPr id="14" name="TextBox 13"/>
           <p:cNvSpPr txBox="1"/>
           <p:nvPr/>
         </p:nvSpPr>
@@ -18878,7 +19374,7 @@
       </p:sp>
       <p:sp>
         <p:nvSpPr>
-          <p:cNvPr id="14" name="Oval 13"/>
+          <p:cNvPr id="15" name="Oval 14"/>
           <p:cNvSpPr/>
           <p:nvPr/>
         </p:nvSpPr>
@@ -18922,7 +19418,7 @@
       </p:sp>
       <p:sp>
         <p:nvSpPr>
-          <p:cNvPr id="15" name="TextBox 14"/>
+          <p:cNvPr id="16" name="TextBox 15"/>
           <p:cNvSpPr txBox="1"/>
           <p:nvPr/>
         </p:nvSpPr>
@@ -18969,7 +19465,7 @@
       </p:sp>
       <p:sp>
         <p:nvSpPr>
-          <p:cNvPr id="16" name="Rounded Rectangle 15"/>
+          <p:cNvPr id="17" name="Rounded Rectangle 16"/>
           <p:cNvSpPr/>
           <p:nvPr/>
         </p:nvSpPr>
@@ -19017,7 +19513,7 @@
       </p:sp>
       <p:sp>
         <p:nvSpPr>
-          <p:cNvPr id="17" name="TextBox 16"/>
+          <p:cNvPr id="18" name="TextBox 17"/>
           <p:cNvSpPr txBox="1"/>
           <p:nvPr/>
         </p:nvSpPr>
@@ -19064,7 +19560,7 @@
       </p:sp>
       <p:sp>
         <p:nvSpPr>
-          <p:cNvPr id="18" name="TextBox 17"/>
+          <p:cNvPr id="19" name="TextBox 18"/>
           <p:cNvSpPr txBox="1"/>
           <p:nvPr/>
         </p:nvSpPr>
@@ -19111,7 +19607,7 @@
       </p:sp>
       <p:sp>
         <p:nvSpPr>
-          <p:cNvPr id="19" name="Oval 18"/>
+          <p:cNvPr id="20" name="Oval 19"/>
           <p:cNvSpPr/>
           <p:nvPr/>
         </p:nvSpPr>
@@ -19155,7 +19651,7 @@
       </p:sp>
       <p:sp>
         <p:nvSpPr>
-          <p:cNvPr id="20" name="TextBox 19"/>
+          <p:cNvPr id="21" name="TextBox 20"/>
           <p:cNvSpPr txBox="1"/>
           <p:nvPr/>
         </p:nvSpPr>
@@ -19202,7 +19698,7 @@
       </p:sp>
       <p:sp>
         <p:nvSpPr>
-          <p:cNvPr id="21" name="Rounded Rectangle 20"/>
+          <p:cNvPr id="22" name="Rounded Rectangle 21"/>
           <p:cNvSpPr/>
           <p:nvPr/>
         </p:nvSpPr>
@@ -19250,7 +19746,7 @@
       </p:sp>
       <p:sp>
         <p:nvSpPr>
-          <p:cNvPr id="22" name="TextBox 21"/>
+          <p:cNvPr id="23" name="TextBox 22"/>
           <p:cNvSpPr txBox="1"/>
           <p:nvPr/>
         </p:nvSpPr>
@@ -19297,7 +19793,7 @@
       </p:sp>
       <p:sp>
         <p:nvSpPr>
-          <p:cNvPr id="23" name="TextBox 22"/>
+          <p:cNvPr id="24" name="TextBox 23"/>
           <p:cNvSpPr txBox="1"/>
           <p:nvPr/>
         </p:nvSpPr>
@@ -19344,7 +19840,7 @@
       </p:sp>
       <p:sp>
         <p:nvSpPr>
-          <p:cNvPr id="24" name="Oval 23"/>
+          <p:cNvPr id="25" name="Oval 24"/>
           <p:cNvSpPr/>
           <p:nvPr/>
         </p:nvSpPr>
@@ -19388,7 +19884,7 @@
       </p:sp>
       <p:sp>
         <p:nvSpPr>
-          <p:cNvPr id="25" name="TextBox 24"/>
+          <p:cNvPr id="26" name="TextBox 25"/>
           <p:cNvSpPr txBox="1"/>
           <p:nvPr/>
         </p:nvSpPr>
@@ -19435,7 +19931,7 @@
       </p:sp>
       <p:sp>
         <p:nvSpPr>
-          <p:cNvPr id="26" name="Rounded Rectangle 25"/>
+          <p:cNvPr id="27" name="Rounded Rectangle 26"/>
           <p:cNvSpPr/>
           <p:nvPr/>
         </p:nvSpPr>
@@ -19483,7 +19979,7 @@
       </p:sp>
       <p:sp>
         <p:nvSpPr>
-          <p:cNvPr id="27" name="TextBox 26"/>
+          <p:cNvPr id="28" name="TextBox 27"/>
           <p:cNvSpPr txBox="1"/>
           <p:nvPr/>
         </p:nvSpPr>
@@ -19530,7 +20026,7 @@
       </p:sp>
       <p:sp>
         <p:nvSpPr>
-          <p:cNvPr id="28" name="TextBox 27"/>
+          <p:cNvPr id="29" name="TextBox 28"/>
           <p:cNvSpPr txBox="1"/>
           <p:nvPr/>
         </p:nvSpPr>
@@ -19577,7 +20073,7 @@
       </p:sp>
       <p:sp>
         <p:nvSpPr>
-          <p:cNvPr id="29" name="Rounded Rectangle 28"/>
+          <p:cNvPr id="30" name="Rounded Rectangle 29"/>
           <p:cNvSpPr/>
           <p:nvPr/>
         </p:nvSpPr>
@@ -19644,7 +20140,7 @@
       </p:sp>
       <p:sp>
         <p:nvSpPr>
-          <p:cNvPr id="30" name="Rectangle 29"/>
+          <p:cNvPr id="31" name="Rectangle 30"/>
           <p:cNvSpPr/>
           <p:nvPr/>
         </p:nvSpPr>
@@ -19850,7 +20346,77 @@
       </p:sp>
       <p:sp>
         <p:nvSpPr>
-          <p:cNvPr id="5" name="TextBox 4"/>
+          <p:cNvPr id="5" name="logo-plate"/>
+          <p:cNvSpPr/>
+          <p:nvPr/>
+        </p:nvSpPr>
+        <p:spPr>
+          <a:xfrm>
+            <a:off x="9769160" y="502920"/>
+            <a:ext cx="1736734" cy="877824"/>
+          </a:xfrm>
+          <a:prstGeom prst="roundRect">
+            <a:avLst>
+              <a:gd name="adj" fmla="val 14000"/>
+            </a:avLst>
+          </a:prstGeom>
+          <a:solidFill>
+            <a:srgbClr val="FFFFFF"/>
+          </a:solidFill>
+          <a:ln>
+            <a:noFill/>
+          </a:ln>
+          <a:effectLst/>
+        </p:spPr>
+        <p:style>
+          <a:lnRef idx="1">
+            <a:schemeClr val="accent1"/>
+          </a:lnRef>
+          <a:fillRef idx="3">
+            <a:schemeClr val="accent1"/>
+          </a:fillRef>
+          <a:effectRef idx="2">
+            <a:schemeClr val="accent1"/>
+          </a:effectRef>
+          <a:fontRef idx="minor">
+            <a:schemeClr val="lt1"/>
+          </a:fontRef>
+        </p:style>
+        <p:txBody>
+          <a:bodyPr rtlCol="0" anchor="ctr" wrap="square"/>
+          <a:lstStyle/>
+          <a:p>
+            <a:pPr algn="ctr"/>
+          </a:p>
+        </p:txBody>
+      </p:sp>
+      <p:pic>
+        <p:nvPicPr>
+          <p:cNvPr id="6" name="college-logo" descr="logo-full.png"/>
+          <p:cNvPicPr>
+            <a:picLocks noChangeAspect="1"/>
+          </p:cNvPicPr>
+          <p:nvPr/>
+        </p:nvPicPr>
+        <p:blipFill>
+          <a:blip r:embed="rId2"/>
+          <a:stretch>
+            <a:fillRect/>
+          </a:stretch>
+        </p:blipFill>
+        <p:spPr>
+          <a:xfrm>
+            <a:off x="9888032" y="621792"/>
+            <a:ext cx="1498991" cy="640080"/>
+          </a:xfrm>
+          <a:prstGeom prst="rect">
+            <a:avLst/>
+          </a:prstGeom>
+        </p:spPr>
+      </p:pic>
+      <p:sp>
+        <p:nvSpPr>
+          <p:cNvPr id="7" name="TextBox 6"/>
           <p:cNvSpPr txBox="1"/>
           <p:nvPr/>
         </p:nvSpPr>
@@ -19897,7 +20463,7 @@
       </p:sp>
       <p:sp>
         <p:nvSpPr>
-          <p:cNvPr id="6" name="TextBox 5"/>
+          <p:cNvPr id="8" name="TextBox 7"/>
           <p:cNvSpPr txBox="1"/>
           <p:nvPr/>
         </p:nvSpPr>
@@ -19944,7 +20510,7 @@
       </p:sp>
       <p:sp>
         <p:nvSpPr>
-          <p:cNvPr id="7" name="Rectangle 6"/>
+          <p:cNvPr id="9" name="Rectangle 8"/>
           <p:cNvSpPr/>
           <p:nvPr/>
         </p:nvSpPr>
@@ -19988,7 +20554,7 @@
       </p:sp>
       <p:sp>
         <p:nvSpPr>
-          <p:cNvPr id="8" name="TextBox 7"/>
+          <p:cNvPr id="10" name="TextBox 9"/>
           <p:cNvSpPr txBox="1"/>
           <p:nvPr/>
         </p:nvSpPr>
@@ -20095,9 +20661,33 @@
           </a:p>
         </p:txBody>
       </p:sp>
-      <p:sp>
-        <p:nvSpPr>
-          <p:cNvPr id="3" name="TextBox 2"/>
+      <p:pic>
+        <p:nvPicPr>
+          <p:cNvPr id="3" name="college-logo" descr="logo-mark.png"/>
+          <p:cNvPicPr>
+            <a:picLocks noChangeAspect="1"/>
+          </p:cNvPicPr>
+          <p:nvPr/>
+        </p:nvPicPr>
+        <p:blipFill>
+          <a:blip r:embed="rId2"/>
+          <a:stretch>
+            <a:fillRect/>
+          </a:stretch>
+        </p:blipFill>
+        <p:spPr>
+          <a:xfrm>
+            <a:off x="11203333" y="6199632"/>
+            <a:ext cx="275129" cy="310896"/>
+          </a:xfrm>
+          <a:prstGeom prst="rect">
+            <a:avLst/>
+          </a:prstGeom>
+        </p:spPr>
+      </p:pic>
+      <p:sp>
+        <p:nvSpPr>
+          <p:cNvPr id="4" name="TextBox 3"/>
           <p:cNvSpPr txBox="1"/>
           <p:nvPr/>
         </p:nvSpPr>
@@ -20166,13 +20756,13 @@
       </p:sp>
       <p:sp>
         <p:nvSpPr>
-          <p:cNvPr id="4" name="TextBox 3"/>
+          <p:cNvPr id="5" name="TextBox 4"/>
           <p:cNvSpPr txBox="1"/>
           <p:nvPr/>
         </p:nvSpPr>
         <p:spPr>
           <a:xfrm>
-            <a:off x="8826703" y="6272784"/>
+            <a:off x="8240677" y="6272784"/>
             <a:ext cx="2651760" cy="219456"/>
           </a:xfrm>
           <a:prstGeom prst="rect">
@@ -20235,7 +20825,7 @@
       </p:sp>
       <p:sp>
         <p:nvSpPr>
-          <p:cNvPr id="5" name="TextBox 4"/>
+          <p:cNvPr id="6" name="TextBox 5"/>
           <p:cNvSpPr txBox="1"/>
           <p:nvPr/>
         </p:nvSpPr>
@@ -20282,7 +20872,7 @@
       </p:sp>
       <p:sp>
         <p:nvSpPr>
-          <p:cNvPr id="6" name="TextBox 5"/>
+          <p:cNvPr id="7" name="TextBox 6"/>
           <p:cNvSpPr txBox="1"/>
           <p:nvPr/>
         </p:nvSpPr>
@@ -20329,7 +20919,7 @@
       </p:sp>
       <p:sp>
         <p:nvSpPr>
-          <p:cNvPr id="7" name="Rectangle 6"/>
+          <p:cNvPr id="8" name="Rectangle 7"/>
           <p:cNvSpPr/>
           <p:nvPr/>
         </p:nvSpPr>
@@ -20373,7 +20963,7 @@
       </p:sp>
       <p:sp>
         <p:nvSpPr>
-          <p:cNvPr id="8" name="TextBox 7"/>
+          <p:cNvPr id="9" name="TextBox 8"/>
           <p:cNvSpPr txBox="1"/>
           <p:nvPr/>
         </p:nvSpPr>
@@ -20420,7 +21010,7 @@
       </p:sp>
       <p:sp>
         <p:nvSpPr>
-          <p:cNvPr id="9" name="Rounded Rectangle 8"/>
+          <p:cNvPr id="10" name="Rounded Rectangle 9"/>
           <p:cNvSpPr/>
           <p:nvPr/>
         </p:nvSpPr>
@@ -20474,7 +21064,7 @@
       </p:sp>
       <p:sp>
         <p:nvSpPr>
-          <p:cNvPr id="10" name="Rectangle 9"/>
+          <p:cNvPr id="11" name="Rectangle 10"/>
           <p:cNvSpPr/>
           <p:nvPr/>
         </p:nvSpPr>
@@ -20518,7 +21108,7 @@
       </p:sp>
       <p:sp>
         <p:nvSpPr>
-          <p:cNvPr id="11" name="Oval 10"/>
+          <p:cNvPr id="12" name="Oval 11"/>
           <p:cNvSpPr/>
           <p:nvPr/>
         </p:nvSpPr>
@@ -20562,7 +21152,7 @@
       </p:sp>
       <p:sp>
         <p:nvSpPr>
-          <p:cNvPr id="12" name="TextBox 11"/>
+          <p:cNvPr id="13" name="TextBox 12"/>
           <p:cNvSpPr txBox="1"/>
           <p:nvPr/>
         </p:nvSpPr>
@@ -20609,7 +21199,7 @@
       </p:sp>
       <p:sp>
         <p:nvSpPr>
-          <p:cNvPr id="13" name="TextBox 12"/>
+          <p:cNvPr id="14" name="TextBox 13"/>
           <p:cNvSpPr txBox="1"/>
           <p:nvPr/>
         </p:nvSpPr>
@@ -20680,7 +21270,7 @@
       </p:sp>
       <p:sp>
         <p:nvSpPr>
-          <p:cNvPr id="14" name="Rounded Rectangle 13"/>
+          <p:cNvPr id="15" name="Rounded Rectangle 14"/>
           <p:cNvSpPr/>
           <p:nvPr/>
         </p:nvSpPr>
@@ -20734,7 +21324,7 @@
       </p:sp>
       <p:sp>
         <p:nvSpPr>
-          <p:cNvPr id="15" name="Rectangle 14"/>
+          <p:cNvPr id="16" name="Rectangle 15"/>
           <p:cNvSpPr/>
           <p:nvPr/>
         </p:nvSpPr>
@@ -20778,7 +21368,7 @@
       </p:sp>
       <p:sp>
         <p:nvSpPr>
-          <p:cNvPr id="16" name="Oval 15"/>
+          <p:cNvPr id="17" name="Oval 16"/>
           <p:cNvSpPr/>
           <p:nvPr/>
         </p:nvSpPr>
@@ -20822,7 +21412,7 @@
       </p:sp>
       <p:sp>
         <p:nvSpPr>
-          <p:cNvPr id="17" name="TextBox 16"/>
+          <p:cNvPr id="18" name="TextBox 17"/>
           <p:cNvSpPr txBox="1"/>
           <p:nvPr/>
         </p:nvSpPr>
@@ -20869,7 +21459,7 @@
       </p:sp>
       <p:sp>
         <p:nvSpPr>
-          <p:cNvPr id="18" name="TextBox 17"/>
+          <p:cNvPr id="19" name="TextBox 18"/>
           <p:cNvSpPr txBox="1"/>
           <p:nvPr/>
         </p:nvSpPr>
@@ -20940,7 +21530,7 @@
       </p:sp>
       <p:sp>
         <p:nvSpPr>
-          <p:cNvPr id="19" name="Rounded Rectangle 18"/>
+          <p:cNvPr id="20" name="Rounded Rectangle 19"/>
           <p:cNvSpPr/>
           <p:nvPr/>
         </p:nvSpPr>
@@ -20994,7 +21584,7 @@
       </p:sp>
       <p:sp>
         <p:nvSpPr>
-          <p:cNvPr id="20" name="Rectangle 19"/>
+          <p:cNvPr id="21" name="Rectangle 20"/>
           <p:cNvSpPr/>
           <p:nvPr/>
         </p:nvSpPr>
@@ -21038,7 +21628,7 @@
       </p:sp>
       <p:sp>
         <p:nvSpPr>
-          <p:cNvPr id="21" name="Oval 20"/>
+          <p:cNvPr id="22" name="Oval 21"/>
           <p:cNvSpPr/>
           <p:nvPr/>
         </p:nvSpPr>
@@ -21082,7 +21672,7 @@
       </p:sp>
       <p:sp>
         <p:nvSpPr>
-          <p:cNvPr id="22" name="TextBox 21"/>
+          <p:cNvPr id="23" name="TextBox 22"/>
           <p:cNvSpPr txBox="1"/>
           <p:nvPr/>
         </p:nvSpPr>
@@ -21129,7 +21719,7 @@
       </p:sp>
       <p:sp>
         <p:nvSpPr>
-          <p:cNvPr id="23" name="TextBox 22"/>
+          <p:cNvPr id="24" name="TextBox 23"/>
           <p:cNvSpPr txBox="1"/>
           <p:nvPr/>
         </p:nvSpPr>
@@ -21200,7 +21790,7 @@
       </p:sp>
       <p:sp>
         <p:nvSpPr>
-          <p:cNvPr id="24" name="Rounded Rectangle 23"/>
+          <p:cNvPr id="25" name="Rounded Rectangle 24"/>
           <p:cNvSpPr/>
           <p:nvPr/>
         </p:nvSpPr>
@@ -21254,7 +21844,7 @@
       </p:sp>
       <p:sp>
         <p:nvSpPr>
-          <p:cNvPr id="25" name="Rectangle 24"/>
+          <p:cNvPr id="26" name="Rectangle 25"/>
           <p:cNvSpPr/>
           <p:nvPr/>
         </p:nvSpPr>
@@ -21298,7 +21888,7 @@
       </p:sp>
       <p:sp>
         <p:nvSpPr>
-          <p:cNvPr id="26" name="Oval 25"/>
+          <p:cNvPr id="27" name="Oval 26"/>
           <p:cNvSpPr/>
           <p:nvPr/>
         </p:nvSpPr>
@@ -21342,7 +21932,7 @@
       </p:sp>
       <p:sp>
         <p:nvSpPr>
-          <p:cNvPr id="27" name="TextBox 26"/>
+          <p:cNvPr id="28" name="TextBox 27"/>
           <p:cNvSpPr txBox="1"/>
           <p:nvPr/>
         </p:nvSpPr>
@@ -21389,7 +21979,7 @@
       </p:sp>
       <p:sp>
         <p:nvSpPr>
-          <p:cNvPr id="28" name="TextBox 27"/>
+          <p:cNvPr id="29" name="TextBox 28"/>
           <p:cNvSpPr txBox="1"/>
           <p:nvPr/>
         </p:nvSpPr>
@@ -21460,7 +22050,7 @@
       </p:sp>
       <p:sp>
         <p:nvSpPr>
-          <p:cNvPr id="29" name="Rounded Rectangle 28"/>
+          <p:cNvPr id="30" name="Rounded Rectangle 29"/>
           <p:cNvSpPr/>
           <p:nvPr/>
         </p:nvSpPr>
@@ -21514,7 +22104,7 @@
       </p:sp>
       <p:sp>
         <p:nvSpPr>
-          <p:cNvPr id="30" name="Rectangle 29"/>
+          <p:cNvPr id="31" name="Rectangle 30"/>
           <p:cNvSpPr/>
           <p:nvPr/>
         </p:nvSpPr>
@@ -21558,7 +22148,7 @@
       </p:sp>
       <p:sp>
         <p:nvSpPr>
-          <p:cNvPr id="31" name="Oval 30"/>
+          <p:cNvPr id="32" name="Oval 31"/>
           <p:cNvSpPr/>
           <p:nvPr/>
         </p:nvSpPr>
@@ -21602,7 +22192,7 @@
       </p:sp>
       <p:sp>
         <p:nvSpPr>
-          <p:cNvPr id="32" name="TextBox 31"/>
+          <p:cNvPr id="33" name="TextBox 32"/>
           <p:cNvSpPr txBox="1"/>
           <p:nvPr/>
         </p:nvSpPr>
@@ -21649,7 +22239,7 @@
       </p:sp>
       <p:sp>
         <p:nvSpPr>
-          <p:cNvPr id="33" name="TextBox 32"/>
+          <p:cNvPr id="34" name="TextBox 33"/>
           <p:cNvSpPr txBox="1"/>
           <p:nvPr/>
         </p:nvSpPr>
@@ -21720,7 +22310,7 @@
       </p:sp>
       <p:sp>
         <p:nvSpPr>
-          <p:cNvPr id="34" name="Rounded Rectangle 33"/>
+          <p:cNvPr id="35" name="Rounded Rectangle 34"/>
           <p:cNvSpPr/>
           <p:nvPr/>
         </p:nvSpPr>
@@ -21774,7 +22364,7 @@
       </p:sp>
       <p:sp>
         <p:nvSpPr>
-          <p:cNvPr id="35" name="Rectangle 34"/>
+          <p:cNvPr id="36" name="Rectangle 35"/>
           <p:cNvSpPr/>
           <p:nvPr/>
         </p:nvSpPr>
@@ -21818,7 +22408,7 @@
       </p:sp>
       <p:sp>
         <p:nvSpPr>
-          <p:cNvPr id="36" name="Oval 35"/>
+          <p:cNvPr id="37" name="Oval 36"/>
           <p:cNvSpPr/>
           <p:nvPr/>
         </p:nvSpPr>
@@ -21862,7 +22452,7 @@
       </p:sp>
       <p:sp>
         <p:nvSpPr>
-          <p:cNvPr id="37" name="TextBox 36"/>
+          <p:cNvPr id="38" name="TextBox 37"/>
           <p:cNvSpPr txBox="1"/>
           <p:nvPr/>
         </p:nvSpPr>
@@ -21909,7 +22499,7 @@
       </p:sp>
       <p:sp>
         <p:nvSpPr>
-          <p:cNvPr id="38" name="TextBox 37"/>
+          <p:cNvPr id="39" name="TextBox 38"/>
           <p:cNvSpPr txBox="1"/>
           <p:nvPr/>
         </p:nvSpPr>
@@ -22490,7 +23080,77 @@
       </p:sp>
       <p:sp>
         <p:nvSpPr>
-          <p:cNvPr id="11" name="Rectangle 10"/>
+          <p:cNvPr id="11" name="logo-plate"/>
+          <p:cNvSpPr/>
+          <p:nvPr/>
+        </p:nvSpPr>
+        <p:spPr>
+          <a:xfrm>
+            <a:off x="9233806" y="539496"/>
+            <a:ext cx="2272088" cy="1106424"/>
+          </a:xfrm>
+          <a:prstGeom prst="roundRect">
+            <a:avLst>
+              <a:gd name="adj" fmla="val 14000"/>
+            </a:avLst>
+          </a:prstGeom>
+          <a:solidFill>
+            <a:srgbClr val="FFFFFF"/>
+          </a:solidFill>
+          <a:ln>
+            <a:noFill/>
+          </a:ln>
+          <a:effectLst/>
+        </p:spPr>
+        <p:style>
+          <a:lnRef idx="1">
+            <a:schemeClr val="accent1"/>
+          </a:lnRef>
+          <a:fillRef idx="3">
+            <a:schemeClr val="accent1"/>
+          </a:fillRef>
+          <a:effectRef idx="2">
+            <a:schemeClr val="accent1"/>
+          </a:effectRef>
+          <a:fontRef idx="minor">
+            <a:schemeClr val="lt1"/>
+          </a:fontRef>
+        </p:style>
+        <p:txBody>
+          <a:bodyPr rtlCol="0" anchor="ctr" wrap="square"/>
+          <a:lstStyle/>
+          <a:p>
+            <a:pPr algn="ctr"/>
+          </a:p>
+        </p:txBody>
+      </p:sp>
+      <p:pic>
+        <p:nvPicPr>
+          <p:cNvPr id="12" name="college-logo" descr="logo-full.png"/>
+          <p:cNvPicPr>
+            <a:picLocks noChangeAspect="1"/>
+          </p:cNvPicPr>
+          <p:nvPr/>
+        </p:nvPicPr>
+        <p:blipFill>
+          <a:blip r:embed="rId2"/>
+          <a:stretch>
+            <a:fillRect/>
+          </a:stretch>
+        </p:blipFill>
+        <p:spPr>
+          <a:xfrm>
+            <a:off x="9352678" y="658368"/>
+            <a:ext cx="2034345" cy="868680"/>
+          </a:xfrm>
+          <a:prstGeom prst="rect">
+            <a:avLst/>
+          </a:prstGeom>
+        </p:spPr>
+      </p:pic>
+      <p:sp>
+        <p:nvSpPr>
+          <p:cNvPr id="13" name="Rectangle 12"/>
           <p:cNvSpPr/>
           <p:nvPr/>
         </p:nvSpPr>
@@ -22534,7 +23194,7 @@
       </p:sp>
       <p:sp>
         <p:nvSpPr>
-          <p:cNvPr id="12" name="TextBox 11"/>
+          <p:cNvPr id="14" name="TextBox 13"/>
           <p:cNvSpPr txBox="1"/>
           <p:nvPr/>
         </p:nvSpPr>
@@ -23061,6 +23721,76 @@
           </a:p>
         </p:txBody>
       </p:sp>
+      <p:sp>
+        <p:nvSpPr>
+          <p:cNvPr id="11" name="logo-plate"/>
+          <p:cNvSpPr/>
+          <p:nvPr/>
+        </p:nvSpPr>
+        <p:spPr>
+          <a:xfrm>
+            <a:off x="9512190" y="539496"/>
+            <a:ext cx="1993704" cy="987552"/>
+          </a:xfrm>
+          <a:prstGeom prst="roundRect">
+            <a:avLst>
+              <a:gd name="adj" fmla="val 14000"/>
+            </a:avLst>
+          </a:prstGeom>
+          <a:solidFill>
+            <a:srgbClr val="FFFFFF"/>
+          </a:solidFill>
+          <a:ln>
+            <a:noFill/>
+          </a:ln>
+          <a:effectLst/>
+        </p:spPr>
+        <p:style>
+          <a:lnRef idx="1">
+            <a:schemeClr val="accent1"/>
+          </a:lnRef>
+          <a:fillRef idx="3">
+            <a:schemeClr val="accent1"/>
+          </a:fillRef>
+          <a:effectRef idx="2">
+            <a:schemeClr val="accent1"/>
+          </a:effectRef>
+          <a:fontRef idx="minor">
+            <a:schemeClr val="lt1"/>
+          </a:fontRef>
+        </p:style>
+        <p:txBody>
+          <a:bodyPr rtlCol="0" anchor="ctr" wrap="square"/>
+          <a:lstStyle/>
+          <a:p>
+            <a:pPr algn="ctr"/>
+          </a:p>
+        </p:txBody>
+      </p:sp>
+      <p:pic>
+        <p:nvPicPr>
+          <p:cNvPr id="12" name="college-logo" descr="logo-full.png"/>
+          <p:cNvPicPr>
+            <a:picLocks noChangeAspect="1"/>
+          </p:cNvPicPr>
+          <p:nvPr/>
+        </p:nvPicPr>
+        <p:blipFill>
+          <a:blip r:embed="rId2"/>
+          <a:stretch>
+            <a:fillRect/>
+          </a:stretch>
+        </p:blipFill>
+        <p:spPr>
+          <a:xfrm>
+            <a:off x="9631062" y="658368"/>
+            <a:ext cx="1755961" cy="749808"/>
+          </a:xfrm>
+          <a:prstGeom prst="rect">
+            <a:avLst/>
+          </a:prstGeom>
+        </p:spPr>
+      </p:pic>
     </p:spTree>
   </p:cSld>
   <p:clrMapOvr>
@@ -23123,9 +23853,33 @@
           </a:p>
         </p:txBody>
       </p:sp>
-      <p:sp>
-        <p:nvSpPr>
-          <p:cNvPr id="3" name="TextBox 2"/>
+      <p:pic>
+        <p:nvPicPr>
+          <p:cNvPr id="3" name="college-logo" descr="logo-mark.png"/>
+          <p:cNvPicPr>
+            <a:picLocks noChangeAspect="1"/>
+          </p:cNvPicPr>
+          <p:nvPr/>
+        </p:nvPicPr>
+        <p:blipFill>
+          <a:blip r:embed="rId2"/>
+          <a:stretch>
+            <a:fillRect/>
+          </a:stretch>
+        </p:blipFill>
+        <p:spPr>
+          <a:xfrm>
+            <a:off x="11203333" y="6199632"/>
+            <a:ext cx="275129" cy="310896"/>
+          </a:xfrm>
+          <a:prstGeom prst="rect">
+            <a:avLst/>
+          </a:prstGeom>
+        </p:spPr>
+      </p:pic>
+      <p:sp>
+        <p:nvSpPr>
+          <p:cNvPr id="4" name="TextBox 3"/>
           <p:cNvSpPr txBox="1"/>
           <p:nvPr/>
         </p:nvSpPr>
@@ -23194,13 +23948,13 @@
       </p:sp>
       <p:sp>
         <p:nvSpPr>
-          <p:cNvPr id="4" name="TextBox 3"/>
+          <p:cNvPr id="5" name="TextBox 4"/>
           <p:cNvSpPr txBox="1"/>
           <p:nvPr/>
         </p:nvSpPr>
         <p:spPr>
           <a:xfrm>
-            <a:off x="8826703" y="6272784"/>
+            <a:off x="8240677" y="6272784"/>
             <a:ext cx="2651760" cy="219456"/>
           </a:xfrm>
           <a:prstGeom prst="rect">
@@ -23263,7 +24017,7 @@
       </p:sp>
       <p:sp>
         <p:nvSpPr>
-          <p:cNvPr id="5" name="TextBox 4"/>
+          <p:cNvPr id="6" name="TextBox 5"/>
           <p:cNvSpPr txBox="1"/>
           <p:nvPr/>
         </p:nvSpPr>
@@ -23310,7 +24064,7 @@
       </p:sp>
       <p:sp>
         <p:nvSpPr>
-          <p:cNvPr id="6" name="TextBox 5"/>
+          <p:cNvPr id="7" name="TextBox 6"/>
           <p:cNvSpPr txBox="1"/>
           <p:nvPr/>
         </p:nvSpPr>
@@ -23357,7 +24111,7 @@
       </p:sp>
       <p:sp>
         <p:nvSpPr>
-          <p:cNvPr id="7" name="Rectangle 6"/>
+          <p:cNvPr id="8" name="Rectangle 7"/>
           <p:cNvSpPr/>
           <p:nvPr/>
         </p:nvSpPr>
@@ -23401,7 +24155,7 @@
       </p:sp>
       <p:sp>
         <p:nvSpPr>
-          <p:cNvPr id="8" name="TextBox 7"/>
+          <p:cNvPr id="9" name="TextBox 8"/>
           <p:cNvSpPr txBox="1"/>
           <p:nvPr/>
         </p:nvSpPr>
@@ -23448,7 +24202,7 @@
       </p:sp>
       <p:sp>
         <p:nvSpPr>
-          <p:cNvPr id="9" name="Rectangle 8"/>
+          <p:cNvPr id="10" name="Rectangle 9"/>
           <p:cNvSpPr/>
           <p:nvPr/>
         </p:nvSpPr>
@@ -23492,7 +24246,7 @@
       </p:sp>
       <p:sp>
         <p:nvSpPr>
-          <p:cNvPr id="10" name="Rounded Rectangle 9"/>
+          <p:cNvPr id="11" name="Rounded Rectangle 10"/>
           <p:cNvSpPr/>
           <p:nvPr/>
         </p:nvSpPr>
@@ -23538,7 +24292,7 @@
       </p:sp>
       <p:sp>
         <p:nvSpPr>
-          <p:cNvPr id="11" name="TextBox 10"/>
+          <p:cNvPr id="12" name="TextBox 11"/>
           <p:cNvSpPr txBox="1"/>
           <p:nvPr/>
         </p:nvSpPr>
@@ -23585,7 +24339,7 @@
       </p:sp>
       <p:sp>
         <p:nvSpPr>
-          <p:cNvPr id="12" name="Rounded Rectangle 11"/>
+          <p:cNvPr id="13" name="Rounded Rectangle 12"/>
           <p:cNvSpPr/>
           <p:nvPr/>
         </p:nvSpPr>
@@ -23631,7 +24385,7 @@
       </p:sp>
       <p:sp>
         <p:nvSpPr>
-          <p:cNvPr id="13" name="TextBox 12"/>
+          <p:cNvPr id="14" name="TextBox 13"/>
           <p:cNvSpPr txBox="1"/>
           <p:nvPr/>
         </p:nvSpPr>
@@ -23678,7 +24432,7 @@
       </p:sp>
       <p:sp>
         <p:nvSpPr>
-          <p:cNvPr id="14" name="Rounded Rectangle 13"/>
+          <p:cNvPr id="15" name="Rounded Rectangle 14"/>
           <p:cNvSpPr/>
           <p:nvPr/>
         </p:nvSpPr>
@@ -23724,7 +24478,7 @@
       </p:sp>
       <p:sp>
         <p:nvSpPr>
-          <p:cNvPr id="15" name="TextBox 14"/>
+          <p:cNvPr id="16" name="TextBox 15"/>
           <p:cNvSpPr txBox="1"/>
           <p:nvPr/>
         </p:nvSpPr>
@@ -23771,7 +24525,7 @@
       </p:sp>
       <p:sp>
         <p:nvSpPr>
-          <p:cNvPr id="16" name="Rounded Rectangle 15"/>
+          <p:cNvPr id="17" name="Rounded Rectangle 16"/>
           <p:cNvSpPr/>
           <p:nvPr/>
         </p:nvSpPr>
@@ -23817,7 +24571,7 @@
       </p:sp>
       <p:sp>
         <p:nvSpPr>
-          <p:cNvPr id="17" name="TextBox 16"/>
+          <p:cNvPr id="18" name="TextBox 17"/>
           <p:cNvSpPr txBox="1"/>
           <p:nvPr/>
         </p:nvSpPr>
@@ -23864,7 +24618,7 @@
       </p:sp>
       <p:sp>
         <p:nvSpPr>
-          <p:cNvPr id="18" name="Rounded Rectangle 17"/>
+          <p:cNvPr id="19" name="Rounded Rectangle 18"/>
           <p:cNvSpPr/>
           <p:nvPr/>
         </p:nvSpPr>
@@ -23910,7 +24664,7 @@
       </p:sp>
       <p:sp>
         <p:nvSpPr>
-          <p:cNvPr id="19" name="TextBox 18"/>
+          <p:cNvPr id="20" name="TextBox 19"/>
           <p:cNvSpPr txBox="1"/>
           <p:nvPr/>
         </p:nvSpPr>
@@ -23957,7 +24711,7 @@
       </p:sp>
       <p:sp>
         <p:nvSpPr>
-          <p:cNvPr id="20" name="Rounded Rectangle 19"/>
+          <p:cNvPr id="21" name="Rounded Rectangle 20"/>
           <p:cNvSpPr/>
           <p:nvPr/>
         </p:nvSpPr>
@@ -24011,7 +24765,7 @@
       </p:sp>
       <p:sp>
         <p:nvSpPr>
-          <p:cNvPr id="21" name="Rectangle 20"/>
+          <p:cNvPr id="22" name="Rectangle 21"/>
           <p:cNvSpPr/>
           <p:nvPr/>
         </p:nvSpPr>
@@ -24055,7 +24809,7 @@
       </p:sp>
       <p:sp>
         <p:nvSpPr>
-          <p:cNvPr id="22" name="TextBox 21"/>
+          <p:cNvPr id="23" name="TextBox 22"/>
           <p:cNvSpPr txBox="1"/>
           <p:nvPr/>
         </p:nvSpPr>
@@ -24102,7 +24856,7 @@
       </p:sp>
       <p:sp>
         <p:nvSpPr>
-          <p:cNvPr id="23" name="TextBox 22"/>
+          <p:cNvPr id="24" name="TextBox 23"/>
           <p:cNvSpPr txBox="1"/>
           <p:nvPr/>
         </p:nvSpPr>
@@ -24149,7 +24903,7 @@
       </p:sp>
       <p:sp>
         <p:nvSpPr>
-          <p:cNvPr id="24" name="Rounded Rectangle 23"/>
+          <p:cNvPr id="25" name="Rounded Rectangle 24"/>
           <p:cNvSpPr/>
           <p:nvPr/>
         </p:nvSpPr>
@@ -24203,7 +24957,7 @@
       </p:sp>
       <p:sp>
         <p:nvSpPr>
-          <p:cNvPr id="25" name="Rectangle 24"/>
+          <p:cNvPr id="26" name="Rectangle 25"/>
           <p:cNvSpPr/>
           <p:nvPr/>
         </p:nvSpPr>
@@ -24247,7 +25001,7 @@
       </p:sp>
       <p:sp>
         <p:nvSpPr>
-          <p:cNvPr id="26" name="TextBox 25"/>
+          <p:cNvPr id="27" name="TextBox 26"/>
           <p:cNvSpPr txBox="1"/>
           <p:nvPr/>
         </p:nvSpPr>
@@ -24294,7 +25048,7 @@
       </p:sp>
       <p:sp>
         <p:nvSpPr>
-          <p:cNvPr id="27" name="TextBox 26"/>
+          <p:cNvPr id="28" name="TextBox 27"/>
           <p:cNvSpPr txBox="1"/>
           <p:nvPr/>
         </p:nvSpPr>
@@ -24341,7 +25095,7 @@
       </p:sp>
       <p:sp>
         <p:nvSpPr>
-          <p:cNvPr id="28" name="Rounded Rectangle 27"/>
+          <p:cNvPr id="29" name="Rounded Rectangle 28"/>
           <p:cNvSpPr/>
           <p:nvPr/>
         </p:nvSpPr>
@@ -24395,7 +25149,7 @@
       </p:sp>
       <p:sp>
         <p:nvSpPr>
-          <p:cNvPr id="29" name="Rectangle 28"/>
+          <p:cNvPr id="30" name="Rectangle 29"/>
           <p:cNvSpPr/>
           <p:nvPr/>
         </p:nvSpPr>
@@ -24439,7 +25193,7 @@
       </p:sp>
       <p:sp>
         <p:nvSpPr>
-          <p:cNvPr id="30" name="TextBox 29"/>
+          <p:cNvPr id="31" name="TextBox 30"/>
           <p:cNvSpPr txBox="1"/>
           <p:nvPr/>
         </p:nvSpPr>
@@ -24486,7 +25240,7 @@
       </p:sp>
       <p:sp>
         <p:nvSpPr>
-          <p:cNvPr id="31" name="TextBox 30"/>
+          <p:cNvPr id="32" name="TextBox 31"/>
           <p:cNvSpPr txBox="1"/>
           <p:nvPr/>
         </p:nvSpPr>
@@ -24593,9 +25347,33 @@
           </a:p>
         </p:txBody>
       </p:sp>
-      <p:sp>
-        <p:nvSpPr>
-          <p:cNvPr id="3" name="TextBox 2"/>
+      <p:pic>
+        <p:nvPicPr>
+          <p:cNvPr id="3" name="college-logo" descr="logo-mark.png"/>
+          <p:cNvPicPr>
+            <a:picLocks noChangeAspect="1"/>
+          </p:cNvPicPr>
+          <p:nvPr/>
+        </p:nvPicPr>
+        <p:blipFill>
+          <a:blip r:embed="rId2"/>
+          <a:stretch>
+            <a:fillRect/>
+          </a:stretch>
+        </p:blipFill>
+        <p:spPr>
+          <a:xfrm>
+            <a:off x="11203333" y="6199632"/>
+            <a:ext cx="275129" cy="310896"/>
+          </a:xfrm>
+          <a:prstGeom prst="rect">
+            <a:avLst/>
+          </a:prstGeom>
+        </p:spPr>
+      </p:pic>
+      <p:sp>
+        <p:nvSpPr>
+          <p:cNvPr id="4" name="TextBox 3"/>
           <p:cNvSpPr txBox="1"/>
           <p:nvPr/>
         </p:nvSpPr>
@@ -24664,13 +25442,13 @@
       </p:sp>
       <p:sp>
         <p:nvSpPr>
-          <p:cNvPr id="4" name="TextBox 3"/>
+          <p:cNvPr id="5" name="TextBox 4"/>
           <p:cNvSpPr txBox="1"/>
           <p:nvPr/>
         </p:nvSpPr>
         <p:spPr>
           <a:xfrm>
-            <a:off x="8826703" y="6272784"/>
+            <a:off x="8240677" y="6272784"/>
             <a:ext cx="2651760" cy="219456"/>
           </a:xfrm>
           <a:prstGeom prst="rect">
@@ -24733,7 +25511,7 @@
       </p:sp>
       <p:sp>
         <p:nvSpPr>
-          <p:cNvPr id="5" name="TextBox 4"/>
+          <p:cNvPr id="6" name="TextBox 5"/>
           <p:cNvSpPr txBox="1"/>
           <p:nvPr/>
         </p:nvSpPr>
@@ -24780,7 +25558,7 @@
       </p:sp>
       <p:sp>
         <p:nvSpPr>
-          <p:cNvPr id="6" name="TextBox 5"/>
+          <p:cNvPr id="7" name="TextBox 6"/>
           <p:cNvSpPr txBox="1"/>
           <p:nvPr/>
         </p:nvSpPr>
@@ -24827,7 +25605,7 @@
       </p:sp>
       <p:sp>
         <p:nvSpPr>
-          <p:cNvPr id="7" name="Rectangle 6"/>
+          <p:cNvPr id="8" name="Rectangle 7"/>
           <p:cNvSpPr/>
           <p:nvPr/>
         </p:nvSpPr>
@@ -24871,7 +25649,7 @@
       </p:sp>
       <p:sp>
         <p:nvSpPr>
-          <p:cNvPr id="8" name="TextBox 7"/>
+          <p:cNvPr id="9" name="TextBox 8"/>
           <p:cNvSpPr txBox="1"/>
           <p:nvPr/>
         </p:nvSpPr>
@@ -24918,7 +25696,7 @@
       </p:sp>
       <p:sp>
         <p:nvSpPr>
-          <p:cNvPr id="9" name="Rounded Rectangle 8"/>
+          <p:cNvPr id="10" name="Rounded Rectangle 9"/>
           <p:cNvSpPr/>
           <p:nvPr/>
         </p:nvSpPr>
@@ -24972,7 +25750,7 @@
       </p:sp>
       <p:sp>
         <p:nvSpPr>
-          <p:cNvPr id="10" name="Rectangle 9"/>
+          <p:cNvPr id="11" name="Rectangle 10"/>
           <p:cNvSpPr/>
           <p:nvPr/>
         </p:nvSpPr>
@@ -25016,7 +25794,7 @@
       </p:sp>
       <p:sp>
         <p:nvSpPr>
-          <p:cNvPr id="11" name="TextBox 10"/>
+          <p:cNvPr id="12" name="TextBox 11"/>
           <p:cNvSpPr txBox="1"/>
           <p:nvPr/>
         </p:nvSpPr>
@@ -25063,7 +25841,7 @@
       </p:sp>
       <p:sp>
         <p:nvSpPr>
-          <p:cNvPr id="12" name="TextBox 11"/>
+          <p:cNvPr id="13" name="TextBox 12"/>
           <p:cNvSpPr txBox="1"/>
           <p:nvPr/>
         </p:nvSpPr>
@@ -25110,7 +25888,7 @@
       </p:sp>
       <p:sp>
         <p:nvSpPr>
-          <p:cNvPr id="13" name="Rounded Rectangle 12"/>
+          <p:cNvPr id="14" name="Rounded Rectangle 13"/>
           <p:cNvSpPr/>
           <p:nvPr/>
         </p:nvSpPr>
@@ -25164,7 +25942,7 @@
       </p:sp>
       <p:sp>
         <p:nvSpPr>
-          <p:cNvPr id="14" name="Rectangle 13"/>
+          <p:cNvPr id="15" name="Rectangle 14"/>
           <p:cNvSpPr/>
           <p:nvPr/>
         </p:nvSpPr>
@@ -25208,7 +25986,7 @@
       </p:sp>
       <p:sp>
         <p:nvSpPr>
-          <p:cNvPr id="15" name="TextBox 14"/>
+          <p:cNvPr id="16" name="TextBox 15"/>
           <p:cNvSpPr txBox="1"/>
           <p:nvPr/>
         </p:nvSpPr>
@@ -25255,7 +26033,7 @@
       </p:sp>
       <p:sp>
         <p:nvSpPr>
-          <p:cNvPr id="16" name="TextBox 15"/>
+          <p:cNvPr id="17" name="TextBox 16"/>
           <p:cNvSpPr txBox="1"/>
           <p:nvPr/>
         </p:nvSpPr>
@@ -25302,7 +26080,7 @@
       </p:sp>
       <p:sp>
         <p:nvSpPr>
-          <p:cNvPr id="17" name="Rounded Rectangle 16"/>
+          <p:cNvPr id="18" name="Rounded Rectangle 17"/>
           <p:cNvSpPr/>
           <p:nvPr/>
         </p:nvSpPr>
@@ -25356,7 +26134,7 @@
       </p:sp>
       <p:sp>
         <p:nvSpPr>
-          <p:cNvPr id="18" name="Rectangle 17"/>
+          <p:cNvPr id="19" name="Rectangle 18"/>
           <p:cNvSpPr/>
           <p:nvPr/>
         </p:nvSpPr>
@@ -25400,7 +26178,7 @@
       </p:sp>
       <p:sp>
         <p:nvSpPr>
-          <p:cNvPr id="19" name="TextBox 18"/>
+          <p:cNvPr id="20" name="TextBox 19"/>
           <p:cNvSpPr txBox="1"/>
           <p:nvPr/>
         </p:nvSpPr>
@@ -25447,7 +26225,7 @@
       </p:sp>
       <p:sp>
         <p:nvSpPr>
-          <p:cNvPr id="20" name="TextBox 19"/>
+          <p:cNvPr id="21" name="TextBox 20"/>
           <p:cNvSpPr txBox="1"/>
           <p:nvPr/>
         </p:nvSpPr>
@@ -25494,7 +26272,7 @@
       </p:sp>
       <p:sp>
         <p:nvSpPr>
-          <p:cNvPr id="21" name="Rounded Rectangle 20"/>
+          <p:cNvPr id="22" name="Rounded Rectangle 21"/>
           <p:cNvSpPr/>
           <p:nvPr/>
         </p:nvSpPr>
@@ -25548,7 +26326,7 @@
       </p:sp>
       <p:sp>
         <p:nvSpPr>
-          <p:cNvPr id="22" name="Rectangle 21"/>
+          <p:cNvPr id="23" name="Rectangle 22"/>
           <p:cNvSpPr/>
           <p:nvPr/>
         </p:nvSpPr>
@@ -25592,7 +26370,7 @@
       </p:sp>
       <p:sp>
         <p:nvSpPr>
-          <p:cNvPr id="23" name="TextBox 22"/>
+          <p:cNvPr id="24" name="TextBox 23"/>
           <p:cNvSpPr txBox="1"/>
           <p:nvPr/>
         </p:nvSpPr>
@@ -25639,7 +26417,7 @@
       </p:sp>
       <p:sp>
         <p:nvSpPr>
-          <p:cNvPr id="24" name="TextBox 23"/>
+          <p:cNvPr id="25" name="TextBox 24"/>
           <p:cNvSpPr txBox="1"/>
           <p:nvPr/>
         </p:nvSpPr>
@@ -25686,7 +26464,7 @@
       </p:sp>
       <p:sp>
         <p:nvSpPr>
-          <p:cNvPr id="25" name="Rounded Rectangle 24"/>
+          <p:cNvPr id="26" name="Rounded Rectangle 25"/>
           <p:cNvSpPr/>
           <p:nvPr/>
         </p:nvSpPr>
@@ -25740,7 +26518,7 @@
       </p:sp>
       <p:sp>
         <p:nvSpPr>
-          <p:cNvPr id="26" name="Rectangle 25"/>
+          <p:cNvPr id="27" name="Rectangle 26"/>
           <p:cNvSpPr/>
           <p:nvPr/>
         </p:nvSpPr>
@@ -25784,7 +26562,7 @@
       </p:sp>
       <p:sp>
         <p:nvSpPr>
-          <p:cNvPr id="27" name="TextBox 26"/>
+          <p:cNvPr id="28" name="TextBox 27"/>
           <p:cNvSpPr txBox="1"/>
           <p:nvPr/>
         </p:nvSpPr>
@@ -25831,7 +26609,7 @@
       </p:sp>
       <p:sp>
         <p:nvSpPr>
-          <p:cNvPr id="28" name="TextBox 27"/>
+          <p:cNvPr id="29" name="TextBox 28"/>
           <p:cNvSpPr txBox="1"/>
           <p:nvPr/>
         </p:nvSpPr>
@@ -25878,7 +26656,7 @@
       </p:sp>
       <p:sp>
         <p:nvSpPr>
-          <p:cNvPr id="29" name="Rounded Rectangle 28"/>
+          <p:cNvPr id="30" name="Rounded Rectangle 29"/>
           <p:cNvSpPr/>
           <p:nvPr/>
         </p:nvSpPr>
@@ -25932,7 +26710,7 @@
       </p:sp>
       <p:sp>
         <p:nvSpPr>
-          <p:cNvPr id="30" name="Rectangle 29"/>
+          <p:cNvPr id="31" name="Rectangle 30"/>
           <p:cNvSpPr/>
           <p:nvPr/>
         </p:nvSpPr>
@@ -25976,7 +26754,7 @@
       </p:sp>
       <p:sp>
         <p:nvSpPr>
-          <p:cNvPr id="31" name="TextBox 30"/>
+          <p:cNvPr id="32" name="TextBox 31"/>
           <p:cNvSpPr txBox="1"/>
           <p:nvPr/>
         </p:nvSpPr>
@@ -26023,7 +26801,7 @@
       </p:sp>
       <p:sp>
         <p:nvSpPr>
-          <p:cNvPr id="32" name="TextBox 31"/>
+          <p:cNvPr id="33" name="TextBox 32"/>
           <p:cNvSpPr txBox="1"/>
           <p:nvPr/>
         </p:nvSpPr>
@@ -26506,6 +27284,76 @@
           </a:p>
         </p:txBody>
       </p:sp>
+      <p:sp>
+        <p:nvSpPr>
+          <p:cNvPr id="11" name="logo-plate"/>
+          <p:cNvSpPr/>
+          <p:nvPr/>
+        </p:nvSpPr>
+        <p:spPr>
+          <a:xfrm>
+            <a:off x="9512190" y="539496"/>
+            <a:ext cx="1993704" cy="987552"/>
+          </a:xfrm>
+          <a:prstGeom prst="roundRect">
+            <a:avLst>
+              <a:gd name="adj" fmla="val 14000"/>
+            </a:avLst>
+          </a:prstGeom>
+          <a:solidFill>
+            <a:srgbClr val="FFFFFF"/>
+          </a:solidFill>
+          <a:ln>
+            <a:noFill/>
+          </a:ln>
+          <a:effectLst/>
+        </p:spPr>
+        <p:style>
+          <a:lnRef idx="1">
+            <a:schemeClr val="accent1"/>
+          </a:lnRef>
+          <a:fillRef idx="3">
+            <a:schemeClr val="accent1"/>
+          </a:fillRef>
+          <a:effectRef idx="2">
+            <a:schemeClr val="accent1"/>
+          </a:effectRef>
+          <a:fontRef idx="minor">
+            <a:schemeClr val="lt1"/>
+          </a:fontRef>
+        </p:style>
+        <p:txBody>
+          <a:bodyPr rtlCol="0" anchor="ctr" wrap="square"/>
+          <a:lstStyle/>
+          <a:p>
+            <a:pPr algn="ctr"/>
+          </a:p>
+        </p:txBody>
+      </p:sp>
+      <p:pic>
+        <p:nvPicPr>
+          <p:cNvPr id="12" name="college-logo" descr="logo-full.png"/>
+          <p:cNvPicPr>
+            <a:picLocks noChangeAspect="1"/>
+          </p:cNvPicPr>
+          <p:nvPr/>
+        </p:nvPicPr>
+        <p:blipFill>
+          <a:blip r:embed="rId2"/>
+          <a:stretch>
+            <a:fillRect/>
+          </a:stretch>
+        </p:blipFill>
+        <p:spPr>
+          <a:xfrm>
+            <a:off x="9631062" y="658368"/>
+            <a:ext cx="1755961" cy="749808"/>
+          </a:xfrm>
+          <a:prstGeom prst="rect">
+            <a:avLst/>
+          </a:prstGeom>
+        </p:spPr>
+      </p:pic>
     </p:spTree>
   </p:cSld>
   <p:clrMapOvr>
@@ -26568,9 +27416,33 @@
           </a:p>
         </p:txBody>
       </p:sp>
-      <p:sp>
-        <p:nvSpPr>
-          <p:cNvPr id="3" name="TextBox 2"/>
+      <p:pic>
+        <p:nvPicPr>
+          <p:cNvPr id="3" name="college-logo" descr="logo-mark.png"/>
+          <p:cNvPicPr>
+            <a:picLocks noChangeAspect="1"/>
+          </p:cNvPicPr>
+          <p:nvPr/>
+        </p:nvPicPr>
+        <p:blipFill>
+          <a:blip r:embed="rId2"/>
+          <a:stretch>
+            <a:fillRect/>
+          </a:stretch>
+        </p:blipFill>
+        <p:spPr>
+          <a:xfrm>
+            <a:off x="11203333" y="6199632"/>
+            <a:ext cx="275129" cy="310896"/>
+          </a:xfrm>
+          <a:prstGeom prst="rect">
+            <a:avLst/>
+          </a:prstGeom>
+        </p:spPr>
+      </p:pic>
+      <p:sp>
+        <p:nvSpPr>
+          <p:cNvPr id="4" name="TextBox 3"/>
           <p:cNvSpPr txBox="1"/>
           <p:nvPr/>
         </p:nvSpPr>
@@ -26639,13 +27511,13 @@
       </p:sp>
       <p:sp>
         <p:nvSpPr>
-          <p:cNvPr id="4" name="TextBox 3"/>
+          <p:cNvPr id="5" name="TextBox 4"/>
           <p:cNvSpPr txBox="1"/>
           <p:nvPr/>
         </p:nvSpPr>
         <p:spPr>
           <a:xfrm>
-            <a:off x="8826703" y="6272784"/>
+            <a:off x="8240677" y="6272784"/>
             <a:ext cx="2651760" cy="219456"/>
           </a:xfrm>
           <a:prstGeom prst="rect">
@@ -26708,7 +27580,7 @@
       </p:sp>
       <p:sp>
         <p:nvSpPr>
-          <p:cNvPr id="5" name="TextBox 4"/>
+          <p:cNvPr id="6" name="TextBox 5"/>
           <p:cNvSpPr txBox="1"/>
           <p:nvPr/>
         </p:nvSpPr>
@@ -26755,7 +27627,7 @@
       </p:sp>
       <p:sp>
         <p:nvSpPr>
-          <p:cNvPr id="6" name="TextBox 5"/>
+          <p:cNvPr id="7" name="TextBox 6"/>
           <p:cNvSpPr txBox="1"/>
           <p:nvPr/>
         </p:nvSpPr>
@@ -26802,7 +27674,7 @@
       </p:sp>
       <p:sp>
         <p:nvSpPr>
-          <p:cNvPr id="7" name="Rectangle 6"/>
+          <p:cNvPr id="8" name="Rectangle 7"/>
           <p:cNvSpPr/>
           <p:nvPr/>
         </p:nvSpPr>
@@ -26846,7 +27718,7 @@
       </p:sp>
       <p:sp>
         <p:nvSpPr>
-          <p:cNvPr id="8" name="TextBox 7"/>
+          <p:cNvPr id="9" name="TextBox 8"/>
           <p:cNvSpPr txBox="1"/>
           <p:nvPr/>
         </p:nvSpPr>
@@ -26893,7 +27765,7 @@
       </p:sp>
       <p:sp>
         <p:nvSpPr>
-          <p:cNvPr id="9" name="Rounded Rectangle 8"/>
+          <p:cNvPr id="10" name="Rounded Rectangle 9"/>
           <p:cNvSpPr/>
           <p:nvPr/>
         </p:nvSpPr>
@@ -26939,7 +27811,7 @@
       </p:sp>
       <p:sp>
         <p:nvSpPr>
-          <p:cNvPr id="10" name="Rectangle 9"/>
+          <p:cNvPr id="11" name="Rectangle 10"/>
           <p:cNvSpPr/>
           <p:nvPr/>
         </p:nvSpPr>
@@ -26983,7 +27855,7 @@
       </p:sp>
       <p:sp>
         <p:nvSpPr>
-          <p:cNvPr id="11" name="Oval 10"/>
+          <p:cNvPr id="12" name="Oval 11"/>
           <p:cNvSpPr/>
           <p:nvPr/>
         </p:nvSpPr>
@@ -27027,7 +27899,7 @@
       </p:sp>
       <p:sp>
         <p:nvSpPr>
-          <p:cNvPr id="12" name="TextBox 11"/>
+          <p:cNvPr id="13" name="TextBox 12"/>
           <p:cNvSpPr txBox="1"/>
           <p:nvPr/>
         </p:nvSpPr>
@@ -27074,7 +27946,7 @@
       </p:sp>
       <p:sp>
         <p:nvSpPr>
-          <p:cNvPr id="13" name="TextBox 12"/>
+          <p:cNvPr id="14" name="TextBox 13"/>
           <p:cNvSpPr txBox="1"/>
           <p:nvPr/>
         </p:nvSpPr>
@@ -27121,7 +27993,7 @@
       </p:sp>
       <p:sp>
         <p:nvSpPr>
-          <p:cNvPr id="14" name="TextBox 13"/>
+          <p:cNvPr id="15" name="TextBox 14"/>
           <p:cNvSpPr txBox="1"/>
           <p:nvPr/>
         </p:nvSpPr>
@@ -27192,7 +28064,7 @@
       </p:sp>
       <p:sp>
         <p:nvSpPr>
-          <p:cNvPr id="15" name="Rounded Rectangle 14"/>
+          <p:cNvPr id="16" name="Rounded Rectangle 15"/>
           <p:cNvSpPr/>
           <p:nvPr/>
         </p:nvSpPr>
@@ -27238,7 +28110,7 @@
       </p:sp>
       <p:sp>
         <p:nvSpPr>
-          <p:cNvPr id="16" name="Rectangle 15"/>
+          <p:cNvPr id="17" name="Rectangle 16"/>
           <p:cNvSpPr/>
           <p:nvPr/>
         </p:nvSpPr>
@@ -27282,7 +28154,7 @@
       </p:sp>
       <p:sp>
         <p:nvSpPr>
-          <p:cNvPr id="17" name="Oval 16"/>
+          <p:cNvPr id="18" name="Oval 17"/>
           <p:cNvSpPr/>
           <p:nvPr/>
         </p:nvSpPr>
@@ -27326,7 +28198,7 @@
       </p:sp>
       <p:sp>
         <p:nvSpPr>
-          <p:cNvPr id="18" name="TextBox 17"/>
+          <p:cNvPr id="19" name="TextBox 18"/>
           <p:cNvSpPr txBox="1"/>
           <p:nvPr/>
         </p:nvSpPr>
@@ -27373,7 +28245,7 @@
       </p:sp>
       <p:sp>
         <p:nvSpPr>
-          <p:cNvPr id="19" name="TextBox 18"/>
+          <p:cNvPr id="20" name="TextBox 19"/>
           <p:cNvSpPr txBox="1"/>
           <p:nvPr/>
         </p:nvSpPr>
@@ -27420,7 +28292,7 @@
       </p:sp>
       <p:sp>
         <p:nvSpPr>
-          <p:cNvPr id="20" name="TextBox 19"/>
+          <p:cNvPr id="21" name="TextBox 20"/>
           <p:cNvSpPr txBox="1"/>
           <p:nvPr/>
         </p:nvSpPr>
@@ -27491,7 +28363,7 @@
       </p:sp>
       <p:sp>
         <p:nvSpPr>
-          <p:cNvPr id="21" name="Rounded Rectangle 20"/>
+          <p:cNvPr id="22" name="Rounded Rectangle 21"/>
           <p:cNvSpPr/>
           <p:nvPr/>
         </p:nvSpPr>
@@ -27537,7 +28409,7 @@
       </p:sp>
       <p:sp>
         <p:nvSpPr>
-          <p:cNvPr id="22" name="Rectangle 21"/>
+          <p:cNvPr id="23" name="Rectangle 22"/>
           <p:cNvSpPr/>
           <p:nvPr/>
         </p:nvSpPr>
@@ -27581,7 +28453,7 @@
       </p:sp>
       <p:sp>
         <p:nvSpPr>
-          <p:cNvPr id="23" name="Oval 22"/>
+          <p:cNvPr id="24" name="Oval 23"/>
           <p:cNvSpPr/>
           <p:nvPr/>
         </p:nvSpPr>
@@ -27625,7 +28497,7 @@
       </p:sp>
       <p:sp>
         <p:nvSpPr>
-          <p:cNvPr id="24" name="TextBox 23"/>
+          <p:cNvPr id="25" name="TextBox 24"/>
           <p:cNvSpPr txBox="1"/>
           <p:nvPr/>
         </p:nvSpPr>
@@ -27672,7 +28544,7 @@
       </p:sp>
       <p:sp>
         <p:nvSpPr>
-          <p:cNvPr id="25" name="TextBox 24"/>
+          <p:cNvPr id="26" name="TextBox 25"/>
           <p:cNvSpPr txBox="1"/>
           <p:nvPr/>
         </p:nvSpPr>
@@ -27719,7 +28591,7 @@
       </p:sp>
       <p:sp>
         <p:nvSpPr>
-          <p:cNvPr id="26" name="TextBox 25"/>
+          <p:cNvPr id="27" name="TextBox 26"/>
           <p:cNvSpPr txBox="1"/>
           <p:nvPr/>
         </p:nvSpPr>
@@ -27850,9 +28722,33 @@
           </a:p>
         </p:txBody>
       </p:sp>
-      <p:sp>
-        <p:nvSpPr>
-          <p:cNvPr id="3" name="TextBox 2"/>
+      <p:pic>
+        <p:nvPicPr>
+          <p:cNvPr id="3" name="college-logo" descr="logo-mark.png"/>
+          <p:cNvPicPr>
+            <a:picLocks noChangeAspect="1"/>
+          </p:cNvPicPr>
+          <p:nvPr/>
+        </p:nvPicPr>
+        <p:blipFill>
+          <a:blip r:embed="rId2"/>
+          <a:stretch>
+            <a:fillRect/>
+          </a:stretch>
+        </p:blipFill>
+        <p:spPr>
+          <a:xfrm>
+            <a:off x="11203333" y="6199632"/>
+            <a:ext cx="275129" cy="310896"/>
+          </a:xfrm>
+          <a:prstGeom prst="rect">
+            <a:avLst/>
+          </a:prstGeom>
+        </p:spPr>
+      </p:pic>
+      <p:sp>
+        <p:nvSpPr>
+          <p:cNvPr id="4" name="TextBox 3"/>
           <p:cNvSpPr txBox="1"/>
           <p:nvPr/>
         </p:nvSpPr>
@@ -27921,13 +28817,13 @@
       </p:sp>
       <p:sp>
         <p:nvSpPr>
-          <p:cNvPr id="4" name="TextBox 3"/>
+          <p:cNvPr id="5" name="TextBox 4"/>
           <p:cNvSpPr txBox="1"/>
           <p:nvPr/>
         </p:nvSpPr>
         <p:spPr>
           <a:xfrm>
-            <a:off x="8826703" y="6272784"/>
+            <a:off x="8240677" y="6272784"/>
             <a:ext cx="2651760" cy="219456"/>
           </a:xfrm>
           <a:prstGeom prst="rect">
@@ -27990,7 +28886,7 @@
       </p:sp>
       <p:sp>
         <p:nvSpPr>
-          <p:cNvPr id="5" name="TextBox 4"/>
+          <p:cNvPr id="6" name="TextBox 5"/>
           <p:cNvSpPr txBox="1"/>
           <p:nvPr/>
         </p:nvSpPr>
@@ -28037,7 +28933,7 @@
       </p:sp>
       <p:sp>
         <p:nvSpPr>
-          <p:cNvPr id="6" name="TextBox 5"/>
+          <p:cNvPr id="7" name="TextBox 6"/>
           <p:cNvSpPr txBox="1"/>
           <p:nvPr/>
         </p:nvSpPr>
@@ -28084,7 +28980,7 @@
       </p:sp>
       <p:sp>
         <p:nvSpPr>
-          <p:cNvPr id="7" name="Rectangle 6"/>
+          <p:cNvPr id="8" name="Rectangle 7"/>
           <p:cNvSpPr/>
           <p:nvPr/>
         </p:nvSpPr>
@@ -28128,7 +29024,7 @@
       </p:sp>
       <p:sp>
         <p:nvSpPr>
-          <p:cNvPr id="8" name="TextBox 7"/>
+          <p:cNvPr id="9" name="TextBox 8"/>
           <p:cNvSpPr txBox="1"/>
           <p:nvPr/>
         </p:nvSpPr>
@@ -28175,7 +29071,7 @@
       </p:sp>
       <p:sp>
         <p:nvSpPr>
-          <p:cNvPr id="9" name="Rounded Rectangle 8"/>
+          <p:cNvPr id="10" name="Rounded Rectangle 9"/>
           <p:cNvSpPr/>
           <p:nvPr/>
         </p:nvSpPr>
@@ -28229,7 +29125,7 @@
       </p:sp>
       <p:sp>
         <p:nvSpPr>
-          <p:cNvPr id="10" name="Rectangle 9"/>
+          <p:cNvPr id="11" name="Rectangle 10"/>
           <p:cNvSpPr/>
           <p:nvPr/>
         </p:nvSpPr>
@@ -28273,7 +29169,7 @@
       </p:sp>
       <p:sp>
         <p:nvSpPr>
-          <p:cNvPr id="11" name="TextBox 10"/>
+          <p:cNvPr id="12" name="TextBox 11"/>
           <p:cNvSpPr txBox="1"/>
           <p:nvPr/>
         </p:nvSpPr>
@@ -28320,7 +29216,7 @@
       </p:sp>
       <p:sp>
         <p:nvSpPr>
-          <p:cNvPr id="12" name="TextBox 11"/>
+          <p:cNvPr id="13" name="TextBox 12"/>
           <p:cNvSpPr txBox="1"/>
           <p:nvPr/>
         </p:nvSpPr>
@@ -28367,7 +29263,7 @@
       </p:sp>
       <p:sp>
         <p:nvSpPr>
-          <p:cNvPr id="13" name="Rounded Rectangle 12"/>
+          <p:cNvPr id="14" name="Rounded Rectangle 13"/>
           <p:cNvSpPr/>
           <p:nvPr/>
         </p:nvSpPr>
@@ -28421,7 +29317,7 @@
       </p:sp>
       <p:sp>
         <p:nvSpPr>
-          <p:cNvPr id="14" name="Rectangle 13"/>
+          <p:cNvPr id="15" name="Rectangle 14"/>
           <p:cNvSpPr/>
           <p:nvPr/>
         </p:nvSpPr>
@@ -28465,7 +29361,7 @@
       </p:sp>
       <p:sp>
         <p:nvSpPr>
-          <p:cNvPr id="15" name="TextBox 14"/>
+          <p:cNvPr id="16" name="TextBox 15"/>
           <p:cNvSpPr txBox="1"/>
           <p:nvPr/>
         </p:nvSpPr>
@@ -28512,7 +29408,7 @@
       </p:sp>
       <p:sp>
         <p:nvSpPr>
-          <p:cNvPr id="16" name="TextBox 15"/>
+          <p:cNvPr id="17" name="TextBox 16"/>
           <p:cNvSpPr txBox="1"/>
           <p:nvPr/>
         </p:nvSpPr>
@@ -28559,7 +29455,7 @@
       </p:sp>
       <p:sp>
         <p:nvSpPr>
-          <p:cNvPr id="17" name="Rounded Rectangle 16"/>
+          <p:cNvPr id="18" name="Rounded Rectangle 17"/>
           <p:cNvSpPr/>
           <p:nvPr/>
         </p:nvSpPr>
@@ -28613,7 +29509,7 @@
       </p:sp>
       <p:sp>
         <p:nvSpPr>
-          <p:cNvPr id="18" name="Rectangle 17"/>
+          <p:cNvPr id="19" name="Rectangle 18"/>
           <p:cNvSpPr/>
           <p:nvPr/>
         </p:nvSpPr>
@@ -28657,7 +29553,7 @@
       </p:sp>
       <p:sp>
         <p:nvSpPr>
-          <p:cNvPr id="19" name="TextBox 18"/>
+          <p:cNvPr id="20" name="TextBox 19"/>
           <p:cNvSpPr txBox="1"/>
           <p:nvPr/>
         </p:nvSpPr>
@@ -28704,7 +29600,7 @@
       </p:sp>
       <p:sp>
         <p:nvSpPr>
-          <p:cNvPr id="20" name="TextBox 19"/>
+          <p:cNvPr id="21" name="TextBox 20"/>
           <p:cNvSpPr txBox="1"/>
           <p:nvPr/>
         </p:nvSpPr>
@@ -28751,7 +29647,7 @@
       </p:sp>
       <p:sp>
         <p:nvSpPr>
-          <p:cNvPr id="21" name="Rounded Rectangle 20"/>
+          <p:cNvPr id="22" name="Rounded Rectangle 21"/>
           <p:cNvSpPr/>
           <p:nvPr/>
         </p:nvSpPr>
@@ -28805,7 +29701,7 @@
       </p:sp>
       <p:sp>
         <p:nvSpPr>
-          <p:cNvPr id="22" name="Rectangle 21"/>
+          <p:cNvPr id="23" name="Rectangle 22"/>
           <p:cNvSpPr/>
           <p:nvPr/>
         </p:nvSpPr>
@@ -28849,7 +29745,7 @@
       </p:sp>
       <p:sp>
         <p:nvSpPr>
-          <p:cNvPr id="23" name="TextBox 22"/>
+          <p:cNvPr id="24" name="TextBox 23"/>
           <p:cNvSpPr txBox="1"/>
           <p:nvPr/>
         </p:nvSpPr>
@@ -28896,7 +29792,7 @@
       </p:sp>
       <p:sp>
         <p:nvSpPr>
-          <p:cNvPr id="24" name="TextBox 23"/>
+          <p:cNvPr id="25" name="TextBox 24"/>
           <p:cNvSpPr txBox="1"/>
           <p:nvPr/>
         </p:nvSpPr>
@@ -29003,9 +29899,33 @@
           </a:p>
         </p:txBody>
       </p:sp>
-      <p:sp>
-        <p:nvSpPr>
-          <p:cNvPr id="3" name="TextBox 2"/>
+      <p:pic>
+        <p:nvPicPr>
+          <p:cNvPr id="3" name="college-logo" descr="logo-mark.png"/>
+          <p:cNvPicPr>
+            <a:picLocks noChangeAspect="1"/>
+          </p:cNvPicPr>
+          <p:nvPr/>
+        </p:nvPicPr>
+        <p:blipFill>
+          <a:blip r:embed="rId2"/>
+          <a:stretch>
+            <a:fillRect/>
+          </a:stretch>
+        </p:blipFill>
+        <p:spPr>
+          <a:xfrm>
+            <a:off x="11203333" y="6199632"/>
+            <a:ext cx="275129" cy="310896"/>
+          </a:xfrm>
+          <a:prstGeom prst="rect">
+            <a:avLst/>
+          </a:prstGeom>
+        </p:spPr>
+      </p:pic>
+      <p:sp>
+        <p:nvSpPr>
+          <p:cNvPr id="4" name="TextBox 3"/>
           <p:cNvSpPr txBox="1"/>
           <p:nvPr/>
         </p:nvSpPr>
@@ -29074,13 +29994,13 @@
       </p:sp>
       <p:sp>
         <p:nvSpPr>
-          <p:cNvPr id="4" name="TextBox 3"/>
+          <p:cNvPr id="5" name="TextBox 4"/>
           <p:cNvSpPr txBox="1"/>
           <p:nvPr/>
         </p:nvSpPr>
         <p:spPr>
           <a:xfrm>
-            <a:off x="8826703" y="6272784"/>
+            <a:off x="8240677" y="6272784"/>
             <a:ext cx="2651760" cy="219456"/>
           </a:xfrm>
           <a:prstGeom prst="rect">
@@ -29143,7 +30063,7 @@
       </p:sp>
       <p:sp>
         <p:nvSpPr>
-          <p:cNvPr id="5" name="TextBox 4"/>
+          <p:cNvPr id="6" name="TextBox 5"/>
           <p:cNvSpPr txBox="1"/>
           <p:nvPr/>
         </p:nvSpPr>
@@ -29190,7 +30110,7 @@
       </p:sp>
       <p:sp>
         <p:nvSpPr>
-          <p:cNvPr id="6" name="TextBox 5"/>
+          <p:cNvPr id="7" name="TextBox 6"/>
           <p:cNvSpPr txBox="1"/>
           <p:nvPr/>
         </p:nvSpPr>
@@ -29237,7 +30157,7 @@
       </p:sp>
       <p:sp>
         <p:nvSpPr>
-          <p:cNvPr id="7" name="Rectangle 6"/>
+          <p:cNvPr id="8" name="Rectangle 7"/>
           <p:cNvSpPr/>
           <p:nvPr/>
         </p:nvSpPr>
@@ -29281,7 +30201,7 @@
       </p:sp>
       <p:sp>
         <p:nvSpPr>
-          <p:cNvPr id="8" name="TextBox 7"/>
+          <p:cNvPr id="9" name="TextBox 8"/>
           <p:cNvSpPr txBox="1"/>
           <p:nvPr/>
         </p:nvSpPr>
@@ -29328,7 +30248,7 @@
       </p:sp>
       <p:sp>
         <p:nvSpPr>
-          <p:cNvPr id="9" name="Rectangle 8"/>
+          <p:cNvPr id="10" name="Rectangle 9"/>
           <p:cNvSpPr/>
           <p:nvPr/>
         </p:nvSpPr>
@@ -29372,7 +30292,7 @@
       </p:sp>
       <p:sp>
         <p:nvSpPr>
-          <p:cNvPr id="10" name="Oval 9"/>
+          <p:cNvPr id="11" name="Oval 10"/>
           <p:cNvSpPr/>
           <p:nvPr/>
         </p:nvSpPr>
@@ -29416,7 +30336,7 @@
       </p:sp>
       <p:sp>
         <p:nvSpPr>
-          <p:cNvPr id="11" name="TextBox 10"/>
+          <p:cNvPr id="12" name="TextBox 11"/>
           <p:cNvSpPr txBox="1"/>
           <p:nvPr/>
         </p:nvSpPr>
@@ -29463,7 +30383,7 @@
       </p:sp>
       <p:sp>
         <p:nvSpPr>
-          <p:cNvPr id="12" name="Rounded Rectangle 11"/>
+          <p:cNvPr id="13" name="Rounded Rectangle 12"/>
           <p:cNvSpPr/>
           <p:nvPr/>
         </p:nvSpPr>
@@ -29511,7 +30431,7 @@
       </p:sp>
       <p:sp>
         <p:nvSpPr>
-          <p:cNvPr id="13" name="TextBox 12"/>
+          <p:cNvPr id="14" name="TextBox 13"/>
           <p:cNvSpPr txBox="1"/>
           <p:nvPr/>
         </p:nvSpPr>
@@ -29558,7 +30478,7 @@
       </p:sp>
       <p:sp>
         <p:nvSpPr>
-          <p:cNvPr id="14" name="TextBox 13"/>
+          <p:cNvPr id="15" name="TextBox 14"/>
           <p:cNvSpPr txBox="1"/>
           <p:nvPr/>
         </p:nvSpPr>
@@ -29605,7 +30525,7 @@
       </p:sp>
       <p:sp>
         <p:nvSpPr>
-          <p:cNvPr id="15" name="Oval 14"/>
+          <p:cNvPr id="16" name="Oval 15"/>
           <p:cNvSpPr/>
           <p:nvPr/>
         </p:nvSpPr>
@@ -29649,7 +30569,7 @@
       </p:sp>
       <p:sp>
         <p:nvSpPr>
-          <p:cNvPr id="16" name="TextBox 15"/>
+          <p:cNvPr id="17" name="TextBox 16"/>
           <p:cNvSpPr txBox="1"/>
           <p:nvPr/>
         </p:nvSpPr>
@@ -29696,7 +30616,7 @@
       </p:sp>
       <p:sp>
         <p:nvSpPr>
-          <p:cNvPr id="17" name="Rounded Rectangle 16"/>
+          <p:cNvPr id="18" name="Rounded Rectangle 17"/>
           <p:cNvSpPr/>
           <p:nvPr/>
         </p:nvSpPr>
@@ -29744,7 +30664,7 @@
       </p:sp>
       <p:sp>
         <p:nvSpPr>
-          <p:cNvPr id="18" name="TextBox 17"/>
+          <p:cNvPr id="19" name="TextBox 18"/>
           <p:cNvSpPr txBox="1"/>
           <p:nvPr/>
         </p:nvSpPr>
@@ -29791,7 +30711,7 @@
       </p:sp>
       <p:sp>
         <p:nvSpPr>
-          <p:cNvPr id="19" name="TextBox 18"/>
+          <p:cNvPr id="20" name="TextBox 19"/>
           <p:cNvSpPr txBox="1"/>
           <p:nvPr/>
         </p:nvSpPr>
@@ -29838,7 +30758,7 @@
       </p:sp>
       <p:sp>
         <p:nvSpPr>
-          <p:cNvPr id="20" name="Oval 19"/>
+          <p:cNvPr id="21" name="Oval 20"/>
           <p:cNvSpPr/>
           <p:nvPr/>
         </p:nvSpPr>
@@ -29882,7 +30802,7 @@
       </p:sp>
       <p:sp>
         <p:nvSpPr>
-          <p:cNvPr id="21" name="TextBox 20"/>
+          <p:cNvPr id="22" name="TextBox 21"/>
           <p:cNvSpPr txBox="1"/>
           <p:nvPr/>
         </p:nvSpPr>
@@ -29929,7 +30849,7 @@
       </p:sp>
       <p:sp>
         <p:nvSpPr>
-          <p:cNvPr id="22" name="Rounded Rectangle 21"/>
+          <p:cNvPr id="23" name="Rounded Rectangle 22"/>
           <p:cNvSpPr/>
           <p:nvPr/>
         </p:nvSpPr>
@@ -29977,7 +30897,7 @@
       </p:sp>
       <p:sp>
         <p:nvSpPr>
-          <p:cNvPr id="23" name="TextBox 22"/>
+          <p:cNvPr id="24" name="TextBox 23"/>
           <p:cNvSpPr txBox="1"/>
           <p:nvPr/>
         </p:nvSpPr>
@@ -30024,7 +30944,7 @@
       </p:sp>
       <p:sp>
         <p:nvSpPr>
-          <p:cNvPr id="24" name="TextBox 23"/>
+          <p:cNvPr id="25" name="TextBox 24"/>
           <p:cNvSpPr txBox="1"/>
           <p:nvPr/>
         </p:nvSpPr>
@@ -30071,7 +30991,7 @@
       </p:sp>
       <p:sp>
         <p:nvSpPr>
-          <p:cNvPr id="25" name="Oval 24"/>
+          <p:cNvPr id="26" name="Oval 25"/>
           <p:cNvSpPr/>
           <p:nvPr/>
         </p:nvSpPr>
@@ -30115,7 +31035,7 @@
       </p:sp>
       <p:sp>
         <p:nvSpPr>
-          <p:cNvPr id="26" name="TextBox 25"/>
+          <p:cNvPr id="27" name="TextBox 26"/>
           <p:cNvSpPr txBox="1"/>
           <p:nvPr/>
         </p:nvSpPr>
@@ -30162,7 +31082,7 @@
       </p:sp>
       <p:sp>
         <p:nvSpPr>
-          <p:cNvPr id="27" name="Rounded Rectangle 26"/>
+          <p:cNvPr id="28" name="Rounded Rectangle 27"/>
           <p:cNvSpPr/>
           <p:nvPr/>
         </p:nvSpPr>
@@ -30210,7 +31130,7 @@
       </p:sp>
       <p:sp>
         <p:nvSpPr>
-          <p:cNvPr id="28" name="TextBox 27"/>
+          <p:cNvPr id="29" name="TextBox 28"/>
           <p:cNvSpPr txBox="1"/>
           <p:nvPr/>
         </p:nvSpPr>
@@ -30257,7 +31177,7 @@
       </p:sp>
       <p:sp>
         <p:nvSpPr>
-          <p:cNvPr id="29" name="TextBox 28"/>
+          <p:cNvPr id="30" name="TextBox 29"/>
           <p:cNvSpPr txBox="1"/>
           <p:nvPr/>
         </p:nvSpPr>
@@ -30304,7 +31224,7 @@
       </p:sp>
       <p:sp>
         <p:nvSpPr>
-          <p:cNvPr id="30" name="Rounded Rectangle 29"/>
+          <p:cNvPr id="31" name="Rounded Rectangle 30"/>
           <p:cNvSpPr/>
           <p:nvPr/>
         </p:nvSpPr>
@@ -30371,7 +31291,7 @@
       </p:sp>
       <p:sp>
         <p:nvSpPr>
-          <p:cNvPr id="31" name="Rectangle 30"/>
+          <p:cNvPr id="32" name="Rectangle 31"/>
           <p:cNvSpPr/>
           <p:nvPr/>
         </p:nvSpPr>

--- a/Unit 1 - Introduction to AI and Gen AI.pptx
+++ b/Unit 1 - Introduction to AI and Gen AI.pptx
@@ -4116,60 +4116,13 @@
       </p:pic>
       <p:sp>
         <p:nvSpPr>
-          <p:cNvPr id="9" name="TextBox 8"/>
-          <p:cNvSpPr txBox="1"/>
-          <p:nvPr/>
-        </p:nvSpPr>
-        <p:spPr>
-          <a:xfrm>
-            <a:off x="932688" y="1170432"/>
-            <a:ext cx="7223760" cy="274320"/>
-          </a:xfrm>
-          <a:prstGeom prst="rect">
-            <a:avLst/>
-          </a:prstGeom>
-          <a:noFill/>
-        </p:spPr>
-        <p:txBody>
-          <a:bodyPr wrap="square" lIns="0" rIns="0" tIns="0" bIns="0" anchor="t">
-            <a:spAutoFit/>
-          </a:bodyPr>
-          <a:lstStyle/>
-          <a:p>
-            <a:pPr algn="l">
-              <a:lnSpc>
-                <a:spcPct val="122000"/>
-              </a:lnSpc>
-              <a:spcBef>
-                <a:spcPts val="0"/>
-              </a:spcBef>
-              <a:spcAft>
-                <a:spcPts val="0"/>
-              </a:spcAft>
-            </a:pPr>
-            <a:r>
-              <a:rPr sz="1050" b="1" i="0" spc="220">
-                <a:solidFill>
-                  <a:srgbClr val="00B3A4"/>
-                </a:solidFill>
-                <a:latin typeface="Segoe UI"/>
-                <a:ea typeface="Segoe UI"/>
-                <a:cs typeface="Segoe UI"/>
-              </a:rPr>
-              <a:t>PGPM · SYSTEMS SPECIALISATION</a:t>
-            </a:r>
-          </a:p>
-        </p:txBody>
-      </p:sp>
-      <p:sp>
-        <p:nvSpPr>
-          <p:cNvPr id="10" name="Rounded Rectangle 9"/>
+          <p:cNvPr id="9" name="Rounded Rectangle 8"/>
           <p:cNvSpPr/>
           <p:nvPr/>
         </p:nvSpPr>
         <p:spPr>
           <a:xfrm>
-            <a:off x="932688" y="1627632"/>
+            <a:off x="932688" y="1572768"/>
             <a:ext cx="1481328" cy="384048"/>
           </a:xfrm>
           <a:prstGeom prst="roundRect">
@@ -4230,7 +4183,7 @@
       </p:sp>
       <p:sp>
         <p:nvSpPr>
-          <p:cNvPr id="11" name="TextBox 10"/>
+          <p:cNvPr id="10" name="TextBox 9"/>
           <p:cNvSpPr txBox="1"/>
           <p:nvPr/>
         </p:nvSpPr>
@@ -4277,7 +4230,7 @@
       </p:sp>
       <p:sp>
         <p:nvSpPr>
-          <p:cNvPr id="12" name="Rectangle 11"/>
+          <p:cNvPr id="11" name="Rectangle 10"/>
           <p:cNvSpPr/>
           <p:nvPr/>
         </p:nvSpPr>
@@ -4321,7 +4274,7 @@
       </p:sp>
       <p:sp>
         <p:nvSpPr>
-          <p:cNvPr id="13" name="TextBox 12"/>
+          <p:cNvPr id="12" name="TextBox 11"/>
           <p:cNvSpPr txBox="1"/>
           <p:nvPr/>
         </p:nvSpPr>
@@ -4368,7 +4321,7 @@
       </p:sp>
       <p:sp>
         <p:nvSpPr>
-          <p:cNvPr id="14" name="Rounded Rectangle 13"/>
+          <p:cNvPr id="13" name="Rounded Rectangle 12"/>
           <p:cNvSpPr/>
           <p:nvPr/>
         </p:nvSpPr>
@@ -4435,7 +4388,7 @@
       </p:sp>
       <p:sp>
         <p:nvSpPr>
-          <p:cNvPr id="15" name="Rounded Rectangle 14"/>
+          <p:cNvPr id="14" name="Rounded Rectangle 13"/>
           <p:cNvSpPr/>
           <p:nvPr/>
         </p:nvSpPr>
@@ -4502,7 +4455,7 @@
       </p:sp>
       <p:sp>
         <p:nvSpPr>
-          <p:cNvPr id="16" name="Rounded Rectangle 15"/>
+          <p:cNvPr id="15" name="Rounded Rectangle 14"/>
           <p:cNvSpPr/>
           <p:nvPr/>
         </p:nvSpPr>
@@ -4569,7 +4522,7 @@
       </p:sp>
       <p:sp>
         <p:nvSpPr>
-          <p:cNvPr id="17" name="Rounded Rectangle 16"/>
+          <p:cNvPr id="16" name="Rounded Rectangle 15"/>
           <p:cNvSpPr/>
           <p:nvPr/>
         </p:nvSpPr>
@@ -4636,7 +4589,7 @@
       </p:sp>
       <p:sp>
         <p:nvSpPr>
-          <p:cNvPr id="18" name="Rectangle 17"/>
+          <p:cNvPr id="17" name="Rectangle 16"/>
           <p:cNvSpPr/>
           <p:nvPr/>
         </p:nvSpPr>
@@ -4680,7 +4633,7 @@
       </p:sp>
       <p:sp>
         <p:nvSpPr>
-          <p:cNvPr id="19" name="TextBox 18"/>
+          <p:cNvPr id="18" name="TextBox 17"/>
           <p:cNvSpPr txBox="1"/>
           <p:nvPr/>
         </p:nvSpPr>
@@ -4767,53 +4720,6 @@
                 <a:cs typeface="Segoe UI"/>
               </a:rPr>
               <a:t>OSI2509030</a:t>
-            </a:r>
-          </a:p>
-        </p:txBody>
-      </p:sp>
-      <p:sp>
-        <p:nvSpPr>
-          <p:cNvPr id="20" name="TextBox 19"/>
-          <p:cNvSpPr txBox="1"/>
-          <p:nvPr/>
-        </p:nvSpPr>
-        <p:spPr>
-          <a:xfrm>
-            <a:off x="7180783" y="5870448"/>
-            <a:ext cx="4206240" cy="640080"/>
-          </a:xfrm>
-          <a:prstGeom prst="rect">
-            <a:avLst/>
-          </a:prstGeom>
-          <a:noFill/>
-        </p:spPr>
-        <p:txBody>
-          <a:bodyPr wrap="square" lIns="0" rIns="0" tIns="0" bIns="0" anchor="t">
-            <a:spAutoFit/>
-          </a:bodyPr>
-          <a:lstStyle/>
-          <a:p>
-            <a:pPr algn="r">
-              <a:lnSpc>
-                <a:spcPct val="134000"/>
-              </a:lnSpc>
-              <a:spcBef>
-                <a:spcPts val="0"/>
-              </a:spcBef>
-              <a:spcAft>
-                <a:spcPts val="0"/>
-              </a:spcAft>
-            </a:pPr>
-            <a:r>
-              <a:rPr sz="1000" b="1" i="0">
-                <a:solidFill>
-                  <a:srgbClr val="C5D2E8"/>
-                </a:solidFill>
-                <a:latin typeface="Segoe UI"/>
-                <a:ea typeface="Segoe UI"/>
-                <a:cs typeface="Segoe UI"/>
-              </a:rPr>
-              <a:t>Unit 1 of 5</a:t>
             </a:r>
           </a:p>
         </p:txBody>
@@ -5211,54 +5117,7 @@
       </p:sp>
       <p:sp>
         <p:nvSpPr>
-          <p:cNvPr id="10" name="TextBox 9"/>
-          <p:cNvSpPr txBox="1"/>
-          <p:nvPr/>
-        </p:nvSpPr>
-        <p:spPr>
-          <a:xfrm>
-            <a:off x="987552" y="5943600"/>
-            <a:ext cx="6400800" cy="274320"/>
-          </a:xfrm>
-          <a:prstGeom prst="rect">
-            <a:avLst/>
-          </a:prstGeom>
-          <a:noFill/>
-        </p:spPr>
-        <p:txBody>
-          <a:bodyPr wrap="square" lIns="0" rIns="0" tIns="0" bIns="0" anchor="t">
-            <a:spAutoFit/>
-          </a:bodyPr>
-          <a:lstStyle/>
-          <a:p>
-            <a:pPr algn="l">
-              <a:lnSpc>
-                <a:spcPct val="122000"/>
-              </a:lnSpc>
-              <a:spcBef>
-                <a:spcPts val="0"/>
-              </a:spcBef>
-              <a:spcAft>
-                <a:spcPts val="0"/>
-              </a:spcAft>
-            </a:pPr>
-            <a:r>
-              <a:rPr sz="900" b="1" i="0" spc="160">
-                <a:solidFill>
-                  <a:srgbClr val="6B7FA6"/>
-                </a:solidFill>
-                <a:latin typeface="Segoe UI"/>
-                <a:ea typeface="Segoe UI"/>
-                <a:cs typeface="Segoe UI"/>
-              </a:rPr>
-              <a:t>UNIT 1  ·  INTRODUCTION OF AI AND GEN AI</a:t>
-            </a:r>
-          </a:p>
-        </p:txBody>
-      </p:sp>
-      <p:sp>
-        <p:nvSpPr>
-          <p:cNvPr id="11" name="logo-plate"/>
+          <p:cNvPr id="10" name="logo-plate"/>
           <p:cNvSpPr/>
           <p:nvPr/>
         </p:nvSpPr>
@@ -5304,7 +5163,7 @@
       </p:sp>
       <p:pic>
         <p:nvPicPr>
-          <p:cNvPr id="12" name="college-logo" descr="logo-full.png"/>
+          <p:cNvPr id="11" name="college-logo" descr="logo-full.png"/>
           <p:cNvPicPr>
             <a:picLocks noChangeAspect="1"/>
           </p:cNvPicPr>
@@ -5420,8 +5279,77 @@
         </p:nvSpPr>
         <p:spPr>
           <a:xfrm>
-            <a:off x="713232" y="6272784"/>
-            <a:ext cx="5597920" cy="219456"/>
+            <a:off x="8240677" y="6272784"/>
+            <a:ext cx="2651760" cy="219456"/>
+          </a:xfrm>
+          <a:prstGeom prst="rect">
+            <a:avLst/>
+          </a:prstGeom>
+          <a:noFill/>
+        </p:spPr>
+        <p:txBody>
+          <a:bodyPr wrap="square" lIns="0" rIns="0" tIns="0" bIns="0" anchor="t">
+            <a:spAutoFit/>
+          </a:bodyPr>
+          <a:lstStyle/>
+          <a:p>
+            <a:pPr algn="r">
+              <a:lnSpc>
+                <a:spcPct val="122000"/>
+              </a:lnSpc>
+              <a:spcBef>
+                <a:spcPts val="0"/>
+              </a:spcBef>
+              <a:spcAft>
+                <a:spcPts val="0"/>
+              </a:spcAft>
+            </a:pPr>
+            <a:r>
+              <a:rPr sz="900" b="0" i="0">
+                <a:solidFill>
+                  <a:srgbClr val="636E85"/>
+                </a:solidFill>
+                <a:latin typeface="Segoe UI"/>
+                <a:ea typeface="Segoe UI"/>
+                <a:cs typeface="Segoe UI"/>
+              </a:rPr>
+              <a:t>Lingesh K  ·  OSI2509030</a:t>
+            </a:r>
+            <a:r>
+              <a:rPr sz="900" b="0" i="0">
+                <a:solidFill>
+                  <a:srgbClr val="141C2E"/>
+                </a:solidFill>
+                <a:latin typeface="Segoe UI"/>
+                <a:ea typeface="Segoe UI"/>
+                <a:cs typeface="Segoe UI"/>
+              </a:rPr>
+              <a:t>     </a:t>
+            </a:r>
+            <a:r>
+              <a:rPr sz="900" b="1" i="0">
+                <a:solidFill>
+                  <a:srgbClr val="0E1E3C"/>
+                </a:solidFill>
+                <a:latin typeface="Segoe UI"/>
+                <a:ea typeface="Segoe UI"/>
+                <a:cs typeface="Segoe UI"/>
+              </a:rPr>
+              <a:t>11</a:t>
+            </a:r>
+          </a:p>
+        </p:txBody>
+      </p:sp>
+      <p:sp>
+        <p:nvSpPr>
+          <p:cNvPr id="5" name="TextBox 4"/>
+          <p:cNvSpPr txBox="1"/>
+          <p:nvPr/>
+        </p:nvSpPr>
+        <p:spPr>
+          <a:xfrm>
+            <a:off x="713232" y="566928"/>
+            <a:ext cx="10765231" cy="219456"/>
           </a:xfrm>
           <a:prstGeom prst="rect">
             <a:avLst/>
@@ -5446,106 +5374,15 @@
               </a:spcAft>
             </a:pPr>
             <a:r>
-              <a:rPr sz="900" b="1" i="0">
-                <a:solidFill>
-                  <a:srgbClr val="0E1E3C"/>
-                </a:solidFill>
-                <a:latin typeface="Segoe UI"/>
-                <a:ea typeface="Segoe UI"/>
-                <a:cs typeface="Segoe UI"/>
-              </a:rPr>
-              <a:t>Unit 1</a:t>
-            </a:r>
-            <a:r>
-              <a:rPr sz="900" b="0" i="0">
-                <a:solidFill>
-                  <a:srgbClr val="939EB3"/>
-                </a:solidFill>
-                <a:latin typeface="Segoe UI"/>
-                <a:ea typeface="Segoe UI"/>
-                <a:cs typeface="Segoe UI"/>
-              </a:rPr>
-              <a:t>  ·  </a:t>
-            </a:r>
-            <a:r>
-              <a:rPr sz="900" b="0" i="0">
-                <a:solidFill>
-                  <a:srgbClr val="636E85"/>
-                </a:solidFill>
-                <a:latin typeface="Segoe UI"/>
-                <a:ea typeface="Segoe UI"/>
-                <a:cs typeface="Segoe UI"/>
-              </a:rPr>
-              <a:t>Introduction of AI and Gen AI</a:t>
-            </a:r>
-          </a:p>
-        </p:txBody>
-      </p:sp>
-      <p:sp>
-        <p:nvSpPr>
-          <p:cNvPr id="5" name="TextBox 4"/>
-          <p:cNvSpPr txBox="1"/>
-          <p:nvPr/>
-        </p:nvSpPr>
-        <p:spPr>
-          <a:xfrm>
-            <a:off x="8240677" y="6272784"/>
-            <a:ext cx="2651760" cy="219456"/>
-          </a:xfrm>
-          <a:prstGeom prst="rect">
-            <a:avLst/>
-          </a:prstGeom>
-          <a:noFill/>
-        </p:spPr>
-        <p:txBody>
-          <a:bodyPr wrap="square" lIns="0" rIns="0" tIns="0" bIns="0" anchor="t">
-            <a:spAutoFit/>
-          </a:bodyPr>
-          <a:lstStyle/>
-          <a:p>
-            <a:pPr algn="r">
-              <a:lnSpc>
-                <a:spcPct val="122000"/>
-              </a:lnSpc>
-              <a:spcBef>
-                <a:spcPts val="0"/>
-              </a:spcBef>
-              <a:spcAft>
-                <a:spcPts val="0"/>
-              </a:spcAft>
-            </a:pPr>
-            <a:r>
-              <a:rPr sz="900" b="0" i="0">
-                <a:solidFill>
-                  <a:srgbClr val="636E85"/>
-                </a:solidFill>
-                <a:latin typeface="Segoe UI"/>
-                <a:ea typeface="Segoe UI"/>
-                <a:cs typeface="Segoe UI"/>
-              </a:rPr>
-              <a:t>Lingesh K  ·  OSI2509030</a:t>
-            </a:r>
-            <a:r>
-              <a:rPr sz="900" b="0" i="0">
-                <a:solidFill>
-                  <a:srgbClr val="141C2E"/>
-                </a:solidFill>
-                <a:latin typeface="Segoe UI"/>
-                <a:ea typeface="Segoe UI"/>
-                <a:cs typeface="Segoe UI"/>
-              </a:rPr>
-              <a:t>     </a:t>
-            </a:r>
-            <a:r>
-              <a:rPr sz="900" b="1" i="0">
-                <a:solidFill>
-                  <a:srgbClr val="0E1E3C"/>
-                </a:solidFill>
-                <a:latin typeface="Segoe UI"/>
-                <a:ea typeface="Segoe UI"/>
-                <a:cs typeface="Segoe UI"/>
-              </a:rPr>
-              <a:t>11</a:t>
+              <a:rPr sz="950" b="1" i="0" spc="160">
+                <a:solidFill>
+                  <a:srgbClr val="745CE0"/>
+                </a:solidFill>
+                <a:latin typeface="Segoe UI"/>
+                <a:ea typeface="Segoe UI"/>
+                <a:cs typeface="Segoe UI"/>
+              </a:rPr>
+              <a:t>DEFINITION</a:t>
             </a:r>
           </a:p>
         </p:txBody>
@@ -5553,53 +5390,6 @@
       <p:sp>
         <p:nvSpPr>
           <p:cNvPr id="6" name="TextBox 5"/>
-          <p:cNvSpPr txBox="1"/>
-          <p:nvPr/>
-        </p:nvSpPr>
-        <p:spPr>
-          <a:xfrm>
-            <a:off x="713232" y="566928"/>
-            <a:ext cx="10765231" cy="219456"/>
-          </a:xfrm>
-          <a:prstGeom prst="rect">
-            <a:avLst/>
-          </a:prstGeom>
-          <a:noFill/>
-        </p:spPr>
-        <p:txBody>
-          <a:bodyPr wrap="square" lIns="0" rIns="0" tIns="0" bIns="0" anchor="t">
-            <a:spAutoFit/>
-          </a:bodyPr>
-          <a:lstStyle/>
-          <a:p>
-            <a:pPr algn="l">
-              <a:lnSpc>
-                <a:spcPct val="122000"/>
-              </a:lnSpc>
-              <a:spcBef>
-                <a:spcPts val="0"/>
-              </a:spcBef>
-              <a:spcAft>
-                <a:spcPts val="0"/>
-              </a:spcAft>
-            </a:pPr>
-            <a:r>
-              <a:rPr sz="950" b="1" i="0" spc="160">
-                <a:solidFill>
-                  <a:srgbClr val="745CE0"/>
-                </a:solidFill>
-                <a:latin typeface="Segoe UI"/>
-                <a:ea typeface="Segoe UI"/>
-                <a:cs typeface="Segoe UI"/>
-              </a:rPr>
-              <a:t>DEFINITION</a:t>
-            </a:r>
-          </a:p>
-        </p:txBody>
-      </p:sp>
-      <p:sp>
-        <p:nvSpPr>
-          <p:cNvPr id="7" name="TextBox 6"/>
           <p:cNvSpPr txBox="1"/>
           <p:nvPr/>
         </p:nvSpPr>
@@ -5646,7 +5436,7 @@
       </p:sp>
       <p:sp>
         <p:nvSpPr>
-          <p:cNvPr id="8" name="Rectangle 7"/>
+          <p:cNvPr id="7" name="Rectangle 6"/>
           <p:cNvSpPr/>
           <p:nvPr/>
         </p:nvSpPr>
@@ -5690,7 +5480,7 @@
       </p:sp>
       <p:sp>
         <p:nvSpPr>
-          <p:cNvPr id="9" name="TextBox 8"/>
+          <p:cNvPr id="8" name="TextBox 7"/>
           <p:cNvSpPr txBox="1"/>
           <p:nvPr/>
         </p:nvSpPr>
@@ -5737,7 +5527,7 @@
       </p:sp>
       <p:sp>
         <p:nvSpPr>
-          <p:cNvPr id="10" name="Rectangle 9"/>
+          <p:cNvPr id="9" name="Rectangle 8"/>
           <p:cNvSpPr/>
           <p:nvPr/>
         </p:nvSpPr>
@@ -5781,7 +5571,7 @@
       </p:sp>
       <p:sp>
         <p:nvSpPr>
-          <p:cNvPr id="11" name="Rounded Rectangle 10"/>
+          <p:cNvPr id="10" name="Rounded Rectangle 9"/>
           <p:cNvSpPr/>
           <p:nvPr/>
         </p:nvSpPr>
@@ -5827,7 +5617,7 @@
       </p:sp>
       <p:sp>
         <p:nvSpPr>
-          <p:cNvPr id="12" name="TextBox 11"/>
+          <p:cNvPr id="11" name="TextBox 10"/>
           <p:cNvSpPr txBox="1"/>
           <p:nvPr/>
         </p:nvSpPr>
@@ -5874,7 +5664,7 @@
       </p:sp>
       <p:sp>
         <p:nvSpPr>
-          <p:cNvPr id="13" name="Rounded Rectangle 12"/>
+          <p:cNvPr id="12" name="Rounded Rectangle 11"/>
           <p:cNvSpPr/>
           <p:nvPr/>
         </p:nvSpPr>
@@ -5920,7 +5710,7 @@
       </p:sp>
       <p:sp>
         <p:nvSpPr>
-          <p:cNvPr id="14" name="TextBox 13"/>
+          <p:cNvPr id="13" name="TextBox 12"/>
           <p:cNvSpPr txBox="1"/>
           <p:nvPr/>
         </p:nvSpPr>
@@ -5967,7 +5757,7 @@
       </p:sp>
       <p:sp>
         <p:nvSpPr>
-          <p:cNvPr id="15" name="Rounded Rectangle 14"/>
+          <p:cNvPr id="14" name="Rounded Rectangle 13"/>
           <p:cNvSpPr/>
           <p:nvPr/>
         </p:nvSpPr>
@@ -6013,7 +5803,7 @@
       </p:sp>
       <p:sp>
         <p:nvSpPr>
-          <p:cNvPr id="16" name="TextBox 15"/>
+          <p:cNvPr id="15" name="TextBox 14"/>
           <p:cNvSpPr txBox="1"/>
           <p:nvPr/>
         </p:nvSpPr>
@@ -6060,7 +5850,7 @@
       </p:sp>
       <p:sp>
         <p:nvSpPr>
-          <p:cNvPr id="17" name="Rounded Rectangle 16"/>
+          <p:cNvPr id="16" name="Rounded Rectangle 15"/>
           <p:cNvSpPr/>
           <p:nvPr/>
         </p:nvSpPr>
@@ -6106,7 +5896,7 @@
       </p:sp>
       <p:sp>
         <p:nvSpPr>
-          <p:cNvPr id="18" name="TextBox 17"/>
+          <p:cNvPr id="17" name="TextBox 16"/>
           <p:cNvSpPr txBox="1"/>
           <p:nvPr/>
         </p:nvSpPr>
@@ -6153,7 +5943,7 @@
       </p:sp>
       <p:sp>
         <p:nvSpPr>
-          <p:cNvPr id="19" name="Rounded Rectangle 18"/>
+          <p:cNvPr id="18" name="Rounded Rectangle 17"/>
           <p:cNvSpPr/>
           <p:nvPr/>
         </p:nvSpPr>
@@ -6199,7 +5989,7 @@
       </p:sp>
       <p:sp>
         <p:nvSpPr>
-          <p:cNvPr id="20" name="TextBox 19"/>
+          <p:cNvPr id="19" name="TextBox 18"/>
           <p:cNvSpPr txBox="1"/>
           <p:nvPr/>
         </p:nvSpPr>
@@ -6246,7 +6036,7 @@
       </p:sp>
       <p:sp>
         <p:nvSpPr>
-          <p:cNvPr id="21" name="Rounded Rectangle 20"/>
+          <p:cNvPr id="20" name="Rounded Rectangle 19"/>
           <p:cNvSpPr/>
           <p:nvPr/>
         </p:nvSpPr>
@@ -6300,7 +6090,7 @@
       </p:sp>
       <p:sp>
         <p:nvSpPr>
-          <p:cNvPr id="22" name="Rectangle 21"/>
+          <p:cNvPr id="21" name="Rectangle 20"/>
           <p:cNvSpPr/>
           <p:nvPr/>
         </p:nvSpPr>
@@ -6344,7 +6134,7 @@
       </p:sp>
       <p:sp>
         <p:nvSpPr>
-          <p:cNvPr id="23" name="TextBox 22"/>
+          <p:cNvPr id="22" name="TextBox 21"/>
           <p:cNvSpPr txBox="1"/>
           <p:nvPr/>
         </p:nvSpPr>
@@ -6391,7 +6181,7 @@
       </p:sp>
       <p:sp>
         <p:nvSpPr>
-          <p:cNvPr id="24" name="TextBox 23"/>
+          <p:cNvPr id="23" name="TextBox 22"/>
           <p:cNvSpPr txBox="1"/>
           <p:nvPr/>
         </p:nvSpPr>
@@ -6438,7 +6228,7 @@
       </p:sp>
       <p:sp>
         <p:nvSpPr>
-          <p:cNvPr id="25" name="Rounded Rectangle 24"/>
+          <p:cNvPr id="24" name="Rounded Rectangle 23"/>
           <p:cNvSpPr/>
           <p:nvPr/>
         </p:nvSpPr>
@@ -6492,7 +6282,7 @@
       </p:sp>
       <p:sp>
         <p:nvSpPr>
-          <p:cNvPr id="26" name="Rectangle 25"/>
+          <p:cNvPr id="25" name="Rectangle 24"/>
           <p:cNvSpPr/>
           <p:nvPr/>
         </p:nvSpPr>
@@ -6536,7 +6326,7 @@
       </p:sp>
       <p:sp>
         <p:nvSpPr>
-          <p:cNvPr id="27" name="TextBox 26"/>
+          <p:cNvPr id="26" name="TextBox 25"/>
           <p:cNvSpPr txBox="1"/>
           <p:nvPr/>
         </p:nvSpPr>
@@ -6583,7 +6373,7 @@
       </p:sp>
       <p:sp>
         <p:nvSpPr>
-          <p:cNvPr id="28" name="TextBox 27"/>
+          <p:cNvPr id="27" name="TextBox 26"/>
           <p:cNvSpPr txBox="1"/>
           <p:nvPr/>
         </p:nvSpPr>
@@ -6630,7 +6420,7 @@
       </p:sp>
       <p:sp>
         <p:nvSpPr>
-          <p:cNvPr id="29" name="Rounded Rectangle 28"/>
+          <p:cNvPr id="28" name="Rounded Rectangle 27"/>
           <p:cNvSpPr/>
           <p:nvPr/>
         </p:nvSpPr>
@@ -6684,7 +6474,7 @@
       </p:sp>
       <p:sp>
         <p:nvSpPr>
-          <p:cNvPr id="30" name="Rectangle 29"/>
+          <p:cNvPr id="29" name="Rectangle 28"/>
           <p:cNvSpPr/>
           <p:nvPr/>
         </p:nvSpPr>
@@ -6728,7 +6518,7 @@
       </p:sp>
       <p:sp>
         <p:nvSpPr>
-          <p:cNvPr id="31" name="TextBox 30"/>
+          <p:cNvPr id="30" name="TextBox 29"/>
           <p:cNvSpPr txBox="1"/>
           <p:nvPr/>
         </p:nvSpPr>
@@ -6775,7 +6565,7 @@
       </p:sp>
       <p:sp>
         <p:nvSpPr>
-          <p:cNvPr id="32" name="TextBox 31"/>
+          <p:cNvPr id="31" name="TextBox 30"/>
           <p:cNvSpPr txBox="1"/>
           <p:nvPr/>
         </p:nvSpPr>
@@ -6914,8 +6704,77 @@
         </p:nvSpPr>
         <p:spPr>
           <a:xfrm>
-            <a:off x="713232" y="6272784"/>
-            <a:ext cx="5597920" cy="219456"/>
+            <a:off x="8240677" y="6272784"/>
+            <a:ext cx="2651760" cy="219456"/>
+          </a:xfrm>
+          <a:prstGeom prst="rect">
+            <a:avLst/>
+          </a:prstGeom>
+          <a:noFill/>
+        </p:spPr>
+        <p:txBody>
+          <a:bodyPr wrap="square" lIns="0" rIns="0" tIns="0" bIns="0" anchor="t">
+            <a:spAutoFit/>
+          </a:bodyPr>
+          <a:lstStyle/>
+          <a:p>
+            <a:pPr algn="r">
+              <a:lnSpc>
+                <a:spcPct val="122000"/>
+              </a:lnSpc>
+              <a:spcBef>
+                <a:spcPts val="0"/>
+              </a:spcBef>
+              <a:spcAft>
+                <a:spcPts val="0"/>
+              </a:spcAft>
+            </a:pPr>
+            <a:r>
+              <a:rPr sz="900" b="0" i="0">
+                <a:solidFill>
+                  <a:srgbClr val="636E85"/>
+                </a:solidFill>
+                <a:latin typeface="Segoe UI"/>
+                <a:ea typeface="Segoe UI"/>
+                <a:cs typeface="Segoe UI"/>
+              </a:rPr>
+              <a:t>Lingesh K  ·  OSI2509030</a:t>
+            </a:r>
+            <a:r>
+              <a:rPr sz="900" b="0" i="0">
+                <a:solidFill>
+                  <a:srgbClr val="141C2E"/>
+                </a:solidFill>
+                <a:latin typeface="Segoe UI"/>
+                <a:ea typeface="Segoe UI"/>
+                <a:cs typeface="Segoe UI"/>
+              </a:rPr>
+              <a:t>     </a:t>
+            </a:r>
+            <a:r>
+              <a:rPr sz="900" b="1" i="0">
+                <a:solidFill>
+                  <a:srgbClr val="0E1E3C"/>
+                </a:solidFill>
+                <a:latin typeface="Segoe UI"/>
+                <a:ea typeface="Segoe UI"/>
+                <a:cs typeface="Segoe UI"/>
+              </a:rPr>
+              <a:t>12</a:t>
+            </a:r>
+          </a:p>
+        </p:txBody>
+      </p:sp>
+      <p:sp>
+        <p:nvSpPr>
+          <p:cNvPr id="5" name="TextBox 4"/>
+          <p:cNvSpPr txBox="1"/>
+          <p:nvPr/>
+        </p:nvSpPr>
+        <p:spPr>
+          <a:xfrm>
+            <a:off x="713232" y="566928"/>
+            <a:ext cx="10765231" cy="219456"/>
           </a:xfrm>
           <a:prstGeom prst="rect">
             <a:avLst/>
@@ -6940,106 +6799,15 @@
               </a:spcAft>
             </a:pPr>
             <a:r>
-              <a:rPr sz="900" b="1" i="0">
-                <a:solidFill>
-                  <a:srgbClr val="0E1E3C"/>
-                </a:solidFill>
-                <a:latin typeface="Segoe UI"/>
-                <a:ea typeface="Segoe UI"/>
-                <a:cs typeface="Segoe UI"/>
-              </a:rPr>
-              <a:t>Unit 1</a:t>
-            </a:r>
-            <a:r>
-              <a:rPr sz="900" b="0" i="0">
-                <a:solidFill>
-                  <a:srgbClr val="939EB3"/>
-                </a:solidFill>
-                <a:latin typeface="Segoe UI"/>
-                <a:ea typeface="Segoe UI"/>
-                <a:cs typeface="Segoe UI"/>
-              </a:rPr>
-              <a:t>  ·  </a:t>
-            </a:r>
-            <a:r>
-              <a:rPr sz="900" b="0" i="0">
-                <a:solidFill>
-                  <a:srgbClr val="636E85"/>
-                </a:solidFill>
-                <a:latin typeface="Segoe UI"/>
-                <a:ea typeface="Segoe UI"/>
-                <a:cs typeface="Segoe UI"/>
-              </a:rPr>
-              <a:t>Introduction of AI and Gen AI</a:t>
-            </a:r>
-          </a:p>
-        </p:txBody>
-      </p:sp>
-      <p:sp>
-        <p:nvSpPr>
-          <p:cNvPr id="5" name="TextBox 4"/>
-          <p:cNvSpPr txBox="1"/>
-          <p:nvPr/>
-        </p:nvSpPr>
-        <p:spPr>
-          <a:xfrm>
-            <a:off x="8240677" y="6272784"/>
-            <a:ext cx="2651760" cy="219456"/>
-          </a:xfrm>
-          <a:prstGeom prst="rect">
-            <a:avLst/>
-          </a:prstGeom>
-          <a:noFill/>
-        </p:spPr>
-        <p:txBody>
-          <a:bodyPr wrap="square" lIns="0" rIns="0" tIns="0" bIns="0" anchor="t">
-            <a:spAutoFit/>
-          </a:bodyPr>
-          <a:lstStyle/>
-          <a:p>
-            <a:pPr algn="r">
-              <a:lnSpc>
-                <a:spcPct val="122000"/>
-              </a:lnSpc>
-              <a:spcBef>
-                <a:spcPts val="0"/>
-              </a:spcBef>
-              <a:spcAft>
-                <a:spcPts val="0"/>
-              </a:spcAft>
-            </a:pPr>
-            <a:r>
-              <a:rPr sz="900" b="0" i="0">
-                <a:solidFill>
-                  <a:srgbClr val="636E85"/>
-                </a:solidFill>
-                <a:latin typeface="Segoe UI"/>
-                <a:ea typeface="Segoe UI"/>
-                <a:cs typeface="Segoe UI"/>
-              </a:rPr>
-              <a:t>Lingesh K  ·  OSI2509030</a:t>
-            </a:r>
-            <a:r>
-              <a:rPr sz="900" b="0" i="0">
-                <a:solidFill>
-                  <a:srgbClr val="141C2E"/>
-                </a:solidFill>
-                <a:latin typeface="Segoe UI"/>
-                <a:ea typeface="Segoe UI"/>
-                <a:cs typeface="Segoe UI"/>
-              </a:rPr>
-              <a:t>     </a:t>
-            </a:r>
-            <a:r>
-              <a:rPr sz="900" b="1" i="0">
-                <a:solidFill>
-                  <a:srgbClr val="0E1E3C"/>
-                </a:solidFill>
-                <a:latin typeface="Segoe UI"/>
-                <a:ea typeface="Segoe UI"/>
-                <a:cs typeface="Segoe UI"/>
-              </a:rPr>
-              <a:t>12</a:t>
+              <a:rPr sz="950" b="1" i="0" spc="160">
+                <a:solidFill>
+                  <a:srgbClr val="745CE0"/>
+                </a:solidFill>
+                <a:latin typeface="Segoe UI"/>
+                <a:ea typeface="Segoe UI"/>
+                <a:cs typeface="Segoe UI"/>
+              </a:rPr>
+              <a:t>MODEL FAMILIES</a:t>
             </a:r>
           </a:p>
         </p:txBody>
@@ -7047,53 +6815,6 @@
       <p:sp>
         <p:nvSpPr>
           <p:cNvPr id="6" name="TextBox 5"/>
-          <p:cNvSpPr txBox="1"/>
-          <p:nvPr/>
-        </p:nvSpPr>
-        <p:spPr>
-          <a:xfrm>
-            <a:off x="713232" y="566928"/>
-            <a:ext cx="10765231" cy="219456"/>
-          </a:xfrm>
-          <a:prstGeom prst="rect">
-            <a:avLst/>
-          </a:prstGeom>
-          <a:noFill/>
-        </p:spPr>
-        <p:txBody>
-          <a:bodyPr wrap="square" lIns="0" rIns="0" tIns="0" bIns="0" anchor="t">
-            <a:spAutoFit/>
-          </a:bodyPr>
-          <a:lstStyle/>
-          <a:p>
-            <a:pPr algn="l">
-              <a:lnSpc>
-                <a:spcPct val="122000"/>
-              </a:lnSpc>
-              <a:spcBef>
-                <a:spcPts val="0"/>
-              </a:spcBef>
-              <a:spcAft>
-                <a:spcPts val="0"/>
-              </a:spcAft>
-            </a:pPr>
-            <a:r>
-              <a:rPr sz="950" b="1" i="0" spc="160">
-                <a:solidFill>
-                  <a:srgbClr val="745CE0"/>
-                </a:solidFill>
-                <a:latin typeface="Segoe UI"/>
-                <a:ea typeface="Segoe UI"/>
-                <a:cs typeface="Segoe UI"/>
-              </a:rPr>
-              <a:t>MODEL FAMILIES</a:t>
-            </a:r>
-          </a:p>
-        </p:txBody>
-      </p:sp>
-      <p:sp>
-        <p:nvSpPr>
-          <p:cNvPr id="7" name="TextBox 6"/>
           <p:cNvSpPr txBox="1"/>
           <p:nvPr/>
         </p:nvSpPr>
@@ -7140,7 +6861,7 @@
       </p:sp>
       <p:sp>
         <p:nvSpPr>
-          <p:cNvPr id="8" name="Rectangle 7"/>
+          <p:cNvPr id="7" name="Rectangle 6"/>
           <p:cNvSpPr/>
           <p:nvPr/>
         </p:nvSpPr>
@@ -7184,7 +6905,7 @@
       </p:sp>
       <p:sp>
         <p:nvSpPr>
-          <p:cNvPr id="9" name="TextBox 8"/>
+          <p:cNvPr id="8" name="TextBox 7"/>
           <p:cNvSpPr txBox="1"/>
           <p:nvPr/>
         </p:nvSpPr>
@@ -7231,7 +6952,7 @@
       </p:sp>
       <p:sp>
         <p:nvSpPr>
-          <p:cNvPr id="10" name="Rounded Rectangle 9"/>
+          <p:cNvPr id="9" name="Rounded Rectangle 8"/>
           <p:cNvSpPr/>
           <p:nvPr/>
         </p:nvSpPr>
@@ -7285,7 +7006,7 @@
       </p:sp>
       <p:sp>
         <p:nvSpPr>
-          <p:cNvPr id="11" name="Rectangle 10"/>
+          <p:cNvPr id="10" name="Rectangle 9"/>
           <p:cNvSpPr/>
           <p:nvPr/>
         </p:nvSpPr>
@@ -7329,7 +7050,7 @@
       </p:sp>
       <p:sp>
         <p:nvSpPr>
-          <p:cNvPr id="12" name="TextBox 11"/>
+          <p:cNvPr id="11" name="TextBox 10"/>
           <p:cNvSpPr txBox="1"/>
           <p:nvPr/>
         </p:nvSpPr>
@@ -7376,7 +7097,7 @@
       </p:sp>
       <p:sp>
         <p:nvSpPr>
-          <p:cNvPr id="13" name="TextBox 12"/>
+          <p:cNvPr id="12" name="TextBox 11"/>
           <p:cNvSpPr txBox="1"/>
           <p:nvPr/>
         </p:nvSpPr>
@@ -7423,7 +7144,7 @@
       </p:sp>
       <p:sp>
         <p:nvSpPr>
-          <p:cNvPr id="14" name="Rounded Rectangle 13"/>
+          <p:cNvPr id="13" name="Rounded Rectangle 12"/>
           <p:cNvSpPr/>
           <p:nvPr/>
         </p:nvSpPr>
@@ -7477,7 +7198,7 @@
       </p:sp>
       <p:sp>
         <p:nvSpPr>
-          <p:cNvPr id="15" name="Rectangle 14"/>
+          <p:cNvPr id="14" name="Rectangle 13"/>
           <p:cNvSpPr/>
           <p:nvPr/>
         </p:nvSpPr>
@@ -7521,7 +7242,7 @@
       </p:sp>
       <p:sp>
         <p:nvSpPr>
-          <p:cNvPr id="16" name="TextBox 15"/>
+          <p:cNvPr id="15" name="TextBox 14"/>
           <p:cNvSpPr txBox="1"/>
           <p:nvPr/>
         </p:nvSpPr>
@@ -7568,7 +7289,7 @@
       </p:sp>
       <p:sp>
         <p:nvSpPr>
-          <p:cNvPr id="17" name="TextBox 16"/>
+          <p:cNvPr id="16" name="TextBox 15"/>
           <p:cNvSpPr txBox="1"/>
           <p:nvPr/>
         </p:nvSpPr>
@@ -7615,7 +7336,7 @@
       </p:sp>
       <p:sp>
         <p:nvSpPr>
-          <p:cNvPr id="18" name="Rounded Rectangle 17"/>
+          <p:cNvPr id="17" name="Rounded Rectangle 16"/>
           <p:cNvSpPr/>
           <p:nvPr/>
         </p:nvSpPr>
@@ -7669,7 +7390,7 @@
       </p:sp>
       <p:sp>
         <p:nvSpPr>
-          <p:cNvPr id="19" name="Rectangle 18"/>
+          <p:cNvPr id="18" name="Rectangle 17"/>
           <p:cNvSpPr/>
           <p:nvPr/>
         </p:nvSpPr>
@@ -7713,7 +7434,7 @@
       </p:sp>
       <p:sp>
         <p:nvSpPr>
-          <p:cNvPr id="20" name="TextBox 19"/>
+          <p:cNvPr id="19" name="TextBox 18"/>
           <p:cNvSpPr txBox="1"/>
           <p:nvPr/>
         </p:nvSpPr>
@@ -7760,7 +7481,7 @@
       </p:sp>
       <p:sp>
         <p:nvSpPr>
-          <p:cNvPr id="21" name="TextBox 20"/>
+          <p:cNvPr id="20" name="TextBox 19"/>
           <p:cNvSpPr txBox="1"/>
           <p:nvPr/>
         </p:nvSpPr>
@@ -7807,7 +7528,7 @@
       </p:sp>
       <p:sp>
         <p:nvSpPr>
-          <p:cNvPr id="22" name="Rounded Rectangle 21"/>
+          <p:cNvPr id="21" name="Rounded Rectangle 20"/>
           <p:cNvSpPr/>
           <p:nvPr/>
         </p:nvSpPr>
@@ -7861,7 +7582,7 @@
       </p:sp>
       <p:sp>
         <p:nvSpPr>
-          <p:cNvPr id="23" name="Rectangle 22"/>
+          <p:cNvPr id="22" name="Rectangle 21"/>
           <p:cNvSpPr/>
           <p:nvPr/>
         </p:nvSpPr>
@@ -7905,7 +7626,7 @@
       </p:sp>
       <p:sp>
         <p:nvSpPr>
-          <p:cNvPr id="24" name="TextBox 23"/>
+          <p:cNvPr id="23" name="TextBox 22"/>
           <p:cNvSpPr txBox="1"/>
           <p:nvPr/>
         </p:nvSpPr>
@@ -7952,7 +7673,7 @@
       </p:sp>
       <p:sp>
         <p:nvSpPr>
-          <p:cNvPr id="25" name="TextBox 24"/>
+          <p:cNvPr id="24" name="TextBox 23"/>
           <p:cNvSpPr txBox="1"/>
           <p:nvPr/>
         </p:nvSpPr>
@@ -8390,54 +8111,7 @@
       </p:sp>
       <p:sp>
         <p:nvSpPr>
-          <p:cNvPr id="10" name="TextBox 9"/>
-          <p:cNvSpPr txBox="1"/>
-          <p:nvPr/>
-        </p:nvSpPr>
-        <p:spPr>
-          <a:xfrm>
-            <a:off x="987552" y="5943600"/>
-            <a:ext cx="6400800" cy="274320"/>
-          </a:xfrm>
-          <a:prstGeom prst="rect">
-            <a:avLst/>
-          </a:prstGeom>
-          <a:noFill/>
-        </p:spPr>
-        <p:txBody>
-          <a:bodyPr wrap="square" lIns="0" rIns="0" tIns="0" bIns="0" anchor="t">
-            <a:spAutoFit/>
-          </a:bodyPr>
-          <a:lstStyle/>
-          <a:p>
-            <a:pPr algn="l">
-              <a:lnSpc>
-                <a:spcPct val="122000"/>
-              </a:lnSpc>
-              <a:spcBef>
-                <a:spcPts val="0"/>
-              </a:spcBef>
-              <a:spcAft>
-                <a:spcPts val="0"/>
-              </a:spcAft>
-            </a:pPr>
-            <a:r>
-              <a:rPr sz="900" b="1" i="0" spc="160">
-                <a:solidFill>
-                  <a:srgbClr val="6B7FA6"/>
-                </a:solidFill>
-                <a:latin typeface="Segoe UI"/>
-                <a:ea typeface="Segoe UI"/>
-                <a:cs typeface="Segoe UI"/>
-              </a:rPr>
-              <a:t>UNIT 1  ·  INTRODUCTION OF AI AND GEN AI</a:t>
-            </a:r>
-          </a:p>
-        </p:txBody>
-      </p:sp>
-      <p:sp>
-        <p:nvSpPr>
-          <p:cNvPr id="11" name="logo-plate"/>
+          <p:cNvPr id="10" name="logo-plate"/>
           <p:cNvSpPr/>
           <p:nvPr/>
         </p:nvSpPr>
@@ -8483,7 +8157,7 @@
       </p:sp>
       <p:pic>
         <p:nvPicPr>
-          <p:cNvPr id="12" name="college-logo" descr="logo-full.png"/>
+          <p:cNvPr id="11" name="college-logo" descr="logo-full.png"/>
           <p:cNvPicPr>
             <a:picLocks noChangeAspect="1"/>
           </p:cNvPicPr>
@@ -8599,8 +8273,77 @@
         </p:nvSpPr>
         <p:spPr>
           <a:xfrm>
-            <a:off x="713232" y="6272784"/>
-            <a:ext cx="5597920" cy="219456"/>
+            <a:off x="8240677" y="6272784"/>
+            <a:ext cx="2651760" cy="219456"/>
+          </a:xfrm>
+          <a:prstGeom prst="rect">
+            <a:avLst/>
+          </a:prstGeom>
+          <a:noFill/>
+        </p:spPr>
+        <p:txBody>
+          <a:bodyPr wrap="square" lIns="0" rIns="0" tIns="0" bIns="0" anchor="t">
+            <a:spAutoFit/>
+          </a:bodyPr>
+          <a:lstStyle/>
+          <a:p>
+            <a:pPr algn="r">
+              <a:lnSpc>
+                <a:spcPct val="122000"/>
+              </a:lnSpc>
+              <a:spcBef>
+                <a:spcPts val="0"/>
+              </a:spcBef>
+              <a:spcAft>
+                <a:spcPts val="0"/>
+              </a:spcAft>
+            </a:pPr>
+            <a:r>
+              <a:rPr sz="900" b="0" i="0">
+                <a:solidFill>
+                  <a:srgbClr val="636E85"/>
+                </a:solidFill>
+                <a:latin typeface="Segoe UI"/>
+                <a:ea typeface="Segoe UI"/>
+                <a:cs typeface="Segoe UI"/>
+              </a:rPr>
+              <a:t>Lingesh K  ·  OSI2509030</a:t>
+            </a:r>
+            <a:r>
+              <a:rPr sz="900" b="0" i="0">
+                <a:solidFill>
+                  <a:srgbClr val="141C2E"/>
+                </a:solidFill>
+                <a:latin typeface="Segoe UI"/>
+                <a:ea typeface="Segoe UI"/>
+                <a:cs typeface="Segoe UI"/>
+              </a:rPr>
+              <a:t>     </a:t>
+            </a:r>
+            <a:r>
+              <a:rPr sz="900" b="1" i="0">
+                <a:solidFill>
+                  <a:srgbClr val="0E1E3C"/>
+                </a:solidFill>
+                <a:latin typeface="Segoe UI"/>
+                <a:ea typeface="Segoe UI"/>
+                <a:cs typeface="Segoe UI"/>
+              </a:rPr>
+              <a:t>14</a:t>
+            </a:r>
+          </a:p>
+        </p:txBody>
+      </p:sp>
+      <p:sp>
+        <p:nvSpPr>
+          <p:cNvPr id="5" name="TextBox 4"/>
+          <p:cNvSpPr txBox="1"/>
+          <p:nvPr/>
+        </p:nvSpPr>
+        <p:spPr>
+          <a:xfrm>
+            <a:off x="713232" y="566928"/>
+            <a:ext cx="10765231" cy="219456"/>
           </a:xfrm>
           <a:prstGeom prst="rect">
             <a:avLst/>
@@ -8625,106 +8368,15 @@
               </a:spcAft>
             </a:pPr>
             <a:r>
-              <a:rPr sz="900" b="1" i="0">
-                <a:solidFill>
-                  <a:srgbClr val="0E1E3C"/>
-                </a:solidFill>
-                <a:latin typeface="Segoe UI"/>
-                <a:ea typeface="Segoe UI"/>
-                <a:cs typeface="Segoe UI"/>
-              </a:rPr>
-              <a:t>Unit 1</a:t>
-            </a:r>
-            <a:r>
-              <a:rPr sz="900" b="0" i="0">
-                <a:solidFill>
-                  <a:srgbClr val="939EB3"/>
-                </a:solidFill>
-                <a:latin typeface="Segoe UI"/>
-                <a:ea typeface="Segoe UI"/>
-                <a:cs typeface="Segoe UI"/>
-              </a:rPr>
-              <a:t>  ·  </a:t>
-            </a:r>
-            <a:r>
-              <a:rPr sz="900" b="0" i="0">
-                <a:solidFill>
-                  <a:srgbClr val="636E85"/>
-                </a:solidFill>
-                <a:latin typeface="Segoe UI"/>
-                <a:ea typeface="Segoe UI"/>
-                <a:cs typeface="Segoe UI"/>
-              </a:rPr>
-              <a:t>Introduction of AI and Gen AI</a:t>
-            </a:r>
-          </a:p>
-        </p:txBody>
-      </p:sp>
-      <p:sp>
-        <p:nvSpPr>
-          <p:cNvPr id="5" name="TextBox 4"/>
-          <p:cNvSpPr txBox="1"/>
-          <p:nvPr/>
-        </p:nvSpPr>
-        <p:spPr>
-          <a:xfrm>
-            <a:off x="8240677" y="6272784"/>
-            <a:ext cx="2651760" cy="219456"/>
-          </a:xfrm>
-          <a:prstGeom prst="rect">
-            <a:avLst/>
-          </a:prstGeom>
-          <a:noFill/>
-        </p:spPr>
-        <p:txBody>
-          <a:bodyPr wrap="square" lIns="0" rIns="0" tIns="0" bIns="0" anchor="t">
-            <a:spAutoFit/>
-          </a:bodyPr>
-          <a:lstStyle/>
-          <a:p>
-            <a:pPr algn="r">
-              <a:lnSpc>
-                <a:spcPct val="122000"/>
-              </a:lnSpc>
-              <a:spcBef>
-                <a:spcPts val="0"/>
-              </a:spcBef>
-              <a:spcAft>
-                <a:spcPts val="0"/>
-              </a:spcAft>
-            </a:pPr>
-            <a:r>
-              <a:rPr sz="900" b="0" i="0">
-                <a:solidFill>
-                  <a:srgbClr val="636E85"/>
-                </a:solidFill>
-                <a:latin typeface="Segoe UI"/>
-                <a:ea typeface="Segoe UI"/>
-                <a:cs typeface="Segoe UI"/>
-              </a:rPr>
-              <a:t>Lingesh K  ·  OSI2509030</a:t>
-            </a:r>
-            <a:r>
-              <a:rPr sz="900" b="0" i="0">
-                <a:solidFill>
-                  <a:srgbClr val="141C2E"/>
-                </a:solidFill>
-                <a:latin typeface="Segoe UI"/>
-                <a:ea typeface="Segoe UI"/>
-                <a:cs typeface="Segoe UI"/>
-              </a:rPr>
-              <a:t>     </a:t>
-            </a:r>
-            <a:r>
-              <a:rPr sz="900" b="1" i="0">
-                <a:solidFill>
-                  <a:srgbClr val="0E1E3C"/>
-                </a:solidFill>
-                <a:latin typeface="Segoe UI"/>
-                <a:ea typeface="Segoe UI"/>
-                <a:cs typeface="Segoe UI"/>
-              </a:rPr>
-              <a:t>14</a:t>
+              <a:rPr sz="950" b="1" i="0" spc="160">
+                <a:solidFill>
+                  <a:srgbClr val="3B7AF7"/>
+                </a:solidFill>
+                <a:latin typeface="Segoe UI"/>
+                <a:ea typeface="Segoe UI"/>
+                <a:cs typeface="Segoe UI"/>
+              </a:rPr>
+              <a:t>CORE DIFFERENCE</a:t>
             </a:r>
           </a:p>
         </p:txBody>
@@ -8732,53 +8384,6 @@
       <p:sp>
         <p:nvSpPr>
           <p:cNvPr id="6" name="TextBox 5"/>
-          <p:cNvSpPr txBox="1"/>
-          <p:nvPr/>
-        </p:nvSpPr>
-        <p:spPr>
-          <a:xfrm>
-            <a:off x="713232" y="566928"/>
-            <a:ext cx="10765231" cy="219456"/>
-          </a:xfrm>
-          <a:prstGeom prst="rect">
-            <a:avLst/>
-          </a:prstGeom>
-          <a:noFill/>
-        </p:spPr>
-        <p:txBody>
-          <a:bodyPr wrap="square" lIns="0" rIns="0" tIns="0" bIns="0" anchor="t">
-            <a:spAutoFit/>
-          </a:bodyPr>
-          <a:lstStyle/>
-          <a:p>
-            <a:pPr algn="l">
-              <a:lnSpc>
-                <a:spcPct val="122000"/>
-              </a:lnSpc>
-              <a:spcBef>
-                <a:spcPts val="0"/>
-              </a:spcBef>
-              <a:spcAft>
-                <a:spcPts val="0"/>
-              </a:spcAft>
-            </a:pPr>
-            <a:r>
-              <a:rPr sz="950" b="1" i="0" spc="160">
-                <a:solidFill>
-                  <a:srgbClr val="3B7AF7"/>
-                </a:solidFill>
-                <a:latin typeface="Segoe UI"/>
-                <a:ea typeface="Segoe UI"/>
-                <a:cs typeface="Segoe UI"/>
-              </a:rPr>
-              <a:t>CORE DIFFERENCE</a:t>
-            </a:r>
-          </a:p>
-        </p:txBody>
-      </p:sp>
-      <p:sp>
-        <p:nvSpPr>
-          <p:cNvPr id="7" name="TextBox 6"/>
           <p:cNvSpPr txBox="1"/>
           <p:nvPr/>
         </p:nvSpPr>
@@ -8825,7 +8430,7 @@
       </p:sp>
       <p:sp>
         <p:nvSpPr>
-          <p:cNvPr id="8" name="Rectangle 7"/>
+          <p:cNvPr id="7" name="Rectangle 6"/>
           <p:cNvSpPr/>
           <p:nvPr/>
         </p:nvSpPr>
@@ -8869,7 +8474,7 @@
       </p:sp>
       <p:sp>
         <p:nvSpPr>
-          <p:cNvPr id="9" name="TextBox 8"/>
+          <p:cNvPr id="8" name="TextBox 7"/>
           <p:cNvSpPr txBox="1"/>
           <p:nvPr/>
         </p:nvSpPr>
@@ -8916,7 +8521,7 @@
       </p:sp>
       <p:sp>
         <p:nvSpPr>
-          <p:cNvPr id="10" name="Rounded Rectangle 9"/>
+          <p:cNvPr id="9" name="Rounded Rectangle 8"/>
           <p:cNvSpPr/>
           <p:nvPr/>
         </p:nvSpPr>
@@ -8970,7 +8575,7 @@
       </p:sp>
       <p:sp>
         <p:nvSpPr>
-          <p:cNvPr id="11" name="Rectangle 10"/>
+          <p:cNvPr id="10" name="Rectangle 9"/>
           <p:cNvSpPr/>
           <p:nvPr/>
         </p:nvSpPr>
@@ -9014,7 +8619,7 @@
       </p:sp>
       <p:sp>
         <p:nvSpPr>
-          <p:cNvPr id="12" name="Rounded Rectangle 11"/>
+          <p:cNvPr id="11" name="Rounded Rectangle 10"/>
           <p:cNvSpPr/>
           <p:nvPr/>
         </p:nvSpPr>
@@ -9081,7 +8686,7 @@
       </p:sp>
       <p:sp>
         <p:nvSpPr>
-          <p:cNvPr id="13" name="TextBox 12"/>
+          <p:cNvPr id="12" name="TextBox 11"/>
           <p:cNvSpPr txBox="1"/>
           <p:nvPr/>
         </p:nvSpPr>
@@ -9128,7 +8733,7 @@
       </p:sp>
       <p:sp>
         <p:nvSpPr>
-          <p:cNvPr id="14" name="Rectangle 13"/>
+          <p:cNvPr id="13" name="Rectangle 12"/>
           <p:cNvSpPr/>
           <p:nvPr/>
         </p:nvSpPr>
@@ -9172,7 +8777,7 @@
       </p:sp>
       <p:sp>
         <p:nvSpPr>
-          <p:cNvPr id="15" name="Rounded Rectangle 14"/>
+          <p:cNvPr id="14" name="Rounded Rectangle 13"/>
           <p:cNvSpPr/>
           <p:nvPr/>
         </p:nvSpPr>
@@ -9218,7 +8823,7 @@
       </p:sp>
       <p:sp>
         <p:nvSpPr>
-          <p:cNvPr id="16" name="TextBox 15"/>
+          <p:cNvPr id="15" name="TextBox 14"/>
           <p:cNvSpPr txBox="1"/>
           <p:nvPr/>
         </p:nvSpPr>
@@ -9265,7 +8870,7 @@
       </p:sp>
       <p:sp>
         <p:nvSpPr>
-          <p:cNvPr id="17" name="Rounded Rectangle 16"/>
+          <p:cNvPr id="16" name="Rounded Rectangle 15"/>
           <p:cNvSpPr/>
           <p:nvPr/>
         </p:nvSpPr>
@@ -9311,7 +8916,7 @@
       </p:sp>
       <p:sp>
         <p:nvSpPr>
-          <p:cNvPr id="18" name="TextBox 17"/>
+          <p:cNvPr id="17" name="TextBox 16"/>
           <p:cNvSpPr txBox="1"/>
           <p:nvPr/>
         </p:nvSpPr>
@@ -9358,7 +8963,7 @@
       </p:sp>
       <p:sp>
         <p:nvSpPr>
-          <p:cNvPr id="19" name="Rounded Rectangle 18"/>
+          <p:cNvPr id="18" name="Rounded Rectangle 17"/>
           <p:cNvSpPr/>
           <p:nvPr/>
         </p:nvSpPr>
@@ -9404,7 +9009,7 @@
       </p:sp>
       <p:sp>
         <p:nvSpPr>
-          <p:cNvPr id="20" name="TextBox 19"/>
+          <p:cNvPr id="19" name="TextBox 18"/>
           <p:cNvSpPr txBox="1"/>
           <p:nvPr/>
         </p:nvSpPr>
@@ -9451,7 +9056,7 @@
       </p:sp>
       <p:sp>
         <p:nvSpPr>
-          <p:cNvPr id="21" name="Rounded Rectangle 20"/>
+          <p:cNvPr id="20" name="Rounded Rectangle 19"/>
           <p:cNvSpPr/>
           <p:nvPr/>
         </p:nvSpPr>
@@ -9497,7 +9102,7 @@
       </p:sp>
       <p:sp>
         <p:nvSpPr>
-          <p:cNvPr id="22" name="TextBox 21"/>
+          <p:cNvPr id="21" name="TextBox 20"/>
           <p:cNvSpPr txBox="1"/>
           <p:nvPr/>
         </p:nvSpPr>
@@ -9544,7 +9149,7 @@
       </p:sp>
       <p:sp>
         <p:nvSpPr>
-          <p:cNvPr id="23" name="Rounded Rectangle 22"/>
+          <p:cNvPr id="22" name="Rounded Rectangle 21"/>
           <p:cNvSpPr/>
           <p:nvPr/>
         </p:nvSpPr>
@@ -9590,7 +9195,7 @@
       </p:sp>
       <p:sp>
         <p:nvSpPr>
-          <p:cNvPr id="24" name="TextBox 23"/>
+          <p:cNvPr id="23" name="TextBox 22"/>
           <p:cNvSpPr txBox="1"/>
           <p:nvPr/>
         </p:nvSpPr>
@@ -9637,7 +9242,7 @@
       </p:sp>
       <p:sp>
         <p:nvSpPr>
-          <p:cNvPr id="25" name="Rounded Rectangle 24"/>
+          <p:cNvPr id="24" name="Rounded Rectangle 23"/>
           <p:cNvSpPr/>
           <p:nvPr/>
         </p:nvSpPr>
@@ -9691,7 +9296,7 @@
       </p:sp>
       <p:sp>
         <p:nvSpPr>
-          <p:cNvPr id="26" name="Rectangle 25"/>
+          <p:cNvPr id="25" name="Rectangle 24"/>
           <p:cNvSpPr/>
           <p:nvPr/>
         </p:nvSpPr>
@@ -9735,7 +9340,7 @@
       </p:sp>
       <p:sp>
         <p:nvSpPr>
-          <p:cNvPr id="27" name="Rounded Rectangle 26"/>
+          <p:cNvPr id="26" name="Rounded Rectangle 25"/>
           <p:cNvSpPr/>
           <p:nvPr/>
         </p:nvSpPr>
@@ -9802,7 +9407,7 @@
       </p:sp>
       <p:sp>
         <p:nvSpPr>
-          <p:cNvPr id="28" name="TextBox 27"/>
+          <p:cNvPr id="27" name="TextBox 26"/>
           <p:cNvSpPr txBox="1"/>
           <p:nvPr/>
         </p:nvSpPr>
@@ -9849,7 +9454,7 @@
       </p:sp>
       <p:sp>
         <p:nvSpPr>
-          <p:cNvPr id="29" name="Rectangle 28"/>
+          <p:cNvPr id="28" name="Rectangle 27"/>
           <p:cNvSpPr/>
           <p:nvPr/>
         </p:nvSpPr>
@@ -9893,7 +9498,7 @@
       </p:sp>
       <p:sp>
         <p:nvSpPr>
-          <p:cNvPr id="30" name="Rounded Rectangle 29"/>
+          <p:cNvPr id="29" name="Rounded Rectangle 28"/>
           <p:cNvSpPr/>
           <p:nvPr/>
         </p:nvSpPr>
@@ -9939,7 +9544,7 @@
       </p:sp>
       <p:sp>
         <p:nvSpPr>
-          <p:cNvPr id="31" name="TextBox 30"/>
+          <p:cNvPr id="30" name="TextBox 29"/>
           <p:cNvSpPr txBox="1"/>
           <p:nvPr/>
         </p:nvSpPr>
@@ -9986,7 +9591,7 @@
       </p:sp>
       <p:sp>
         <p:nvSpPr>
-          <p:cNvPr id="32" name="Rounded Rectangle 31"/>
+          <p:cNvPr id="31" name="Rounded Rectangle 30"/>
           <p:cNvSpPr/>
           <p:nvPr/>
         </p:nvSpPr>
@@ -10032,7 +9637,7 @@
       </p:sp>
       <p:sp>
         <p:nvSpPr>
-          <p:cNvPr id="33" name="TextBox 32"/>
+          <p:cNvPr id="32" name="TextBox 31"/>
           <p:cNvSpPr txBox="1"/>
           <p:nvPr/>
         </p:nvSpPr>
@@ -10079,7 +9684,7 @@
       </p:sp>
       <p:sp>
         <p:nvSpPr>
-          <p:cNvPr id="34" name="Rounded Rectangle 33"/>
+          <p:cNvPr id="33" name="Rounded Rectangle 32"/>
           <p:cNvSpPr/>
           <p:nvPr/>
         </p:nvSpPr>
@@ -10125,7 +9730,7 @@
       </p:sp>
       <p:sp>
         <p:nvSpPr>
-          <p:cNvPr id="35" name="TextBox 34"/>
+          <p:cNvPr id="34" name="TextBox 33"/>
           <p:cNvSpPr txBox="1"/>
           <p:nvPr/>
         </p:nvSpPr>
@@ -10172,7 +9777,7 @@
       </p:sp>
       <p:sp>
         <p:nvSpPr>
-          <p:cNvPr id="36" name="Rounded Rectangle 35"/>
+          <p:cNvPr id="35" name="Rounded Rectangle 34"/>
           <p:cNvSpPr/>
           <p:nvPr/>
         </p:nvSpPr>
@@ -10218,7 +9823,7 @@
       </p:sp>
       <p:sp>
         <p:nvSpPr>
-          <p:cNvPr id="37" name="TextBox 36"/>
+          <p:cNvPr id="36" name="TextBox 35"/>
           <p:cNvSpPr txBox="1"/>
           <p:nvPr/>
         </p:nvSpPr>
@@ -10265,7 +9870,7 @@
       </p:sp>
       <p:sp>
         <p:nvSpPr>
-          <p:cNvPr id="38" name="Rounded Rectangle 37"/>
+          <p:cNvPr id="37" name="Rounded Rectangle 36"/>
           <p:cNvSpPr/>
           <p:nvPr/>
         </p:nvSpPr>
@@ -10311,7 +9916,7 @@
       </p:sp>
       <p:sp>
         <p:nvSpPr>
-          <p:cNvPr id="39" name="TextBox 38"/>
+          <p:cNvPr id="38" name="TextBox 37"/>
           <p:cNvSpPr txBox="1"/>
           <p:nvPr/>
         </p:nvSpPr>
@@ -10358,7 +9963,7 @@
       </p:sp>
       <p:sp>
         <p:nvSpPr>
-          <p:cNvPr id="40" name="Rounded Rectangle 39"/>
+          <p:cNvPr id="39" name="Rounded Rectangle 38"/>
           <p:cNvSpPr/>
           <p:nvPr/>
         </p:nvSpPr>
@@ -10528,8 +10133,77 @@
         </p:nvSpPr>
         <p:spPr>
           <a:xfrm>
-            <a:off x="713232" y="6272784"/>
-            <a:ext cx="5597920" cy="219456"/>
+            <a:off x="8240677" y="6272784"/>
+            <a:ext cx="2651760" cy="219456"/>
+          </a:xfrm>
+          <a:prstGeom prst="rect">
+            <a:avLst/>
+          </a:prstGeom>
+          <a:noFill/>
+        </p:spPr>
+        <p:txBody>
+          <a:bodyPr wrap="square" lIns="0" rIns="0" tIns="0" bIns="0" anchor="t">
+            <a:spAutoFit/>
+          </a:bodyPr>
+          <a:lstStyle/>
+          <a:p>
+            <a:pPr algn="r">
+              <a:lnSpc>
+                <a:spcPct val="122000"/>
+              </a:lnSpc>
+              <a:spcBef>
+                <a:spcPts val="0"/>
+              </a:spcBef>
+              <a:spcAft>
+                <a:spcPts val="0"/>
+              </a:spcAft>
+            </a:pPr>
+            <a:r>
+              <a:rPr sz="900" b="0" i="0">
+                <a:solidFill>
+                  <a:srgbClr val="636E85"/>
+                </a:solidFill>
+                <a:latin typeface="Segoe UI"/>
+                <a:ea typeface="Segoe UI"/>
+                <a:cs typeface="Segoe UI"/>
+              </a:rPr>
+              <a:t>Lingesh K  ·  OSI2509030</a:t>
+            </a:r>
+            <a:r>
+              <a:rPr sz="900" b="0" i="0">
+                <a:solidFill>
+                  <a:srgbClr val="141C2E"/>
+                </a:solidFill>
+                <a:latin typeface="Segoe UI"/>
+                <a:ea typeface="Segoe UI"/>
+                <a:cs typeface="Segoe UI"/>
+              </a:rPr>
+              <a:t>     </a:t>
+            </a:r>
+            <a:r>
+              <a:rPr sz="900" b="1" i="0">
+                <a:solidFill>
+                  <a:srgbClr val="0E1E3C"/>
+                </a:solidFill>
+                <a:latin typeface="Segoe UI"/>
+                <a:ea typeface="Segoe UI"/>
+                <a:cs typeface="Segoe UI"/>
+              </a:rPr>
+              <a:t>15</a:t>
+            </a:r>
+          </a:p>
+        </p:txBody>
+      </p:sp>
+      <p:sp>
+        <p:nvSpPr>
+          <p:cNvPr id="5" name="TextBox 4"/>
+          <p:cNvSpPr txBox="1"/>
+          <p:nvPr/>
+        </p:nvSpPr>
+        <p:spPr>
+          <a:xfrm>
+            <a:off x="713232" y="566928"/>
+            <a:ext cx="10765231" cy="219456"/>
           </a:xfrm>
           <a:prstGeom prst="rect">
             <a:avLst/>
@@ -10554,106 +10228,15 @@
               </a:spcAft>
             </a:pPr>
             <a:r>
-              <a:rPr sz="900" b="1" i="0">
-                <a:solidFill>
-                  <a:srgbClr val="0E1E3C"/>
-                </a:solidFill>
-                <a:latin typeface="Segoe UI"/>
-                <a:ea typeface="Segoe UI"/>
-                <a:cs typeface="Segoe UI"/>
-              </a:rPr>
-              <a:t>Unit 1</a:t>
-            </a:r>
-            <a:r>
-              <a:rPr sz="900" b="0" i="0">
-                <a:solidFill>
-                  <a:srgbClr val="939EB3"/>
-                </a:solidFill>
-                <a:latin typeface="Segoe UI"/>
-                <a:ea typeface="Segoe UI"/>
-                <a:cs typeface="Segoe UI"/>
-              </a:rPr>
-              <a:t>  ·  </a:t>
-            </a:r>
-            <a:r>
-              <a:rPr sz="900" b="0" i="0">
-                <a:solidFill>
-                  <a:srgbClr val="636E85"/>
-                </a:solidFill>
-                <a:latin typeface="Segoe UI"/>
-                <a:ea typeface="Segoe UI"/>
-                <a:cs typeface="Segoe UI"/>
-              </a:rPr>
-              <a:t>Introduction of AI and Gen AI</a:t>
-            </a:r>
-          </a:p>
-        </p:txBody>
-      </p:sp>
-      <p:sp>
-        <p:nvSpPr>
-          <p:cNvPr id="5" name="TextBox 4"/>
-          <p:cNvSpPr txBox="1"/>
-          <p:nvPr/>
-        </p:nvSpPr>
-        <p:spPr>
-          <a:xfrm>
-            <a:off x="8240677" y="6272784"/>
-            <a:ext cx="2651760" cy="219456"/>
-          </a:xfrm>
-          <a:prstGeom prst="rect">
-            <a:avLst/>
-          </a:prstGeom>
-          <a:noFill/>
-        </p:spPr>
-        <p:txBody>
-          <a:bodyPr wrap="square" lIns="0" rIns="0" tIns="0" bIns="0" anchor="t">
-            <a:spAutoFit/>
-          </a:bodyPr>
-          <a:lstStyle/>
-          <a:p>
-            <a:pPr algn="r">
-              <a:lnSpc>
-                <a:spcPct val="122000"/>
-              </a:lnSpc>
-              <a:spcBef>
-                <a:spcPts val="0"/>
-              </a:spcBef>
-              <a:spcAft>
-                <a:spcPts val="0"/>
-              </a:spcAft>
-            </a:pPr>
-            <a:r>
-              <a:rPr sz="900" b="0" i="0">
-                <a:solidFill>
-                  <a:srgbClr val="636E85"/>
-                </a:solidFill>
-                <a:latin typeface="Segoe UI"/>
-                <a:ea typeface="Segoe UI"/>
-                <a:cs typeface="Segoe UI"/>
-              </a:rPr>
-              <a:t>Lingesh K  ·  OSI2509030</a:t>
-            </a:r>
-            <a:r>
-              <a:rPr sz="900" b="0" i="0">
-                <a:solidFill>
-                  <a:srgbClr val="141C2E"/>
-                </a:solidFill>
-                <a:latin typeface="Segoe UI"/>
-                <a:ea typeface="Segoe UI"/>
-                <a:cs typeface="Segoe UI"/>
-              </a:rPr>
-              <a:t>     </a:t>
-            </a:r>
-            <a:r>
-              <a:rPr sz="900" b="1" i="0">
-                <a:solidFill>
-                  <a:srgbClr val="0E1E3C"/>
-                </a:solidFill>
-                <a:latin typeface="Segoe UI"/>
-                <a:ea typeface="Segoe UI"/>
-                <a:cs typeface="Segoe UI"/>
-              </a:rPr>
-              <a:t>15</a:t>
+              <a:rPr sz="950" b="1" i="0" spc="160">
+                <a:solidFill>
+                  <a:srgbClr val="F5A623"/>
+                </a:solidFill>
+                <a:latin typeface="Segoe UI"/>
+                <a:ea typeface="Segoe UI"/>
+                <a:cs typeface="Segoe UI"/>
+              </a:rPr>
+              <a:t>SIDE BY SIDE</a:t>
             </a:r>
           </a:p>
         </p:txBody>
@@ -10661,53 +10244,6 @@
       <p:sp>
         <p:nvSpPr>
           <p:cNvPr id="6" name="TextBox 5"/>
-          <p:cNvSpPr txBox="1"/>
-          <p:nvPr/>
-        </p:nvSpPr>
-        <p:spPr>
-          <a:xfrm>
-            <a:off x="713232" y="566928"/>
-            <a:ext cx="10765231" cy="219456"/>
-          </a:xfrm>
-          <a:prstGeom prst="rect">
-            <a:avLst/>
-          </a:prstGeom>
-          <a:noFill/>
-        </p:spPr>
-        <p:txBody>
-          <a:bodyPr wrap="square" lIns="0" rIns="0" tIns="0" bIns="0" anchor="t">
-            <a:spAutoFit/>
-          </a:bodyPr>
-          <a:lstStyle/>
-          <a:p>
-            <a:pPr algn="l">
-              <a:lnSpc>
-                <a:spcPct val="122000"/>
-              </a:lnSpc>
-              <a:spcBef>
-                <a:spcPts val="0"/>
-              </a:spcBef>
-              <a:spcAft>
-                <a:spcPts val="0"/>
-              </a:spcAft>
-            </a:pPr>
-            <a:r>
-              <a:rPr sz="950" b="1" i="0" spc="160">
-                <a:solidFill>
-                  <a:srgbClr val="F5A623"/>
-                </a:solidFill>
-                <a:latin typeface="Segoe UI"/>
-                <a:ea typeface="Segoe UI"/>
-                <a:cs typeface="Segoe UI"/>
-              </a:rPr>
-              <a:t>SIDE BY SIDE</a:t>
-            </a:r>
-          </a:p>
-        </p:txBody>
-      </p:sp>
-      <p:sp>
-        <p:nvSpPr>
-          <p:cNvPr id="7" name="TextBox 6"/>
           <p:cNvSpPr txBox="1"/>
           <p:nvPr/>
         </p:nvSpPr>
@@ -10754,7 +10290,7 @@
       </p:sp>
       <p:sp>
         <p:nvSpPr>
-          <p:cNvPr id="8" name="Rectangle 7"/>
+          <p:cNvPr id="7" name="Rectangle 6"/>
           <p:cNvSpPr/>
           <p:nvPr/>
         </p:nvSpPr>
@@ -10798,7 +10334,7 @@
       </p:sp>
       <p:graphicFrame>
         <p:nvGraphicFramePr>
-          <p:cNvPr id="9" name="Table 8"/>
+          <p:cNvPr id="8" name="Table 7"/>
           <p:cNvGraphicFramePr>
             <a:graphicFrameLocks noGrp="1"/>
           </p:cNvGraphicFramePr>
@@ -11681,7 +11217,7 @@
       </p:graphicFrame>
       <p:sp>
         <p:nvSpPr>
-          <p:cNvPr id="10" name="Rounded Rectangle 9"/>
+          <p:cNvPr id="9" name="Rounded Rectangle 8"/>
           <p:cNvSpPr/>
           <p:nvPr/>
         </p:nvSpPr>
@@ -11748,7 +11284,7 @@
       </p:sp>
       <p:sp>
         <p:nvSpPr>
-          <p:cNvPr id="11" name="Rectangle 10"/>
+          <p:cNvPr id="10" name="Rectangle 9"/>
           <p:cNvSpPr/>
           <p:nvPr/>
         </p:nvSpPr>
@@ -12183,54 +11719,7 @@
       </p:sp>
       <p:sp>
         <p:nvSpPr>
-          <p:cNvPr id="10" name="TextBox 9"/>
-          <p:cNvSpPr txBox="1"/>
-          <p:nvPr/>
-        </p:nvSpPr>
-        <p:spPr>
-          <a:xfrm>
-            <a:off x="987552" y="5943600"/>
-            <a:ext cx="6400800" cy="274320"/>
-          </a:xfrm>
-          <a:prstGeom prst="rect">
-            <a:avLst/>
-          </a:prstGeom>
-          <a:noFill/>
-        </p:spPr>
-        <p:txBody>
-          <a:bodyPr wrap="square" lIns="0" rIns="0" tIns="0" bIns="0" anchor="t">
-            <a:spAutoFit/>
-          </a:bodyPr>
-          <a:lstStyle/>
-          <a:p>
-            <a:pPr algn="l">
-              <a:lnSpc>
-                <a:spcPct val="122000"/>
-              </a:lnSpc>
-              <a:spcBef>
-                <a:spcPts val="0"/>
-              </a:spcBef>
-              <a:spcAft>
-                <a:spcPts val="0"/>
-              </a:spcAft>
-            </a:pPr>
-            <a:r>
-              <a:rPr sz="900" b="1" i="0" spc="160">
-                <a:solidFill>
-                  <a:srgbClr val="6B7FA6"/>
-                </a:solidFill>
-                <a:latin typeface="Segoe UI"/>
-                <a:ea typeface="Segoe UI"/>
-                <a:cs typeface="Segoe UI"/>
-              </a:rPr>
-              <a:t>UNIT 1  ·  INTRODUCTION OF AI AND GEN AI</a:t>
-            </a:r>
-          </a:p>
-        </p:txBody>
-      </p:sp>
-      <p:sp>
-        <p:nvSpPr>
-          <p:cNvPr id="11" name="logo-plate"/>
+          <p:cNvPr id="10" name="logo-plate"/>
           <p:cNvSpPr/>
           <p:nvPr/>
         </p:nvSpPr>
@@ -12276,7 +11765,7 @@
       </p:sp>
       <p:pic>
         <p:nvPicPr>
-          <p:cNvPr id="12" name="college-logo" descr="logo-full.png"/>
+          <p:cNvPr id="11" name="college-logo" descr="logo-full.png"/>
           <p:cNvPicPr>
             <a:picLocks noChangeAspect="1"/>
           </p:cNvPicPr>
@@ -12392,8 +11881,77 @@
         </p:nvSpPr>
         <p:spPr>
           <a:xfrm>
-            <a:off x="713232" y="6272784"/>
-            <a:ext cx="5597920" cy="219456"/>
+            <a:off x="8240677" y="6272784"/>
+            <a:ext cx="2651760" cy="219456"/>
+          </a:xfrm>
+          <a:prstGeom prst="rect">
+            <a:avLst/>
+          </a:prstGeom>
+          <a:noFill/>
+        </p:spPr>
+        <p:txBody>
+          <a:bodyPr wrap="square" lIns="0" rIns="0" tIns="0" bIns="0" anchor="t">
+            <a:spAutoFit/>
+          </a:bodyPr>
+          <a:lstStyle/>
+          <a:p>
+            <a:pPr algn="r">
+              <a:lnSpc>
+                <a:spcPct val="122000"/>
+              </a:lnSpc>
+              <a:spcBef>
+                <a:spcPts val="0"/>
+              </a:spcBef>
+              <a:spcAft>
+                <a:spcPts val="0"/>
+              </a:spcAft>
+            </a:pPr>
+            <a:r>
+              <a:rPr sz="900" b="0" i="0">
+                <a:solidFill>
+                  <a:srgbClr val="636E85"/>
+                </a:solidFill>
+                <a:latin typeface="Segoe UI"/>
+                <a:ea typeface="Segoe UI"/>
+                <a:cs typeface="Segoe UI"/>
+              </a:rPr>
+              <a:t>Lingesh K  ·  OSI2509030</a:t>
+            </a:r>
+            <a:r>
+              <a:rPr sz="900" b="0" i="0">
+                <a:solidFill>
+                  <a:srgbClr val="141C2E"/>
+                </a:solidFill>
+                <a:latin typeface="Segoe UI"/>
+                <a:ea typeface="Segoe UI"/>
+                <a:cs typeface="Segoe UI"/>
+              </a:rPr>
+              <a:t>     </a:t>
+            </a:r>
+            <a:r>
+              <a:rPr sz="900" b="1" i="0">
+                <a:solidFill>
+                  <a:srgbClr val="0E1E3C"/>
+                </a:solidFill>
+                <a:latin typeface="Segoe UI"/>
+                <a:ea typeface="Segoe UI"/>
+                <a:cs typeface="Segoe UI"/>
+              </a:rPr>
+              <a:t>17</a:t>
+            </a:r>
+          </a:p>
+        </p:txBody>
+      </p:sp>
+      <p:sp>
+        <p:nvSpPr>
+          <p:cNvPr id="5" name="TextBox 4"/>
+          <p:cNvSpPr txBox="1"/>
+          <p:nvPr/>
+        </p:nvSpPr>
+        <p:spPr>
+          <a:xfrm>
+            <a:off x="713232" y="566928"/>
+            <a:ext cx="10765231" cy="219456"/>
           </a:xfrm>
           <a:prstGeom prst="rect">
             <a:avLst/>
@@ -12418,106 +11976,15 @@
               </a:spcAft>
             </a:pPr>
             <a:r>
-              <a:rPr sz="900" b="1" i="0">
-                <a:solidFill>
-                  <a:srgbClr val="0E1E3C"/>
-                </a:solidFill>
-                <a:latin typeface="Segoe UI"/>
-                <a:ea typeface="Segoe UI"/>
-                <a:cs typeface="Segoe UI"/>
-              </a:rPr>
-              <a:t>Unit 1</a:t>
-            </a:r>
-            <a:r>
-              <a:rPr sz="900" b="0" i="0">
-                <a:solidFill>
-                  <a:srgbClr val="939EB3"/>
-                </a:solidFill>
-                <a:latin typeface="Segoe UI"/>
-                <a:ea typeface="Segoe UI"/>
-                <a:cs typeface="Segoe UI"/>
-              </a:rPr>
-              <a:t>  ·  </a:t>
-            </a:r>
-            <a:r>
-              <a:rPr sz="900" b="0" i="0">
-                <a:solidFill>
-                  <a:srgbClr val="636E85"/>
-                </a:solidFill>
-                <a:latin typeface="Segoe UI"/>
-                <a:ea typeface="Segoe UI"/>
-                <a:cs typeface="Segoe UI"/>
-              </a:rPr>
-              <a:t>Introduction of AI and Gen AI</a:t>
-            </a:r>
-          </a:p>
-        </p:txBody>
-      </p:sp>
-      <p:sp>
-        <p:nvSpPr>
-          <p:cNvPr id="5" name="TextBox 4"/>
-          <p:cNvSpPr txBox="1"/>
-          <p:nvPr/>
-        </p:nvSpPr>
-        <p:spPr>
-          <a:xfrm>
-            <a:off x="8240677" y="6272784"/>
-            <a:ext cx="2651760" cy="219456"/>
-          </a:xfrm>
-          <a:prstGeom prst="rect">
-            <a:avLst/>
-          </a:prstGeom>
-          <a:noFill/>
-        </p:spPr>
-        <p:txBody>
-          <a:bodyPr wrap="square" lIns="0" rIns="0" tIns="0" bIns="0" anchor="t">
-            <a:spAutoFit/>
-          </a:bodyPr>
-          <a:lstStyle/>
-          <a:p>
-            <a:pPr algn="r">
-              <a:lnSpc>
-                <a:spcPct val="122000"/>
-              </a:lnSpc>
-              <a:spcBef>
-                <a:spcPts val="0"/>
-              </a:spcBef>
-              <a:spcAft>
-                <a:spcPts val="0"/>
-              </a:spcAft>
-            </a:pPr>
-            <a:r>
-              <a:rPr sz="900" b="0" i="0">
-                <a:solidFill>
-                  <a:srgbClr val="636E85"/>
-                </a:solidFill>
-                <a:latin typeface="Segoe UI"/>
-                <a:ea typeface="Segoe UI"/>
-                <a:cs typeface="Segoe UI"/>
-              </a:rPr>
-              <a:t>Lingesh K  ·  OSI2509030</a:t>
-            </a:r>
-            <a:r>
-              <a:rPr sz="900" b="0" i="0">
-                <a:solidFill>
-                  <a:srgbClr val="141C2E"/>
-                </a:solidFill>
-                <a:latin typeface="Segoe UI"/>
-                <a:ea typeface="Segoe UI"/>
-                <a:cs typeface="Segoe UI"/>
-              </a:rPr>
-              <a:t>     </a:t>
-            </a:r>
-            <a:r>
-              <a:rPr sz="900" b="1" i="0">
-                <a:solidFill>
-                  <a:srgbClr val="0E1E3C"/>
-                </a:solidFill>
-                <a:latin typeface="Segoe UI"/>
-                <a:ea typeface="Segoe UI"/>
-                <a:cs typeface="Segoe UI"/>
-              </a:rPr>
-              <a:t>17</a:t>
+              <a:rPr sz="950" b="1" i="0" spc="160">
+                <a:solidFill>
+                  <a:srgbClr val="27A06A"/>
+                </a:solidFill>
+                <a:latin typeface="Segoe UI"/>
+                <a:ea typeface="Segoe UI"/>
+                <a:cs typeface="Segoe UI"/>
+              </a:rPr>
+              <a:t>THE UPSIDE</a:t>
             </a:r>
           </a:p>
         </p:txBody>
@@ -12525,53 +11992,6 @@
       <p:sp>
         <p:nvSpPr>
           <p:cNvPr id="6" name="TextBox 5"/>
-          <p:cNvSpPr txBox="1"/>
-          <p:nvPr/>
-        </p:nvSpPr>
-        <p:spPr>
-          <a:xfrm>
-            <a:off x="713232" y="566928"/>
-            <a:ext cx="10765231" cy="219456"/>
-          </a:xfrm>
-          <a:prstGeom prst="rect">
-            <a:avLst/>
-          </a:prstGeom>
-          <a:noFill/>
-        </p:spPr>
-        <p:txBody>
-          <a:bodyPr wrap="square" lIns="0" rIns="0" tIns="0" bIns="0" anchor="t">
-            <a:spAutoFit/>
-          </a:bodyPr>
-          <a:lstStyle/>
-          <a:p>
-            <a:pPr algn="l">
-              <a:lnSpc>
-                <a:spcPct val="122000"/>
-              </a:lnSpc>
-              <a:spcBef>
-                <a:spcPts val="0"/>
-              </a:spcBef>
-              <a:spcAft>
-                <a:spcPts val="0"/>
-              </a:spcAft>
-            </a:pPr>
-            <a:r>
-              <a:rPr sz="950" b="1" i="0" spc="160">
-                <a:solidFill>
-                  <a:srgbClr val="27A06A"/>
-                </a:solidFill>
-                <a:latin typeface="Segoe UI"/>
-                <a:ea typeface="Segoe UI"/>
-                <a:cs typeface="Segoe UI"/>
-              </a:rPr>
-              <a:t>THE UPSIDE</a:t>
-            </a:r>
-          </a:p>
-        </p:txBody>
-      </p:sp>
-      <p:sp>
-        <p:nvSpPr>
-          <p:cNvPr id="7" name="TextBox 6"/>
           <p:cNvSpPr txBox="1"/>
           <p:nvPr/>
         </p:nvSpPr>
@@ -12618,7 +12038,7 @@
       </p:sp>
       <p:sp>
         <p:nvSpPr>
-          <p:cNvPr id="8" name="Rectangle 7"/>
+          <p:cNvPr id="7" name="Rectangle 6"/>
           <p:cNvSpPr/>
           <p:nvPr/>
         </p:nvSpPr>
@@ -12662,7 +12082,7 @@
       </p:sp>
       <p:sp>
         <p:nvSpPr>
-          <p:cNvPr id="9" name="Rounded Rectangle 8"/>
+          <p:cNvPr id="8" name="Rounded Rectangle 7"/>
           <p:cNvSpPr/>
           <p:nvPr/>
         </p:nvSpPr>
@@ -12716,7 +12136,7 @@
       </p:sp>
       <p:sp>
         <p:nvSpPr>
-          <p:cNvPr id="10" name="Rectangle 9"/>
+          <p:cNvPr id="9" name="Rectangle 8"/>
           <p:cNvSpPr/>
           <p:nvPr/>
         </p:nvSpPr>
@@ -12760,7 +12180,7 @@
       </p:sp>
       <p:sp>
         <p:nvSpPr>
-          <p:cNvPr id="11" name="TextBox 10"/>
+          <p:cNvPr id="10" name="TextBox 9"/>
           <p:cNvSpPr txBox="1"/>
           <p:nvPr/>
         </p:nvSpPr>
@@ -12807,7 +12227,7 @@
       </p:sp>
       <p:sp>
         <p:nvSpPr>
-          <p:cNvPr id="12" name="TextBox 11"/>
+          <p:cNvPr id="11" name="TextBox 10"/>
           <p:cNvSpPr txBox="1"/>
           <p:nvPr/>
         </p:nvSpPr>
@@ -12854,7 +12274,7 @@
       </p:sp>
       <p:sp>
         <p:nvSpPr>
-          <p:cNvPr id="13" name="Rounded Rectangle 12"/>
+          <p:cNvPr id="12" name="Rounded Rectangle 11"/>
           <p:cNvSpPr/>
           <p:nvPr/>
         </p:nvSpPr>
@@ -12908,7 +12328,7 @@
       </p:sp>
       <p:sp>
         <p:nvSpPr>
-          <p:cNvPr id="14" name="Rectangle 13"/>
+          <p:cNvPr id="13" name="Rectangle 12"/>
           <p:cNvSpPr/>
           <p:nvPr/>
         </p:nvSpPr>
@@ -12952,7 +12372,7 @@
       </p:sp>
       <p:sp>
         <p:nvSpPr>
-          <p:cNvPr id="15" name="TextBox 14"/>
+          <p:cNvPr id="14" name="TextBox 13"/>
           <p:cNvSpPr txBox="1"/>
           <p:nvPr/>
         </p:nvSpPr>
@@ -12999,7 +12419,7 @@
       </p:sp>
       <p:sp>
         <p:nvSpPr>
-          <p:cNvPr id="16" name="TextBox 15"/>
+          <p:cNvPr id="15" name="TextBox 14"/>
           <p:cNvSpPr txBox="1"/>
           <p:nvPr/>
         </p:nvSpPr>
@@ -13046,7 +12466,7 @@
       </p:sp>
       <p:sp>
         <p:nvSpPr>
-          <p:cNvPr id="17" name="Rounded Rectangle 16"/>
+          <p:cNvPr id="16" name="Rounded Rectangle 15"/>
           <p:cNvSpPr/>
           <p:nvPr/>
         </p:nvSpPr>
@@ -13100,7 +12520,7 @@
       </p:sp>
       <p:sp>
         <p:nvSpPr>
-          <p:cNvPr id="18" name="Rectangle 17"/>
+          <p:cNvPr id="17" name="Rectangle 16"/>
           <p:cNvSpPr/>
           <p:nvPr/>
         </p:nvSpPr>
@@ -13144,7 +12564,7 @@
       </p:sp>
       <p:sp>
         <p:nvSpPr>
-          <p:cNvPr id="19" name="TextBox 18"/>
+          <p:cNvPr id="18" name="TextBox 17"/>
           <p:cNvSpPr txBox="1"/>
           <p:nvPr/>
         </p:nvSpPr>
@@ -13191,7 +12611,7 @@
       </p:sp>
       <p:sp>
         <p:nvSpPr>
-          <p:cNvPr id="20" name="TextBox 19"/>
+          <p:cNvPr id="19" name="TextBox 18"/>
           <p:cNvSpPr txBox="1"/>
           <p:nvPr/>
         </p:nvSpPr>
@@ -13238,7 +12658,7 @@
       </p:sp>
       <p:sp>
         <p:nvSpPr>
-          <p:cNvPr id="21" name="Rounded Rectangle 20"/>
+          <p:cNvPr id="20" name="Rounded Rectangle 19"/>
           <p:cNvSpPr/>
           <p:nvPr/>
         </p:nvSpPr>
@@ -13292,7 +12712,7 @@
       </p:sp>
       <p:sp>
         <p:nvSpPr>
-          <p:cNvPr id="22" name="Rectangle 21"/>
+          <p:cNvPr id="21" name="Rectangle 20"/>
           <p:cNvSpPr/>
           <p:nvPr/>
         </p:nvSpPr>
@@ -13336,7 +12756,7 @@
       </p:sp>
       <p:sp>
         <p:nvSpPr>
-          <p:cNvPr id="23" name="TextBox 22"/>
+          <p:cNvPr id="22" name="TextBox 21"/>
           <p:cNvSpPr txBox="1"/>
           <p:nvPr/>
         </p:nvSpPr>
@@ -13383,7 +12803,7 @@
       </p:sp>
       <p:sp>
         <p:nvSpPr>
-          <p:cNvPr id="24" name="TextBox 23"/>
+          <p:cNvPr id="23" name="TextBox 22"/>
           <p:cNvSpPr txBox="1"/>
           <p:nvPr/>
         </p:nvSpPr>
@@ -13430,7 +12850,7 @@
       </p:sp>
       <p:sp>
         <p:nvSpPr>
-          <p:cNvPr id="25" name="Rounded Rectangle 24"/>
+          <p:cNvPr id="24" name="Rounded Rectangle 23"/>
           <p:cNvSpPr/>
           <p:nvPr/>
         </p:nvSpPr>
@@ -13484,7 +12904,7 @@
       </p:sp>
       <p:sp>
         <p:nvSpPr>
-          <p:cNvPr id="26" name="Rectangle 25"/>
+          <p:cNvPr id="25" name="Rectangle 24"/>
           <p:cNvSpPr/>
           <p:nvPr/>
         </p:nvSpPr>
@@ -13528,7 +12948,7 @@
       </p:sp>
       <p:sp>
         <p:nvSpPr>
-          <p:cNvPr id="27" name="TextBox 26"/>
+          <p:cNvPr id="26" name="TextBox 25"/>
           <p:cNvSpPr txBox="1"/>
           <p:nvPr/>
         </p:nvSpPr>
@@ -13575,7 +12995,7 @@
       </p:sp>
       <p:sp>
         <p:nvSpPr>
-          <p:cNvPr id="28" name="TextBox 27"/>
+          <p:cNvPr id="27" name="TextBox 26"/>
           <p:cNvSpPr txBox="1"/>
           <p:nvPr/>
         </p:nvSpPr>
@@ -13622,7 +13042,7 @@
       </p:sp>
       <p:sp>
         <p:nvSpPr>
-          <p:cNvPr id="29" name="Rounded Rectangle 28"/>
+          <p:cNvPr id="28" name="Rounded Rectangle 27"/>
           <p:cNvSpPr/>
           <p:nvPr/>
         </p:nvSpPr>
@@ -13676,7 +13096,7 @@
       </p:sp>
       <p:sp>
         <p:nvSpPr>
-          <p:cNvPr id="30" name="Rectangle 29"/>
+          <p:cNvPr id="29" name="Rectangle 28"/>
           <p:cNvSpPr/>
           <p:nvPr/>
         </p:nvSpPr>
@@ -13720,7 +13140,7 @@
       </p:sp>
       <p:sp>
         <p:nvSpPr>
-          <p:cNvPr id="31" name="TextBox 30"/>
+          <p:cNvPr id="30" name="TextBox 29"/>
           <p:cNvSpPr txBox="1"/>
           <p:nvPr/>
         </p:nvSpPr>
@@ -13767,7 +13187,7 @@
       </p:sp>
       <p:sp>
         <p:nvSpPr>
-          <p:cNvPr id="32" name="TextBox 31"/>
+          <p:cNvPr id="31" name="TextBox 30"/>
           <p:cNvSpPr txBox="1"/>
           <p:nvPr/>
         </p:nvSpPr>
@@ -13906,8 +13326,77 @@
         </p:nvSpPr>
         <p:spPr>
           <a:xfrm>
-            <a:off x="713232" y="6272784"/>
-            <a:ext cx="5597920" cy="219456"/>
+            <a:off x="8240677" y="6272784"/>
+            <a:ext cx="2651760" cy="219456"/>
+          </a:xfrm>
+          <a:prstGeom prst="rect">
+            <a:avLst/>
+          </a:prstGeom>
+          <a:noFill/>
+        </p:spPr>
+        <p:txBody>
+          <a:bodyPr wrap="square" lIns="0" rIns="0" tIns="0" bIns="0" anchor="t">
+            <a:spAutoFit/>
+          </a:bodyPr>
+          <a:lstStyle/>
+          <a:p>
+            <a:pPr algn="r">
+              <a:lnSpc>
+                <a:spcPct val="122000"/>
+              </a:lnSpc>
+              <a:spcBef>
+                <a:spcPts val="0"/>
+              </a:spcBef>
+              <a:spcAft>
+                <a:spcPts val="0"/>
+              </a:spcAft>
+            </a:pPr>
+            <a:r>
+              <a:rPr sz="900" b="0" i="0">
+                <a:solidFill>
+                  <a:srgbClr val="636E85"/>
+                </a:solidFill>
+                <a:latin typeface="Segoe UI"/>
+                <a:ea typeface="Segoe UI"/>
+                <a:cs typeface="Segoe UI"/>
+              </a:rPr>
+              <a:t>Lingesh K  ·  OSI2509030</a:t>
+            </a:r>
+            <a:r>
+              <a:rPr sz="900" b="0" i="0">
+                <a:solidFill>
+                  <a:srgbClr val="141C2E"/>
+                </a:solidFill>
+                <a:latin typeface="Segoe UI"/>
+                <a:ea typeface="Segoe UI"/>
+                <a:cs typeface="Segoe UI"/>
+              </a:rPr>
+              <a:t>     </a:t>
+            </a:r>
+            <a:r>
+              <a:rPr sz="900" b="1" i="0">
+                <a:solidFill>
+                  <a:srgbClr val="0E1E3C"/>
+                </a:solidFill>
+                <a:latin typeface="Segoe UI"/>
+                <a:ea typeface="Segoe UI"/>
+                <a:cs typeface="Segoe UI"/>
+              </a:rPr>
+              <a:t>18</a:t>
+            </a:r>
+          </a:p>
+        </p:txBody>
+      </p:sp>
+      <p:sp>
+        <p:nvSpPr>
+          <p:cNvPr id="5" name="TextBox 4"/>
+          <p:cNvSpPr txBox="1"/>
+          <p:nvPr/>
+        </p:nvSpPr>
+        <p:spPr>
+          <a:xfrm>
+            <a:off x="713232" y="566928"/>
+            <a:ext cx="10765231" cy="219456"/>
           </a:xfrm>
           <a:prstGeom prst="rect">
             <a:avLst/>
@@ -13932,106 +13421,15 @@
               </a:spcAft>
             </a:pPr>
             <a:r>
-              <a:rPr sz="900" b="1" i="0">
-                <a:solidFill>
-                  <a:srgbClr val="0E1E3C"/>
-                </a:solidFill>
-                <a:latin typeface="Segoe UI"/>
-                <a:ea typeface="Segoe UI"/>
-                <a:cs typeface="Segoe UI"/>
-              </a:rPr>
-              <a:t>Unit 1</a:t>
-            </a:r>
-            <a:r>
-              <a:rPr sz="900" b="0" i="0">
-                <a:solidFill>
-                  <a:srgbClr val="939EB3"/>
-                </a:solidFill>
-                <a:latin typeface="Segoe UI"/>
-                <a:ea typeface="Segoe UI"/>
-                <a:cs typeface="Segoe UI"/>
-              </a:rPr>
-              <a:t>  ·  </a:t>
-            </a:r>
-            <a:r>
-              <a:rPr sz="900" b="0" i="0">
-                <a:solidFill>
-                  <a:srgbClr val="636E85"/>
-                </a:solidFill>
-                <a:latin typeface="Segoe UI"/>
-                <a:ea typeface="Segoe UI"/>
-                <a:cs typeface="Segoe UI"/>
-              </a:rPr>
-              <a:t>Introduction of AI and Gen AI</a:t>
-            </a:r>
-          </a:p>
-        </p:txBody>
-      </p:sp>
-      <p:sp>
-        <p:nvSpPr>
-          <p:cNvPr id="5" name="TextBox 4"/>
-          <p:cNvSpPr txBox="1"/>
-          <p:nvPr/>
-        </p:nvSpPr>
-        <p:spPr>
-          <a:xfrm>
-            <a:off x="8240677" y="6272784"/>
-            <a:ext cx="2651760" cy="219456"/>
-          </a:xfrm>
-          <a:prstGeom prst="rect">
-            <a:avLst/>
-          </a:prstGeom>
-          <a:noFill/>
-        </p:spPr>
-        <p:txBody>
-          <a:bodyPr wrap="square" lIns="0" rIns="0" tIns="0" bIns="0" anchor="t">
-            <a:spAutoFit/>
-          </a:bodyPr>
-          <a:lstStyle/>
-          <a:p>
-            <a:pPr algn="r">
-              <a:lnSpc>
-                <a:spcPct val="122000"/>
-              </a:lnSpc>
-              <a:spcBef>
-                <a:spcPts val="0"/>
-              </a:spcBef>
-              <a:spcAft>
-                <a:spcPts val="0"/>
-              </a:spcAft>
-            </a:pPr>
-            <a:r>
-              <a:rPr sz="900" b="0" i="0">
-                <a:solidFill>
-                  <a:srgbClr val="636E85"/>
-                </a:solidFill>
-                <a:latin typeface="Segoe UI"/>
-                <a:ea typeface="Segoe UI"/>
-                <a:cs typeface="Segoe UI"/>
-              </a:rPr>
-              <a:t>Lingesh K  ·  OSI2509030</a:t>
-            </a:r>
-            <a:r>
-              <a:rPr sz="900" b="0" i="0">
-                <a:solidFill>
-                  <a:srgbClr val="141C2E"/>
-                </a:solidFill>
-                <a:latin typeface="Segoe UI"/>
-                <a:ea typeface="Segoe UI"/>
-                <a:cs typeface="Segoe UI"/>
-              </a:rPr>
-              <a:t>     </a:t>
-            </a:r>
-            <a:r>
-              <a:rPr sz="900" b="1" i="0">
-                <a:solidFill>
-                  <a:srgbClr val="0E1E3C"/>
-                </a:solidFill>
-                <a:latin typeface="Segoe UI"/>
-                <a:ea typeface="Segoe UI"/>
-                <a:cs typeface="Segoe UI"/>
-              </a:rPr>
-              <a:t>18</a:t>
+              <a:rPr sz="950" b="1" i="0" spc="160">
+                <a:solidFill>
+                  <a:srgbClr val="E05151"/>
+                </a:solidFill>
+                <a:latin typeface="Segoe UI"/>
+                <a:ea typeface="Segoe UI"/>
+                <a:cs typeface="Segoe UI"/>
+              </a:rPr>
+              <a:t>THE DOWNSIDE</a:t>
             </a:r>
           </a:p>
         </p:txBody>
@@ -14039,53 +13437,6 @@
       <p:sp>
         <p:nvSpPr>
           <p:cNvPr id="6" name="TextBox 5"/>
-          <p:cNvSpPr txBox="1"/>
-          <p:nvPr/>
-        </p:nvSpPr>
-        <p:spPr>
-          <a:xfrm>
-            <a:off x="713232" y="566928"/>
-            <a:ext cx="10765231" cy="219456"/>
-          </a:xfrm>
-          <a:prstGeom prst="rect">
-            <a:avLst/>
-          </a:prstGeom>
-          <a:noFill/>
-        </p:spPr>
-        <p:txBody>
-          <a:bodyPr wrap="square" lIns="0" rIns="0" tIns="0" bIns="0" anchor="t">
-            <a:spAutoFit/>
-          </a:bodyPr>
-          <a:lstStyle/>
-          <a:p>
-            <a:pPr algn="l">
-              <a:lnSpc>
-                <a:spcPct val="122000"/>
-              </a:lnSpc>
-              <a:spcBef>
-                <a:spcPts val="0"/>
-              </a:spcBef>
-              <a:spcAft>
-                <a:spcPts val="0"/>
-              </a:spcAft>
-            </a:pPr>
-            <a:r>
-              <a:rPr sz="950" b="1" i="0" spc="160">
-                <a:solidFill>
-                  <a:srgbClr val="E05151"/>
-                </a:solidFill>
-                <a:latin typeface="Segoe UI"/>
-                <a:ea typeface="Segoe UI"/>
-                <a:cs typeface="Segoe UI"/>
-              </a:rPr>
-              <a:t>THE DOWNSIDE</a:t>
-            </a:r>
-          </a:p>
-        </p:txBody>
-      </p:sp>
-      <p:sp>
-        <p:nvSpPr>
-          <p:cNvPr id="7" name="TextBox 6"/>
           <p:cNvSpPr txBox="1"/>
           <p:nvPr/>
         </p:nvSpPr>
@@ -14132,7 +13483,7 @@
       </p:sp>
       <p:sp>
         <p:nvSpPr>
-          <p:cNvPr id="8" name="Rectangle 7"/>
+          <p:cNvPr id="7" name="Rectangle 6"/>
           <p:cNvSpPr/>
           <p:nvPr/>
         </p:nvSpPr>
@@ -14176,7 +13527,7 @@
       </p:sp>
       <p:sp>
         <p:nvSpPr>
-          <p:cNvPr id="9" name="TextBox 8"/>
+          <p:cNvPr id="8" name="TextBox 7"/>
           <p:cNvSpPr txBox="1"/>
           <p:nvPr/>
         </p:nvSpPr>
@@ -14223,7 +13574,7 @@
       </p:sp>
       <p:sp>
         <p:nvSpPr>
-          <p:cNvPr id="10" name="Rounded Rectangle 9"/>
+          <p:cNvPr id="9" name="Rounded Rectangle 8"/>
           <p:cNvSpPr/>
           <p:nvPr/>
         </p:nvSpPr>
@@ -14277,7 +13628,7 @@
       </p:sp>
       <p:sp>
         <p:nvSpPr>
-          <p:cNvPr id="11" name="Rectangle 10"/>
+          <p:cNvPr id="10" name="Rectangle 9"/>
           <p:cNvSpPr/>
           <p:nvPr/>
         </p:nvSpPr>
@@ -14321,7 +13672,7 @@
       </p:sp>
       <p:sp>
         <p:nvSpPr>
-          <p:cNvPr id="12" name="TextBox 11"/>
+          <p:cNvPr id="11" name="TextBox 10"/>
           <p:cNvSpPr txBox="1"/>
           <p:nvPr/>
         </p:nvSpPr>
@@ -14368,7 +13719,7 @@
       </p:sp>
       <p:sp>
         <p:nvSpPr>
-          <p:cNvPr id="13" name="Rounded Rectangle 12"/>
+          <p:cNvPr id="12" name="Rounded Rectangle 11"/>
           <p:cNvSpPr/>
           <p:nvPr/>
         </p:nvSpPr>
@@ -14414,7 +13765,7 @@
       </p:sp>
       <p:sp>
         <p:nvSpPr>
-          <p:cNvPr id="14" name="TextBox 13"/>
+          <p:cNvPr id="13" name="TextBox 12"/>
           <p:cNvSpPr txBox="1"/>
           <p:nvPr/>
         </p:nvSpPr>
@@ -14461,7 +13812,7 @@
       </p:sp>
       <p:sp>
         <p:nvSpPr>
-          <p:cNvPr id="15" name="Rounded Rectangle 14"/>
+          <p:cNvPr id="14" name="Rounded Rectangle 13"/>
           <p:cNvSpPr/>
           <p:nvPr/>
         </p:nvSpPr>
@@ -14507,7 +13858,7 @@
       </p:sp>
       <p:sp>
         <p:nvSpPr>
-          <p:cNvPr id="16" name="TextBox 15"/>
+          <p:cNvPr id="15" name="TextBox 14"/>
           <p:cNvSpPr txBox="1"/>
           <p:nvPr/>
         </p:nvSpPr>
@@ -14554,7 +13905,7 @@
       </p:sp>
       <p:sp>
         <p:nvSpPr>
-          <p:cNvPr id="17" name="Rounded Rectangle 16"/>
+          <p:cNvPr id="16" name="Rounded Rectangle 15"/>
           <p:cNvSpPr/>
           <p:nvPr/>
         </p:nvSpPr>
@@ -14600,7 +13951,7 @@
       </p:sp>
       <p:sp>
         <p:nvSpPr>
-          <p:cNvPr id="18" name="TextBox 17"/>
+          <p:cNvPr id="17" name="TextBox 16"/>
           <p:cNvSpPr txBox="1"/>
           <p:nvPr/>
         </p:nvSpPr>
@@ -14647,7 +13998,7 @@
       </p:sp>
       <p:sp>
         <p:nvSpPr>
-          <p:cNvPr id="19" name="Rounded Rectangle 18"/>
+          <p:cNvPr id="18" name="Rounded Rectangle 17"/>
           <p:cNvSpPr/>
           <p:nvPr/>
         </p:nvSpPr>
@@ -14701,7 +14052,7 @@
       </p:sp>
       <p:sp>
         <p:nvSpPr>
-          <p:cNvPr id="20" name="Rectangle 19"/>
+          <p:cNvPr id="19" name="Rectangle 18"/>
           <p:cNvSpPr/>
           <p:nvPr/>
         </p:nvSpPr>
@@ -14745,7 +14096,7 @@
       </p:sp>
       <p:sp>
         <p:nvSpPr>
-          <p:cNvPr id="21" name="TextBox 20"/>
+          <p:cNvPr id="20" name="TextBox 19"/>
           <p:cNvSpPr txBox="1"/>
           <p:nvPr/>
         </p:nvSpPr>
@@ -14792,7 +14143,7 @@
       </p:sp>
       <p:sp>
         <p:nvSpPr>
-          <p:cNvPr id="22" name="Rounded Rectangle 21"/>
+          <p:cNvPr id="21" name="Rounded Rectangle 20"/>
           <p:cNvSpPr/>
           <p:nvPr/>
         </p:nvSpPr>
@@ -14838,7 +14189,7 @@
       </p:sp>
       <p:sp>
         <p:nvSpPr>
-          <p:cNvPr id="23" name="TextBox 22"/>
+          <p:cNvPr id="22" name="TextBox 21"/>
           <p:cNvSpPr txBox="1"/>
           <p:nvPr/>
         </p:nvSpPr>
@@ -14885,7 +14236,7 @@
       </p:sp>
       <p:sp>
         <p:nvSpPr>
-          <p:cNvPr id="24" name="Rounded Rectangle 23"/>
+          <p:cNvPr id="23" name="Rounded Rectangle 22"/>
           <p:cNvSpPr/>
           <p:nvPr/>
         </p:nvSpPr>
@@ -14931,7 +14282,7 @@
       </p:sp>
       <p:sp>
         <p:nvSpPr>
-          <p:cNvPr id="25" name="TextBox 24"/>
+          <p:cNvPr id="24" name="TextBox 23"/>
           <p:cNvSpPr txBox="1"/>
           <p:nvPr/>
         </p:nvSpPr>
@@ -14978,7 +14329,7 @@
       </p:sp>
       <p:sp>
         <p:nvSpPr>
-          <p:cNvPr id="26" name="Rounded Rectangle 25"/>
+          <p:cNvPr id="25" name="Rounded Rectangle 24"/>
           <p:cNvSpPr/>
           <p:nvPr/>
         </p:nvSpPr>
@@ -15024,7 +14375,7 @@
       </p:sp>
       <p:sp>
         <p:nvSpPr>
-          <p:cNvPr id="27" name="TextBox 26"/>
+          <p:cNvPr id="26" name="TextBox 25"/>
           <p:cNvSpPr txBox="1"/>
           <p:nvPr/>
         </p:nvSpPr>
@@ -15071,7 +14422,7 @@
       </p:sp>
       <p:sp>
         <p:nvSpPr>
-          <p:cNvPr id="28" name="Rounded Rectangle 27"/>
+          <p:cNvPr id="27" name="Rounded Rectangle 26"/>
           <p:cNvSpPr/>
           <p:nvPr/>
         </p:nvSpPr>
@@ -15125,7 +14476,7 @@
       </p:sp>
       <p:sp>
         <p:nvSpPr>
-          <p:cNvPr id="29" name="Rectangle 28"/>
+          <p:cNvPr id="28" name="Rectangle 27"/>
           <p:cNvSpPr/>
           <p:nvPr/>
         </p:nvSpPr>
@@ -15169,7 +14520,7 @@
       </p:sp>
       <p:sp>
         <p:nvSpPr>
-          <p:cNvPr id="30" name="TextBox 29"/>
+          <p:cNvPr id="29" name="TextBox 28"/>
           <p:cNvSpPr txBox="1"/>
           <p:nvPr/>
         </p:nvSpPr>
@@ -15216,7 +14567,7 @@
       </p:sp>
       <p:sp>
         <p:nvSpPr>
-          <p:cNvPr id="31" name="Rounded Rectangle 30"/>
+          <p:cNvPr id="30" name="Rounded Rectangle 29"/>
           <p:cNvSpPr/>
           <p:nvPr/>
         </p:nvSpPr>
@@ -15262,7 +14613,7 @@
       </p:sp>
       <p:sp>
         <p:nvSpPr>
-          <p:cNvPr id="32" name="TextBox 31"/>
+          <p:cNvPr id="31" name="TextBox 30"/>
           <p:cNvSpPr txBox="1"/>
           <p:nvPr/>
         </p:nvSpPr>
@@ -15309,7 +14660,7 @@
       </p:sp>
       <p:sp>
         <p:nvSpPr>
-          <p:cNvPr id="33" name="Rounded Rectangle 32"/>
+          <p:cNvPr id="32" name="Rounded Rectangle 31"/>
           <p:cNvSpPr/>
           <p:nvPr/>
         </p:nvSpPr>
@@ -15355,7 +14706,7 @@
       </p:sp>
       <p:sp>
         <p:nvSpPr>
-          <p:cNvPr id="34" name="TextBox 33"/>
+          <p:cNvPr id="33" name="TextBox 32"/>
           <p:cNvSpPr txBox="1"/>
           <p:nvPr/>
         </p:nvSpPr>
@@ -15402,7 +14753,7 @@
       </p:sp>
       <p:sp>
         <p:nvSpPr>
-          <p:cNvPr id="35" name="Rounded Rectangle 34"/>
+          <p:cNvPr id="34" name="Rounded Rectangle 33"/>
           <p:cNvSpPr/>
           <p:nvPr/>
         </p:nvSpPr>
@@ -15448,7 +14799,7 @@
       </p:sp>
       <p:sp>
         <p:nvSpPr>
-          <p:cNvPr id="36" name="TextBox 35"/>
+          <p:cNvPr id="35" name="TextBox 34"/>
           <p:cNvSpPr txBox="1"/>
           <p:nvPr/>
         </p:nvSpPr>
@@ -15495,7 +14846,7 @@
       </p:sp>
       <p:sp>
         <p:nvSpPr>
-          <p:cNvPr id="37" name="Rounded Rectangle 36"/>
+          <p:cNvPr id="36" name="Rounded Rectangle 35"/>
           <p:cNvSpPr/>
           <p:nvPr/>
         </p:nvSpPr>
@@ -15549,7 +14900,7 @@
       </p:sp>
       <p:sp>
         <p:nvSpPr>
-          <p:cNvPr id="38" name="Rectangle 37"/>
+          <p:cNvPr id="37" name="Rectangle 36"/>
           <p:cNvSpPr/>
           <p:nvPr/>
         </p:nvSpPr>
@@ -15593,7 +14944,7 @@
       </p:sp>
       <p:sp>
         <p:nvSpPr>
-          <p:cNvPr id="39" name="TextBox 38"/>
+          <p:cNvPr id="38" name="TextBox 37"/>
           <p:cNvSpPr txBox="1"/>
           <p:nvPr/>
         </p:nvSpPr>
@@ -15640,7 +14991,7 @@
       </p:sp>
       <p:sp>
         <p:nvSpPr>
-          <p:cNvPr id="40" name="Rounded Rectangle 39"/>
+          <p:cNvPr id="39" name="Rounded Rectangle 38"/>
           <p:cNvSpPr/>
           <p:nvPr/>
         </p:nvSpPr>
@@ -15686,7 +15037,7 @@
       </p:sp>
       <p:sp>
         <p:nvSpPr>
-          <p:cNvPr id="41" name="TextBox 40"/>
+          <p:cNvPr id="40" name="TextBox 39"/>
           <p:cNvSpPr txBox="1"/>
           <p:nvPr/>
         </p:nvSpPr>
@@ -15733,7 +15084,7 @@
       </p:sp>
       <p:sp>
         <p:nvSpPr>
-          <p:cNvPr id="42" name="Rounded Rectangle 41"/>
+          <p:cNvPr id="41" name="Rounded Rectangle 40"/>
           <p:cNvSpPr/>
           <p:nvPr/>
         </p:nvSpPr>
@@ -15779,7 +15130,7 @@
       </p:sp>
       <p:sp>
         <p:nvSpPr>
-          <p:cNvPr id="43" name="TextBox 42"/>
+          <p:cNvPr id="42" name="TextBox 41"/>
           <p:cNvSpPr txBox="1"/>
           <p:nvPr/>
         </p:nvSpPr>
@@ -15826,7 +15177,7 @@
       </p:sp>
       <p:sp>
         <p:nvSpPr>
-          <p:cNvPr id="44" name="Rounded Rectangle 43"/>
+          <p:cNvPr id="43" name="Rounded Rectangle 42"/>
           <p:cNvSpPr/>
           <p:nvPr/>
         </p:nvSpPr>
@@ -15872,7 +15223,7 @@
       </p:sp>
       <p:sp>
         <p:nvSpPr>
-          <p:cNvPr id="45" name="TextBox 44"/>
+          <p:cNvPr id="44" name="TextBox 43"/>
           <p:cNvSpPr txBox="1"/>
           <p:nvPr/>
         </p:nvSpPr>
@@ -16011,8 +15362,77 @@
         </p:nvSpPr>
         <p:spPr>
           <a:xfrm>
-            <a:off x="713232" y="6272784"/>
-            <a:ext cx="5597920" cy="219456"/>
+            <a:off x="8240677" y="6272784"/>
+            <a:ext cx="2651760" cy="219456"/>
+          </a:xfrm>
+          <a:prstGeom prst="rect">
+            <a:avLst/>
+          </a:prstGeom>
+          <a:noFill/>
+        </p:spPr>
+        <p:txBody>
+          <a:bodyPr wrap="square" lIns="0" rIns="0" tIns="0" bIns="0" anchor="t">
+            <a:spAutoFit/>
+          </a:bodyPr>
+          <a:lstStyle/>
+          <a:p>
+            <a:pPr algn="r">
+              <a:lnSpc>
+                <a:spcPct val="122000"/>
+              </a:lnSpc>
+              <a:spcBef>
+                <a:spcPts val="0"/>
+              </a:spcBef>
+              <a:spcAft>
+                <a:spcPts val="0"/>
+              </a:spcAft>
+            </a:pPr>
+            <a:r>
+              <a:rPr sz="900" b="0" i="0">
+                <a:solidFill>
+                  <a:srgbClr val="636E85"/>
+                </a:solidFill>
+                <a:latin typeface="Segoe UI"/>
+                <a:ea typeface="Segoe UI"/>
+                <a:cs typeface="Segoe UI"/>
+              </a:rPr>
+              <a:t>Lingesh K  ·  OSI2509030</a:t>
+            </a:r>
+            <a:r>
+              <a:rPr sz="900" b="0" i="0">
+                <a:solidFill>
+                  <a:srgbClr val="141C2E"/>
+                </a:solidFill>
+                <a:latin typeface="Segoe UI"/>
+                <a:ea typeface="Segoe UI"/>
+                <a:cs typeface="Segoe UI"/>
+              </a:rPr>
+              <a:t>     </a:t>
+            </a:r>
+            <a:r>
+              <a:rPr sz="900" b="1" i="0">
+                <a:solidFill>
+                  <a:srgbClr val="0E1E3C"/>
+                </a:solidFill>
+                <a:latin typeface="Segoe UI"/>
+                <a:ea typeface="Segoe UI"/>
+                <a:cs typeface="Segoe UI"/>
+              </a:rPr>
+              <a:t>19</a:t>
+            </a:r>
+          </a:p>
+        </p:txBody>
+      </p:sp>
+      <p:sp>
+        <p:nvSpPr>
+          <p:cNvPr id="5" name="TextBox 4"/>
+          <p:cNvSpPr txBox="1"/>
+          <p:nvPr/>
+        </p:nvSpPr>
+        <p:spPr>
+          <a:xfrm>
+            <a:off x="713232" y="566928"/>
+            <a:ext cx="10765231" cy="219456"/>
           </a:xfrm>
           <a:prstGeom prst="rect">
             <a:avLst/>
@@ -16037,106 +15457,15 @@
               </a:spcAft>
             </a:pPr>
             <a:r>
-              <a:rPr sz="900" b="1" i="0">
-                <a:solidFill>
-                  <a:srgbClr val="0E1E3C"/>
-                </a:solidFill>
-                <a:latin typeface="Segoe UI"/>
-                <a:ea typeface="Segoe UI"/>
-                <a:cs typeface="Segoe UI"/>
-              </a:rPr>
-              <a:t>Unit 1</a:t>
-            </a:r>
-            <a:r>
-              <a:rPr sz="900" b="0" i="0">
-                <a:solidFill>
-                  <a:srgbClr val="939EB3"/>
-                </a:solidFill>
-                <a:latin typeface="Segoe UI"/>
-                <a:ea typeface="Segoe UI"/>
-                <a:cs typeface="Segoe UI"/>
-              </a:rPr>
-              <a:t>  ·  </a:t>
-            </a:r>
-            <a:r>
-              <a:rPr sz="900" b="0" i="0">
-                <a:solidFill>
-                  <a:srgbClr val="636E85"/>
-                </a:solidFill>
-                <a:latin typeface="Segoe UI"/>
-                <a:ea typeface="Segoe UI"/>
-                <a:cs typeface="Segoe UI"/>
-              </a:rPr>
-              <a:t>Introduction of AI and Gen AI</a:t>
-            </a:r>
-          </a:p>
-        </p:txBody>
-      </p:sp>
-      <p:sp>
-        <p:nvSpPr>
-          <p:cNvPr id="5" name="TextBox 4"/>
-          <p:cNvSpPr txBox="1"/>
-          <p:nvPr/>
-        </p:nvSpPr>
-        <p:spPr>
-          <a:xfrm>
-            <a:off x="8240677" y="6272784"/>
-            <a:ext cx="2651760" cy="219456"/>
-          </a:xfrm>
-          <a:prstGeom prst="rect">
-            <a:avLst/>
-          </a:prstGeom>
-          <a:noFill/>
-        </p:spPr>
-        <p:txBody>
-          <a:bodyPr wrap="square" lIns="0" rIns="0" tIns="0" bIns="0" anchor="t">
-            <a:spAutoFit/>
-          </a:bodyPr>
-          <a:lstStyle/>
-          <a:p>
-            <a:pPr algn="r">
-              <a:lnSpc>
-                <a:spcPct val="122000"/>
-              </a:lnSpc>
-              <a:spcBef>
-                <a:spcPts val="0"/>
-              </a:spcBef>
-              <a:spcAft>
-                <a:spcPts val="0"/>
-              </a:spcAft>
-            </a:pPr>
-            <a:r>
-              <a:rPr sz="900" b="0" i="0">
-                <a:solidFill>
-                  <a:srgbClr val="636E85"/>
-                </a:solidFill>
-                <a:latin typeface="Segoe UI"/>
-                <a:ea typeface="Segoe UI"/>
-                <a:cs typeface="Segoe UI"/>
-              </a:rPr>
-              <a:t>Lingesh K  ·  OSI2509030</a:t>
-            </a:r>
-            <a:r>
-              <a:rPr sz="900" b="0" i="0">
-                <a:solidFill>
-                  <a:srgbClr val="141C2E"/>
-                </a:solidFill>
-                <a:latin typeface="Segoe UI"/>
-                <a:ea typeface="Segoe UI"/>
-                <a:cs typeface="Segoe UI"/>
-              </a:rPr>
-              <a:t>     </a:t>
-            </a:r>
-            <a:r>
-              <a:rPr sz="900" b="1" i="0">
-                <a:solidFill>
-                  <a:srgbClr val="0E1E3C"/>
-                </a:solidFill>
-                <a:latin typeface="Segoe UI"/>
-                <a:ea typeface="Segoe UI"/>
-                <a:cs typeface="Segoe UI"/>
-              </a:rPr>
-              <a:t>19</a:t>
+              <a:rPr sz="950" b="1" i="0" spc="160">
+                <a:solidFill>
+                  <a:srgbClr val="F5A623"/>
+                </a:solidFill>
+                <a:latin typeface="Segoe UI"/>
+                <a:ea typeface="Segoe UI"/>
+                <a:cs typeface="Segoe UI"/>
+              </a:rPr>
+              <a:t>LIMITATIONS</a:t>
             </a:r>
           </a:p>
         </p:txBody>
@@ -16144,53 +15473,6 @@
       <p:sp>
         <p:nvSpPr>
           <p:cNvPr id="6" name="TextBox 5"/>
-          <p:cNvSpPr txBox="1"/>
-          <p:nvPr/>
-        </p:nvSpPr>
-        <p:spPr>
-          <a:xfrm>
-            <a:off x="713232" y="566928"/>
-            <a:ext cx="10765231" cy="219456"/>
-          </a:xfrm>
-          <a:prstGeom prst="rect">
-            <a:avLst/>
-          </a:prstGeom>
-          <a:noFill/>
-        </p:spPr>
-        <p:txBody>
-          <a:bodyPr wrap="square" lIns="0" rIns="0" tIns="0" bIns="0" anchor="t">
-            <a:spAutoFit/>
-          </a:bodyPr>
-          <a:lstStyle/>
-          <a:p>
-            <a:pPr algn="l">
-              <a:lnSpc>
-                <a:spcPct val="122000"/>
-              </a:lnSpc>
-              <a:spcBef>
-                <a:spcPts val="0"/>
-              </a:spcBef>
-              <a:spcAft>
-                <a:spcPts val="0"/>
-              </a:spcAft>
-            </a:pPr>
-            <a:r>
-              <a:rPr sz="950" b="1" i="0" spc="160">
-                <a:solidFill>
-                  <a:srgbClr val="F5A623"/>
-                </a:solidFill>
-                <a:latin typeface="Segoe UI"/>
-                <a:ea typeface="Segoe UI"/>
-                <a:cs typeface="Segoe UI"/>
-              </a:rPr>
-              <a:t>LIMITATIONS</a:t>
-            </a:r>
-          </a:p>
-        </p:txBody>
-      </p:sp>
-      <p:sp>
-        <p:nvSpPr>
-          <p:cNvPr id="7" name="TextBox 6"/>
           <p:cNvSpPr txBox="1"/>
           <p:nvPr/>
         </p:nvSpPr>
@@ -16237,7 +15519,7 @@
       </p:sp>
       <p:sp>
         <p:nvSpPr>
-          <p:cNvPr id="8" name="Rectangle 7"/>
+          <p:cNvPr id="7" name="Rectangle 6"/>
           <p:cNvSpPr/>
           <p:nvPr/>
         </p:nvSpPr>
@@ -16281,7 +15563,7 @@
       </p:sp>
       <p:sp>
         <p:nvSpPr>
-          <p:cNvPr id="9" name="TextBox 8"/>
+          <p:cNvPr id="8" name="TextBox 7"/>
           <p:cNvSpPr txBox="1"/>
           <p:nvPr/>
         </p:nvSpPr>
@@ -16328,7 +15610,7 @@
       </p:sp>
       <p:sp>
         <p:nvSpPr>
-          <p:cNvPr id="10" name="Rounded Rectangle 9"/>
+          <p:cNvPr id="9" name="Rounded Rectangle 8"/>
           <p:cNvSpPr/>
           <p:nvPr/>
         </p:nvSpPr>
@@ -16374,7 +15656,7 @@
       </p:sp>
       <p:sp>
         <p:nvSpPr>
-          <p:cNvPr id="11" name="TextBox 10"/>
+          <p:cNvPr id="10" name="TextBox 9"/>
           <p:cNvSpPr txBox="1"/>
           <p:nvPr/>
         </p:nvSpPr>
@@ -16445,7 +15727,7 @@
       </p:sp>
       <p:sp>
         <p:nvSpPr>
-          <p:cNvPr id="12" name="Rounded Rectangle 11"/>
+          <p:cNvPr id="11" name="Rounded Rectangle 10"/>
           <p:cNvSpPr/>
           <p:nvPr/>
         </p:nvSpPr>
@@ -16491,7 +15773,7 @@
       </p:sp>
       <p:sp>
         <p:nvSpPr>
-          <p:cNvPr id="13" name="TextBox 12"/>
+          <p:cNvPr id="12" name="TextBox 11"/>
           <p:cNvSpPr txBox="1"/>
           <p:nvPr/>
         </p:nvSpPr>
@@ -16562,7 +15844,7 @@
       </p:sp>
       <p:sp>
         <p:nvSpPr>
-          <p:cNvPr id="14" name="Rounded Rectangle 13"/>
+          <p:cNvPr id="13" name="Rounded Rectangle 12"/>
           <p:cNvSpPr/>
           <p:nvPr/>
         </p:nvSpPr>
@@ -16608,7 +15890,7 @@
       </p:sp>
       <p:sp>
         <p:nvSpPr>
-          <p:cNvPr id="15" name="TextBox 14"/>
+          <p:cNvPr id="14" name="TextBox 13"/>
           <p:cNvSpPr txBox="1"/>
           <p:nvPr/>
         </p:nvSpPr>
@@ -16679,7 +15961,7 @@
       </p:sp>
       <p:sp>
         <p:nvSpPr>
-          <p:cNvPr id="16" name="Rounded Rectangle 15"/>
+          <p:cNvPr id="15" name="Rounded Rectangle 14"/>
           <p:cNvSpPr/>
           <p:nvPr/>
         </p:nvSpPr>
@@ -16725,7 +16007,7 @@
       </p:sp>
       <p:sp>
         <p:nvSpPr>
-          <p:cNvPr id="17" name="TextBox 16"/>
+          <p:cNvPr id="16" name="TextBox 15"/>
           <p:cNvSpPr txBox="1"/>
           <p:nvPr/>
         </p:nvSpPr>
@@ -16796,7 +16078,7 @@
       </p:sp>
       <p:sp>
         <p:nvSpPr>
-          <p:cNvPr id="18" name="Rounded Rectangle 17"/>
+          <p:cNvPr id="17" name="Rounded Rectangle 16"/>
           <p:cNvSpPr/>
           <p:nvPr/>
         </p:nvSpPr>
@@ -16842,7 +16124,7 @@
       </p:sp>
       <p:sp>
         <p:nvSpPr>
-          <p:cNvPr id="19" name="TextBox 18"/>
+          <p:cNvPr id="18" name="TextBox 17"/>
           <p:cNvSpPr txBox="1"/>
           <p:nvPr/>
         </p:nvSpPr>
@@ -16913,7 +16195,7 @@
       </p:sp>
       <p:sp>
         <p:nvSpPr>
-          <p:cNvPr id="20" name="Rounded Rectangle 19"/>
+          <p:cNvPr id="19" name="Rounded Rectangle 18"/>
           <p:cNvSpPr/>
           <p:nvPr/>
         </p:nvSpPr>
@@ -16959,7 +16241,7 @@
       </p:sp>
       <p:sp>
         <p:nvSpPr>
-          <p:cNvPr id="21" name="TextBox 20"/>
+          <p:cNvPr id="20" name="TextBox 19"/>
           <p:cNvSpPr txBox="1"/>
           <p:nvPr/>
         </p:nvSpPr>
@@ -17122,8 +16404,77 @@
         </p:nvSpPr>
         <p:spPr>
           <a:xfrm>
-            <a:off x="713232" y="6272784"/>
-            <a:ext cx="5597920" cy="219456"/>
+            <a:off x="8240677" y="6272784"/>
+            <a:ext cx="2651760" cy="219456"/>
+          </a:xfrm>
+          <a:prstGeom prst="rect">
+            <a:avLst/>
+          </a:prstGeom>
+          <a:noFill/>
+        </p:spPr>
+        <p:txBody>
+          <a:bodyPr wrap="square" lIns="0" rIns="0" tIns="0" bIns="0" anchor="t">
+            <a:spAutoFit/>
+          </a:bodyPr>
+          <a:lstStyle/>
+          <a:p>
+            <a:pPr algn="r">
+              <a:lnSpc>
+                <a:spcPct val="122000"/>
+              </a:lnSpc>
+              <a:spcBef>
+                <a:spcPts val="0"/>
+              </a:spcBef>
+              <a:spcAft>
+                <a:spcPts val="0"/>
+              </a:spcAft>
+            </a:pPr>
+            <a:r>
+              <a:rPr sz="900" b="0" i="0">
+                <a:solidFill>
+                  <a:srgbClr val="636E85"/>
+                </a:solidFill>
+                <a:latin typeface="Segoe UI"/>
+                <a:ea typeface="Segoe UI"/>
+                <a:cs typeface="Segoe UI"/>
+              </a:rPr>
+              <a:t>Lingesh K  ·  OSI2509030</a:t>
+            </a:r>
+            <a:r>
+              <a:rPr sz="900" b="0" i="0">
+                <a:solidFill>
+                  <a:srgbClr val="141C2E"/>
+                </a:solidFill>
+                <a:latin typeface="Segoe UI"/>
+                <a:ea typeface="Segoe UI"/>
+                <a:cs typeface="Segoe UI"/>
+              </a:rPr>
+              <a:t>     </a:t>
+            </a:r>
+            <a:r>
+              <a:rPr sz="900" b="1" i="0">
+                <a:solidFill>
+                  <a:srgbClr val="0E1E3C"/>
+                </a:solidFill>
+                <a:latin typeface="Segoe UI"/>
+                <a:ea typeface="Segoe UI"/>
+                <a:cs typeface="Segoe UI"/>
+              </a:rPr>
+              <a:t>02</a:t>
+            </a:r>
+          </a:p>
+        </p:txBody>
+      </p:sp>
+      <p:sp>
+        <p:nvSpPr>
+          <p:cNvPr id="5" name="TextBox 4"/>
+          <p:cNvSpPr txBox="1"/>
+          <p:nvPr/>
+        </p:nvSpPr>
+        <p:spPr>
+          <a:xfrm>
+            <a:off x="713232" y="566928"/>
+            <a:ext cx="10765231" cy="219456"/>
           </a:xfrm>
           <a:prstGeom prst="rect">
             <a:avLst/>
@@ -17148,106 +16499,15 @@
               </a:spcAft>
             </a:pPr>
             <a:r>
-              <a:rPr sz="900" b="1" i="0">
-                <a:solidFill>
-                  <a:srgbClr val="0E1E3C"/>
-                </a:solidFill>
-                <a:latin typeface="Segoe UI"/>
-                <a:ea typeface="Segoe UI"/>
-                <a:cs typeface="Segoe UI"/>
-              </a:rPr>
-              <a:t>Unit 1</a:t>
-            </a:r>
-            <a:r>
-              <a:rPr sz="900" b="0" i="0">
-                <a:solidFill>
-                  <a:srgbClr val="939EB3"/>
-                </a:solidFill>
-                <a:latin typeface="Segoe UI"/>
-                <a:ea typeface="Segoe UI"/>
-                <a:cs typeface="Segoe UI"/>
-              </a:rPr>
-              <a:t>  ·  </a:t>
-            </a:r>
-            <a:r>
-              <a:rPr sz="900" b="0" i="0">
-                <a:solidFill>
-                  <a:srgbClr val="636E85"/>
-                </a:solidFill>
-                <a:latin typeface="Segoe UI"/>
-                <a:ea typeface="Segoe UI"/>
-                <a:cs typeface="Segoe UI"/>
-              </a:rPr>
-              <a:t>Introduction of AI and Gen AI</a:t>
-            </a:r>
-          </a:p>
-        </p:txBody>
-      </p:sp>
-      <p:sp>
-        <p:nvSpPr>
-          <p:cNvPr id="5" name="TextBox 4"/>
-          <p:cNvSpPr txBox="1"/>
-          <p:nvPr/>
-        </p:nvSpPr>
-        <p:spPr>
-          <a:xfrm>
-            <a:off x="8240677" y="6272784"/>
-            <a:ext cx="2651760" cy="219456"/>
-          </a:xfrm>
-          <a:prstGeom prst="rect">
-            <a:avLst/>
-          </a:prstGeom>
-          <a:noFill/>
-        </p:spPr>
-        <p:txBody>
-          <a:bodyPr wrap="square" lIns="0" rIns="0" tIns="0" bIns="0" anchor="t">
-            <a:spAutoFit/>
-          </a:bodyPr>
-          <a:lstStyle/>
-          <a:p>
-            <a:pPr algn="r">
-              <a:lnSpc>
-                <a:spcPct val="122000"/>
-              </a:lnSpc>
-              <a:spcBef>
-                <a:spcPts val="0"/>
-              </a:spcBef>
-              <a:spcAft>
-                <a:spcPts val="0"/>
-              </a:spcAft>
-            </a:pPr>
-            <a:r>
-              <a:rPr sz="900" b="0" i="0">
-                <a:solidFill>
-                  <a:srgbClr val="636E85"/>
-                </a:solidFill>
-                <a:latin typeface="Segoe UI"/>
-                <a:ea typeface="Segoe UI"/>
-                <a:cs typeface="Segoe UI"/>
-              </a:rPr>
-              <a:t>Lingesh K  ·  OSI2509030</a:t>
-            </a:r>
-            <a:r>
-              <a:rPr sz="900" b="0" i="0">
-                <a:solidFill>
-                  <a:srgbClr val="141C2E"/>
-                </a:solidFill>
-                <a:latin typeface="Segoe UI"/>
-                <a:ea typeface="Segoe UI"/>
-                <a:cs typeface="Segoe UI"/>
-              </a:rPr>
-              <a:t>     </a:t>
-            </a:r>
-            <a:r>
-              <a:rPr sz="900" b="1" i="0">
-                <a:solidFill>
-                  <a:srgbClr val="0E1E3C"/>
-                </a:solidFill>
-                <a:latin typeface="Segoe UI"/>
-                <a:ea typeface="Segoe UI"/>
-                <a:cs typeface="Segoe UI"/>
-              </a:rPr>
-              <a:t>02</a:t>
+              <a:rPr sz="950" b="1" i="0" spc="160">
+                <a:solidFill>
+                  <a:srgbClr val="3B7AF7"/>
+                </a:solidFill>
+                <a:latin typeface="Segoe UI"/>
+                <a:ea typeface="Segoe UI"/>
+                <a:cs typeface="Segoe UI"/>
+              </a:rPr>
+              <a:t>AGENDA</a:t>
             </a:r>
           </a:p>
         </p:txBody>
@@ -17255,53 +16515,6 @@
       <p:sp>
         <p:nvSpPr>
           <p:cNvPr id="6" name="TextBox 5"/>
-          <p:cNvSpPr txBox="1"/>
-          <p:nvPr/>
-        </p:nvSpPr>
-        <p:spPr>
-          <a:xfrm>
-            <a:off x="713232" y="566928"/>
-            <a:ext cx="10765231" cy="219456"/>
-          </a:xfrm>
-          <a:prstGeom prst="rect">
-            <a:avLst/>
-          </a:prstGeom>
-          <a:noFill/>
-        </p:spPr>
-        <p:txBody>
-          <a:bodyPr wrap="square" lIns="0" rIns="0" tIns="0" bIns="0" anchor="t">
-            <a:spAutoFit/>
-          </a:bodyPr>
-          <a:lstStyle/>
-          <a:p>
-            <a:pPr algn="l">
-              <a:lnSpc>
-                <a:spcPct val="122000"/>
-              </a:lnSpc>
-              <a:spcBef>
-                <a:spcPts val="0"/>
-              </a:spcBef>
-              <a:spcAft>
-                <a:spcPts val="0"/>
-              </a:spcAft>
-            </a:pPr>
-            <a:r>
-              <a:rPr sz="950" b="1" i="0" spc="160">
-                <a:solidFill>
-                  <a:srgbClr val="3B7AF7"/>
-                </a:solidFill>
-                <a:latin typeface="Segoe UI"/>
-                <a:ea typeface="Segoe UI"/>
-                <a:cs typeface="Segoe UI"/>
-              </a:rPr>
-              <a:t>AGENDA</a:t>
-            </a:r>
-          </a:p>
-        </p:txBody>
-      </p:sp>
-      <p:sp>
-        <p:nvSpPr>
-          <p:cNvPr id="7" name="TextBox 6"/>
           <p:cNvSpPr txBox="1"/>
           <p:nvPr/>
         </p:nvSpPr>
@@ -17348,7 +16561,7 @@
       </p:sp>
       <p:sp>
         <p:nvSpPr>
-          <p:cNvPr id="8" name="Rectangle 7"/>
+          <p:cNvPr id="7" name="Rectangle 6"/>
           <p:cNvSpPr/>
           <p:nvPr/>
         </p:nvSpPr>
@@ -17392,7 +16605,7 @@
       </p:sp>
       <p:sp>
         <p:nvSpPr>
-          <p:cNvPr id="9" name="TextBox 8"/>
+          <p:cNvPr id="8" name="TextBox 7"/>
           <p:cNvSpPr txBox="1"/>
           <p:nvPr/>
         </p:nvSpPr>
@@ -17439,7 +16652,7 @@
       </p:sp>
       <p:sp>
         <p:nvSpPr>
-          <p:cNvPr id="10" name="Rectangle 9"/>
+          <p:cNvPr id="9" name="Rectangle 8"/>
           <p:cNvSpPr/>
           <p:nvPr/>
         </p:nvSpPr>
@@ -17483,7 +16696,7 @@
       </p:sp>
       <p:sp>
         <p:nvSpPr>
-          <p:cNvPr id="11" name="TextBox 10"/>
+          <p:cNvPr id="10" name="TextBox 9"/>
           <p:cNvSpPr txBox="1"/>
           <p:nvPr/>
         </p:nvSpPr>
@@ -17530,7 +16743,7 @@
       </p:sp>
       <p:sp>
         <p:nvSpPr>
-          <p:cNvPr id="12" name="TextBox 11"/>
+          <p:cNvPr id="11" name="TextBox 10"/>
           <p:cNvSpPr txBox="1"/>
           <p:nvPr/>
         </p:nvSpPr>
@@ -17601,7 +16814,7 @@
       </p:sp>
       <p:sp>
         <p:nvSpPr>
-          <p:cNvPr id="13" name="Rectangle 12"/>
+          <p:cNvPr id="12" name="Rectangle 11"/>
           <p:cNvSpPr/>
           <p:nvPr/>
         </p:nvSpPr>
@@ -17645,7 +16858,7 @@
       </p:sp>
       <p:sp>
         <p:nvSpPr>
-          <p:cNvPr id="14" name="TextBox 13"/>
+          <p:cNvPr id="13" name="TextBox 12"/>
           <p:cNvSpPr txBox="1"/>
           <p:nvPr/>
         </p:nvSpPr>
@@ -17692,7 +16905,7 @@
       </p:sp>
       <p:sp>
         <p:nvSpPr>
-          <p:cNvPr id="15" name="TextBox 14"/>
+          <p:cNvPr id="14" name="TextBox 13"/>
           <p:cNvSpPr txBox="1"/>
           <p:nvPr/>
         </p:nvSpPr>
@@ -17763,7 +16976,7 @@
       </p:sp>
       <p:sp>
         <p:nvSpPr>
-          <p:cNvPr id="16" name="Rectangle 15"/>
+          <p:cNvPr id="15" name="Rectangle 14"/>
           <p:cNvSpPr/>
           <p:nvPr/>
         </p:nvSpPr>
@@ -17807,7 +17020,7 @@
       </p:sp>
       <p:sp>
         <p:nvSpPr>
-          <p:cNvPr id="17" name="TextBox 16"/>
+          <p:cNvPr id="16" name="TextBox 15"/>
           <p:cNvSpPr txBox="1"/>
           <p:nvPr/>
         </p:nvSpPr>
@@ -17854,7 +17067,7 @@
       </p:sp>
       <p:sp>
         <p:nvSpPr>
-          <p:cNvPr id="18" name="TextBox 17"/>
+          <p:cNvPr id="17" name="TextBox 16"/>
           <p:cNvSpPr txBox="1"/>
           <p:nvPr/>
         </p:nvSpPr>
@@ -17925,7 +17138,7 @@
       </p:sp>
       <p:sp>
         <p:nvSpPr>
-          <p:cNvPr id="19" name="Rectangle 18"/>
+          <p:cNvPr id="18" name="Rectangle 17"/>
           <p:cNvSpPr/>
           <p:nvPr/>
         </p:nvSpPr>
@@ -17969,7 +17182,7 @@
       </p:sp>
       <p:sp>
         <p:nvSpPr>
-          <p:cNvPr id="20" name="TextBox 19"/>
+          <p:cNvPr id="19" name="TextBox 18"/>
           <p:cNvSpPr txBox="1"/>
           <p:nvPr/>
         </p:nvSpPr>
@@ -18016,7 +17229,7 @@
       </p:sp>
       <p:sp>
         <p:nvSpPr>
-          <p:cNvPr id="21" name="TextBox 20"/>
+          <p:cNvPr id="20" name="TextBox 19"/>
           <p:cNvSpPr txBox="1"/>
           <p:nvPr/>
         </p:nvSpPr>
@@ -18087,7 +17300,7 @@
       </p:sp>
       <p:sp>
         <p:nvSpPr>
-          <p:cNvPr id="22" name="Rectangle 21"/>
+          <p:cNvPr id="21" name="Rectangle 20"/>
           <p:cNvSpPr/>
           <p:nvPr/>
         </p:nvSpPr>
@@ -18131,7 +17344,7 @@
       </p:sp>
       <p:sp>
         <p:nvSpPr>
-          <p:cNvPr id="23" name="TextBox 22"/>
+          <p:cNvPr id="22" name="TextBox 21"/>
           <p:cNvSpPr txBox="1"/>
           <p:nvPr/>
         </p:nvSpPr>
@@ -18178,7 +17391,7 @@
       </p:sp>
       <p:sp>
         <p:nvSpPr>
-          <p:cNvPr id="24" name="TextBox 23"/>
+          <p:cNvPr id="23" name="TextBox 22"/>
           <p:cNvSpPr txBox="1"/>
           <p:nvPr/>
         </p:nvSpPr>
@@ -18249,7 +17462,7 @@
       </p:sp>
       <p:sp>
         <p:nvSpPr>
-          <p:cNvPr id="25" name="Rectangle 24"/>
+          <p:cNvPr id="24" name="Rectangle 23"/>
           <p:cNvSpPr/>
           <p:nvPr/>
         </p:nvSpPr>
@@ -18293,7 +17506,7 @@
       </p:sp>
       <p:sp>
         <p:nvSpPr>
-          <p:cNvPr id="26" name="TextBox 25"/>
+          <p:cNvPr id="25" name="TextBox 24"/>
           <p:cNvSpPr txBox="1"/>
           <p:nvPr/>
         </p:nvSpPr>
@@ -18340,7 +17553,7 @@
       </p:sp>
       <p:sp>
         <p:nvSpPr>
-          <p:cNvPr id="27" name="TextBox 26"/>
+          <p:cNvPr id="26" name="TextBox 25"/>
           <p:cNvSpPr txBox="1"/>
           <p:nvPr/>
         </p:nvSpPr>
@@ -18411,7 +17624,7 @@
       </p:sp>
       <p:sp>
         <p:nvSpPr>
-          <p:cNvPr id="28" name="Rectangle 27"/>
+          <p:cNvPr id="27" name="Rectangle 26"/>
           <p:cNvSpPr/>
           <p:nvPr/>
         </p:nvSpPr>
@@ -18455,7 +17668,7 @@
       </p:sp>
       <p:sp>
         <p:nvSpPr>
-          <p:cNvPr id="29" name="TextBox 28"/>
+          <p:cNvPr id="28" name="TextBox 27"/>
           <p:cNvSpPr txBox="1"/>
           <p:nvPr/>
         </p:nvSpPr>
@@ -18502,7 +17715,7 @@
       </p:sp>
       <p:sp>
         <p:nvSpPr>
-          <p:cNvPr id="30" name="TextBox 29"/>
+          <p:cNvPr id="29" name="TextBox 28"/>
           <p:cNvSpPr txBox="1"/>
           <p:nvPr/>
         </p:nvSpPr>
@@ -18573,7 +17786,7 @@
       </p:sp>
       <p:sp>
         <p:nvSpPr>
-          <p:cNvPr id="31" name="Rectangle 30"/>
+          <p:cNvPr id="30" name="Rectangle 29"/>
           <p:cNvSpPr/>
           <p:nvPr/>
         </p:nvSpPr>
@@ -18617,7 +17830,7 @@
       </p:sp>
       <p:sp>
         <p:nvSpPr>
-          <p:cNvPr id="32" name="TextBox 31"/>
+          <p:cNvPr id="31" name="TextBox 30"/>
           <p:cNvSpPr txBox="1"/>
           <p:nvPr/>
         </p:nvSpPr>
@@ -18664,7 +17877,7 @@
       </p:sp>
       <p:sp>
         <p:nvSpPr>
-          <p:cNvPr id="33" name="TextBox 32"/>
+          <p:cNvPr id="32" name="TextBox 31"/>
           <p:cNvSpPr txBox="1"/>
           <p:nvPr/>
         </p:nvSpPr>
@@ -18827,8 +18040,77 @@
         </p:nvSpPr>
         <p:spPr>
           <a:xfrm>
-            <a:off x="713232" y="6272784"/>
-            <a:ext cx="5597920" cy="219456"/>
+            <a:off x="8240677" y="6272784"/>
+            <a:ext cx="2651760" cy="219456"/>
+          </a:xfrm>
+          <a:prstGeom prst="rect">
+            <a:avLst/>
+          </a:prstGeom>
+          <a:noFill/>
+        </p:spPr>
+        <p:txBody>
+          <a:bodyPr wrap="square" lIns="0" rIns="0" tIns="0" bIns="0" anchor="t">
+            <a:spAutoFit/>
+          </a:bodyPr>
+          <a:lstStyle/>
+          <a:p>
+            <a:pPr algn="r">
+              <a:lnSpc>
+                <a:spcPct val="122000"/>
+              </a:lnSpc>
+              <a:spcBef>
+                <a:spcPts val="0"/>
+              </a:spcBef>
+              <a:spcAft>
+                <a:spcPts val="0"/>
+              </a:spcAft>
+            </a:pPr>
+            <a:r>
+              <a:rPr sz="900" b="0" i="0">
+                <a:solidFill>
+                  <a:srgbClr val="636E85"/>
+                </a:solidFill>
+                <a:latin typeface="Segoe UI"/>
+                <a:ea typeface="Segoe UI"/>
+                <a:cs typeface="Segoe UI"/>
+              </a:rPr>
+              <a:t>Lingesh K  ·  OSI2509030</a:t>
+            </a:r>
+            <a:r>
+              <a:rPr sz="900" b="0" i="0">
+                <a:solidFill>
+                  <a:srgbClr val="141C2E"/>
+                </a:solidFill>
+                <a:latin typeface="Segoe UI"/>
+                <a:ea typeface="Segoe UI"/>
+                <a:cs typeface="Segoe UI"/>
+              </a:rPr>
+              <a:t>     </a:t>
+            </a:r>
+            <a:r>
+              <a:rPr sz="900" b="1" i="0">
+                <a:solidFill>
+                  <a:srgbClr val="0E1E3C"/>
+                </a:solidFill>
+                <a:latin typeface="Segoe UI"/>
+                <a:ea typeface="Segoe UI"/>
+                <a:cs typeface="Segoe UI"/>
+              </a:rPr>
+              <a:t>20</a:t>
+            </a:r>
+          </a:p>
+        </p:txBody>
+      </p:sp>
+      <p:sp>
+        <p:nvSpPr>
+          <p:cNvPr id="5" name="TextBox 4"/>
+          <p:cNvSpPr txBox="1"/>
+          <p:nvPr/>
+        </p:nvSpPr>
+        <p:spPr>
+          <a:xfrm>
+            <a:off x="713232" y="566928"/>
+            <a:ext cx="10765231" cy="219456"/>
           </a:xfrm>
           <a:prstGeom prst="rect">
             <a:avLst/>
@@ -18853,106 +18135,15 @@
               </a:spcAft>
             </a:pPr>
             <a:r>
-              <a:rPr sz="900" b="1" i="0">
-                <a:solidFill>
-                  <a:srgbClr val="0E1E3C"/>
-                </a:solidFill>
-                <a:latin typeface="Segoe UI"/>
-                <a:ea typeface="Segoe UI"/>
-                <a:cs typeface="Segoe UI"/>
-              </a:rPr>
-              <a:t>Unit 1</a:t>
-            </a:r>
-            <a:r>
-              <a:rPr sz="900" b="0" i="0">
-                <a:solidFill>
-                  <a:srgbClr val="939EB3"/>
-                </a:solidFill>
-                <a:latin typeface="Segoe UI"/>
-                <a:ea typeface="Segoe UI"/>
-                <a:cs typeface="Segoe UI"/>
-              </a:rPr>
-              <a:t>  ·  </a:t>
-            </a:r>
-            <a:r>
-              <a:rPr sz="900" b="0" i="0">
-                <a:solidFill>
-                  <a:srgbClr val="636E85"/>
-                </a:solidFill>
-                <a:latin typeface="Segoe UI"/>
-                <a:ea typeface="Segoe UI"/>
-                <a:cs typeface="Segoe UI"/>
-              </a:rPr>
-              <a:t>Introduction of AI and Gen AI</a:t>
-            </a:r>
-          </a:p>
-        </p:txBody>
-      </p:sp>
-      <p:sp>
-        <p:nvSpPr>
-          <p:cNvPr id="5" name="TextBox 4"/>
-          <p:cNvSpPr txBox="1"/>
-          <p:nvPr/>
-        </p:nvSpPr>
-        <p:spPr>
-          <a:xfrm>
-            <a:off x="8240677" y="6272784"/>
-            <a:ext cx="2651760" cy="219456"/>
-          </a:xfrm>
-          <a:prstGeom prst="rect">
-            <a:avLst/>
-          </a:prstGeom>
-          <a:noFill/>
-        </p:spPr>
-        <p:txBody>
-          <a:bodyPr wrap="square" lIns="0" rIns="0" tIns="0" bIns="0" anchor="t">
-            <a:spAutoFit/>
-          </a:bodyPr>
-          <a:lstStyle/>
-          <a:p>
-            <a:pPr algn="r">
-              <a:lnSpc>
-                <a:spcPct val="122000"/>
-              </a:lnSpc>
-              <a:spcBef>
-                <a:spcPts val="0"/>
-              </a:spcBef>
-              <a:spcAft>
-                <a:spcPts val="0"/>
-              </a:spcAft>
-            </a:pPr>
-            <a:r>
-              <a:rPr sz="900" b="0" i="0">
-                <a:solidFill>
-                  <a:srgbClr val="636E85"/>
-                </a:solidFill>
-                <a:latin typeface="Segoe UI"/>
-                <a:ea typeface="Segoe UI"/>
-                <a:cs typeface="Segoe UI"/>
-              </a:rPr>
-              <a:t>Lingesh K  ·  OSI2509030</a:t>
-            </a:r>
-            <a:r>
-              <a:rPr sz="900" b="0" i="0">
-                <a:solidFill>
-                  <a:srgbClr val="141C2E"/>
-                </a:solidFill>
-                <a:latin typeface="Segoe UI"/>
-                <a:ea typeface="Segoe UI"/>
-                <a:cs typeface="Segoe UI"/>
-              </a:rPr>
-              <a:t>     </a:t>
-            </a:r>
-            <a:r>
-              <a:rPr sz="900" b="1" i="0">
-                <a:solidFill>
-                  <a:srgbClr val="0E1E3C"/>
-                </a:solidFill>
-                <a:latin typeface="Segoe UI"/>
-                <a:ea typeface="Segoe UI"/>
-                <a:cs typeface="Segoe UI"/>
-              </a:rPr>
-              <a:t>20</a:t>
+              <a:rPr sz="950" b="1" i="0" spc="160">
+                <a:solidFill>
+                  <a:srgbClr val="3B7AF7"/>
+                </a:solidFill>
+                <a:latin typeface="Segoe UI"/>
+                <a:ea typeface="Segoe UI"/>
+                <a:cs typeface="Segoe UI"/>
+              </a:rPr>
+              <a:t>USING IT WELL</a:t>
             </a:r>
           </a:p>
         </p:txBody>
@@ -18960,53 +18151,6 @@
       <p:sp>
         <p:nvSpPr>
           <p:cNvPr id="6" name="TextBox 5"/>
-          <p:cNvSpPr txBox="1"/>
-          <p:nvPr/>
-        </p:nvSpPr>
-        <p:spPr>
-          <a:xfrm>
-            <a:off x="713232" y="566928"/>
-            <a:ext cx="10765231" cy="219456"/>
-          </a:xfrm>
-          <a:prstGeom prst="rect">
-            <a:avLst/>
-          </a:prstGeom>
-          <a:noFill/>
-        </p:spPr>
-        <p:txBody>
-          <a:bodyPr wrap="square" lIns="0" rIns="0" tIns="0" bIns="0" anchor="t">
-            <a:spAutoFit/>
-          </a:bodyPr>
-          <a:lstStyle/>
-          <a:p>
-            <a:pPr algn="l">
-              <a:lnSpc>
-                <a:spcPct val="122000"/>
-              </a:lnSpc>
-              <a:spcBef>
-                <a:spcPts val="0"/>
-              </a:spcBef>
-              <a:spcAft>
-                <a:spcPts val="0"/>
-              </a:spcAft>
-            </a:pPr>
-            <a:r>
-              <a:rPr sz="950" b="1" i="0" spc="160">
-                <a:solidFill>
-                  <a:srgbClr val="3B7AF7"/>
-                </a:solidFill>
-                <a:latin typeface="Segoe UI"/>
-                <a:ea typeface="Segoe UI"/>
-                <a:cs typeface="Segoe UI"/>
-              </a:rPr>
-              <a:t>USING IT WELL</a:t>
-            </a:r>
-          </a:p>
-        </p:txBody>
-      </p:sp>
-      <p:sp>
-        <p:nvSpPr>
-          <p:cNvPr id="7" name="TextBox 6"/>
           <p:cNvSpPr txBox="1"/>
           <p:nvPr/>
         </p:nvSpPr>
@@ -19053,7 +18197,7 @@
       </p:sp>
       <p:sp>
         <p:nvSpPr>
-          <p:cNvPr id="8" name="Rectangle 7"/>
+          <p:cNvPr id="7" name="Rectangle 6"/>
           <p:cNvSpPr/>
           <p:nvPr/>
         </p:nvSpPr>
@@ -19097,7 +18241,7 @@
       </p:sp>
       <p:sp>
         <p:nvSpPr>
-          <p:cNvPr id="9" name="Rectangle 8"/>
+          <p:cNvPr id="8" name="Rectangle 7"/>
           <p:cNvSpPr/>
           <p:nvPr/>
         </p:nvSpPr>
@@ -19141,7 +18285,7 @@
       </p:sp>
       <p:sp>
         <p:nvSpPr>
-          <p:cNvPr id="10" name="Oval 9"/>
+          <p:cNvPr id="9" name="Oval 8"/>
           <p:cNvSpPr/>
           <p:nvPr/>
         </p:nvSpPr>
@@ -19185,7 +18329,7 @@
       </p:sp>
       <p:sp>
         <p:nvSpPr>
-          <p:cNvPr id="11" name="TextBox 10"/>
+          <p:cNvPr id="10" name="TextBox 9"/>
           <p:cNvSpPr txBox="1"/>
           <p:nvPr/>
         </p:nvSpPr>
@@ -19232,7 +18376,7 @@
       </p:sp>
       <p:sp>
         <p:nvSpPr>
-          <p:cNvPr id="12" name="Rounded Rectangle 11"/>
+          <p:cNvPr id="11" name="Rounded Rectangle 10"/>
           <p:cNvSpPr/>
           <p:nvPr/>
         </p:nvSpPr>
@@ -19280,7 +18424,7 @@
       </p:sp>
       <p:sp>
         <p:nvSpPr>
-          <p:cNvPr id="13" name="TextBox 12"/>
+          <p:cNvPr id="12" name="TextBox 11"/>
           <p:cNvSpPr txBox="1"/>
           <p:nvPr/>
         </p:nvSpPr>
@@ -19327,7 +18471,7 @@
       </p:sp>
       <p:sp>
         <p:nvSpPr>
-          <p:cNvPr id="14" name="TextBox 13"/>
+          <p:cNvPr id="13" name="TextBox 12"/>
           <p:cNvSpPr txBox="1"/>
           <p:nvPr/>
         </p:nvSpPr>
@@ -19374,7 +18518,7 @@
       </p:sp>
       <p:sp>
         <p:nvSpPr>
-          <p:cNvPr id="15" name="Oval 14"/>
+          <p:cNvPr id="14" name="Oval 13"/>
           <p:cNvSpPr/>
           <p:nvPr/>
         </p:nvSpPr>
@@ -19418,7 +18562,7 @@
       </p:sp>
       <p:sp>
         <p:nvSpPr>
-          <p:cNvPr id="16" name="TextBox 15"/>
+          <p:cNvPr id="15" name="TextBox 14"/>
           <p:cNvSpPr txBox="1"/>
           <p:nvPr/>
         </p:nvSpPr>
@@ -19465,7 +18609,7 @@
       </p:sp>
       <p:sp>
         <p:nvSpPr>
-          <p:cNvPr id="17" name="Rounded Rectangle 16"/>
+          <p:cNvPr id="16" name="Rounded Rectangle 15"/>
           <p:cNvSpPr/>
           <p:nvPr/>
         </p:nvSpPr>
@@ -19513,7 +18657,7 @@
       </p:sp>
       <p:sp>
         <p:nvSpPr>
-          <p:cNvPr id="18" name="TextBox 17"/>
+          <p:cNvPr id="17" name="TextBox 16"/>
           <p:cNvSpPr txBox="1"/>
           <p:nvPr/>
         </p:nvSpPr>
@@ -19560,7 +18704,7 @@
       </p:sp>
       <p:sp>
         <p:nvSpPr>
-          <p:cNvPr id="19" name="TextBox 18"/>
+          <p:cNvPr id="18" name="TextBox 17"/>
           <p:cNvSpPr txBox="1"/>
           <p:nvPr/>
         </p:nvSpPr>
@@ -19607,7 +18751,7 @@
       </p:sp>
       <p:sp>
         <p:nvSpPr>
-          <p:cNvPr id="20" name="Oval 19"/>
+          <p:cNvPr id="19" name="Oval 18"/>
           <p:cNvSpPr/>
           <p:nvPr/>
         </p:nvSpPr>
@@ -19651,7 +18795,7 @@
       </p:sp>
       <p:sp>
         <p:nvSpPr>
-          <p:cNvPr id="21" name="TextBox 20"/>
+          <p:cNvPr id="20" name="TextBox 19"/>
           <p:cNvSpPr txBox="1"/>
           <p:nvPr/>
         </p:nvSpPr>
@@ -19698,7 +18842,7 @@
       </p:sp>
       <p:sp>
         <p:nvSpPr>
-          <p:cNvPr id="22" name="Rounded Rectangle 21"/>
+          <p:cNvPr id="21" name="Rounded Rectangle 20"/>
           <p:cNvSpPr/>
           <p:nvPr/>
         </p:nvSpPr>
@@ -19746,7 +18890,7 @@
       </p:sp>
       <p:sp>
         <p:nvSpPr>
-          <p:cNvPr id="23" name="TextBox 22"/>
+          <p:cNvPr id="22" name="TextBox 21"/>
           <p:cNvSpPr txBox="1"/>
           <p:nvPr/>
         </p:nvSpPr>
@@ -19793,7 +18937,7 @@
       </p:sp>
       <p:sp>
         <p:nvSpPr>
-          <p:cNvPr id="24" name="TextBox 23"/>
+          <p:cNvPr id="23" name="TextBox 22"/>
           <p:cNvSpPr txBox="1"/>
           <p:nvPr/>
         </p:nvSpPr>
@@ -19840,7 +18984,7 @@
       </p:sp>
       <p:sp>
         <p:nvSpPr>
-          <p:cNvPr id="25" name="Oval 24"/>
+          <p:cNvPr id="24" name="Oval 23"/>
           <p:cNvSpPr/>
           <p:nvPr/>
         </p:nvSpPr>
@@ -19884,7 +19028,7 @@
       </p:sp>
       <p:sp>
         <p:nvSpPr>
-          <p:cNvPr id="26" name="TextBox 25"/>
+          <p:cNvPr id="25" name="TextBox 24"/>
           <p:cNvSpPr txBox="1"/>
           <p:nvPr/>
         </p:nvSpPr>
@@ -19931,7 +19075,7 @@
       </p:sp>
       <p:sp>
         <p:nvSpPr>
-          <p:cNvPr id="27" name="Rounded Rectangle 26"/>
+          <p:cNvPr id="26" name="Rounded Rectangle 25"/>
           <p:cNvSpPr/>
           <p:nvPr/>
         </p:nvSpPr>
@@ -19979,7 +19123,7 @@
       </p:sp>
       <p:sp>
         <p:nvSpPr>
-          <p:cNvPr id="28" name="TextBox 27"/>
+          <p:cNvPr id="27" name="TextBox 26"/>
           <p:cNvSpPr txBox="1"/>
           <p:nvPr/>
         </p:nvSpPr>
@@ -20026,7 +19170,7 @@
       </p:sp>
       <p:sp>
         <p:nvSpPr>
-          <p:cNvPr id="29" name="TextBox 28"/>
+          <p:cNvPr id="28" name="TextBox 27"/>
           <p:cNvSpPr txBox="1"/>
           <p:nvPr/>
         </p:nvSpPr>
@@ -20073,7 +19217,7 @@
       </p:sp>
       <p:sp>
         <p:nvSpPr>
-          <p:cNvPr id="30" name="Rounded Rectangle 29"/>
+          <p:cNvPr id="29" name="Rounded Rectangle 28"/>
           <p:cNvSpPr/>
           <p:nvPr/>
         </p:nvSpPr>
@@ -20140,7 +19284,7 @@
       </p:sp>
       <p:sp>
         <p:nvSpPr>
-          <p:cNvPr id="31" name="Rectangle 30"/>
+          <p:cNvPr id="30" name="Rectangle 29"/>
           <p:cNvSpPr/>
           <p:nvPr/>
         </p:nvSpPr>
@@ -20693,8 +19837,77 @@
         </p:nvSpPr>
         <p:spPr>
           <a:xfrm>
-            <a:off x="713232" y="6272784"/>
-            <a:ext cx="5597920" cy="219456"/>
+            <a:off x="8240677" y="6272784"/>
+            <a:ext cx="2651760" cy="219456"/>
+          </a:xfrm>
+          <a:prstGeom prst="rect">
+            <a:avLst/>
+          </a:prstGeom>
+          <a:noFill/>
+        </p:spPr>
+        <p:txBody>
+          <a:bodyPr wrap="square" lIns="0" rIns="0" tIns="0" bIns="0" anchor="t">
+            <a:spAutoFit/>
+          </a:bodyPr>
+          <a:lstStyle/>
+          <a:p>
+            <a:pPr algn="r">
+              <a:lnSpc>
+                <a:spcPct val="122000"/>
+              </a:lnSpc>
+              <a:spcBef>
+                <a:spcPts val="0"/>
+              </a:spcBef>
+              <a:spcAft>
+                <a:spcPts val="0"/>
+              </a:spcAft>
+            </a:pPr>
+            <a:r>
+              <a:rPr sz="900" b="0" i="0">
+                <a:solidFill>
+                  <a:srgbClr val="636E85"/>
+                </a:solidFill>
+                <a:latin typeface="Segoe UI"/>
+                <a:ea typeface="Segoe UI"/>
+                <a:cs typeface="Segoe UI"/>
+              </a:rPr>
+              <a:t>Lingesh K  ·  OSI2509030</a:t>
+            </a:r>
+            <a:r>
+              <a:rPr sz="900" b="0" i="0">
+                <a:solidFill>
+                  <a:srgbClr val="141C2E"/>
+                </a:solidFill>
+                <a:latin typeface="Segoe UI"/>
+                <a:ea typeface="Segoe UI"/>
+                <a:cs typeface="Segoe UI"/>
+              </a:rPr>
+              <a:t>     </a:t>
+            </a:r>
+            <a:r>
+              <a:rPr sz="900" b="1" i="0">
+                <a:solidFill>
+                  <a:srgbClr val="0E1E3C"/>
+                </a:solidFill>
+                <a:latin typeface="Segoe UI"/>
+                <a:ea typeface="Segoe UI"/>
+                <a:cs typeface="Segoe UI"/>
+              </a:rPr>
+              <a:t>22</a:t>
+            </a:r>
+          </a:p>
+        </p:txBody>
+      </p:sp>
+      <p:sp>
+        <p:nvSpPr>
+          <p:cNvPr id="5" name="TextBox 4"/>
+          <p:cNvSpPr txBox="1"/>
+          <p:nvPr/>
+        </p:nvSpPr>
+        <p:spPr>
+          <a:xfrm>
+            <a:off x="713232" y="566928"/>
+            <a:ext cx="10765231" cy="219456"/>
           </a:xfrm>
           <a:prstGeom prst="rect">
             <a:avLst/>
@@ -20719,106 +19932,15 @@
               </a:spcAft>
             </a:pPr>
             <a:r>
-              <a:rPr sz="900" b="1" i="0">
-                <a:solidFill>
-                  <a:srgbClr val="0E1E3C"/>
-                </a:solidFill>
-                <a:latin typeface="Segoe UI"/>
-                <a:ea typeface="Segoe UI"/>
-                <a:cs typeface="Segoe UI"/>
-              </a:rPr>
-              <a:t>Unit 1</a:t>
-            </a:r>
-            <a:r>
-              <a:rPr sz="900" b="0" i="0">
-                <a:solidFill>
-                  <a:srgbClr val="939EB3"/>
-                </a:solidFill>
-                <a:latin typeface="Segoe UI"/>
-                <a:ea typeface="Segoe UI"/>
-                <a:cs typeface="Segoe UI"/>
-              </a:rPr>
-              <a:t>  ·  </a:t>
-            </a:r>
-            <a:r>
-              <a:rPr sz="900" b="0" i="0">
-                <a:solidFill>
-                  <a:srgbClr val="636E85"/>
-                </a:solidFill>
-                <a:latin typeface="Segoe UI"/>
-                <a:ea typeface="Segoe UI"/>
-                <a:cs typeface="Segoe UI"/>
-              </a:rPr>
-              <a:t>Introduction of AI and Gen AI</a:t>
-            </a:r>
-          </a:p>
-        </p:txBody>
-      </p:sp>
-      <p:sp>
-        <p:nvSpPr>
-          <p:cNvPr id="5" name="TextBox 4"/>
-          <p:cNvSpPr txBox="1"/>
-          <p:nvPr/>
-        </p:nvSpPr>
-        <p:spPr>
-          <a:xfrm>
-            <a:off x="8240677" y="6272784"/>
-            <a:ext cx="2651760" cy="219456"/>
-          </a:xfrm>
-          <a:prstGeom prst="rect">
-            <a:avLst/>
-          </a:prstGeom>
-          <a:noFill/>
-        </p:spPr>
-        <p:txBody>
-          <a:bodyPr wrap="square" lIns="0" rIns="0" tIns="0" bIns="0" anchor="t">
-            <a:spAutoFit/>
-          </a:bodyPr>
-          <a:lstStyle/>
-          <a:p>
-            <a:pPr algn="r">
-              <a:lnSpc>
-                <a:spcPct val="122000"/>
-              </a:lnSpc>
-              <a:spcBef>
-                <a:spcPts val="0"/>
-              </a:spcBef>
-              <a:spcAft>
-                <a:spcPts val="0"/>
-              </a:spcAft>
-            </a:pPr>
-            <a:r>
-              <a:rPr sz="900" b="0" i="0">
-                <a:solidFill>
-                  <a:srgbClr val="636E85"/>
-                </a:solidFill>
-                <a:latin typeface="Segoe UI"/>
-                <a:ea typeface="Segoe UI"/>
-                <a:cs typeface="Segoe UI"/>
-              </a:rPr>
-              <a:t>Lingesh K  ·  OSI2509030</a:t>
-            </a:r>
-            <a:r>
-              <a:rPr sz="900" b="0" i="0">
-                <a:solidFill>
-                  <a:srgbClr val="141C2E"/>
-                </a:solidFill>
-                <a:latin typeface="Segoe UI"/>
-                <a:ea typeface="Segoe UI"/>
-                <a:cs typeface="Segoe UI"/>
-              </a:rPr>
-              <a:t>     </a:t>
-            </a:r>
-            <a:r>
-              <a:rPr sz="900" b="1" i="0">
-                <a:solidFill>
-                  <a:srgbClr val="0E1E3C"/>
-                </a:solidFill>
-                <a:latin typeface="Segoe UI"/>
-                <a:ea typeface="Segoe UI"/>
-                <a:cs typeface="Segoe UI"/>
-              </a:rPr>
-              <a:t>22</a:t>
+              <a:rPr sz="950" b="1" i="0" spc="160">
+                <a:solidFill>
+                  <a:srgbClr val="00B3A4"/>
+                </a:solidFill>
+                <a:latin typeface="Segoe UI"/>
+                <a:ea typeface="Segoe UI"/>
+                <a:cs typeface="Segoe UI"/>
+              </a:rPr>
+              <a:t>RECAP</a:t>
             </a:r>
           </a:p>
         </p:txBody>
@@ -20826,53 +19948,6 @@
       <p:sp>
         <p:nvSpPr>
           <p:cNvPr id="6" name="TextBox 5"/>
-          <p:cNvSpPr txBox="1"/>
-          <p:nvPr/>
-        </p:nvSpPr>
-        <p:spPr>
-          <a:xfrm>
-            <a:off x="713232" y="566928"/>
-            <a:ext cx="10765231" cy="219456"/>
-          </a:xfrm>
-          <a:prstGeom prst="rect">
-            <a:avLst/>
-          </a:prstGeom>
-          <a:noFill/>
-        </p:spPr>
-        <p:txBody>
-          <a:bodyPr wrap="square" lIns="0" rIns="0" tIns="0" bIns="0" anchor="t">
-            <a:spAutoFit/>
-          </a:bodyPr>
-          <a:lstStyle/>
-          <a:p>
-            <a:pPr algn="l">
-              <a:lnSpc>
-                <a:spcPct val="122000"/>
-              </a:lnSpc>
-              <a:spcBef>
-                <a:spcPts val="0"/>
-              </a:spcBef>
-              <a:spcAft>
-                <a:spcPts val="0"/>
-              </a:spcAft>
-            </a:pPr>
-            <a:r>
-              <a:rPr sz="950" b="1" i="0" spc="160">
-                <a:solidFill>
-                  <a:srgbClr val="00B3A4"/>
-                </a:solidFill>
-                <a:latin typeface="Segoe UI"/>
-                <a:ea typeface="Segoe UI"/>
-                <a:cs typeface="Segoe UI"/>
-              </a:rPr>
-              <a:t>RECAP</a:t>
-            </a:r>
-          </a:p>
-        </p:txBody>
-      </p:sp>
-      <p:sp>
-        <p:nvSpPr>
-          <p:cNvPr id="7" name="TextBox 6"/>
           <p:cNvSpPr txBox="1"/>
           <p:nvPr/>
         </p:nvSpPr>
@@ -20919,7 +19994,7 @@
       </p:sp>
       <p:sp>
         <p:nvSpPr>
-          <p:cNvPr id="8" name="Rectangle 7"/>
+          <p:cNvPr id="7" name="Rectangle 6"/>
           <p:cNvSpPr/>
           <p:nvPr/>
         </p:nvSpPr>
@@ -20963,7 +20038,7 @@
       </p:sp>
       <p:sp>
         <p:nvSpPr>
-          <p:cNvPr id="9" name="TextBox 8"/>
+          <p:cNvPr id="8" name="TextBox 7"/>
           <p:cNvSpPr txBox="1"/>
           <p:nvPr/>
         </p:nvSpPr>
@@ -21010,7 +20085,7 @@
       </p:sp>
       <p:sp>
         <p:nvSpPr>
-          <p:cNvPr id="10" name="Rounded Rectangle 9"/>
+          <p:cNvPr id="9" name="Rounded Rectangle 8"/>
           <p:cNvSpPr/>
           <p:nvPr/>
         </p:nvSpPr>
@@ -21064,7 +20139,7 @@
       </p:sp>
       <p:sp>
         <p:nvSpPr>
-          <p:cNvPr id="11" name="Rectangle 10"/>
+          <p:cNvPr id="10" name="Rectangle 9"/>
           <p:cNvSpPr/>
           <p:nvPr/>
         </p:nvSpPr>
@@ -21108,7 +20183,7 @@
       </p:sp>
       <p:sp>
         <p:nvSpPr>
-          <p:cNvPr id="12" name="Oval 11"/>
+          <p:cNvPr id="11" name="Oval 10"/>
           <p:cNvSpPr/>
           <p:nvPr/>
         </p:nvSpPr>
@@ -21152,7 +20227,7 @@
       </p:sp>
       <p:sp>
         <p:nvSpPr>
-          <p:cNvPr id="13" name="TextBox 12"/>
+          <p:cNvPr id="12" name="TextBox 11"/>
           <p:cNvSpPr txBox="1"/>
           <p:nvPr/>
         </p:nvSpPr>
@@ -21199,7 +20274,7 @@
       </p:sp>
       <p:sp>
         <p:nvSpPr>
-          <p:cNvPr id="14" name="TextBox 13"/>
+          <p:cNvPr id="13" name="TextBox 12"/>
           <p:cNvSpPr txBox="1"/>
           <p:nvPr/>
         </p:nvSpPr>
@@ -21270,7 +20345,7 @@
       </p:sp>
       <p:sp>
         <p:nvSpPr>
-          <p:cNvPr id="15" name="Rounded Rectangle 14"/>
+          <p:cNvPr id="14" name="Rounded Rectangle 13"/>
           <p:cNvSpPr/>
           <p:nvPr/>
         </p:nvSpPr>
@@ -21324,7 +20399,7 @@
       </p:sp>
       <p:sp>
         <p:nvSpPr>
-          <p:cNvPr id="16" name="Rectangle 15"/>
+          <p:cNvPr id="15" name="Rectangle 14"/>
           <p:cNvSpPr/>
           <p:nvPr/>
         </p:nvSpPr>
@@ -21368,7 +20443,7 @@
       </p:sp>
       <p:sp>
         <p:nvSpPr>
-          <p:cNvPr id="17" name="Oval 16"/>
+          <p:cNvPr id="16" name="Oval 15"/>
           <p:cNvSpPr/>
           <p:nvPr/>
         </p:nvSpPr>
@@ -21412,7 +20487,7 @@
       </p:sp>
       <p:sp>
         <p:nvSpPr>
-          <p:cNvPr id="18" name="TextBox 17"/>
+          <p:cNvPr id="17" name="TextBox 16"/>
           <p:cNvSpPr txBox="1"/>
           <p:nvPr/>
         </p:nvSpPr>
@@ -21459,7 +20534,7 @@
       </p:sp>
       <p:sp>
         <p:nvSpPr>
-          <p:cNvPr id="19" name="TextBox 18"/>
+          <p:cNvPr id="18" name="TextBox 17"/>
           <p:cNvSpPr txBox="1"/>
           <p:nvPr/>
         </p:nvSpPr>
@@ -21530,7 +20605,7 @@
       </p:sp>
       <p:sp>
         <p:nvSpPr>
-          <p:cNvPr id="20" name="Rounded Rectangle 19"/>
+          <p:cNvPr id="19" name="Rounded Rectangle 18"/>
           <p:cNvSpPr/>
           <p:nvPr/>
         </p:nvSpPr>
@@ -21584,7 +20659,7 @@
       </p:sp>
       <p:sp>
         <p:nvSpPr>
-          <p:cNvPr id="21" name="Rectangle 20"/>
+          <p:cNvPr id="20" name="Rectangle 19"/>
           <p:cNvSpPr/>
           <p:nvPr/>
         </p:nvSpPr>
@@ -21628,7 +20703,7 @@
       </p:sp>
       <p:sp>
         <p:nvSpPr>
-          <p:cNvPr id="22" name="Oval 21"/>
+          <p:cNvPr id="21" name="Oval 20"/>
           <p:cNvSpPr/>
           <p:nvPr/>
         </p:nvSpPr>
@@ -21672,7 +20747,7 @@
       </p:sp>
       <p:sp>
         <p:nvSpPr>
-          <p:cNvPr id="23" name="TextBox 22"/>
+          <p:cNvPr id="22" name="TextBox 21"/>
           <p:cNvSpPr txBox="1"/>
           <p:nvPr/>
         </p:nvSpPr>
@@ -21719,7 +20794,7 @@
       </p:sp>
       <p:sp>
         <p:nvSpPr>
-          <p:cNvPr id="24" name="TextBox 23"/>
+          <p:cNvPr id="23" name="TextBox 22"/>
           <p:cNvSpPr txBox="1"/>
           <p:nvPr/>
         </p:nvSpPr>
@@ -21790,7 +20865,7 @@
       </p:sp>
       <p:sp>
         <p:nvSpPr>
-          <p:cNvPr id="25" name="Rounded Rectangle 24"/>
+          <p:cNvPr id="24" name="Rounded Rectangle 23"/>
           <p:cNvSpPr/>
           <p:nvPr/>
         </p:nvSpPr>
@@ -21844,7 +20919,7 @@
       </p:sp>
       <p:sp>
         <p:nvSpPr>
-          <p:cNvPr id="26" name="Rectangle 25"/>
+          <p:cNvPr id="25" name="Rectangle 24"/>
           <p:cNvSpPr/>
           <p:nvPr/>
         </p:nvSpPr>
@@ -21888,7 +20963,7 @@
       </p:sp>
       <p:sp>
         <p:nvSpPr>
-          <p:cNvPr id="27" name="Oval 26"/>
+          <p:cNvPr id="26" name="Oval 25"/>
           <p:cNvSpPr/>
           <p:nvPr/>
         </p:nvSpPr>
@@ -21932,7 +21007,7 @@
       </p:sp>
       <p:sp>
         <p:nvSpPr>
-          <p:cNvPr id="28" name="TextBox 27"/>
+          <p:cNvPr id="27" name="TextBox 26"/>
           <p:cNvSpPr txBox="1"/>
           <p:nvPr/>
         </p:nvSpPr>
@@ -21979,7 +21054,7 @@
       </p:sp>
       <p:sp>
         <p:nvSpPr>
-          <p:cNvPr id="29" name="TextBox 28"/>
+          <p:cNvPr id="28" name="TextBox 27"/>
           <p:cNvSpPr txBox="1"/>
           <p:nvPr/>
         </p:nvSpPr>
@@ -22050,7 +21125,7 @@
       </p:sp>
       <p:sp>
         <p:nvSpPr>
-          <p:cNvPr id="30" name="Rounded Rectangle 29"/>
+          <p:cNvPr id="29" name="Rounded Rectangle 28"/>
           <p:cNvSpPr/>
           <p:nvPr/>
         </p:nvSpPr>
@@ -22104,7 +21179,7 @@
       </p:sp>
       <p:sp>
         <p:nvSpPr>
-          <p:cNvPr id="31" name="Rectangle 30"/>
+          <p:cNvPr id="30" name="Rectangle 29"/>
           <p:cNvSpPr/>
           <p:nvPr/>
         </p:nvSpPr>
@@ -22148,7 +21223,7 @@
       </p:sp>
       <p:sp>
         <p:nvSpPr>
-          <p:cNvPr id="32" name="Oval 31"/>
+          <p:cNvPr id="31" name="Oval 30"/>
           <p:cNvSpPr/>
           <p:nvPr/>
         </p:nvSpPr>
@@ -22192,7 +21267,7 @@
       </p:sp>
       <p:sp>
         <p:nvSpPr>
-          <p:cNvPr id="33" name="TextBox 32"/>
+          <p:cNvPr id="32" name="TextBox 31"/>
           <p:cNvSpPr txBox="1"/>
           <p:nvPr/>
         </p:nvSpPr>
@@ -22239,7 +21314,7 @@
       </p:sp>
       <p:sp>
         <p:nvSpPr>
-          <p:cNvPr id="34" name="TextBox 33"/>
+          <p:cNvPr id="33" name="TextBox 32"/>
           <p:cNvSpPr txBox="1"/>
           <p:nvPr/>
         </p:nvSpPr>
@@ -22310,7 +21385,7 @@
       </p:sp>
       <p:sp>
         <p:nvSpPr>
-          <p:cNvPr id="35" name="Rounded Rectangle 34"/>
+          <p:cNvPr id="34" name="Rounded Rectangle 33"/>
           <p:cNvSpPr/>
           <p:nvPr/>
         </p:nvSpPr>
@@ -22364,7 +21439,7 @@
       </p:sp>
       <p:sp>
         <p:nvSpPr>
-          <p:cNvPr id="36" name="Rectangle 35"/>
+          <p:cNvPr id="35" name="Rectangle 34"/>
           <p:cNvSpPr/>
           <p:nvPr/>
         </p:nvSpPr>
@@ -22408,7 +21483,7 @@
       </p:sp>
       <p:sp>
         <p:nvSpPr>
-          <p:cNvPr id="37" name="Oval 36"/>
+          <p:cNvPr id="36" name="Oval 35"/>
           <p:cNvSpPr/>
           <p:nvPr/>
         </p:nvSpPr>
@@ -22452,7 +21527,7 @@
       </p:sp>
       <p:sp>
         <p:nvSpPr>
-          <p:cNvPr id="38" name="TextBox 37"/>
+          <p:cNvPr id="37" name="TextBox 36"/>
           <p:cNvSpPr txBox="1"/>
           <p:nvPr/>
         </p:nvSpPr>
@@ -22499,7 +21574,7 @@
       </p:sp>
       <p:sp>
         <p:nvSpPr>
-          <p:cNvPr id="39" name="TextBox 38"/>
+          <p:cNvPr id="38" name="TextBox 37"/>
           <p:cNvSpPr txBox="1"/>
           <p:nvPr/>
         </p:nvSpPr>
@@ -22782,53 +21857,6 @@
         </p:nvSpPr>
         <p:spPr>
           <a:xfrm>
-            <a:off x="987552" y="2157984"/>
-            <a:ext cx="6766560" cy="274320"/>
-          </a:xfrm>
-          <a:prstGeom prst="rect">
-            <a:avLst/>
-          </a:prstGeom>
-          <a:noFill/>
-        </p:spPr>
-        <p:txBody>
-          <a:bodyPr wrap="square" lIns="0" rIns="0" tIns="0" bIns="0" anchor="t">
-            <a:spAutoFit/>
-          </a:bodyPr>
-          <a:lstStyle/>
-          <a:p>
-            <a:pPr algn="l">
-              <a:lnSpc>
-                <a:spcPct val="122000"/>
-              </a:lnSpc>
-              <a:spcBef>
-                <a:spcPts val="0"/>
-              </a:spcBef>
-              <a:spcAft>
-                <a:spcPts val="0"/>
-              </a:spcAft>
-            </a:pPr>
-            <a:r>
-              <a:rPr sz="1000" b="1" i="0" spc="200">
-                <a:solidFill>
-                  <a:srgbClr val="00B3A4"/>
-                </a:solidFill>
-                <a:latin typeface="Segoe UI"/>
-                <a:ea typeface="Segoe UI"/>
-                <a:cs typeface="Segoe UI"/>
-              </a:rPr>
-              <a:t>UNIT 01  ·  INTRODUCTION OF AI AND GEN AI</a:t>
-            </a:r>
-          </a:p>
-        </p:txBody>
-      </p:sp>
-      <p:sp>
-        <p:nvSpPr>
-          <p:cNvPr id="7" name="TextBox 6"/>
-          <p:cNvSpPr txBox="1"/>
-          <p:nvPr/>
-        </p:nvSpPr>
-        <p:spPr>
-          <a:xfrm>
             <a:off x="987552" y="2542032"/>
             <a:ext cx="7315200" cy="1005840"/>
           </a:xfrm>
@@ -22870,7 +21898,7 @@
       </p:sp>
       <p:sp>
         <p:nvSpPr>
-          <p:cNvPr id="8" name="Rectangle 7"/>
+          <p:cNvPr id="7" name="Rectangle 6"/>
           <p:cNvSpPr/>
           <p:nvPr/>
         </p:nvSpPr>
@@ -22914,7 +21942,7 @@
       </p:sp>
       <p:sp>
         <p:nvSpPr>
-          <p:cNvPr id="9" name="TextBox 8"/>
+          <p:cNvPr id="8" name="TextBox 7"/>
           <p:cNvSpPr txBox="1"/>
           <p:nvPr/>
         </p:nvSpPr>
@@ -22961,7 +21989,7 @@
       </p:sp>
       <p:sp>
         <p:nvSpPr>
-          <p:cNvPr id="10" name="TextBox 9"/>
+          <p:cNvPr id="9" name="TextBox 8"/>
           <p:cNvSpPr txBox="1"/>
           <p:nvPr/>
         </p:nvSpPr>
@@ -23080,7 +22108,7 @@
       </p:sp>
       <p:sp>
         <p:nvSpPr>
-          <p:cNvPr id="11" name="logo-plate"/>
+          <p:cNvPr id="10" name="logo-plate"/>
           <p:cNvSpPr/>
           <p:nvPr/>
         </p:nvSpPr>
@@ -23126,7 +22154,7 @@
       </p:sp>
       <p:pic>
         <p:nvPicPr>
-          <p:cNvPr id="12" name="college-logo" descr="logo-full.png"/>
+          <p:cNvPr id="11" name="college-logo" descr="logo-full.png"/>
           <p:cNvPicPr>
             <a:picLocks noChangeAspect="1"/>
           </p:cNvPicPr>
@@ -23150,7 +22178,7 @@
       </p:pic>
       <p:sp>
         <p:nvSpPr>
-          <p:cNvPr id="13" name="Rectangle 12"/>
+          <p:cNvPr id="12" name="Rectangle 11"/>
           <p:cNvSpPr/>
           <p:nvPr/>
         </p:nvSpPr>
@@ -23194,7 +22222,7 @@
       </p:sp>
       <p:sp>
         <p:nvSpPr>
-          <p:cNvPr id="14" name="TextBox 13"/>
+          <p:cNvPr id="13" name="TextBox 12"/>
           <p:cNvSpPr txBox="1"/>
           <p:nvPr/>
         </p:nvSpPr>
@@ -23257,28 +22285,6 @@
                 <a:cs typeface="Segoe UI"/>
               </a:rPr>
               <a:t>OSI2509030</a:t>
-            </a:r>
-            <a:r>
-              <a:rPr sz="1000" b="0" i="0">
-                <a:solidFill>
-                  <a:srgbClr val="4A5E86"/>
-                </a:solidFill>
-                <a:latin typeface="Segoe UI"/>
-                <a:ea typeface="Segoe UI"/>
-                <a:cs typeface="Segoe UI"/>
-              </a:rPr>
-              <a:t>   ·   </a:t>
-            </a:r>
-            <a:r>
-              <a:rPr sz="1000" b="0" i="0">
-                <a:solidFill>
-                  <a:srgbClr val="7E91B4"/>
-                </a:solidFill>
-                <a:latin typeface="Segoe UI"/>
-                <a:ea typeface="Segoe UI"/>
-                <a:cs typeface="Segoe UI"/>
-              </a:rPr>
-              <a:t>PGPM · Systems Specialisation</a:t>
             </a:r>
           </a:p>
         </p:txBody>
@@ -23676,54 +22682,7 @@
       </p:sp>
       <p:sp>
         <p:nvSpPr>
-          <p:cNvPr id="10" name="TextBox 9"/>
-          <p:cNvSpPr txBox="1"/>
-          <p:nvPr/>
-        </p:nvSpPr>
-        <p:spPr>
-          <a:xfrm>
-            <a:off x="987552" y="5943600"/>
-            <a:ext cx="6400800" cy="274320"/>
-          </a:xfrm>
-          <a:prstGeom prst="rect">
-            <a:avLst/>
-          </a:prstGeom>
-          <a:noFill/>
-        </p:spPr>
-        <p:txBody>
-          <a:bodyPr wrap="square" lIns="0" rIns="0" tIns="0" bIns="0" anchor="t">
-            <a:spAutoFit/>
-          </a:bodyPr>
-          <a:lstStyle/>
-          <a:p>
-            <a:pPr algn="l">
-              <a:lnSpc>
-                <a:spcPct val="122000"/>
-              </a:lnSpc>
-              <a:spcBef>
-                <a:spcPts val="0"/>
-              </a:spcBef>
-              <a:spcAft>
-                <a:spcPts val="0"/>
-              </a:spcAft>
-            </a:pPr>
-            <a:r>
-              <a:rPr sz="900" b="1" i="0" spc="160">
-                <a:solidFill>
-                  <a:srgbClr val="6B7FA6"/>
-                </a:solidFill>
-                <a:latin typeface="Segoe UI"/>
-                <a:ea typeface="Segoe UI"/>
-                <a:cs typeface="Segoe UI"/>
-              </a:rPr>
-              <a:t>UNIT 1  ·  INTRODUCTION OF AI AND GEN AI</a:t>
-            </a:r>
-          </a:p>
-        </p:txBody>
-      </p:sp>
-      <p:sp>
-        <p:nvSpPr>
-          <p:cNvPr id="11" name="logo-plate"/>
+          <p:cNvPr id="10" name="logo-plate"/>
           <p:cNvSpPr/>
           <p:nvPr/>
         </p:nvSpPr>
@@ -23769,7 +22728,7 @@
       </p:sp>
       <p:pic>
         <p:nvPicPr>
-          <p:cNvPr id="12" name="college-logo" descr="logo-full.png"/>
+          <p:cNvPr id="11" name="college-logo" descr="logo-full.png"/>
           <p:cNvPicPr>
             <a:picLocks noChangeAspect="1"/>
           </p:cNvPicPr>
@@ -23885,8 +22844,77 @@
         </p:nvSpPr>
         <p:spPr>
           <a:xfrm>
-            <a:off x="713232" y="6272784"/>
-            <a:ext cx="5597920" cy="219456"/>
+            <a:off x="8240677" y="6272784"/>
+            <a:ext cx="2651760" cy="219456"/>
+          </a:xfrm>
+          <a:prstGeom prst="rect">
+            <a:avLst/>
+          </a:prstGeom>
+          <a:noFill/>
+        </p:spPr>
+        <p:txBody>
+          <a:bodyPr wrap="square" lIns="0" rIns="0" tIns="0" bIns="0" anchor="t">
+            <a:spAutoFit/>
+          </a:bodyPr>
+          <a:lstStyle/>
+          <a:p>
+            <a:pPr algn="r">
+              <a:lnSpc>
+                <a:spcPct val="122000"/>
+              </a:lnSpc>
+              <a:spcBef>
+                <a:spcPts val="0"/>
+              </a:spcBef>
+              <a:spcAft>
+                <a:spcPts val="0"/>
+              </a:spcAft>
+            </a:pPr>
+            <a:r>
+              <a:rPr sz="900" b="0" i="0">
+                <a:solidFill>
+                  <a:srgbClr val="636E85"/>
+                </a:solidFill>
+                <a:latin typeface="Segoe UI"/>
+                <a:ea typeface="Segoe UI"/>
+                <a:cs typeface="Segoe UI"/>
+              </a:rPr>
+              <a:t>Lingesh K  ·  OSI2509030</a:t>
+            </a:r>
+            <a:r>
+              <a:rPr sz="900" b="0" i="0">
+                <a:solidFill>
+                  <a:srgbClr val="141C2E"/>
+                </a:solidFill>
+                <a:latin typeface="Segoe UI"/>
+                <a:ea typeface="Segoe UI"/>
+                <a:cs typeface="Segoe UI"/>
+              </a:rPr>
+              <a:t>     </a:t>
+            </a:r>
+            <a:r>
+              <a:rPr sz="900" b="1" i="0">
+                <a:solidFill>
+                  <a:srgbClr val="0E1E3C"/>
+                </a:solidFill>
+                <a:latin typeface="Segoe UI"/>
+                <a:ea typeface="Segoe UI"/>
+                <a:cs typeface="Segoe UI"/>
+              </a:rPr>
+              <a:t>04</a:t>
+            </a:r>
+          </a:p>
+        </p:txBody>
+      </p:sp>
+      <p:sp>
+        <p:nvSpPr>
+          <p:cNvPr id="5" name="TextBox 4"/>
+          <p:cNvSpPr txBox="1"/>
+          <p:nvPr/>
+        </p:nvSpPr>
+        <p:spPr>
+          <a:xfrm>
+            <a:off x="713232" y="566928"/>
+            <a:ext cx="10765231" cy="219456"/>
           </a:xfrm>
           <a:prstGeom prst="rect">
             <a:avLst/>
@@ -23911,106 +22939,15 @@
               </a:spcAft>
             </a:pPr>
             <a:r>
-              <a:rPr sz="900" b="1" i="0">
-                <a:solidFill>
-                  <a:srgbClr val="0E1E3C"/>
-                </a:solidFill>
-                <a:latin typeface="Segoe UI"/>
-                <a:ea typeface="Segoe UI"/>
-                <a:cs typeface="Segoe UI"/>
-              </a:rPr>
-              <a:t>Unit 1</a:t>
-            </a:r>
-            <a:r>
-              <a:rPr sz="900" b="0" i="0">
-                <a:solidFill>
-                  <a:srgbClr val="939EB3"/>
-                </a:solidFill>
-                <a:latin typeface="Segoe UI"/>
-                <a:ea typeface="Segoe UI"/>
-                <a:cs typeface="Segoe UI"/>
-              </a:rPr>
-              <a:t>  ·  </a:t>
-            </a:r>
-            <a:r>
-              <a:rPr sz="900" b="0" i="0">
-                <a:solidFill>
-                  <a:srgbClr val="636E85"/>
-                </a:solidFill>
-                <a:latin typeface="Segoe UI"/>
-                <a:ea typeface="Segoe UI"/>
-                <a:cs typeface="Segoe UI"/>
-              </a:rPr>
-              <a:t>Introduction of AI and Gen AI</a:t>
-            </a:r>
-          </a:p>
-        </p:txBody>
-      </p:sp>
-      <p:sp>
-        <p:nvSpPr>
-          <p:cNvPr id="5" name="TextBox 4"/>
-          <p:cNvSpPr txBox="1"/>
-          <p:nvPr/>
-        </p:nvSpPr>
-        <p:spPr>
-          <a:xfrm>
-            <a:off x="8240677" y="6272784"/>
-            <a:ext cx="2651760" cy="219456"/>
-          </a:xfrm>
-          <a:prstGeom prst="rect">
-            <a:avLst/>
-          </a:prstGeom>
-          <a:noFill/>
-        </p:spPr>
-        <p:txBody>
-          <a:bodyPr wrap="square" lIns="0" rIns="0" tIns="0" bIns="0" anchor="t">
-            <a:spAutoFit/>
-          </a:bodyPr>
-          <a:lstStyle/>
-          <a:p>
-            <a:pPr algn="r">
-              <a:lnSpc>
-                <a:spcPct val="122000"/>
-              </a:lnSpc>
-              <a:spcBef>
-                <a:spcPts val="0"/>
-              </a:spcBef>
-              <a:spcAft>
-                <a:spcPts val="0"/>
-              </a:spcAft>
-            </a:pPr>
-            <a:r>
-              <a:rPr sz="900" b="0" i="0">
-                <a:solidFill>
-                  <a:srgbClr val="636E85"/>
-                </a:solidFill>
-                <a:latin typeface="Segoe UI"/>
-                <a:ea typeface="Segoe UI"/>
-                <a:cs typeface="Segoe UI"/>
-              </a:rPr>
-              <a:t>Lingesh K  ·  OSI2509030</a:t>
-            </a:r>
-            <a:r>
-              <a:rPr sz="900" b="0" i="0">
-                <a:solidFill>
-                  <a:srgbClr val="141C2E"/>
-                </a:solidFill>
-                <a:latin typeface="Segoe UI"/>
-                <a:ea typeface="Segoe UI"/>
-                <a:cs typeface="Segoe UI"/>
-              </a:rPr>
-              <a:t>     </a:t>
-            </a:r>
-            <a:r>
-              <a:rPr sz="900" b="1" i="0">
-                <a:solidFill>
-                  <a:srgbClr val="0E1E3C"/>
-                </a:solidFill>
-                <a:latin typeface="Segoe UI"/>
-                <a:ea typeface="Segoe UI"/>
-                <a:cs typeface="Segoe UI"/>
-              </a:rPr>
-              <a:t>04</a:t>
+              <a:rPr sz="950" b="1" i="0" spc="160">
+                <a:solidFill>
+                  <a:srgbClr val="3B7AF7"/>
+                </a:solidFill>
+                <a:latin typeface="Segoe UI"/>
+                <a:ea typeface="Segoe UI"/>
+                <a:cs typeface="Segoe UI"/>
+              </a:rPr>
+              <a:t>DEFINITION</a:t>
             </a:r>
           </a:p>
         </p:txBody>
@@ -24018,53 +22955,6 @@
       <p:sp>
         <p:nvSpPr>
           <p:cNvPr id="6" name="TextBox 5"/>
-          <p:cNvSpPr txBox="1"/>
-          <p:nvPr/>
-        </p:nvSpPr>
-        <p:spPr>
-          <a:xfrm>
-            <a:off x="713232" y="566928"/>
-            <a:ext cx="10765231" cy="219456"/>
-          </a:xfrm>
-          <a:prstGeom prst="rect">
-            <a:avLst/>
-          </a:prstGeom>
-          <a:noFill/>
-        </p:spPr>
-        <p:txBody>
-          <a:bodyPr wrap="square" lIns="0" rIns="0" tIns="0" bIns="0" anchor="t">
-            <a:spAutoFit/>
-          </a:bodyPr>
-          <a:lstStyle/>
-          <a:p>
-            <a:pPr algn="l">
-              <a:lnSpc>
-                <a:spcPct val="122000"/>
-              </a:lnSpc>
-              <a:spcBef>
-                <a:spcPts val="0"/>
-              </a:spcBef>
-              <a:spcAft>
-                <a:spcPts val="0"/>
-              </a:spcAft>
-            </a:pPr>
-            <a:r>
-              <a:rPr sz="950" b="1" i="0" spc="160">
-                <a:solidFill>
-                  <a:srgbClr val="3B7AF7"/>
-                </a:solidFill>
-                <a:latin typeface="Segoe UI"/>
-                <a:ea typeface="Segoe UI"/>
-                <a:cs typeface="Segoe UI"/>
-              </a:rPr>
-              <a:t>DEFINITION</a:t>
-            </a:r>
-          </a:p>
-        </p:txBody>
-      </p:sp>
-      <p:sp>
-        <p:nvSpPr>
-          <p:cNvPr id="7" name="TextBox 6"/>
           <p:cNvSpPr txBox="1"/>
           <p:nvPr/>
         </p:nvSpPr>
@@ -24111,7 +23001,7 @@
       </p:sp>
       <p:sp>
         <p:nvSpPr>
-          <p:cNvPr id="8" name="Rectangle 7"/>
+          <p:cNvPr id="7" name="Rectangle 6"/>
           <p:cNvSpPr/>
           <p:nvPr/>
         </p:nvSpPr>
@@ -24155,7 +23045,7 @@
       </p:sp>
       <p:sp>
         <p:nvSpPr>
-          <p:cNvPr id="9" name="TextBox 8"/>
+          <p:cNvPr id="8" name="TextBox 7"/>
           <p:cNvSpPr txBox="1"/>
           <p:nvPr/>
         </p:nvSpPr>
@@ -24202,7 +23092,7 @@
       </p:sp>
       <p:sp>
         <p:nvSpPr>
-          <p:cNvPr id="10" name="Rectangle 9"/>
+          <p:cNvPr id="9" name="Rectangle 8"/>
           <p:cNvSpPr/>
           <p:nvPr/>
         </p:nvSpPr>
@@ -24246,7 +23136,7 @@
       </p:sp>
       <p:sp>
         <p:nvSpPr>
-          <p:cNvPr id="11" name="Rounded Rectangle 10"/>
+          <p:cNvPr id="10" name="Rounded Rectangle 9"/>
           <p:cNvSpPr/>
           <p:nvPr/>
         </p:nvSpPr>
@@ -24292,7 +23182,7 @@
       </p:sp>
       <p:sp>
         <p:nvSpPr>
-          <p:cNvPr id="12" name="TextBox 11"/>
+          <p:cNvPr id="11" name="TextBox 10"/>
           <p:cNvSpPr txBox="1"/>
           <p:nvPr/>
         </p:nvSpPr>
@@ -24339,7 +23229,7 @@
       </p:sp>
       <p:sp>
         <p:nvSpPr>
-          <p:cNvPr id="13" name="Rounded Rectangle 12"/>
+          <p:cNvPr id="12" name="Rounded Rectangle 11"/>
           <p:cNvSpPr/>
           <p:nvPr/>
         </p:nvSpPr>
@@ -24385,7 +23275,7 @@
       </p:sp>
       <p:sp>
         <p:nvSpPr>
-          <p:cNvPr id="14" name="TextBox 13"/>
+          <p:cNvPr id="13" name="TextBox 12"/>
           <p:cNvSpPr txBox="1"/>
           <p:nvPr/>
         </p:nvSpPr>
@@ -24432,7 +23322,7 @@
       </p:sp>
       <p:sp>
         <p:nvSpPr>
-          <p:cNvPr id="15" name="Rounded Rectangle 14"/>
+          <p:cNvPr id="14" name="Rounded Rectangle 13"/>
           <p:cNvSpPr/>
           <p:nvPr/>
         </p:nvSpPr>
@@ -24478,7 +23368,7 @@
       </p:sp>
       <p:sp>
         <p:nvSpPr>
-          <p:cNvPr id="16" name="TextBox 15"/>
+          <p:cNvPr id="15" name="TextBox 14"/>
           <p:cNvSpPr txBox="1"/>
           <p:nvPr/>
         </p:nvSpPr>
@@ -24525,7 +23415,7 @@
       </p:sp>
       <p:sp>
         <p:nvSpPr>
-          <p:cNvPr id="17" name="Rounded Rectangle 16"/>
+          <p:cNvPr id="16" name="Rounded Rectangle 15"/>
           <p:cNvSpPr/>
           <p:nvPr/>
         </p:nvSpPr>
@@ -24571,7 +23461,7 @@
       </p:sp>
       <p:sp>
         <p:nvSpPr>
-          <p:cNvPr id="18" name="TextBox 17"/>
+          <p:cNvPr id="17" name="TextBox 16"/>
           <p:cNvSpPr txBox="1"/>
           <p:nvPr/>
         </p:nvSpPr>
@@ -24618,7 +23508,7 @@
       </p:sp>
       <p:sp>
         <p:nvSpPr>
-          <p:cNvPr id="19" name="Rounded Rectangle 18"/>
+          <p:cNvPr id="18" name="Rounded Rectangle 17"/>
           <p:cNvSpPr/>
           <p:nvPr/>
         </p:nvSpPr>
@@ -24664,7 +23554,7 @@
       </p:sp>
       <p:sp>
         <p:nvSpPr>
-          <p:cNvPr id="20" name="TextBox 19"/>
+          <p:cNvPr id="19" name="TextBox 18"/>
           <p:cNvSpPr txBox="1"/>
           <p:nvPr/>
         </p:nvSpPr>
@@ -24711,7 +23601,7 @@
       </p:sp>
       <p:sp>
         <p:nvSpPr>
-          <p:cNvPr id="21" name="Rounded Rectangle 20"/>
+          <p:cNvPr id="20" name="Rounded Rectangle 19"/>
           <p:cNvSpPr/>
           <p:nvPr/>
         </p:nvSpPr>
@@ -24765,7 +23655,7 @@
       </p:sp>
       <p:sp>
         <p:nvSpPr>
-          <p:cNvPr id="22" name="Rectangle 21"/>
+          <p:cNvPr id="21" name="Rectangle 20"/>
           <p:cNvSpPr/>
           <p:nvPr/>
         </p:nvSpPr>
@@ -24809,7 +23699,7 @@
       </p:sp>
       <p:sp>
         <p:nvSpPr>
-          <p:cNvPr id="23" name="TextBox 22"/>
+          <p:cNvPr id="22" name="TextBox 21"/>
           <p:cNvSpPr txBox="1"/>
           <p:nvPr/>
         </p:nvSpPr>
@@ -24856,7 +23746,7 @@
       </p:sp>
       <p:sp>
         <p:nvSpPr>
-          <p:cNvPr id="24" name="TextBox 23"/>
+          <p:cNvPr id="23" name="TextBox 22"/>
           <p:cNvSpPr txBox="1"/>
           <p:nvPr/>
         </p:nvSpPr>
@@ -24903,7 +23793,7 @@
       </p:sp>
       <p:sp>
         <p:nvSpPr>
-          <p:cNvPr id="25" name="Rounded Rectangle 24"/>
+          <p:cNvPr id="24" name="Rounded Rectangle 23"/>
           <p:cNvSpPr/>
           <p:nvPr/>
         </p:nvSpPr>
@@ -24957,7 +23847,7 @@
       </p:sp>
       <p:sp>
         <p:nvSpPr>
-          <p:cNvPr id="26" name="Rectangle 25"/>
+          <p:cNvPr id="25" name="Rectangle 24"/>
           <p:cNvSpPr/>
           <p:nvPr/>
         </p:nvSpPr>
@@ -25001,7 +23891,7 @@
       </p:sp>
       <p:sp>
         <p:nvSpPr>
-          <p:cNvPr id="27" name="TextBox 26"/>
+          <p:cNvPr id="26" name="TextBox 25"/>
           <p:cNvSpPr txBox="1"/>
           <p:nvPr/>
         </p:nvSpPr>
@@ -25048,7 +23938,7 @@
       </p:sp>
       <p:sp>
         <p:nvSpPr>
-          <p:cNvPr id="28" name="TextBox 27"/>
+          <p:cNvPr id="27" name="TextBox 26"/>
           <p:cNvSpPr txBox="1"/>
           <p:nvPr/>
         </p:nvSpPr>
@@ -25095,7 +23985,7 @@
       </p:sp>
       <p:sp>
         <p:nvSpPr>
-          <p:cNvPr id="29" name="Rounded Rectangle 28"/>
+          <p:cNvPr id="28" name="Rounded Rectangle 27"/>
           <p:cNvSpPr/>
           <p:nvPr/>
         </p:nvSpPr>
@@ -25149,7 +24039,7 @@
       </p:sp>
       <p:sp>
         <p:nvSpPr>
-          <p:cNvPr id="30" name="Rectangle 29"/>
+          <p:cNvPr id="29" name="Rectangle 28"/>
           <p:cNvSpPr/>
           <p:nvPr/>
         </p:nvSpPr>
@@ -25193,7 +24083,7 @@
       </p:sp>
       <p:sp>
         <p:nvSpPr>
-          <p:cNvPr id="31" name="TextBox 30"/>
+          <p:cNvPr id="30" name="TextBox 29"/>
           <p:cNvSpPr txBox="1"/>
           <p:nvPr/>
         </p:nvSpPr>
@@ -25240,7 +24130,7 @@
       </p:sp>
       <p:sp>
         <p:nvSpPr>
-          <p:cNvPr id="32" name="TextBox 31"/>
+          <p:cNvPr id="31" name="TextBox 30"/>
           <p:cNvSpPr txBox="1"/>
           <p:nvPr/>
         </p:nvSpPr>
@@ -25379,8 +24269,77 @@
         </p:nvSpPr>
         <p:spPr>
           <a:xfrm>
-            <a:off x="713232" y="6272784"/>
-            <a:ext cx="5597920" cy="219456"/>
+            <a:off x="8240677" y="6272784"/>
+            <a:ext cx="2651760" cy="219456"/>
+          </a:xfrm>
+          <a:prstGeom prst="rect">
+            <a:avLst/>
+          </a:prstGeom>
+          <a:noFill/>
+        </p:spPr>
+        <p:txBody>
+          <a:bodyPr wrap="square" lIns="0" rIns="0" tIns="0" bIns="0" anchor="t">
+            <a:spAutoFit/>
+          </a:bodyPr>
+          <a:lstStyle/>
+          <a:p>
+            <a:pPr algn="r">
+              <a:lnSpc>
+                <a:spcPct val="122000"/>
+              </a:lnSpc>
+              <a:spcBef>
+                <a:spcPts val="0"/>
+              </a:spcBef>
+              <a:spcAft>
+                <a:spcPts val="0"/>
+              </a:spcAft>
+            </a:pPr>
+            <a:r>
+              <a:rPr sz="900" b="0" i="0">
+                <a:solidFill>
+                  <a:srgbClr val="636E85"/>
+                </a:solidFill>
+                <a:latin typeface="Segoe UI"/>
+                <a:ea typeface="Segoe UI"/>
+                <a:cs typeface="Segoe UI"/>
+              </a:rPr>
+              <a:t>Lingesh K  ·  OSI2509030</a:t>
+            </a:r>
+            <a:r>
+              <a:rPr sz="900" b="0" i="0">
+                <a:solidFill>
+                  <a:srgbClr val="141C2E"/>
+                </a:solidFill>
+                <a:latin typeface="Segoe UI"/>
+                <a:ea typeface="Segoe UI"/>
+                <a:cs typeface="Segoe UI"/>
+              </a:rPr>
+              <a:t>     </a:t>
+            </a:r>
+            <a:r>
+              <a:rPr sz="900" b="1" i="0">
+                <a:solidFill>
+                  <a:srgbClr val="0E1E3C"/>
+                </a:solidFill>
+                <a:latin typeface="Segoe UI"/>
+                <a:ea typeface="Segoe UI"/>
+                <a:cs typeface="Segoe UI"/>
+              </a:rPr>
+              <a:t>05</a:t>
+            </a:r>
+          </a:p>
+        </p:txBody>
+      </p:sp>
+      <p:sp>
+        <p:nvSpPr>
+          <p:cNvPr id="5" name="TextBox 4"/>
+          <p:cNvSpPr txBox="1"/>
+          <p:nvPr/>
+        </p:nvSpPr>
+        <p:spPr>
+          <a:xfrm>
+            <a:off x="713232" y="566928"/>
+            <a:ext cx="10765231" cy="219456"/>
           </a:xfrm>
           <a:prstGeom prst="rect">
             <a:avLst/>
@@ -25405,106 +24364,15 @@
               </a:spcAft>
             </a:pPr>
             <a:r>
-              <a:rPr sz="900" b="1" i="0">
-                <a:solidFill>
-                  <a:srgbClr val="0E1E3C"/>
-                </a:solidFill>
-                <a:latin typeface="Segoe UI"/>
-                <a:ea typeface="Segoe UI"/>
-                <a:cs typeface="Segoe UI"/>
-              </a:rPr>
-              <a:t>Unit 1</a:t>
-            </a:r>
-            <a:r>
-              <a:rPr sz="900" b="0" i="0">
-                <a:solidFill>
-                  <a:srgbClr val="939EB3"/>
-                </a:solidFill>
-                <a:latin typeface="Segoe UI"/>
-                <a:ea typeface="Segoe UI"/>
-                <a:cs typeface="Segoe UI"/>
-              </a:rPr>
-              <a:t>  ·  </a:t>
-            </a:r>
-            <a:r>
-              <a:rPr sz="900" b="0" i="0">
-                <a:solidFill>
-                  <a:srgbClr val="636E85"/>
-                </a:solidFill>
-                <a:latin typeface="Segoe UI"/>
-                <a:ea typeface="Segoe UI"/>
-                <a:cs typeface="Segoe UI"/>
-              </a:rPr>
-              <a:t>Introduction of AI and Gen AI</a:t>
-            </a:r>
-          </a:p>
-        </p:txBody>
-      </p:sp>
-      <p:sp>
-        <p:nvSpPr>
-          <p:cNvPr id="5" name="TextBox 4"/>
-          <p:cNvSpPr txBox="1"/>
-          <p:nvPr/>
-        </p:nvSpPr>
-        <p:spPr>
-          <a:xfrm>
-            <a:off x="8240677" y="6272784"/>
-            <a:ext cx="2651760" cy="219456"/>
-          </a:xfrm>
-          <a:prstGeom prst="rect">
-            <a:avLst/>
-          </a:prstGeom>
-          <a:noFill/>
-        </p:spPr>
-        <p:txBody>
-          <a:bodyPr wrap="square" lIns="0" rIns="0" tIns="0" bIns="0" anchor="t">
-            <a:spAutoFit/>
-          </a:bodyPr>
-          <a:lstStyle/>
-          <a:p>
-            <a:pPr algn="r">
-              <a:lnSpc>
-                <a:spcPct val="122000"/>
-              </a:lnSpc>
-              <a:spcBef>
-                <a:spcPts val="0"/>
-              </a:spcBef>
-              <a:spcAft>
-                <a:spcPts val="0"/>
-              </a:spcAft>
-            </a:pPr>
-            <a:r>
-              <a:rPr sz="900" b="0" i="0">
-                <a:solidFill>
-                  <a:srgbClr val="636E85"/>
-                </a:solidFill>
-                <a:latin typeface="Segoe UI"/>
-                <a:ea typeface="Segoe UI"/>
-                <a:cs typeface="Segoe UI"/>
-              </a:rPr>
-              <a:t>Lingesh K  ·  OSI2509030</a:t>
-            </a:r>
-            <a:r>
-              <a:rPr sz="900" b="0" i="0">
-                <a:solidFill>
-                  <a:srgbClr val="141C2E"/>
-                </a:solidFill>
-                <a:latin typeface="Segoe UI"/>
-                <a:ea typeface="Segoe UI"/>
-                <a:cs typeface="Segoe UI"/>
-              </a:rPr>
-              <a:t>     </a:t>
-            </a:r>
-            <a:r>
-              <a:rPr sz="900" b="1" i="0">
-                <a:solidFill>
-                  <a:srgbClr val="0E1E3C"/>
-                </a:solidFill>
-                <a:latin typeface="Segoe UI"/>
-                <a:ea typeface="Segoe UI"/>
-                <a:cs typeface="Segoe UI"/>
-              </a:rPr>
-              <a:t>05</a:t>
+              <a:rPr sz="950" b="1" i="0" spc="160">
+                <a:solidFill>
+                  <a:srgbClr val="3B7AF7"/>
+                </a:solidFill>
+                <a:latin typeface="Segoe UI"/>
+                <a:ea typeface="Segoe UI"/>
+                <a:cs typeface="Segoe UI"/>
+              </a:rPr>
+              <a:t>EVERYDAY EXAMPLES</a:t>
             </a:r>
           </a:p>
         </p:txBody>
@@ -25512,53 +24380,6 @@
       <p:sp>
         <p:nvSpPr>
           <p:cNvPr id="6" name="TextBox 5"/>
-          <p:cNvSpPr txBox="1"/>
-          <p:nvPr/>
-        </p:nvSpPr>
-        <p:spPr>
-          <a:xfrm>
-            <a:off x="713232" y="566928"/>
-            <a:ext cx="10765231" cy="219456"/>
-          </a:xfrm>
-          <a:prstGeom prst="rect">
-            <a:avLst/>
-          </a:prstGeom>
-          <a:noFill/>
-        </p:spPr>
-        <p:txBody>
-          <a:bodyPr wrap="square" lIns="0" rIns="0" tIns="0" bIns="0" anchor="t">
-            <a:spAutoFit/>
-          </a:bodyPr>
-          <a:lstStyle/>
-          <a:p>
-            <a:pPr algn="l">
-              <a:lnSpc>
-                <a:spcPct val="122000"/>
-              </a:lnSpc>
-              <a:spcBef>
-                <a:spcPts val="0"/>
-              </a:spcBef>
-              <a:spcAft>
-                <a:spcPts val="0"/>
-              </a:spcAft>
-            </a:pPr>
-            <a:r>
-              <a:rPr sz="950" b="1" i="0" spc="160">
-                <a:solidFill>
-                  <a:srgbClr val="3B7AF7"/>
-                </a:solidFill>
-                <a:latin typeface="Segoe UI"/>
-                <a:ea typeface="Segoe UI"/>
-                <a:cs typeface="Segoe UI"/>
-              </a:rPr>
-              <a:t>EVERYDAY EXAMPLES</a:t>
-            </a:r>
-          </a:p>
-        </p:txBody>
-      </p:sp>
-      <p:sp>
-        <p:nvSpPr>
-          <p:cNvPr id="7" name="TextBox 6"/>
           <p:cNvSpPr txBox="1"/>
           <p:nvPr/>
         </p:nvSpPr>
@@ -25605,7 +24426,7 @@
       </p:sp>
       <p:sp>
         <p:nvSpPr>
-          <p:cNvPr id="8" name="Rectangle 7"/>
+          <p:cNvPr id="7" name="Rectangle 6"/>
           <p:cNvSpPr/>
           <p:nvPr/>
         </p:nvSpPr>
@@ -25649,7 +24470,7 @@
       </p:sp>
       <p:sp>
         <p:nvSpPr>
-          <p:cNvPr id="9" name="TextBox 8"/>
+          <p:cNvPr id="8" name="TextBox 7"/>
           <p:cNvSpPr txBox="1"/>
           <p:nvPr/>
         </p:nvSpPr>
@@ -25696,7 +24517,7 @@
       </p:sp>
       <p:sp>
         <p:nvSpPr>
-          <p:cNvPr id="10" name="Rounded Rectangle 9"/>
+          <p:cNvPr id="9" name="Rounded Rectangle 8"/>
           <p:cNvSpPr/>
           <p:nvPr/>
         </p:nvSpPr>
@@ -25750,7 +24571,7 @@
       </p:sp>
       <p:sp>
         <p:nvSpPr>
-          <p:cNvPr id="11" name="Rectangle 10"/>
+          <p:cNvPr id="10" name="Rectangle 9"/>
           <p:cNvSpPr/>
           <p:nvPr/>
         </p:nvSpPr>
@@ -25794,7 +24615,7 @@
       </p:sp>
       <p:sp>
         <p:nvSpPr>
-          <p:cNvPr id="12" name="TextBox 11"/>
+          <p:cNvPr id="11" name="TextBox 10"/>
           <p:cNvSpPr txBox="1"/>
           <p:nvPr/>
         </p:nvSpPr>
@@ -25841,7 +24662,7 @@
       </p:sp>
       <p:sp>
         <p:nvSpPr>
-          <p:cNvPr id="13" name="TextBox 12"/>
+          <p:cNvPr id="12" name="TextBox 11"/>
           <p:cNvSpPr txBox="1"/>
           <p:nvPr/>
         </p:nvSpPr>
@@ -25888,7 +24709,7 @@
       </p:sp>
       <p:sp>
         <p:nvSpPr>
-          <p:cNvPr id="14" name="Rounded Rectangle 13"/>
+          <p:cNvPr id="13" name="Rounded Rectangle 12"/>
           <p:cNvSpPr/>
           <p:nvPr/>
         </p:nvSpPr>
@@ -25942,7 +24763,7 @@
       </p:sp>
       <p:sp>
         <p:nvSpPr>
-          <p:cNvPr id="15" name="Rectangle 14"/>
+          <p:cNvPr id="14" name="Rectangle 13"/>
           <p:cNvSpPr/>
           <p:nvPr/>
         </p:nvSpPr>
@@ -25986,7 +24807,7 @@
       </p:sp>
       <p:sp>
         <p:nvSpPr>
-          <p:cNvPr id="16" name="TextBox 15"/>
+          <p:cNvPr id="15" name="TextBox 14"/>
           <p:cNvSpPr txBox="1"/>
           <p:nvPr/>
         </p:nvSpPr>
@@ -26033,7 +24854,7 @@
       </p:sp>
       <p:sp>
         <p:nvSpPr>
-          <p:cNvPr id="17" name="TextBox 16"/>
+          <p:cNvPr id="16" name="TextBox 15"/>
           <p:cNvSpPr txBox="1"/>
           <p:nvPr/>
         </p:nvSpPr>
@@ -26080,7 +24901,7 @@
       </p:sp>
       <p:sp>
         <p:nvSpPr>
-          <p:cNvPr id="18" name="Rounded Rectangle 17"/>
+          <p:cNvPr id="17" name="Rounded Rectangle 16"/>
           <p:cNvSpPr/>
           <p:nvPr/>
         </p:nvSpPr>
@@ -26134,7 +24955,7 @@
       </p:sp>
       <p:sp>
         <p:nvSpPr>
-          <p:cNvPr id="19" name="Rectangle 18"/>
+          <p:cNvPr id="18" name="Rectangle 17"/>
           <p:cNvSpPr/>
           <p:nvPr/>
         </p:nvSpPr>
@@ -26178,7 +24999,7 @@
       </p:sp>
       <p:sp>
         <p:nvSpPr>
-          <p:cNvPr id="20" name="TextBox 19"/>
+          <p:cNvPr id="19" name="TextBox 18"/>
           <p:cNvSpPr txBox="1"/>
           <p:nvPr/>
         </p:nvSpPr>
@@ -26225,7 +25046,7 @@
       </p:sp>
       <p:sp>
         <p:nvSpPr>
-          <p:cNvPr id="21" name="TextBox 20"/>
+          <p:cNvPr id="20" name="TextBox 19"/>
           <p:cNvSpPr txBox="1"/>
           <p:nvPr/>
         </p:nvSpPr>
@@ -26272,7 +25093,7 @@
       </p:sp>
       <p:sp>
         <p:nvSpPr>
-          <p:cNvPr id="22" name="Rounded Rectangle 21"/>
+          <p:cNvPr id="21" name="Rounded Rectangle 20"/>
           <p:cNvSpPr/>
           <p:nvPr/>
         </p:nvSpPr>
@@ -26326,7 +25147,7 @@
       </p:sp>
       <p:sp>
         <p:nvSpPr>
-          <p:cNvPr id="23" name="Rectangle 22"/>
+          <p:cNvPr id="22" name="Rectangle 21"/>
           <p:cNvSpPr/>
           <p:nvPr/>
         </p:nvSpPr>
@@ -26370,7 +25191,7 @@
       </p:sp>
       <p:sp>
         <p:nvSpPr>
-          <p:cNvPr id="24" name="TextBox 23"/>
+          <p:cNvPr id="23" name="TextBox 22"/>
           <p:cNvSpPr txBox="1"/>
           <p:nvPr/>
         </p:nvSpPr>
@@ -26417,7 +25238,7 @@
       </p:sp>
       <p:sp>
         <p:nvSpPr>
-          <p:cNvPr id="25" name="TextBox 24"/>
+          <p:cNvPr id="24" name="TextBox 23"/>
           <p:cNvSpPr txBox="1"/>
           <p:nvPr/>
         </p:nvSpPr>
@@ -26464,7 +25285,7 @@
       </p:sp>
       <p:sp>
         <p:nvSpPr>
-          <p:cNvPr id="26" name="Rounded Rectangle 25"/>
+          <p:cNvPr id="25" name="Rounded Rectangle 24"/>
           <p:cNvSpPr/>
           <p:nvPr/>
         </p:nvSpPr>
@@ -26518,7 +25339,7 @@
       </p:sp>
       <p:sp>
         <p:nvSpPr>
-          <p:cNvPr id="27" name="Rectangle 26"/>
+          <p:cNvPr id="26" name="Rectangle 25"/>
           <p:cNvSpPr/>
           <p:nvPr/>
         </p:nvSpPr>
@@ -26562,7 +25383,7 @@
       </p:sp>
       <p:sp>
         <p:nvSpPr>
-          <p:cNvPr id="28" name="TextBox 27"/>
+          <p:cNvPr id="27" name="TextBox 26"/>
           <p:cNvSpPr txBox="1"/>
           <p:nvPr/>
         </p:nvSpPr>
@@ -26609,7 +25430,7 @@
       </p:sp>
       <p:sp>
         <p:nvSpPr>
-          <p:cNvPr id="29" name="TextBox 28"/>
+          <p:cNvPr id="28" name="TextBox 27"/>
           <p:cNvSpPr txBox="1"/>
           <p:nvPr/>
         </p:nvSpPr>
@@ -26656,7 +25477,7 @@
       </p:sp>
       <p:sp>
         <p:nvSpPr>
-          <p:cNvPr id="30" name="Rounded Rectangle 29"/>
+          <p:cNvPr id="29" name="Rounded Rectangle 28"/>
           <p:cNvSpPr/>
           <p:nvPr/>
         </p:nvSpPr>
@@ -26710,7 +25531,7 @@
       </p:sp>
       <p:sp>
         <p:nvSpPr>
-          <p:cNvPr id="31" name="Rectangle 30"/>
+          <p:cNvPr id="30" name="Rectangle 29"/>
           <p:cNvSpPr/>
           <p:nvPr/>
         </p:nvSpPr>
@@ -26754,7 +25575,7 @@
       </p:sp>
       <p:sp>
         <p:nvSpPr>
-          <p:cNvPr id="32" name="TextBox 31"/>
+          <p:cNvPr id="31" name="TextBox 30"/>
           <p:cNvSpPr txBox="1"/>
           <p:nvPr/>
         </p:nvSpPr>
@@ -26801,7 +25622,7 @@
       </p:sp>
       <p:sp>
         <p:nvSpPr>
-          <p:cNvPr id="33" name="TextBox 32"/>
+          <p:cNvPr id="32" name="TextBox 31"/>
           <p:cNvSpPr txBox="1"/>
           <p:nvPr/>
         </p:nvSpPr>
@@ -27239,54 +26060,7 @@
       </p:sp>
       <p:sp>
         <p:nvSpPr>
-          <p:cNvPr id="10" name="TextBox 9"/>
-          <p:cNvSpPr txBox="1"/>
-          <p:nvPr/>
-        </p:nvSpPr>
-        <p:spPr>
-          <a:xfrm>
-            <a:off x="987552" y="5943600"/>
-            <a:ext cx="6400800" cy="274320"/>
-          </a:xfrm>
-          <a:prstGeom prst="rect">
-            <a:avLst/>
-          </a:prstGeom>
-          <a:noFill/>
-        </p:spPr>
-        <p:txBody>
-          <a:bodyPr wrap="square" lIns="0" rIns="0" tIns="0" bIns="0" anchor="t">
-            <a:spAutoFit/>
-          </a:bodyPr>
-          <a:lstStyle/>
-          <a:p>
-            <a:pPr algn="l">
-              <a:lnSpc>
-                <a:spcPct val="122000"/>
-              </a:lnSpc>
-              <a:spcBef>
-                <a:spcPts val="0"/>
-              </a:spcBef>
-              <a:spcAft>
-                <a:spcPts val="0"/>
-              </a:spcAft>
-            </a:pPr>
-            <a:r>
-              <a:rPr sz="900" b="1" i="0" spc="160">
-                <a:solidFill>
-                  <a:srgbClr val="6B7FA6"/>
-                </a:solidFill>
-                <a:latin typeface="Segoe UI"/>
-                <a:ea typeface="Segoe UI"/>
-                <a:cs typeface="Segoe UI"/>
-              </a:rPr>
-              <a:t>UNIT 1  ·  INTRODUCTION OF AI AND GEN AI</a:t>
-            </a:r>
-          </a:p>
-        </p:txBody>
-      </p:sp>
-      <p:sp>
-        <p:nvSpPr>
-          <p:cNvPr id="11" name="logo-plate"/>
+          <p:cNvPr id="10" name="logo-plate"/>
           <p:cNvSpPr/>
           <p:nvPr/>
         </p:nvSpPr>
@@ -27332,7 +26106,7 @@
       </p:sp>
       <p:pic>
         <p:nvPicPr>
-          <p:cNvPr id="12" name="college-logo" descr="logo-full.png"/>
+          <p:cNvPr id="11" name="college-logo" descr="logo-full.png"/>
           <p:cNvPicPr>
             <a:picLocks noChangeAspect="1"/>
           </p:cNvPicPr>
@@ -27448,8 +26222,77 @@
         </p:nvSpPr>
         <p:spPr>
           <a:xfrm>
-            <a:off x="713232" y="6272784"/>
-            <a:ext cx="5597920" cy="219456"/>
+            <a:off x="8240677" y="6272784"/>
+            <a:ext cx="2651760" cy="219456"/>
+          </a:xfrm>
+          <a:prstGeom prst="rect">
+            <a:avLst/>
+          </a:prstGeom>
+          <a:noFill/>
+        </p:spPr>
+        <p:txBody>
+          <a:bodyPr wrap="square" lIns="0" rIns="0" tIns="0" bIns="0" anchor="t">
+            <a:spAutoFit/>
+          </a:bodyPr>
+          <a:lstStyle/>
+          <a:p>
+            <a:pPr algn="r">
+              <a:lnSpc>
+                <a:spcPct val="122000"/>
+              </a:lnSpc>
+              <a:spcBef>
+                <a:spcPts val="0"/>
+              </a:spcBef>
+              <a:spcAft>
+                <a:spcPts val="0"/>
+              </a:spcAft>
+            </a:pPr>
+            <a:r>
+              <a:rPr sz="900" b="0" i="0">
+                <a:solidFill>
+                  <a:srgbClr val="636E85"/>
+                </a:solidFill>
+                <a:latin typeface="Segoe UI"/>
+                <a:ea typeface="Segoe UI"/>
+                <a:cs typeface="Segoe UI"/>
+              </a:rPr>
+              <a:t>Lingesh K  ·  OSI2509030</a:t>
+            </a:r>
+            <a:r>
+              <a:rPr sz="900" b="0" i="0">
+                <a:solidFill>
+                  <a:srgbClr val="141C2E"/>
+                </a:solidFill>
+                <a:latin typeface="Segoe UI"/>
+                <a:ea typeface="Segoe UI"/>
+                <a:cs typeface="Segoe UI"/>
+              </a:rPr>
+              <a:t>     </a:t>
+            </a:r>
+            <a:r>
+              <a:rPr sz="900" b="1" i="0">
+                <a:solidFill>
+                  <a:srgbClr val="0E1E3C"/>
+                </a:solidFill>
+                <a:latin typeface="Segoe UI"/>
+                <a:ea typeface="Segoe UI"/>
+                <a:cs typeface="Segoe UI"/>
+              </a:rPr>
+              <a:t>07</a:t>
+            </a:r>
+          </a:p>
+        </p:txBody>
+      </p:sp>
+      <p:sp>
+        <p:nvSpPr>
+          <p:cNvPr id="5" name="TextBox 4"/>
+          <p:cNvSpPr txBox="1"/>
+          <p:nvPr/>
+        </p:nvSpPr>
+        <p:spPr>
+          <a:xfrm>
+            <a:off x="713232" y="566928"/>
+            <a:ext cx="10765231" cy="219456"/>
           </a:xfrm>
           <a:prstGeom prst="rect">
             <a:avLst/>
@@ -27474,106 +26317,15 @@
               </a:spcAft>
             </a:pPr>
             <a:r>
-              <a:rPr sz="900" b="1" i="0">
-                <a:solidFill>
-                  <a:srgbClr val="0E1E3C"/>
-                </a:solidFill>
-                <a:latin typeface="Segoe UI"/>
-                <a:ea typeface="Segoe UI"/>
-                <a:cs typeface="Segoe UI"/>
-              </a:rPr>
-              <a:t>Unit 1</a:t>
-            </a:r>
-            <a:r>
-              <a:rPr sz="900" b="0" i="0">
-                <a:solidFill>
-                  <a:srgbClr val="939EB3"/>
-                </a:solidFill>
-                <a:latin typeface="Segoe UI"/>
-                <a:ea typeface="Segoe UI"/>
-                <a:cs typeface="Segoe UI"/>
-              </a:rPr>
-              <a:t>  ·  </a:t>
-            </a:r>
-            <a:r>
-              <a:rPr sz="900" b="0" i="0">
-                <a:solidFill>
-                  <a:srgbClr val="636E85"/>
-                </a:solidFill>
-                <a:latin typeface="Segoe UI"/>
-                <a:ea typeface="Segoe UI"/>
-                <a:cs typeface="Segoe UI"/>
-              </a:rPr>
-              <a:t>Introduction of AI and Gen AI</a:t>
-            </a:r>
-          </a:p>
-        </p:txBody>
-      </p:sp>
-      <p:sp>
-        <p:nvSpPr>
-          <p:cNvPr id="5" name="TextBox 4"/>
-          <p:cNvSpPr txBox="1"/>
-          <p:nvPr/>
-        </p:nvSpPr>
-        <p:spPr>
-          <a:xfrm>
-            <a:off x="8240677" y="6272784"/>
-            <a:ext cx="2651760" cy="219456"/>
-          </a:xfrm>
-          <a:prstGeom prst="rect">
-            <a:avLst/>
-          </a:prstGeom>
-          <a:noFill/>
-        </p:spPr>
-        <p:txBody>
-          <a:bodyPr wrap="square" lIns="0" rIns="0" tIns="0" bIns="0" anchor="t">
-            <a:spAutoFit/>
-          </a:bodyPr>
-          <a:lstStyle/>
-          <a:p>
-            <a:pPr algn="r">
-              <a:lnSpc>
-                <a:spcPct val="122000"/>
-              </a:lnSpc>
-              <a:spcBef>
-                <a:spcPts val="0"/>
-              </a:spcBef>
-              <a:spcAft>
-                <a:spcPts val="0"/>
-              </a:spcAft>
-            </a:pPr>
-            <a:r>
-              <a:rPr sz="900" b="0" i="0">
-                <a:solidFill>
-                  <a:srgbClr val="636E85"/>
-                </a:solidFill>
-                <a:latin typeface="Segoe UI"/>
-                <a:ea typeface="Segoe UI"/>
-                <a:cs typeface="Segoe UI"/>
-              </a:rPr>
-              <a:t>Lingesh K  ·  OSI2509030</a:t>
-            </a:r>
-            <a:r>
-              <a:rPr sz="900" b="0" i="0">
-                <a:solidFill>
-                  <a:srgbClr val="141C2E"/>
-                </a:solidFill>
-                <a:latin typeface="Segoe UI"/>
-                <a:ea typeface="Segoe UI"/>
-                <a:cs typeface="Segoe UI"/>
-              </a:rPr>
-              <a:t>     </a:t>
-            </a:r>
-            <a:r>
-              <a:rPr sz="900" b="1" i="0">
-                <a:solidFill>
-                  <a:srgbClr val="0E1E3C"/>
-                </a:solidFill>
-                <a:latin typeface="Segoe UI"/>
-                <a:ea typeface="Segoe UI"/>
-                <a:cs typeface="Segoe UI"/>
-              </a:rPr>
-              <a:t>07</a:t>
+              <a:rPr sz="950" b="1" i="0" spc="160">
+                <a:solidFill>
+                  <a:srgbClr val="00B3A4"/>
+                </a:solidFill>
+                <a:latin typeface="Segoe UI"/>
+                <a:ea typeface="Segoe UI"/>
+                <a:cs typeface="Segoe UI"/>
+              </a:rPr>
+              <a:t>TYPE 1 — BY CAPABILITY</a:t>
             </a:r>
           </a:p>
         </p:txBody>
@@ -27581,53 +26333,6 @@
       <p:sp>
         <p:nvSpPr>
           <p:cNvPr id="6" name="TextBox 5"/>
-          <p:cNvSpPr txBox="1"/>
-          <p:nvPr/>
-        </p:nvSpPr>
-        <p:spPr>
-          <a:xfrm>
-            <a:off x="713232" y="566928"/>
-            <a:ext cx="10765231" cy="219456"/>
-          </a:xfrm>
-          <a:prstGeom prst="rect">
-            <a:avLst/>
-          </a:prstGeom>
-          <a:noFill/>
-        </p:spPr>
-        <p:txBody>
-          <a:bodyPr wrap="square" lIns="0" rIns="0" tIns="0" bIns="0" anchor="t">
-            <a:spAutoFit/>
-          </a:bodyPr>
-          <a:lstStyle/>
-          <a:p>
-            <a:pPr algn="l">
-              <a:lnSpc>
-                <a:spcPct val="122000"/>
-              </a:lnSpc>
-              <a:spcBef>
-                <a:spcPts val="0"/>
-              </a:spcBef>
-              <a:spcAft>
-                <a:spcPts val="0"/>
-              </a:spcAft>
-            </a:pPr>
-            <a:r>
-              <a:rPr sz="950" b="1" i="0" spc="160">
-                <a:solidFill>
-                  <a:srgbClr val="00B3A4"/>
-                </a:solidFill>
-                <a:latin typeface="Segoe UI"/>
-                <a:ea typeface="Segoe UI"/>
-                <a:cs typeface="Segoe UI"/>
-              </a:rPr>
-              <a:t>TYPE 1 — BY CAPABILITY</a:t>
-            </a:r>
-          </a:p>
-        </p:txBody>
-      </p:sp>
-      <p:sp>
-        <p:nvSpPr>
-          <p:cNvPr id="7" name="TextBox 6"/>
           <p:cNvSpPr txBox="1"/>
           <p:nvPr/>
         </p:nvSpPr>
@@ -27674,7 +26379,7 @@
       </p:sp>
       <p:sp>
         <p:nvSpPr>
-          <p:cNvPr id="8" name="Rectangle 7"/>
+          <p:cNvPr id="7" name="Rectangle 6"/>
           <p:cNvSpPr/>
           <p:nvPr/>
         </p:nvSpPr>
@@ -27718,7 +26423,7 @@
       </p:sp>
       <p:sp>
         <p:nvSpPr>
-          <p:cNvPr id="9" name="TextBox 8"/>
+          <p:cNvPr id="8" name="TextBox 7"/>
           <p:cNvSpPr txBox="1"/>
           <p:nvPr/>
         </p:nvSpPr>
@@ -27765,7 +26470,7 @@
       </p:sp>
       <p:sp>
         <p:nvSpPr>
-          <p:cNvPr id="10" name="Rounded Rectangle 9"/>
+          <p:cNvPr id="9" name="Rounded Rectangle 8"/>
           <p:cNvSpPr/>
           <p:nvPr/>
         </p:nvSpPr>
@@ -27811,7 +26516,7 @@
       </p:sp>
       <p:sp>
         <p:nvSpPr>
-          <p:cNvPr id="11" name="Rectangle 10"/>
+          <p:cNvPr id="10" name="Rectangle 9"/>
           <p:cNvSpPr/>
           <p:nvPr/>
         </p:nvSpPr>
@@ -27855,7 +26560,7 @@
       </p:sp>
       <p:sp>
         <p:nvSpPr>
-          <p:cNvPr id="12" name="Oval 11"/>
+          <p:cNvPr id="11" name="Oval 10"/>
           <p:cNvSpPr/>
           <p:nvPr/>
         </p:nvSpPr>
@@ -27899,7 +26604,7 @@
       </p:sp>
       <p:sp>
         <p:nvSpPr>
-          <p:cNvPr id="13" name="TextBox 12"/>
+          <p:cNvPr id="12" name="TextBox 11"/>
           <p:cNvSpPr txBox="1"/>
           <p:nvPr/>
         </p:nvSpPr>
@@ -27946,7 +26651,7 @@
       </p:sp>
       <p:sp>
         <p:nvSpPr>
-          <p:cNvPr id="14" name="TextBox 13"/>
+          <p:cNvPr id="13" name="TextBox 12"/>
           <p:cNvSpPr txBox="1"/>
           <p:nvPr/>
         </p:nvSpPr>
@@ -27993,7 +26698,7 @@
       </p:sp>
       <p:sp>
         <p:nvSpPr>
-          <p:cNvPr id="15" name="TextBox 14"/>
+          <p:cNvPr id="14" name="TextBox 13"/>
           <p:cNvSpPr txBox="1"/>
           <p:nvPr/>
         </p:nvSpPr>
@@ -28064,7 +26769,7 @@
       </p:sp>
       <p:sp>
         <p:nvSpPr>
-          <p:cNvPr id="16" name="Rounded Rectangle 15"/>
+          <p:cNvPr id="15" name="Rounded Rectangle 14"/>
           <p:cNvSpPr/>
           <p:nvPr/>
         </p:nvSpPr>
@@ -28110,7 +26815,7 @@
       </p:sp>
       <p:sp>
         <p:nvSpPr>
-          <p:cNvPr id="17" name="Rectangle 16"/>
+          <p:cNvPr id="16" name="Rectangle 15"/>
           <p:cNvSpPr/>
           <p:nvPr/>
         </p:nvSpPr>
@@ -28154,7 +26859,7 @@
       </p:sp>
       <p:sp>
         <p:nvSpPr>
-          <p:cNvPr id="18" name="Oval 17"/>
+          <p:cNvPr id="17" name="Oval 16"/>
           <p:cNvSpPr/>
           <p:nvPr/>
         </p:nvSpPr>
@@ -28198,7 +26903,7 @@
       </p:sp>
       <p:sp>
         <p:nvSpPr>
-          <p:cNvPr id="19" name="TextBox 18"/>
+          <p:cNvPr id="18" name="TextBox 17"/>
           <p:cNvSpPr txBox="1"/>
           <p:nvPr/>
         </p:nvSpPr>
@@ -28245,7 +26950,7 @@
       </p:sp>
       <p:sp>
         <p:nvSpPr>
-          <p:cNvPr id="20" name="TextBox 19"/>
+          <p:cNvPr id="19" name="TextBox 18"/>
           <p:cNvSpPr txBox="1"/>
           <p:nvPr/>
         </p:nvSpPr>
@@ -28292,7 +26997,7 @@
       </p:sp>
       <p:sp>
         <p:nvSpPr>
-          <p:cNvPr id="21" name="TextBox 20"/>
+          <p:cNvPr id="20" name="TextBox 19"/>
           <p:cNvSpPr txBox="1"/>
           <p:nvPr/>
         </p:nvSpPr>
@@ -28363,7 +27068,7 @@
       </p:sp>
       <p:sp>
         <p:nvSpPr>
-          <p:cNvPr id="22" name="Rounded Rectangle 21"/>
+          <p:cNvPr id="21" name="Rounded Rectangle 20"/>
           <p:cNvSpPr/>
           <p:nvPr/>
         </p:nvSpPr>
@@ -28409,7 +27114,7 @@
       </p:sp>
       <p:sp>
         <p:nvSpPr>
-          <p:cNvPr id="23" name="Rectangle 22"/>
+          <p:cNvPr id="22" name="Rectangle 21"/>
           <p:cNvSpPr/>
           <p:nvPr/>
         </p:nvSpPr>
@@ -28453,7 +27158,7 @@
       </p:sp>
       <p:sp>
         <p:nvSpPr>
-          <p:cNvPr id="24" name="Oval 23"/>
+          <p:cNvPr id="23" name="Oval 22"/>
           <p:cNvSpPr/>
           <p:nvPr/>
         </p:nvSpPr>
@@ -28497,7 +27202,7 @@
       </p:sp>
       <p:sp>
         <p:nvSpPr>
-          <p:cNvPr id="25" name="TextBox 24"/>
+          <p:cNvPr id="24" name="TextBox 23"/>
           <p:cNvSpPr txBox="1"/>
           <p:nvPr/>
         </p:nvSpPr>
@@ -28544,7 +27249,7 @@
       </p:sp>
       <p:sp>
         <p:nvSpPr>
-          <p:cNvPr id="26" name="TextBox 25"/>
+          <p:cNvPr id="25" name="TextBox 24"/>
           <p:cNvSpPr txBox="1"/>
           <p:nvPr/>
         </p:nvSpPr>
@@ -28591,7 +27296,7 @@
       </p:sp>
       <p:sp>
         <p:nvSpPr>
-          <p:cNvPr id="27" name="TextBox 26"/>
+          <p:cNvPr id="26" name="TextBox 25"/>
           <p:cNvSpPr txBox="1"/>
           <p:nvPr/>
         </p:nvSpPr>
@@ -28754,8 +27459,77 @@
         </p:nvSpPr>
         <p:spPr>
           <a:xfrm>
-            <a:off x="713232" y="6272784"/>
-            <a:ext cx="5597920" cy="219456"/>
+            <a:off x="8240677" y="6272784"/>
+            <a:ext cx="2651760" cy="219456"/>
+          </a:xfrm>
+          <a:prstGeom prst="rect">
+            <a:avLst/>
+          </a:prstGeom>
+          <a:noFill/>
+        </p:spPr>
+        <p:txBody>
+          <a:bodyPr wrap="square" lIns="0" rIns="0" tIns="0" bIns="0" anchor="t">
+            <a:spAutoFit/>
+          </a:bodyPr>
+          <a:lstStyle/>
+          <a:p>
+            <a:pPr algn="r">
+              <a:lnSpc>
+                <a:spcPct val="122000"/>
+              </a:lnSpc>
+              <a:spcBef>
+                <a:spcPts val="0"/>
+              </a:spcBef>
+              <a:spcAft>
+                <a:spcPts val="0"/>
+              </a:spcAft>
+            </a:pPr>
+            <a:r>
+              <a:rPr sz="900" b="0" i="0">
+                <a:solidFill>
+                  <a:srgbClr val="636E85"/>
+                </a:solidFill>
+                <a:latin typeface="Segoe UI"/>
+                <a:ea typeface="Segoe UI"/>
+                <a:cs typeface="Segoe UI"/>
+              </a:rPr>
+              <a:t>Lingesh K  ·  OSI2509030</a:t>
+            </a:r>
+            <a:r>
+              <a:rPr sz="900" b="0" i="0">
+                <a:solidFill>
+                  <a:srgbClr val="141C2E"/>
+                </a:solidFill>
+                <a:latin typeface="Segoe UI"/>
+                <a:ea typeface="Segoe UI"/>
+                <a:cs typeface="Segoe UI"/>
+              </a:rPr>
+              <a:t>     </a:t>
+            </a:r>
+            <a:r>
+              <a:rPr sz="900" b="1" i="0">
+                <a:solidFill>
+                  <a:srgbClr val="0E1E3C"/>
+                </a:solidFill>
+                <a:latin typeface="Segoe UI"/>
+                <a:ea typeface="Segoe UI"/>
+                <a:cs typeface="Segoe UI"/>
+              </a:rPr>
+              <a:t>08</a:t>
+            </a:r>
+          </a:p>
+        </p:txBody>
+      </p:sp>
+      <p:sp>
+        <p:nvSpPr>
+          <p:cNvPr id="5" name="TextBox 4"/>
+          <p:cNvSpPr txBox="1"/>
+          <p:nvPr/>
+        </p:nvSpPr>
+        <p:spPr>
+          <a:xfrm>
+            <a:off x="713232" y="566928"/>
+            <a:ext cx="10765231" cy="219456"/>
           </a:xfrm>
           <a:prstGeom prst="rect">
             <a:avLst/>
@@ -28780,106 +27554,15 @@
               </a:spcAft>
             </a:pPr>
             <a:r>
-              <a:rPr sz="900" b="1" i="0">
-                <a:solidFill>
-                  <a:srgbClr val="0E1E3C"/>
-                </a:solidFill>
-                <a:latin typeface="Segoe UI"/>
-                <a:ea typeface="Segoe UI"/>
-                <a:cs typeface="Segoe UI"/>
-              </a:rPr>
-              <a:t>Unit 1</a:t>
-            </a:r>
-            <a:r>
-              <a:rPr sz="900" b="0" i="0">
-                <a:solidFill>
-                  <a:srgbClr val="939EB3"/>
-                </a:solidFill>
-                <a:latin typeface="Segoe UI"/>
-                <a:ea typeface="Segoe UI"/>
-                <a:cs typeface="Segoe UI"/>
-              </a:rPr>
-              <a:t>  ·  </a:t>
-            </a:r>
-            <a:r>
-              <a:rPr sz="900" b="0" i="0">
-                <a:solidFill>
-                  <a:srgbClr val="636E85"/>
-                </a:solidFill>
-                <a:latin typeface="Segoe UI"/>
-                <a:ea typeface="Segoe UI"/>
-                <a:cs typeface="Segoe UI"/>
-              </a:rPr>
-              <a:t>Introduction of AI and Gen AI</a:t>
-            </a:r>
-          </a:p>
-        </p:txBody>
-      </p:sp>
-      <p:sp>
-        <p:nvSpPr>
-          <p:cNvPr id="5" name="TextBox 4"/>
-          <p:cNvSpPr txBox="1"/>
-          <p:nvPr/>
-        </p:nvSpPr>
-        <p:spPr>
-          <a:xfrm>
-            <a:off x="8240677" y="6272784"/>
-            <a:ext cx="2651760" cy="219456"/>
-          </a:xfrm>
-          <a:prstGeom prst="rect">
-            <a:avLst/>
-          </a:prstGeom>
-          <a:noFill/>
-        </p:spPr>
-        <p:txBody>
-          <a:bodyPr wrap="square" lIns="0" rIns="0" tIns="0" bIns="0" anchor="t">
-            <a:spAutoFit/>
-          </a:bodyPr>
-          <a:lstStyle/>
-          <a:p>
-            <a:pPr algn="r">
-              <a:lnSpc>
-                <a:spcPct val="122000"/>
-              </a:lnSpc>
-              <a:spcBef>
-                <a:spcPts val="0"/>
-              </a:spcBef>
-              <a:spcAft>
-                <a:spcPts val="0"/>
-              </a:spcAft>
-            </a:pPr>
-            <a:r>
-              <a:rPr sz="900" b="0" i="0">
-                <a:solidFill>
-                  <a:srgbClr val="636E85"/>
-                </a:solidFill>
-                <a:latin typeface="Segoe UI"/>
-                <a:ea typeface="Segoe UI"/>
-                <a:cs typeface="Segoe UI"/>
-              </a:rPr>
-              <a:t>Lingesh K  ·  OSI2509030</a:t>
-            </a:r>
-            <a:r>
-              <a:rPr sz="900" b="0" i="0">
-                <a:solidFill>
-                  <a:srgbClr val="141C2E"/>
-                </a:solidFill>
-                <a:latin typeface="Segoe UI"/>
-                <a:ea typeface="Segoe UI"/>
-                <a:cs typeface="Segoe UI"/>
-              </a:rPr>
-              <a:t>     </a:t>
-            </a:r>
-            <a:r>
-              <a:rPr sz="900" b="1" i="0">
-                <a:solidFill>
-                  <a:srgbClr val="0E1E3C"/>
-                </a:solidFill>
-                <a:latin typeface="Segoe UI"/>
-                <a:ea typeface="Segoe UI"/>
-                <a:cs typeface="Segoe UI"/>
-              </a:rPr>
-              <a:t>08</a:t>
+              <a:rPr sz="950" b="1" i="0" spc="160">
+                <a:solidFill>
+                  <a:srgbClr val="00B3A4"/>
+                </a:solidFill>
+                <a:latin typeface="Segoe UI"/>
+                <a:ea typeface="Segoe UI"/>
+                <a:cs typeface="Segoe UI"/>
+              </a:rPr>
+              <a:t>TYPE 2 — BY HOW IT WORKS</a:t>
             </a:r>
           </a:p>
         </p:txBody>
@@ -28887,53 +27570,6 @@
       <p:sp>
         <p:nvSpPr>
           <p:cNvPr id="6" name="TextBox 5"/>
-          <p:cNvSpPr txBox="1"/>
-          <p:nvPr/>
-        </p:nvSpPr>
-        <p:spPr>
-          <a:xfrm>
-            <a:off x="713232" y="566928"/>
-            <a:ext cx="10765231" cy="219456"/>
-          </a:xfrm>
-          <a:prstGeom prst="rect">
-            <a:avLst/>
-          </a:prstGeom>
-          <a:noFill/>
-        </p:spPr>
-        <p:txBody>
-          <a:bodyPr wrap="square" lIns="0" rIns="0" tIns="0" bIns="0" anchor="t">
-            <a:spAutoFit/>
-          </a:bodyPr>
-          <a:lstStyle/>
-          <a:p>
-            <a:pPr algn="l">
-              <a:lnSpc>
-                <a:spcPct val="122000"/>
-              </a:lnSpc>
-              <a:spcBef>
-                <a:spcPts val="0"/>
-              </a:spcBef>
-              <a:spcAft>
-                <a:spcPts val="0"/>
-              </a:spcAft>
-            </a:pPr>
-            <a:r>
-              <a:rPr sz="950" b="1" i="0" spc="160">
-                <a:solidFill>
-                  <a:srgbClr val="00B3A4"/>
-                </a:solidFill>
-                <a:latin typeface="Segoe UI"/>
-                <a:ea typeface="Segoe UI"/>
-                <a:cs typeface="Segoe UI"/>
-              </a:rPr>
-              <a:t>TYPE 2 — BY HOW IT WORKS</a:t>
-            </a:r>
-          </a:p>
-        </p:txBody>
-      </p:sp>
-      <p:sp>
-        <p:nvSpPr>
-          <p:cNvPr id="7" name="TextBox 6"/>
           <p:cNvSpPr txBox="1"/>
           <p:nvPr/>
         </p:nvSpPr>
@@ -28980,7 +27616,7 @@
       </p:sp>
       <p:sp>
         <p:nvSpPr>
-          <p:cNvPr id="8" name="Rectangle 7"/>
+          <p:cNvPr id="7" name="Rectangle 6"/>
           <p:cNvSpPr/>
           <p:nvPr/>
         </p:nvSpPr>
@@ -29024,7 +27660,7 @@
       </p:sp>
       <p:sp>
         <p:nvSpPr>
-          <p:cNvPr id="9" name="TextBox 8"/>
+          <p:cNvPr id="8" name="TextBox 7"/>
           <p:cNvSpPr txBox="1"/>
           <p:nvPr/>
         </p:nvSpPr>
@@ -29071,7 +27707,7 @@
       </p:sp>
       <p:sp>
         <p:nvSpPr>
-          <p:cNvPr id="10" name="Rounded Rectangle 9"/>
+          <p:cNvPr id="9" name="Rounded Rectangle 8"/>
           <p:cNvSpPr/>
           <p:nvPr/>
         </p:nvSpPr>
@@ -29125,7 +27761,7 @@
       </p:sp>
       <p:sp>
         <p:nvSpPr>
-          <p:cNvPr id="11" name="Rectangle 10"/>
+          <p:cNvPr id="10" name="Rectangle 9"/>
           <p:cNvSpPr/>
           <p:nvPr/>
         </p:nvSpPr>
@@ -29169,7 +27805,7 @@
       </p:sp>
       <p:sp>
         <p:nvSpPr>
-          <p:cNvPr id="12" name="TextBox 11"/>
+          <p:cNvPr id="11" name="TextBox 10"/>
           <p:cNvSpPr txBox="1"/>
           <p:nvPr/>
         </p:nvSpPr>
@@ -29216,7 +27852,7 @@
       </p:sp>
       <p:sp>
         <p:nvSpPr>
-          <p:cNvPr id="13" name="TextBox 12"/>
+          <p:cNvPr id="12" name="TextBox 11"/>
           <p:cNvSpPr txBox="1"/>
           <p:nvPr/>
         </p:nvSpPr>
@@ -29263,7 +27899,7 @@
       </p:sp>
       <p:sp>
         <p:nvSpPr>
-          <p:cNvPr id="14" name="Rounded Rectangle 13"/>
+          <p:cNvPr id="13" name="Rounded Rectangle 12"/>
           <p:cNvSpPr/>
           <p:nvPr/>
         </p:nvSpPr>
@@ -29317,7 +27953,7 @@
       </p:sp>
       <p:sp>
         <p:nvSpPr>
-          <p:cNvPr id="15" name="Rectangle 14"/>
+          <p:cNvPr id="14" name="Rectangle 13"/>
           <p:cNvSpPr/>
           <p:nvPr/>
         </p:nvSpPr>
@@ -29361,7 +27997,7 @@
       </p:sp>
       <p:sp>
         <p:nvSpPr>
-          <p:cNvPr id="16" name="TextBox 15"/>
+          <p:cNvPr id="15" name="TextBox 14"/>
           <p:cNvSpPr txBox="1"/>
           <p:nvPr/>
         </p:nvSpPr>
@@ -29408,7 +28044,7 @@
       </p:sp>
       <p:sp>
         <p:nvSpPr>
-          <p:cNvPr id="17" name="TextBox 16"/>
+          <p:cNvPr id="16" name="TextBox 15"/>
           <p:cNvSpPr txBox="1"/>
           <p:nvPr/>
         </p:nvSpPr>
@@ -29455,7 +28091,7 @@
       </p:sp>
       <p:sp>
         <p:nvSpPr>
-          <p:cNvPr id="18" name="Rounded Rectangle 17"/>
+          <p:cNvPr id="17" name="Rounded Rectangle 16"/>
           <p:cNvSpPr/>
           <p:nvPr/>
         </p:nvSpPr>
@@ -29509,7 +28145,7 @@
       </p:sp>
       <p:sp>
         <p:nvSpPr>
-          <p:cNvPr id="19" name="Rectangle 18"/>
+          <p:cNvPr id="18" name="Rectangle 17"/>
           <p:cNvSpPr/>
           <p:nvPr/>
         </p:nvSpPr>
@@ -29553,7 +28189,7 @@
       </p:sp>
       <p:sp>
         <p:nvSpPr>
-          <p:cNvPr id="20" name="TextBox 19"/>
+          <p:cNvPr id="19" name="TextBox 18"/>
           <p:cNvSpPr txBox="1"/>
           <p:nvPr/>
         </p:nvSpPr>
@@ -29600,7 +28236,7 @@
       </p:sp>
       <p:sp>
         <p:nvSpPr>
-          <p:cNvPr id="21" name="TextBox 20"/>
+          <p:cNvPr id="20" name="TextBox 19"/>
           <p:cNvSpPr txBox="1"/>
           <p:nvPr/>
         </p:nvSpPr>
@@ -29647,7 +28283,7 @@
       </p:sp>
       <p:sp>
         <p:nvSpPr>
-          <p:cNvPr id="22" name="Rounded Rectangle 21"/>
+          <p:cNvPr id="21" name="Rounded Rectangle 20"/>
           <p:cNvSpPr/>
           <p:nvPr/>
         </p:nvSpPr>
@@ -29701,7 +28337,7 @@
       </p:sp>
       <p:sp>
         <p:nvSpPr>
-          <p:cNvPr id="23" name="Rectangle 22"/>
+          <p:cNvPr id="22" name="Rectangle 21"/>
           <p:cNvSpPr/>
           <p:nvPr/>
         </p:nvSpPr>
@@ -29745,7 +28381,7 @@
       </p:sp>
       <p:sp>
         <p:nvSpPr>
-          <p:cNvPr id="24" name="TextBox 23"/>
+          <p:cNvPr id="23" name="TextBox 22"/>
           <p:cNvSpPr txBox="1"/>
           <p:nvPr/>
         </p:nvSpPr>
@@ -29792,7 +28428,7 @@
       </p:sp>
       <p:sp>
         <p:nvSpPr>
-          <p:cNvPr id="25" name="TextBox 24"/>
+          <p:cNvPr id="24" name="TextBox 23"/>
           <p:cNvSpPr txBox="1"/>
           <p:nvPr/>
         </p:nvSpPr>
@@ -29931,8 +28567,77 @@
         </p:nvSpPr>
         <p:spPr>
           <a:xfrm>
-            <a:off x="713232" y="6272784"/>
-            <a:ext cx="5597920" cy="219456"/>
+            <a:off x="8240677" y="6272784"/>
+            <a:ext cx="2651760" cy="219456"/>
+          </a:xfrm>
+          <a:prstGeom prst="rect">
+            <a:avLst/>
+          </a:prstGeom>
+          <a:noFill/>
+        </p:spPr>
+        <p:txBody>
+          <a:bodyPr wrap="square" lIns="0" rIns="0" tIns="0" bIns="0" anchor="t">
+            <a:spAutoFit/>
+          </a:bodyPr>
+          <a:lstStyle/>
+          <a:p>
+            <a:pPr algn="r">
+              <a:lnSpc>
+                <a:spcPct val="122000"/>
+              </a:lnSpc>
+              <a:spcBef>
+                <a:spcPts val="0"/>
+              </a:spcBef>
+              <a:spcAft>
+                <a:spcPts val="0"/>
+              </a:spcAft>
+            </a:pPr>
+            <a:r>
+              <a:rPr sz="900" b="0" i="0">
+                <a:solidFill>
+                  <a:srgbClr val="636E85"/>
+                </a:solidFill>
+                <a:latin typeface="Segoe UI"/>
+                <a:ea typeface="Segoe UI"/>
+                <a:cs typeface="Segoe UI"/>
+              </a:rPr>
+              <a:t>Lingesh K  ·  OSI2509030</a:t>
+            </a:r>
+            <a:r>
+              <a:rPr sz="900" b="0" i="0">
+                <a:solidFill>
+                  <a:srgbClr val="141C2E"/>
+                </a:solidFill>
+                <a:latin typeface="Segoe UI"/>
+                <a:ea typeface="Segoe UI"/>
+                <a:cs typeface="Segoe UI"/>
+              </a:rPr>
+              <a:t>     </a:t>
+            </a:r>
+            <a:r>
+              <a:rPr sz="900" b="1" i="0">
+                <a:solidFill>
+                  <a:srgbClr val="0E1E3C"/>
+                </a:solidFill>
+                <a:latin typeface="Segoe UI"/>
+                <a:ea typeface="Segoe UI"/>
+                <a:cs typeface="Segoe UI"/>
+              </a:rPr>
+              <a:t>09</a:t>
+            </a:r>
+          </a:p>
+        </p:txBody>
+      </p:sp>
+      <p:sp>
+        <p:nvSpPr>
+          <p:cNvPr id="5" name="TextBox 4"/>
+          <p:cNvSpPr txBox="1"/>
+          <p:nvPr/>
+        </p:nvSpPr>
+        <p:spPr>
+          <a:xfrm>
+            <a:off x="713232" y="566928"/>
+            <a:ext cx="10765231" cy="219456"/>
           </a:xfrm>
           <a:prstGeom prst="rect">
             <a:avLst/>
@@ -29957,106 +28662,15 @@
               </a:spcAft>
             </a:pPr>
             <a:r>
-              <a:rPr sz="900" b="1" i="0">
-                <a:solidFill>
-                  <a:srgbClr val="0E1E3C"/>
-                </a:solidFill>
-                <a:latin typeface="Segoe UI"/>
-                <a:ea typeface="Segoe UI"/>
-                <a:cs typeface="Segoe UI"/>
-              </a:rPr>
-              <a:t>Unit 1</a:t>
-            </a:r>
-            <a:r>
-              <a:rPr sz="900" b="0" i="0">
-                <a:solidFill>
-                  <a:srgbClr val="939EB3"/>
-                </a:solidFill>
-                <a:latin typeface="Segoe UI"/>
-                <a:ea typeface="Segoe UI"/>
-                <a:cs typeface="Segoe UI"/>
-              </a:rPr>
-              <a:t>  ·  </a:t>
-            </a:r>
-            <a:r>
-              <a:rPr sz="900" b="0" i="0">
-                <a:solidFill>
-                  <a:srgbClr val="636E85"/>
-                </a:solidFill>
-                <a:latin typeface="Segoe UI"/>
-                <a:ea typeface="Segoe UI"/>
-                <a:cs typeface="Segoe UI"/>
-              </a:rPr>
-              <a:t>Introduction of AI and Gen AI</a:t>
-            </a:r>
-          </a:p>
-        </p:txBody>
-      </p:sp>
-      <p:sp>
-        <p:nvSpPr>
-          <p:cNvPr id="5" name="TextBox 4"/>
-          <p:cNvSpPr txBox="1"/>
-          <p:nvPr/>
-        </p:nvSpPr>
-        <p:spPr>
-          <a:xfrm>
-            <a:off x="8240677" y="6272784"/>
-            <a:ext cx="2651760" cy="219456"/>
-          </a:xfrm>
-          <a:prstGeom prst="rect">
-            <a:avLst/>
-          </a:prstGeom>
-          <a:noFill/>
-        </p:spPr>
-        <p:txBody>
-          <a:bodyPr wrap="square" lIns="0" rIns="0" tIns="0" bIns="0" anchor="t">
-            <a:spAutoFit/>
-          </a:bodyPr>
-          <a:lstStyle/>
-          <a:p>
-            <a:pPr algn="r">
-              <a:lnSpc>
-                <a:spcPct val="122000"/>
-              </a:lnSpc>
-              <a:spcBef>
-                <a:spcPts val="0"/>
-              </a:spcBef>
-              <a:spcAft>
-                <a:spcPts val="0"/>
-              </a:spcAft>
-            </a:pPr>
-            <a:r>
-              <a:rPr sz="900" b="0" i="0">
-                <a:solidFill>
-                  <a:srgbClr val="636E85"/>
-                </a:solidFill>
-                <a:latin typeface="Segoe UI"/>
-                <a:ea typeface="Segoe UI"/>
-                <a:cs typeface="Segoe UI"/>
-              </a:rPr>
-              <a:t>Lingesh K  ·  OSI2509030</a:t>
-            </a:r>
-            <a:r>
-              <a:rPr sz="900" b="0" i="0">
-                <a:solidFill>
-                  <a:srgbClr val="141C2E"/>
-                </a:solidFill>
-                <a:latin typeface="Segoe UI"/>
-                <a:ea typeface="Segoe UI"/>
-                <a:cs typeface="Segoe UI"/>
-              </a:rPr>
-              <a:t>     </a:t>
-            </a:r>
-            <a:r>
-              <a:rPr sz="900" b="1" i="0">
-                <a:solidFill>
-                  <a:srgbClr val="0E1E3C"/>
-                </a:solidFill>
-                <a:latin typeface="Segoe UI"/>
-                <a:ea typeface="Segoe UI"/>
-                <a:cs typeface="Segoe UI"/>
-              </a:rPr>
-              <a:t>09</a:t>
+              <a:rPr sz="950" b="1" i="0" spc="160">
+                <a:solidFill>
+                  <a:srgbClr val="3B7AF7"/>
+                </a:solidFill>
+                <a:latin typeface="Segoe UI"/>
+                <a:ea typeface="Segoe UI"/>
+                <a:cs typeface="Segoe UI"/>
+              </a:rPr>
+              <a:t>HOW MODELS LEARN</a:t>
             </a:r>
           </a:p>
         </p:txBody>
@@ -30064,53 +28678,6 @@
       <p:sp>
         <p:nvSpPr>
           <p:cNvPr id="6" name="TextBox 5"/>
-          <p:cNvSpPr txBox="1"/>
-          <p:nvPr/>
-        </p:nvSpPr>
-        <p:spPr>
-          <a:xfrm>
-            <a:off x="713232" y="566928"/>
-            <a:ext cx="10765231" cy="219456"/>
-          </a:xfrm>
-          <a:prstGeom prst="rect">
-            <a:avLst/>
-          </a:prstGeom>
-          <a:noFill/>
-        </p:spPr>
-        <p:txBody>
-          <a:bodyPr wrap="square" lIns="0" rIns="0" tIns="0" bIns="0" anchor="t">
-            <a:spAutoFit/>
-          </a:bodyPr>
-          <a:lstStyle/>
-          <a:p>
-            <a:pPr algn="l">
-              <a:lnSpc>
-                <a:spcPct val="122000"/>
-              </a:lnSpc>
-              <a:spcBef>
-                <a:spcPts val="0"/>
-              </a:spcBef>
-              <a:spcAft>
-                <a:spcPts val="0"/>
-              </a:spcAft>
-            </a:pPr>
-            <a:r>
-              <a:rPr sz="950" b="1" i="0" spc="160">
-                <a:solidFill>
-                  <a:srgbClr val="3B7AF7"/>
-                </a:solidFill>
-                <a:latin typeface="Segoe UI"/>
-                <a:ea typeface="Segoe UI"/>
-                <a:cs typeface="Segoe UI"/>
-              </a:rPr>
-              <a:t>HOW MODELS LEARN</a:t>
-            </a:r>
-          </a:p>
-        </p:txBody>
-      </p:sp>
-      <p:sp>
-        <p:nvSpPr>
-          <p:cNvPr id="7" name="TextBox 6"/>
           <p:cNvSpPr txBox="1"/>
           <p:nvPr/>
         </p:nvSpPr>
@@ -30157,7 +28724,7 @@
       </p:sp>
       <p:sp>
         <p:nvSpPr>
-          <p:cNvPr id="8" name="Rectangle 7"/>
+          <p:cNvPr id="7" name="Rectangle 6"/>
           <p:cNvSpPr/>
           <p:nvPr/>
         </p:nvSpPr>
@@ -30201,7 +28768,7 @@
       </p:sp>
       <p:sp>
         <p:nvSpPr>
-          <p:cNvPr id="9" name="TextBox 8"/>
+          <p:cNvPr id="8" name="TextBox 7"/>
           <p:cNvSpPr txBox="1"/>
           <p:nvPr/>
         </p:nvSpPr>
@@ -30248,7 +28815,7 @@
       </p:sp>
       <p:sp>
         <p:nvSpPr>
-          <p:cNvPr id="10" name="Rectangle 9"/>
+          <p:cNvPr id="9" name="Rectangle 8"/>
           <p:cNvSpPr/>
           <p:nvPr/>
         </p:nvSpPr>
@@ -30292,7 +28859,7 @@
       </p:sp>
       <p:sp>
         <p:nvSpPr>
-          <p:cNvPr id="11" name="Oval 10"/>
+          <p:cNvPr id="10" name="Oval 9"/>
           <p:cNvSpPr/>
           <p:nvPr/>
         </p:nvSpPr>
@@ -30336,7 +28903,7 @@
       </p:sp>
       <p:sp>
         <p:nvSpPr>
-          <p:cNvPr id="12" name="TextBox 11"/>
+          <p:cNvPr id="11" name="TextBox 10"/>
           <p:cNvSpPr txBox="1"/>
           <p:nvPr/>
         </p:nvSpPr>
@@ -30383,7 +28950,7 @@
       </p:sp>
       <p:sp>
         <p:nvSpPr>
-          <p:cNvPr id="13" name="Rounded Rectangle 12"/>
+          <p:cNvPr id="12" name="Rounded Rectangle 11"/>
           <p:cNvSpPr/>
           <p:nvPr/>
         </p:nvSpPr>
@@ -30431,7 +28998,7 @@
       </p:sp>
       <p:sp>
         <p:nvSpPr>
-          <p:cNvPr id="14" name="TextBox 13"/>
+          <p:cNvPr id="13" name="TextBox 12"/>
           <p:cNvSpPr txBox="1"/>
           <p:nvPr/>
         </p:nvSpPr>
@@ -30478,7 +29045,7 @@
       </p:sp>
       <p:sp>
         <p:nvSpPr>
-          <p:cNvPr id="15" name="TextBox 14"/>
+          <p:cNvPr id="14" name="TextBox 13"/>
           <p:cNvSpPr txBox="1"/>
           <p:nvPr/>
         </p:nvSpPr>
@@ -30525,7 +29092,7 @@
       </p:sp>
       <p:sp>
         <p:nvSpPr>
-          <p:cNvPr id="16" name="Oval 15"/>
+          <p:cNvPr id="15" name="Oval 14"/>
           <p:cNvSpPr/>
           <p:nvPr/>
         </p:nvSpPr>
@@ -30569,7 +29136,7 @@
       </p:sp>
       <p:sp>
         <p:nvSpPr>
-          <p:cNvPr id="17" name="TextBox 16"/>
+          <p:cNvPr id="16" name="TextBox 15"/>
           <p:cNvSpPr txBox="1"/>
           <p:nvPr/>
         </p:nvSpPr>
@@ -30616,7 +29183,7 @@
       </p:sp>
       <p:sp>
         <p:nvSpPr>
-          <p:cNvPr id="18" name="Rounded Rectangle 17"/>
+          <p:cNvPr id="17" name="Rounded Rectangle 16"/>
           <p:cNvSpPr/>
           <p:nvPr/>
         </p:nvSpPr>
@@ -30664,7 +29231,7 @@
       </p:sp>
       <p:sp>
         <p:nvSpPr>
-          <p:cNvPr id="19" name="TextBox 18"/>
+          <p:cNvPr id="18" name="TextBox 17"/>
           <p:cNvSpPr txBox="1"/>
           <p:nvPr/>
         </p:nvSpPr>
@@ -30711,7 +29278,7 @@
       </p:sp>
       <p:sp>
         <p:nvSpPr>
-          <p:cNvPr id="20" name="TextBox 19"/>
+          <p:cNvPr id="19" name="TextBox 18"/>
           <p:cNvSpPr txBox="1"/>
           <p:nvPr/>
         </p:nvSpPr>
@@ -30758,7 +29325,7 @@
       </p:sp>
       <p:sp>
         <p:nvSpPr>
-          <p:cNvPr id="21" name="Oval 20"/>
+          <p:cNvPr id="20" name="Oval 19"/>
           <p:cNvSpPr/>
           <p:nvPr/>
         </p:nvSpPr>
@@ -30802,7 +29369,7 @@
       </p:sp>
       <p:sp>
         <p:nvSpPr>
-          <p:cNvPr id="22" name="TextBox 21"/>
+          <p:cNvPr id="21" name="TextBox 20"/>
           <p:cNvSpPr txBox="1"/>
           <p:nvPr/>
         </p:nvSpPr>
@@ -30849,7 +29416,7 @@
       </p:sp>
       <p:sp>
         <p:nvSpPr>
-          <p:cNvPr id="23" name="Rounded Rectangle 22"/>
+          <p:cNvPr id="22" name="Rounded Rectangle 21"/>
           <p:cNvSpPr/>
           <p:nvPr/>
         </p:nvSpPr>
@@ -30897,7 +29464,7 @@
       </p:sp>
       <p:sp>
         <p:nvSpPr>
-          <p:cNvPr id="24" name="TextBox 23"/>
+          <p:cNvPr id="23" name="TextBox 22"/>
           <p:cNvSpPr txBox="1"/>
           <p:nvPr/>
         </p:nvSpPr>
@@ -30944,7 +29511,7 @@
       </p:sp>
       <p:sp>
         <p:nvSpPr>
-          <p:cNvPr id="25" name="TextBox 24"/>
+          <p:cNvPr id="24" name="TextBox 23"/>
           <p:cNvSpPr txBox="1"/>
           <p:nvPr/>
         </p:nvSpPr>
@@ -30991,7 +29558,7 @@
       </p:sp>
       <p:sp>
         <p:nvSpPr>
-          <p:cNvPr id="26" name="Oval 25"/>
+          <p:cNvPr id="25" name="Oval 24"/>
           <p:cNvSpPr/>
           <p:nvPr/>
         </p:nvSpPr>
@@ -31035,7 +29602,7 @@
       </p:sp>
       <p:sp>
         <p:nvSpPr>
-          <p:cNvPr id="27" name="TextBox 26"/>
+          <p:cNvPr id="26" name="TextBox 25"/>
           <p:cNvSpPr txBox="1"/>
           <p:nvPr/>
         </p:nvSpPr>
@@ -31082,7 +29649,7 @@
       </p:sp>
       <p:sp>
         <p:nvSpPr>
-          <p:cNvPr id="28" name="Rounded Rectangle 27"/>
+          <p:cNvPr id="27" name="Rounded Rectangle 26"/>
           <p:cNvSpPr/>
           <p:nvPr/>
         </p:nvSpPr>
@@ -31130,7 +29697,7 @@
       </p:sp>
       <p:sp>
         <p:nvSpPr>
-          <p:cNvPr id="29" name="TextBox 28"/>
+          <p:cNvPr id="28" name="TextBox 27"/>
           <p:cNvSpPr txBox="1"/>
           <p:nvPr/>
         </p:nvSpPr>
@@ -31177,7 +29744,7 @@
       </p:sp>
       <p:sp>
         <p:nvSpPr>
-          <p:cNvPr id="30" name="TextBox 29"/>
+          <p:cNvPr id="29" name="TextBox 28"/>
           <p:cNvSpPr txBox="1"/>
           <p:nvPr/>
         </p:nvSpPr>
@@ -31224,7 +29791,7 @@
       </p:sp>
       <p:sp>
         <p:nvSpPr>
-          <p:cNvPr id="31" name="Rounded Rectangle 30"/>
+          <p:cNvPr id="30" name="Rounded Rectangle 29"/>
           <p:cNvSpPr/>
           <p:nvPr/>
         </p:nvSpPr>
@@ -31291,7 +29858,7 @@
       </p:sp>
       <p:sp>
         <p:nvSpPr>
-          <p:cNvPr id="32" name="Rectangle 31"/>
+          <p:cNvPr id="31" name="Rectangle 30"/>
           <p:cNvSpPr/>
           <p:nvPr/>
         </p:nvSpPr>

--- a/Unit 1 - Introduction to AI and Gen AI.pptx
+++ b/Unit 1 - Introduction to AI and Gen AI.pptx
@@ -4116,80 +4116,13 @@
       </p:pic>
       <p:sp>
         <p:nvSpPr>
-          <p:cNvPr id="9" name="Rounded Rectangle 8"/>
-          <p:cNvSpPr/>
-          <p:nvPr/>
-        </p:nvSpPr>
-        <p:spPr>
-          <a:xfrm>
-            <a:off x="932688" y="1572768"/>
-            <a:ext cx="1481328" cy="384048"/>
-          </a:xfrm>
-          <a:prstGeom prst="roundRect">
-            <a:avLst>
-              <a:gd name="adj" fmla="val 50000"/>
-            </a:avLst>
-          </a:prstGeom>
-          <a:noFill/>
-          <a:ln w="15875">
-            <a:solidFill>
-              <a:srgbClr val="3B7AF7"/>
-            </a:solidFill>
-          </a:ln>
-          <a:effectLst/>
-        </p:spPr>
-        <p:style>
-          <a:lnRef idx="1">
-            <a:schemeClr val="accent1"/>
-          </a:lnRef>
-          <a:fillRef idx="3">
-            <a:schemeClr val="accent1"/>
-          </a:fillRef>
-          <a:effectRef idx="2">
-            <a:schemeClr val="accent1"/>
-          </a:effectRef>
-          <a:fontRef idx="minor">
-            <a:schemeClr val="lt1"/>
-          </a:fontRef>
-        </p:style>
-        <p:txBody>
-          <a:bodyPr rtlCol="0" anchor="ctr" wrap="square"/>
-          <a:lstStyle/>
-          <a:p>
-            <a:pPr algn="ctr">
-              <a:lnSpc>
-                <a:spcPct val="122000"/>
-              </a:lnSpc>
-              <a:spcBef>
-                <a:spcPts val="0"/>
-              </a:spcBef>
-              <a:spcAft>
-                <a:spcPts val="0"/>
-              </a:spcAft>
-            </a:pPr>
-            <a:r>
-              <a:rPr sz="1050" b="1" i="0" spc="160">
-                <a:solidFill>
-                  <a:srgbClr val="FFFFFF"/>
-                </a:solidFill>
-                <a:latin typeface="Segoe UI"/>
-                <a:ea typeface="Segoe UI"/>
-                <a:cs typeface="Segoe UI"/>
-              </a:rPr>
-              <a:t>UNIT 01</a:t>
-            </a:r>
-          </a:p>
-        </p:txBody>
-      </p:sp>
-      <p:sp>
-        <p:nvSpPr>
-          <p:cNvPr id="10" name="TextBox 9"/>
+          <p:cNvPr id="9" name="TextBox 8"/>
           <p:cNvSpPr txBox="1"/>
           <p:nvPr/>
         </p:nvSpPr>
         <p:spPr>
           <a:xfrm>
-            <a:off x="932688" y="2304288"/>
+            <a:off x="932688" y="2065553"/>
             <a:ext cx="7406640" cy="1578807"/>
           </a:xfrm>
           <a:prstGeom prst="rect">
@@ -4230,13 +4163,13 @@
       </p:sp>
       <p:sp>
         <p:nvSpPr>
-          <p:cNvPr id="11" name="Rectangle 10"/>
+          <p:cNvPr id="10" name="Rectangle 9"/>
           <p:cNvSpPr/>
           <p:nvPr/>
         </p:nvSpPr>
         <p:spPr>
           <a:xfrm>
-            <a:off x="932688" y="3901383"/>
+            <a:off x="932688" y="3662648"/>
             <a:ext cx="658368" cy="45720"/>
           </a:xfrm>
           <a:prstGeom prst="rect">
@@ -4274,14 +4207,14 @@
       </p:sp>
       <p:sp>
         <p:nvSpPr>
-          <p:cNvPr id="12" name="TextBox 11"/>
+          <p:cNvPr id="11" name="TextBox 10"/>
           <p:cNvSpPr txBox="1"/>
           <p:nvPr/>
         </p:nvSpPr>
         <p:spPr>
           <a:xfrm>
-            <a:off x="932688" y="4212279"/>
-            <a:ext cx="6766560" cy="960120"/>
+            <a:off x="932688" y="3973544"/>
+            <a:ext cx="6766560" cy="745750"/>
           </a:xfrm>
           <a:prstGeom prst="rect">
             <a:avLst/>
@@ -4321,13 +4254,13 @@
       </p:sp>
       <p:sp>
         <p:nvSpPr>
-          <p:cNvPr id="13" name="Rounded Rectangle 12"/>
+          <p:cNvPr id="12" name="Rounded Rectangle 11"/>
           <p:cNvSpPr/>
           <p:nvPr/>
         </p:nvSpPr>
         <p:spPr>
           <a:xfrm>
-            <a:off x="932688" y="4992624"/>
+            <a:off x="932688" y="4993614"/>
             <a:ext cx="966784" cy="329184"/>
           </a:xfrm>
           <a:prstGeom prst="roundRect">
@@ -4388,13 +4321,13 @@
       </p:sp>
       <p:sp>
         <p:nvSpPr>
-          <p:cNvPr id="14" name="Rounded Rectangle 13"/>
+          <p:cNvPr id="13" name="Rounded Rectangle 12"/>
           <p:cNvSpPr/>
           <p:nvPr/>
         </p:nvSpPr>
         <p:spPr>
           <a:xfrm>
-            <a:off x="2027488" y="4992624"/>
+            <a:off x="2027488" y="4993614"/>
             <a:ext cx="1298522" cy="329184"/>
           </a:xfrm>
           <a:prstGeom prst="roundRect">
@@ -4455,13 +4388,13 @@
       </p:sp>
       <p:sp>
         <p:nvSpPr>
-          <p:cNvPr id="15" name="Rounded Rectangle 14"/>
+          <p:cNvPr id="14" name="Rounded Rectangle 13"/>
           <p:cNvSpPr/>
           <p:nvPr/>
         </p:nvSpPr>
         <p:spPr>
           <a:xfrm>
-            <a:off x="3454026" y="4992624"/>
+            <a:off x="3454026" y="4993614"/>
             <a:ext cx="1672081" cy="329184"/>
           </a:xfrm>
           <a:prstGeom prst="roundRect">
@@ -4522,13 +4455,13 @@
       </p:sp>
       <p:sp>
         <p:nvSpPr>
-          <p:cNvPr id="16" name="Rounded Rectangle 15"/>
+          <p:cNvPr id="15" name="Rounded Rectangle 14"/>
           <p:cNvSpPr/>
           <p:nvPr/>
         </p:nvSpPr>
         <p:spPr>
           <a:xfrm>
-            <a:off x="5254123" y="4992624"/>
+            <a:off x="5254123" y="4993614"/>
             <a:ext cx="1301250" cy="329184"/>
           </a:xfrm>
           <a:prstGeom prst="roundRect">
@@ -4589,7 +4522,7 @@
       </p:sp>
       <p:sp>
         <p:nvSpPr>
-          <p:cNvPr id="17" name="Rectangle 16"/>
+          <p:cNvPr id="16" name="Rectangle 15"/>
           <p:cNvSpPr/>
           <p:nvPr/>
         </p:nvSpPr>
@@ -4633,7 +4566,7 @@
       </p:sp>
       <p:sp>
         <p:nvSpPr>
-          <p:cNvPr id="18" name="TextBox 17"/>
+          <p:cNvPr id="17" name="TextBox 16"/>
           <p:cNvSpPr txBox="1"/>
           <p:nvPr/>
         </p:nvSpPr>
